--- a/slides/day1_intro.pptx
+++ b/slides/day1_intro.pptx
@@ -5,46 +5,42 @@
     <p:sldMasterId id="2147483648" r:id="rId1"/>
   </p:sldMasterIdLst>
   <p:notesMasterIdLst>
-    <p:notesMasterId r:id="rId39"/>
+    <p:notesMasterId r:id="rId35"/>
   </p:notesMasterIdLst>
   <p:sldIdLst>
     <p:sldId id="256" r:id="rId2"/>
     <p:sldId id="257" r:id="rId3"/>
     <p:sldId id="290" r:id="rId4"/>
     <p:sldId id="291" r:id="rId5"/>
-    <p:sldId id="293" r:id="rId6"/>
-    <p:sldId id="266" r:id="rId7"/>
-    <p:sldId id="269" r:id="rId8"/>
-    <p:sldId id="273" r:id="rId9"/>
-    <p:sldId id="270" r:id="rId10"/>
-    <p:sldId id="275" r:id="rId11"/>
-    <p:sldId id="268" r:id="rId12"/>
-    <p:sldId id="276" r:id="rId13"/>
-    <p:sldId id="261" r:id="rId14"/>
-    <p:sldId id="294" r:id="rId15"/>
-    <p:sldId id="265" r:id="rId16"/>
-    <p:sldId id="284" r:id="rId17"/>
-    <p:sldId id="285" r:id="rId18"/>
-    <p:sldId id="286" r:id="rId19"/>
-    <p:sldId id="287" r:id="rId20"/>
-    <p:sldId id="288" r:id="rId21"/>
-    <p:sldId id="289" r:id="rId22"/>
-    <p:sldId id="295" r:id="rId23"/>
-    <p:sldId id="313" r:id="rId24"/>
-    <p:sldId id="314" r:id="rId25"/>
-    <p:sldId id="296" r:id="rId26"/>
-    <p:sldId id="297" r:id="rId27"/>
-    <p:sldId id="315" r:id="rId28"/>
-    <p:sldId id="298" r:id="rId29"/>
-    <p:sldId id="299" r:id="rId30"/>
-    <p:sldId id="300" r:id="rId31"/>
-    <p:sldId id="316" r:id="rId32"/>
-    <p:sldId id="301" r:id="rId33"/>
-    <p:sldId id="302" r:id="rId34"/>
-    <p:sldId id="317" r:id="rId35"/>
-    <p:sldId id="303" r:id="rId36"/>
-    <p:sldId id="304" r:id="rId37"/>
-    <p:sldId id="318" r:id="rId38"/>
+    <p:sldId id="266" r:id="rId6"/>
+    <p:sldId id="269" r:id="rId7"/>
+    <p:sldId id="320" r:id="rId8"/>
+    <p:sldId id="322" r:id="rId9"/>
+    <p:sldId id="276" r:id="rId10"/>
+    <p:sldId id="261" r:id="rId11"/>
+    <p:sldId id="294" r:id="rId12"/>
+    <p:sldId id="265" r:id="rId13"/>
+    <p:sldId id="284" r:id="rId14"/>
+    <p:sldId id="285" r:id="rId15"/>
+    <p:sldId id="286" r:id="rId16"/>
+    <p:sldId id="287" r:id="rId17"/>
+    <p:sldId id="325" r:id="rId18"/>
+    <p:sldId id="298" r:id="rId19"/>
+    <p:sldId id="295" r:id="rId20"/>
+    <p:sldId id="324" r:id="rId21"/>
+    <p:sldId id="323" r:id="rId22"/>
+    <p:sldId id="299" r:id="rId23"/>
+    <p:sldId id="300" r:id="rId24"/>
+    <p:sldId id="301" r:id="rId25"/>
+    <p:sldId id="302" r:id="rId26"/>
+    <p:sldId id="317" r:id="rId27"/>
+    <p:sldId id="303" r:id="rId28"/>
+    <p:sldId id="318" r:id="rId29"/>
+    <p:sldId id="278" r:id="rId30"/>
+    <p:sldId id="279" r:id="rId31"/>
+    <p:sldId id="262" r:id="rId32"/>
+    <p:sldId id="281" r:id="rId33"/>
+    <p:sldId id="326" r:id="rId34"/>
   </p:sldIdLst>
   <p:sldSz cx="12192000" cy="6858000"/>
   <p:notesSz cx="6858000" cy="9144000"/>
@@ -233,7 +229,7 @@
           <a:p>
             <a:fld id="{7E56A4D3-12C5-0B42-BA95-8BCAC7551791}" type="datetimeFigureOut">
               <a:rPr lang="en-US" smtClean="0"/>
-              <a:t>6/26/26</a:t>
+              <a:t>6/29/26</a:t>
             </a:fld>
             <a:endParaRPr lang="en-US"/>
           </a:p>
@@ -589,13 +585,7 @@
   <p:cSld>
     <p:spTree>
       <p:nvGrpSpPr>
-        <p:cNvPr id="1" name="">
-          <a:extLst>
-            <a:ext uri="{FF2B5EF4-FFF2-40B4-BE49-F238E27FC236}">
-              <a16:creationId xmlns:a16="http://schemas.microsoft.com/office/drawing/2014/main" id="{1DE37C1D-4437-12B2-C88E-ABF90ABEE3EA}"/>
-            </a:ext>
-          </a:extLst>
-        </p:cNvPr>
+        <p:cNvPr id="1" name=""/>
         <p:cNvGrpSpPr/>
         <p:nvPr/>
       </p:nvGrpSpPr>
@@ -609,13 +599,7 @@
       </p:grpSpPr>
       <p:sp>
         <p:nvSpPr>
-          <p:cNvPr id="2" name="Slide Image Placeholder 1">
-            <a:extLst>
-              <a:ext uri="{FF2B5EF4-FFF2-40B4-BE49-F238E27FC236}">
-                <a16:creationId xmlns:a16="http://schemas.microsoft.com/office/drawing/2014/main" id="{BD57E214-B4DB-A91F-3A2A-F893CE4A027C}"/>
-              </a:ext>
-            </a:extLst>
-          </p:cNvPr>
+          <p:cNvPr id="2" name="Slide Image Placeholder 1"/>
           <p:cNvSpPr>
             <a:spLocks noGrp="1" noRot="1" noChangeAspect="1"/>
           </p:cNvSpPr>
@@ -627,13 +611,7 @@
       </p:sp>
       <p:sp>
         <p:nvSpPr>
-          <p:cNvPr id="3" name="Notes Placeholder 2">
-            <a:extLst>
-              <a:ext uri="{FF2B5EF4-FFF2-40B4-BE49-F238E27FC236}">
-                <a16:creationId xmlns:a16="http://schemas.microsoft.com/office/drawing/2014/main" id="{59B4DA61-9F2B-E8FE-E99A-E9E668436566}"/>
-              </a:ext>
-            </a:extLst>
-          </p:cNvPr>
+          <p:cNvPr id="3" name="Notes Placeholder 2"/>
           <p:cNvSpPr>
             <a:spLocks noGrp="1"/>
           </p:cNvSpPr>
@@ -646,19 +624,40 @@
           <a:bodyPr/>
           <a:lstStyle/>
           <a:p>
-            <a:endParaRPr lang="en-US" dirty="0"/>
-          </a:p>
-        </p:txBody>
-      </p:sp>
-      <p:sp>
-        <p:nvSpPr>
-          <p:cNvPr id="4" name="Slide Number Placeholder 3">
-            <a:extLst>
-              <a:ext uri="{FF2B5EF4-FFF2-40B4-BE49-F238E27FC236}">
-                <a16:creationId xmlns:a16="http://schemas.microsoft.com/office/drawing/2014/main" id="{F199C592-77FD-555D-7F20-E2448D6889DD}"/>
-              </a:ext>
-            </a:extLst>
-          </p:cNvPr>
+            <a:r>
+              <a:rPr lang="en-US" dirty="0"/>
+              <a:t>https://</a:t>
+            </a:r>
+            <a:r>
+              <a:rPr lang="en-US" dirty="0" err="1"/>
+              <a:t>github.com</a:t>
+            </a:r>
+            <a:r>
+              <a:rPr lang="en-US" dirty="0"/>
+              <a:t>/</a:t>
+            </a:r>
+            <a:r>
+              <a:rPr lang="en-US" dirty="0" err="1"/>
+              <a:t>noellelebe</a:t>
+            </a:r>
+            <a:r>
+              <a:rPr lang="en-US" dirty="0"/>
+              <a:t>/</a:t>
+            </a:r>
+            <a:r>
+              <a:rPr lang="en-US" dirty="0" err="1"/>
+              <a:t>methodsNET_vlop</a:t>
+            </a:r>
+            <a:r>
+              <a:rPr lang="en-US" dirty="0"/>
+              <a:t>-course-materials</a:t>
+            </a:r>
+          </a:p>
+        </p:txBody>
+      </p:sp>
+      <p:sp>
+        <p:nvSpPr>
+          <p:cNvPr id="4" name="Slide Number Placeholder 3"/>
           <p:cNvSpPr>
             <a:spLocks noGrp="1"/>
           </p:cNvSpPr>
@@ -673,7 +672,7 @@
           <a:p>
             <a:fld id="{FF78EFD2-C9A0-A146-8CE9-0A2B7CC7B867}" type="slidenum">
               <a:rPr lang="en-US" smtClean="0"/>
-              <a:t>11</a:t>
+              <a:t>10</a:t>
             </a:fld>
             <a:endParaRPr lang="en-US"/>
           </a:p>
@@ -682,7 +681,7 @@
     </p:spTree>
     <p:extLst>
       <p:ext uri="{BB962C8B-B14F-4D97-AF65-F5344CB8AC3E}">
-        <p14:creationId xmlns:p14="http://schemas.microsoft.com/office/powerpoint/2010/main" val="761079926"/>
+        <p14:creationId xmlns:p14="http://schemas.microsoft.com/office/powerpoint/2010/main" val="619526483"/>
       </p:ext>
     </p:extLst>
   </p:cSld>
@@ -693,114 +692,6 @@
 </file>
 
 <file path=ppt/notesSlides/notesSlide11.xml><?xml version="1.0" encoding="utf-8"?>
-<p:notes xmlns:a="http://schemas.openxmlformats.org/drawingml/2006/main" xmlns:r="http://schemas.openxmlformats.org/officeDocument/2006/relationships" xmlns:p="http://schemas.openxmlformats.org/presentationml/2006/main">
-  <p:cSld>
-    <p:spTree>
-      <p:nvGrpSpPr>
-        <p:cNvPr id="1" name="">
-          <a:extLst>
-            <a:ext uri="{FF2B5EF4-FFF2-40B4-BE49-F238E27FC236}">
-              <a16:creationId xmlns:a16="http://schemas.microsoft.com/office/drawing/2014/main" id="{D20A7850-14F2-68C5-8A06-D2F017FDEF3B}"/>
-            </a:ext>
-          </a:extLst>
-        </p:cNvPr>
-        <p:cNvGrpSpPr/>
-        <p:nvPr/>
-      </p:nvGrpSpPr>
-      <p:grpSpPr>
-        <a:xfrm>
-          <a:off x="0" y="0"/>
-          <a:ext cx="0" cy="0"/>
-          <a:chOff x="0" y="0"/>
-          <a:chExt cx="0" cy="0"/>
-        </a:xfrm>
-      </p:grpSpPr>
-      <p:sp>
-        <p:nvSpPr>
-          <p:cNvPr id="2" name="Slide Image Placeholder 1">
-            <a:extLst>
-              <a:ext uri="{FF2B5EF4-FFF2-40B4-BE49-F238E27FC236}">
-                <a16:creationId xmlns:a16="http://schemas.microsoft.com/office/drawing/2014/main" id="{D762E806-BC20-E995-DAE2-37F43F025574}"/>
-              </a:ext>
-            </a:extLst>
-          </p:cNvPr>
-          <p:cNvSpPr>
-            <a:spLocks noGrp="1" noRot="1" noChangeAspect="1"/>
-          </p:cNvSpPr>
-          <p:nvPr>
-            <p:ph type="sldImg"/>
-          </p:nvPr>
-        </p:nvSpPr>
-        <p:spPr/>
-      </p:sp>
-      <p:sp>
-        <p:nvSpPr>
-          <p:cNvPr id="3" name="Notes Placeholder 2">
-            <a:extLst>
-              <a:ext uri="{FF2B5EF4-FFF2-40B4-BE49-F238E27FC236}">
-                <a16:creationId xmlns:a16="http://schemas.microsoft.com/office/drawing/2014/main" id="{4FDD7048-312E-C7BB-1DF3-D4CDFACE5162}"/>
-              </a:ext>
-            </a:extLst>
-          </p:cNvPr>
-          <p:cNvSpPr>
-            <a:spLocks noGrp="1"/>
-          </p:cNvSpPr>
-          <p:nvPr>
-            <p:ph type="body" idx="1"/>
-          </p:nvPr>
-        </p:nvSpPr>
-        <p:spPr/>
-        <p:txBody>
-          <a:bodyPr/>
-          <a:lstStyle/>
-          <a:p>
-            <a:endParaRPr lang="en-US" dirty="0"/>
-          </a:p>
-        </p:txBody>
-      </p:sp>
-      <p:sp>
-        <p:nvSpPr>
-          <p:cNvPr id="4" name="Slide Number Placeholder 3">
-            <a:extLst>
-              <a:ext uri="{FF2B5EF4-FFF2-40B4-BE49-F238E27FC236}">
-                <a16:creationId xmlns:a16="http://schemas.microsoft.com/office/drawing/2014/main" id="{88962D5A-5EFE-CC99-1BD6-7F9515522180}"/>
-              </a:ext>
-            </a:extLst>
-          </p:cNvPr>
-          <p:cNvSpPr>
-            <a:spLocks noGrp="1"/>
-          </p:cNvSpPr>
-          <p:nvPr>
-            <p:ph type="sldNum" sz="quarter" idx="5"/>
-          </p:nvPr>
-        </p:nvSpPr>
-        <p:spPr/>
-        <p:txBody>
-          <a:bodyPr/>
-          <a:lstStyle/>
-          <a:p>
-            <a:fld id="{FF78EFD2-C9A0-A146-8CE9-0A2B7CC7B867}" type="slidenum">
-              <a:rPr lang="en-US" smtClean="0"/>
-              <a:t>12</a:t>
-            </a:fld>
-            <a:endParaRPr lang="en-US"/>
-          </a:p>
-        </p:txBody>
-      </p:sp>
-    </p:spTree>
-    <p:extLst>
-      <p:ext uri="{BB962C8B-B14F-4D97-AF65-F5344CB8AC3E}">
-        <p14:creationId xmlns:p14="http://schemas.microsoft.com/office/powerpoint/2010/main" val="3284948924"/>
-      </p:ext>
-    </p:extLst>
-  </p:cSld>
-  <p:clrMapOvr>
-    <a:masterClrMapping/>
-  </p:clrMapOvr>
-</p:notes>
-</file>
-
-<file path=ppt/notesSlides/notesSlide12.xml><?xml version="1.0" encoding="utf-8"?>
 <p:notes xmlns:a="http://schemas.openxmlformats.org/drawingml/2006/main" xmlns:r="http://schemas.openxmlformats.org/officeDocument/2006/relationships" xmlns:p="http://schemas.openxmlformats.org/presentationml/2006/main">
   <p:cSld>
     <p:spTree>
@@ -889,7 +780,7 @@
           <a:p>
             <a:fld id="{FF78EFD2-C9A0-A146-8CE9-0A2B7CC7B867}" type="slidenum">
               <a:rPr lang="en-US" smtClean="0"/>
-              <a:t>14</a:t>
+              <a:t>11</a:t>
             </a:fld>
             <a:endParaRPr lang="en-US"/>
           </a:p>
@@ -908,7 +799,7 @@
 </p:notes>
 </file>
 
-<file path=ppt/notesSlides/notesSlide13.xml><?xml version="1.0" encoding="utf-8"?>
+<file path=ppt/notesSlides/notesSlide12.xml><?xml version="1.0" encoding="utf-8"?>
 <p:notes xmlns:a="http://schemas.openxmlformats.org/drawingml/2006/main" xmlns:r="http://schemas.openxmlformats.org/officeDocument/2006/relationships" xmlns:p="http://schemas.openxmlformats.org/presentationml/2006/main">
   <p:cSld>
     <p:spTree>
@@ -973,7 +864,7 @@
           <a:p>
             <a:fld id="{FF78EFD2-C9A0-A146-8CE9-0A2B7CC7B867}" type="slidenum">
               <a:rPr lang="en-US" smtClean="0"/>
-              <a:t>15</a:t>
+              <a:t>12</a:t>
             </a:fld>
             <a:endParaRPr lang="en-US"/>
           </a:p>
@@ -992,7 +883,7 @@
 </p:notes>
 </file>
 
-<file path=ppt/notesSlides/notesSlide14.xml><?xml version="1.0" encoding="utf-8"?>
+<file path=ppt/notesSlides/notesSlide13.xml><?xml version="1.0" encoding="utf-8"?>
 <p:notes xmlns:a="http://schemas.openxmlformats.org/drawingml/2006/main" xmlns:r="http://schemas.openxmlformats.org/officeDocument/2006/relationships" xmlns:p="http://schemas.openxmlformats.org/presentationml/2006/main">
   <p:cSld>
     <p:spTree>
@@ -1141,7 +1032,7 @@
           <a:p>
             <a:fld id="{FF78EFD2-C9A0-A146-8CE9-0A2B7CC7B867}" type="slidenum">
               <a:rPr lang="en-US" smtClean="0"/>
-              <a:t>16</a:t>
+              <a:t>13</a:t>
             </a:fld>
             <a:endParaRPr lang="en-US"/>
           </a:p>
@@ -1160,7 +1051,7 @@
 </p:notes>
 </file>
 
-<file path=ppt/notesSlides/notesSlide15.xml><?xml version="1.0" encoding="utf-8"?>
+<file path=ppt/notesSlides/notesSlide14.xml><?xml version="1.0" encoding="utf-8"?>
 <p:notes xmlns:a="http://schemas.openxmlformats.org/drawingml/2006/main" xmlns:r="http://schemas.openxmlformats.org/officeDocument/2006/relationships" xmlns:p="http://schemas.openxmlformats.org/presentationml/2006/main">
   <p:cSld>
     <p:spTree>
@@ -1249,7 +1140,7 @@
           <a:p>
             <a:fld id="{FF78EFD2-C9A0-A146-8CE9-0A2B7CC7B867}" type="slidenum">
               <a:rPr lang="en-US" smtClean="0"/>
-              <a:t>17</a:t>
+              <a:t>14</a:t>
             </a:fld>
             <a:endParaRPr lang="en-US"/>
           </a:p>
@@ -1268,7 +1159,7 @@
 </p:notes>
 </file>
 
-<file path=ppt/notesSlides/notesSlide16.xml><?xml version="1.0" encoding="utf-8"?>
+<file path=ppt/notesSlides/notesSlide15.xml><?xml version="1.0" encoding="utf-8"?>
 <p:notes xmlns:a="http://schemas.openxmlformats.org/drawingml/2006/main" xmlns:r="http://schemas.openxmlformats.org/officeDocument/2006/relationships" xmlns:p="http://schemas.openxmlformats.org/presentationml/2006/main">
   <p:cSld>
     <p:spTree>
@@ -1357,7 +1248,7 @@
           <a:p>
             <a:fld id="{FF78EFD2-C9A0-A146-8CE9-0A2B7CC7B867}" type="slidenum">
               <a:rPr lang="en-US" smtClean="0"/>
-              <a:t>18</a:t>
+              <a:t>15</a:t>
             </a:fld>
             <a:endParaRPr lang="en-US"/>
           </a:p>
@@ -1376,7 +1267,7 @@
 </p:notes>
 </file>
 
-<file path=ppt/notesSlides/notesSlide17.xml><?xml version="1.0" encoding="utf-8"?>
+<file path=ppt/notesSlides/notesSlide16.xml><?xml version="1.0" encoding="utf-8"?>
 <p:notes xmlns:a="http://schemas.openxmlformats.org/drawingml/2006/main" xmlns:r="http://schemas.openxmlformats.org/officeDocument/2006/relationships" xmlns:p="http://schemas.openxmlformats.org/presentationml/2006/main">
   <p:cSld>
     <p:spTree>
@@ -1465,7 +1356,7 @@
           <a:p>
             <a:fld id="{FF78EFD2-C9A0-A146-8CE9-0A2B7CC7B867}" type="slidenum">
               <a:rPr lang="en-US" smtClean="0"/>
-              <a:t>19</a:t>
+              <a:t>16</a:t>
             </a:fld>
             <a:endParaRPr lang="en-US"/>
           </a:p>
@@ -1475,6 +1366,145 @@
     <p:extLst>
       <p:ext uri="{BB962C8B-B14F-4D97-AF65-F5344CB8AC3E}">
         <p14:creationId xmlns:p14="http://schemas.microsoft.com/office/powerpoint/2010/main" val="3576672142"/>
+      </p:ext>
+    </p:extLst>
+  </p:cSld>
+  <p:clrMapOvr>
+    <a:masterClrMapping/>
+  </p:clrMapOvr>
+</p:notes>
+</file>
+
+<file path=ppt/notesSlides/notesSlide17.xml><?xml version="1.0" encoding="utf-8"?>
+<p:notes xmlns:a="http://schemas.openxmlformats.org/drawingml/2006/main" xmlns:r="http://schemas.openxmlformats.org/officeDocument/2006/relationships" xmlns:p="http://schemas.openxmlformats.org/presentationml/2006/main">
+  <p:cSld>
+    <p:spTree>
+      <p:nvGrpSpPr>
+        <p:cNvPr id="1" name="">
+          <a:extLst>
+            <a:ext uri="{FF2B5EF4-FFF2-40B4-BE49-F238E27FC236}">
+              <a16:creationId xmlns:a16="http://schemas.microsoft.com/office/drawing/2014/main" id="{75DEEB32-46DF-FFB3-BFD7-21018DA9F13A}"/>
+            </a:ext>
+          </a:extLst>
+        </p:cNvPr>
+        <p:cNvGrpSpPr/>
+        <p:nvPr/>
+      </p:nvGrpSpPr>
+      <p:grpSpPr>
+        <a:xfrm>
+          <a:off x="0" y="0"/>
+          <a:ext cx="0" cy="0"/>
+          <a:chOff x="0" y="0"/>
+          <a:chExt cx="0" cy="0"/>
+        </a:xfrm>
+      </p:grpSpPr>
+      <p:sp>
+        <p:nvSpPr>
+          <p:cNvPr id="2" name="Slide Image Placeholder 1">
+            <a:extLst>
+              <a:ext uri="{FF2B5EF4-FFF2-40B4-BE49-F238E27FC236}">
+                <a16:creationId xmlns:a16="http://schemas.microsoft.com/office/drawing/2014/main" id="{D3B197C2-EACB-574B-379F-C41568AEDA68}"/>
+              </a:ext>
+            </a:extLst>
+          </p:cNvPr>
+          <p:cNvSpPr>
+            <a:spLocks noGrp="1" noRot="1" noChangeAspect="1"/>
+          </p:cNvSpPr>
+          <p:nvPr>
+            <p:ph type="sldImg"/>
+          </p:nvPr>
+        </p:nvSpPr>
+        <p:spPr/>
+      </p:sp>
+      <p:sp>
+        <p:nvSpPr>
+          <p:cNvPr id="3" name="Notes Placeholder 2">
+            <a:extLst>
+              <a:ext uri="{FF2B5EF4-FFF2-40B4-BE49-F238E27FC236}">
+                <a16:creationId xmlns:a16="http://schemas.microsoft.com/office/drawing/2014/main" id="{79A9E8D5-6C12-07EA-09CF-A2E9CB0ACB26}"/>
+              </a:ext>
+            </a:extLst>
+          </p:cNvPr>
+          <p:cNvSpPr>
+            <a:spLocks noGrp="1"/>
+          </p:cNvSpPr>
+          <p:nvPr>
+            <p:ph type="body" idx="1"/>
+          </p:nvPr>
+        </p:nvSpPr>
+        <p:spPr/>
+        <p:txBody>
+          <a:bodyPr/>
+          <a:lstStyle/>
+          <a:p>
+            <a:pPr marL="0" marR="0" lvl="0" indent="0" algn="l" defTabSz="914400" rtl="0" eaLnBrk="1" fontAlgn="auto" latinLnBrk="0" hangingPunct="1">
+              <a:lnSpc>
+                <a:spcPct val="100000"/>
+              </a:lnSpc>
+              <a:spcBef>
+                <a:spcPts val="0"/>
+              </a:spcBef>
+              <a:spcAft>
+                <a:spcPts val="0"/>
+              </a:spcAft>
+              <a:buClrTx/>
+              <a:buSzTx/>
+              <a:buFontTx/>
+              <a:buNone/>
+              <a:tabLst/>
+              <a:defRPr/>
+            </a:pPr>
+            <a:r>
+              <a:rPr lang="en-US" dirty="0">
+                <a:solidFill>
+                  <a:schemeClr val="accent1"/>
+                </a:solidFill>
+              </a:rPr>
+              <a:t>DOM = </a:t>
+            </a:r>
+            <a:r>
+              <a:rPr lang="en-US" dirty="0"/>
+              <a:t>browser’s internal tree representation of a webpage.</a:t>
+            </a:r>
+          </a:p>
+          <a:p>
+            <a:endParaRPr lang="en-US" dirty="0"/>
+          </a:p>
+        </p:txBody>
+      </p:sp>
+      <p:sp>
+        <p:nvSpPr>
+          <p:cNvPr id="4" name="Slide Number Placeholder 3">
+            <a:extLst>
+              <a:ext uri="{FF2B5EF4-FFF2-40B4-BE49-F238E27FC236}">
+                <a16:creationId xmlns:a16="http://schemas.microsoft.com/office/drawing/2014/main" id="{1904E7CB-EA27-F73A-2714-1DCFA676C0DA}"/>
+              </a:ext>
+            </a:extLst>
+          </p:cNvPr>
+          <p:cNvSpPr>
+            <a:spLocks noGrp="1"/>
+          </p:cNvSpPr>
+          <p:nvPr>
+            <p:ph type="sldNum" sz="quarter" idx="5"/>
+          </p:nvPr>
+        </p:nvSpPr>
+        <p:spPr/>
+        <p:txBody>
+          <a:bodyPr/>
+          <a:lstStyle/>
+          <a:p>
+            <a:fld id="{FF78EFD2-C9A0-A146-8CE9-0A2B7CC7B867}" type="slidenum">
+              <a:rPr lang="en-US" smtClean="0"/>
+              <a:t>17</a:t>
+            </a:fld>
+            <a:endParaRPr lang="en-US"/>
+          </a:p>
+        </p:txBody>
+      </p:sp>
+    </p:spTree>
+    <p:extLst>
+      <p:ext uri="{BB962C8B-B14F-4D97-AF65-F5344CB8AC3E}">
+        <p14:creationId xmlns:p14="http://schemas.microsoft.com/office/powerpoint/2010/main" val="3839759340"/>
       </p:ext>
     </p:extLst>
   </p:cSld>
@@ -1492,7 +1522,7 @@
         <p:cNvPr id="1" name="">
           <a:extLst>
             <a:ext uri="{FF2B5EF4-FFF2-40B4-BE49-F238E27FC236}">
-              <a16:creationId xmlns:a16="http://schemas.microsoft.com/office/drawing/2014/main" id="{E3E83B74-78D6-BF1A-D31D-60025A4C7FCD}"/>
+              <a16:creationId xmlns:a16="http://schemas.microsoft.com/office/drawing/2014/main" id="{52EAA044-D8CF-6D34-F12D-31A9F9A769DE}"/>
             </a:ext>
           </a:extLst>
         </p:cNvPr>
@@ -1512,7 +1542,7 @@
           <p:cNvPr id="2" name="Slide Image Placeholder 1">
             <a:extLst>
               <a:ext uri="{FF2B5EF4-FFF2-40B4-BE49-F238E27FC236}">
-                <a16:creationId xmlns:a16="http://schemas.microsoft.com/office/drawing/2014/main" id="{95A941D7-3C81-341C-C217-FE22E5AC3138}"/>
+                <a16:creationId xmlns:a16="http://schemas.microsoft.com/office/drawing/2014/main" id="{1FCB08AC-6983-BB43-48AE-3FBB70A73E42}"/>
               </a:ext>
             </a:extLst>
           </p:cNvPr>
@@ -1530,7 +1560,7 @@
           <p:cNvPr id="3" name="Notes Placeholder 2">
             <a:extLst>
               <a:ext uri="{FF2B5EF4-FFF2-40B4-BE49-F238E27FC236}">
-                <a16:creationId xmlns:a16="http://schemas.microsoft.com/office/drawing/2014/main" id="{8DC2AF3F-3557-3E5C-9194-B8AF3A74AEA2}"/>
+                <a16:creationId xmlns:a16="http://schemas.microsoft.com/office/drawing/2014/main" id="{6181D450-00B8-3D29-11F2-B3F24B386FCF}"/>
               </a:ext>
             </a:extLst>
           </p:cNvPr>
@@ -1555,7 +1585,7 @@
           <p:cNvPr id="4" name="Slide Number Placeholder 3">
             <a:extLst>
               <a:ext uri="{FF2B5EF4-FFF2-40B4-BE49-F238E27FC236}">
-                <a16:creationId xmlns:a16="http://schemas.microsoft.com/office/drawing/2014/main" id="{7DE3D114-22DC-39FF-4326-7B2564E07935}"/>
+                <a16:creationId xmlns:a16="http://schemas.microsoft.com/office/drawing/2014/main" id="{84F17BEC-AB79-5B29-F611-73506680AA7C}"/>
               </a:ext>
             </a:extLst>
           </p:cNvPr>
@@ -1573,7 +1603,7 @@
           <a:p>
             <a:fld id="{FF78EFD2-C9A0-A146-8CE9-0A2B7CC7B867}" type="slidenum">
               <a:rPr lang="en-US" smtClean="0"/>
-              <a:t>20</a:t>
+              <a:t>18</a:t>
             </a:fld>
             <a:endParaRPr lang="en-US"/>
           </a:p>
@@ -1582,7 +1612,7 @@
     </p:spTree>
     <p:extLst>
       <p:ext uri="{BB962C8B-B14F-4D97-AF65-F5344CB8AC3E}">
-        <p14:creationId xmlns:p14="http://schemas.microsoft.com/office/powerpoint/2010/main" val="2064964318"/>
+        <p14:creationId xmlns:p14="http://schemas.microsoft.com/office/powerpoint/2010/main" val="1273647382"/>
       </p:ext>
     </p:extLst>
   </p:cSld>
@@ -1600,7 +1630,7 @@
         <p:cNvPr id="1" name="">
           <a:extLst>
             <a:ext uri="{FF2B5EF4-FFF2-40B4-BE49-F238E27FC236}">
-              <a16:creationId xmlns:a16="http://schemas.microsoft.com/office/drawing/2014/main" id="{8C395B5B-EC05-7334-DFD8-7AD0566E26B1}"/>
+              <a16:creationId xmlns:a16="http://schemas.microsoft.com/office/drawing/2014/main" id="{CD8F6DB9-60AD-9C7C-389C-50ED6D1C35E7}"/>
             </a:ext>
           </a:extLst>
         </p:cNvPr>
@@ -1620,7 +1650,7 @@
           <p:cNvPr id="2" name="Slide Image Placeholder 1">
             <a:extLst>
               <a:ext uri="{FF2B5EF4-FFF2-40B4-BE49-F238E27FC236}">
-                <a16:creationId xmlns:a16="http://schemas.microsoft.com/office/drawing/2014/main" id="{DBC573A4-98D1-43DB-0D0C-AB3E412B27E1}"/>
+                <a16:creationId xmlns:a16="http://schemas.microsoft.com/office/drawing/2014/main" id="{8E116A8F-A6C5-7BFE-325B-8980E92363A8}"/>
               </a:ext>
             </a:extLst>
           </p:cNvPr>
@@ -1638,7 +1668,7 @@
           <p:cNvPr id="3" name="Notes Placeholder 2">
             <a:extLst>
               <a:ext uri="{FF2B5EF4-FFF2-40B4-BE49-F238E27FC236}">
-                <a16:creationId xmlns:a16="http://schemas.microsoft.com/office/drawing/2014/main" id="{450D264D-5009-DA1C-B921-B930E55D28EE}"/>
+                <a16:creationId xmlns:a16="http://schemas.microsoft.com/office/drawing/2014/main" id="{C1AD7453-B595-66A0-0E51-5B29FD692482}"/>
               </a:ext>
             </a:extLst>
           </p:cNvPr>
@@ -1663,7 +1693,7 @@
           <p:cNvPr id="4" name="Slide Number Placeholder 3">
             <a:extLst>
               <a:ext uri="{FF2B5EF4-FFF2-40B4-BE49-F238E27FC236}">
-                <a16:creationId xmlns:a16="http://schemas.microsoft.com/office/drawing/2014/main" id="{A5C69E24-F6CF-CDBC-4142-24345697CC8B}"/>
+                <a16:creationId xmlns:a16="http://schemas.microsoft.com/office/drawing/2014/main" id="{6C065344-BCAD-2B30-6321-EE19BB597859}"/>
               </a:ext>
             </a:extLst>
           </p:cNvPr>
@@ -1681,7 +1711,7 @@
           <a:p>
             <a:fld id="{FF78EFD2-C9A0-A146-8CE9-0A2B7CC7B867}" type="slidenum">
               <a:rPr lang="en-US" smtClean="0"/>
-              <a:t>21</a:t>
+              <a:t>19</a:t>
             </a:fld>
             <a:endParaRPr lang="en-US"/>
           </a:p>
@@ -1690,7 +1720,7 @@
     </p:spTree>
     <p:extLst>
       <p:ext uri="{BB962C8B-B14F-4D97-AF65-F5344CB8AC3E}">
-        <p14:creationId xmlns:p14="http://schemas.microsoft.com/office/powerpoint/2010/main" val="1132258861"/>
+        <p14:creationId xmlns:p14="http://schemas.microsoft.com/office/powerpoint/2010/main" val="1195492899"/>
       </p:ext>
     </p:extLst>
   </p:cSld>
@@ -1792,7 +1822,7 @@
         <p:cNvPr id="1" name="">
           <a:extLst>
             <a:ext uri="{FF2B5EF4-FFF2-40B4-BE49-F238E27FC236}">
-              <a16:creationId xmlns:a16="http://schemas.microsoft.com/office/drawing/2014/main" id="{CD8F6DB9-60AD-9C7C-389C-50ED6D1C35E7}"/>
+              <a16:creationId xmlns:a16="http://schemas.microsoft.com/office/drawing/2014/main" id="{B5F074ED-271C-CB18-0BD5-B5D06A72AD81}"/>
             </a:ext>
           </a:extLst>
         </p:cNvPr>
@@ -1812,7 +1842,7 @@
           <p:cNvPr id="2" name="Slide Image Placeholder 1">
             <a:extLst>
               <a:ext uri="{FF2B5EF4-FFF2-40B4-BE49-F238E27FC236}">
-                <a16:creationId xmlns:a16="http://schemas.microsoft.com/office/drawing/2014/main" id="{8E116A8F-A6C5-7BFE-325B-8980E92363A8}"/>
+                <a16:creationId xmlns:a16="http://schemas.microsoft.com/office/drawing/2014/main" id="{45189A24-A48B-6441-0BC8-E3D43488AA63}"/>
               </a:ext>
             </a:extLst>
           </p:cNvPr>
@@ -1830,7 +1860,7 @@
           <p:cNvPr id="3" name="Notes Placeholder 2">
             <a:extLst>
               <a:ext uri="{FF2B5EF4-FFF2-40B4-BE49-F238E27FC236}">
-                <a16:creationId xmlns:a16="http://schemas.microsoft.com/office/drawing/2014/main" id="{C1AD7453-B595-66A0-0E51-5B29FD692482}"/>
+                <a16:creationId xmlns:a16="http://schemas.microsoft.com/office/drawing/2014/main" id="{249FFC95-0287-5490-E527-E89AADFC86FB}"/>
               </a:ext>
             </a:extLst>
           </p:cNvPr>
@@ -1855,7 +1885,7 @@
           <p:cNvPr id="4" name="Slide Number Placeholder 3">
             <a:extLst>
               <a:ext uri="{FF2B5EF4-FFF2-40B4-BE49-F238E27FC236}">
-                <a16:creationId xmlns:a16="http://schemas.microsoft.com/office/drawing/2014/main" id="{6C065344-BCAD-2B30-6321-EE19BB597859}"/>
+                <a16:creationId xmlns:a16="http://schemas.microsoft.com/office/drawing/2014/main" id="{49FB50DA-E49C-BD7E-7E68-E996D33BC062}"/>
               </a:ext>
             </a:extLst>
           </p:cNvPr>
@@ -1873,7 +1903,7 @@
           <a:p>
             <a:fld id="{FF78EFD2-C9A0-A146-8CE9-0A2B7CC7B867}" type="slidenum">
               <a:rPr lang="en-US" smtClean="0"/>
-              <a:t>22</a:t>
+              <a:t>20</a:t>
             </a:fld>
             <a:endParaRPr lang="en-US"/>
           </a:p>
@@ -1882,7 +1912,7 @@
     </p:spTree>
     <p:extLst>
       <p:ext uri="{BB962C8B-B14F-4D97-AF65-F5344CB8AC3E}">
-        <p14:creationId xmlns:p14="http://schemas.microsoft.com/office/powerpoint/2010/main" val="1195492899"/>
+        <p14:creationId xmlns:p14="http://schemas.microsoft.com/office/powerpoint/2010/main" val="2831120238"/>
       </p:ext>
     </p:extLst>
   </p:cSld>
@@ -1900,7 +1930,7 @@
         <p:cNvPr id="1" name="">
           <a:extLst>
             <a:ext uri="{FF2B5EF4-FFF2-40B4-BE49-F238E27FC236}">
-              <a16:creationId xmlns:a16="http://schemas.microsoft.com/office/drawing/2014/main" id="{4FAD67A6-49E5-07AF-67D6-E105C7DD81B2}"/>
+              <a16:creationId xmlns:a16="http://schemas.microsoft.com/office/drawing/2014/main" id="{F940C512-90DF-13F9-F943-EA3F3FA6C635}"/>
             </a:ext>
           </a:extLst>
         </p:cNvPr>
@@ -1920,7 +1950,7 @@
           <p:cNvPr id="2" name="Slide Image Placeholder 1">
             <a:extLst>
               <a:ext uri="{FF2B5EF4-FFF2-40B4-BE49-F238E27FC236}">
-                <a16:creationId xmlns:a16="http://schemas.microsoft.com/office/drawing/2014/main" id="{5CA18DA9-1BE5-8213-3A63-F5F263737D48}"/>
+                <a16:creationId xmlns:a16="http://schemas.microsoft.com/office/drawing/2014/main" id="{7789E67D-2EB4-2A19-3AD0-6DF8112EB2EA}"/>
               </a:ext>
             </a:extLst>
           </p:cNvPr>
@@ -1938,7 +1968,7 @@
           <p:cNvPr id="3" name="Notes Placeholder 2">
             <a:extLst>
               <a:ext uri="{FF2B5EF4-FFF2-40B4-BE49-F238E27FC236}">
-                <a16:creationId xmlns:a16="http://schemas.microsoft.com/office/drawing/2014/main" id="{2448E8D6-D589-DE2B-1BF8-144EAE1CC99B}"/>
+                <a16:creationId xmlns:a16="http://schemas.microsoft.com/office/drawing/2014/main" id="{7501559B-F25B-CC6F-D771-95A82D2766A5}"/>
               </a:ext>
             </a:extLst>
           </p:cNvPr>
@@ -1954,6 +1984,37 @@
           <a:bodyPr/>
           <a:lstStyle/>
           <a:p>
+            <a:pPr marL="0" marR="0" lvl="0" indent="0" algn="l" defTabSz="914400" rtl="0" eaLnBrk="1" fontAlgn="auto" latinLnBrk="0" hangingPunct="1">
+              <a:lnSpc>
+                <a:spcPct val="100000"/>
+              </a:lnSpc>
+              <a:spcBef>
+                <a:spcPts val="0"/>
+              </a:spcBef>
+              <a:spcAft>
+                <a:spcPts val="0"/>
+              </a:spcAft>
+              <a:buClrTx/>
+              <a:buSzTx/>
+              <a:buFontTx/>
+              <a:buNone/>
+              <a:tabLst/>
+              <a:defRPr/>
+            </a:pPr>
+            <a:r>
+              <a:rPr lang="en-US" dirty="0">
+                <a:solidFill>
+                  <a:schemeClr val="accent1"/>
+                </a:solidFill>
+              </a:rPr>
+              <a:t>DOM = </a:t>
+            </a:r>
+            <a:r>
+              <a:rPr lang="en-US" dirty="0"/>
+              <a:t>browser’s internal tree representation of a webpage.</a:t>
+            </a:r>
+          </a:p>
+          <a:p>
             <a:endParaRPr lang="en-US" dirty="0"/>
           </a:p>
         </p:txBody>
@@ -1963,7 +2024,7 @@
           <p:cNvPr id="4" name="Slide Number Placeholder 3">
             <a:extLst>
               <a:ext uri="{FF2B5EF4-FFF2-40B4-BE49-F238E27FC236}">
-                <a16:creationId xmlns:a16="http://schemas.microsoft.com/office/drawing/2014/main" id="{E9624697-BEF7-78AF-8C0A-A1BD8647159A}"/>
+                <a16:creationId xmlns:a16="http://schemas.microsoft.com/office/drawing/2014/main" id="{AE852092-4195-ACA7-6B6B-14C3FE874DF6}"/>
               </a:ext>
             </a:extLst>
           </p:cNvPr>
@@ -1981,7 +2042,7 @@
           <a:p>
             <a:fld id="{FF78EFD2-C9A0-A146-8CE9-0A2B7CC7B867}" type="slidenum">
               <a:rPr lang="en-US" smtClean="0"/>
-              <a:t>23</a:t>
+              <a:t>21</a:t>
             </a:fld>
             <a:endParaRPr lang="en-US"/>
           </a:p>
@@ -1990,7 +2051,7 @@
     </p:spTree>
     <p:extLst>
       <p:ext uri="{BB962C8B-B14F-4D97-AF65-F5344CB8AC3E}">
-        <p14:creationId xmlns:p14="http://schemas.microsoft.com/office/powerpoint/2010/main" val="3952875464"/>
+        <p14:creationId xmlns:p14="http://schemas.microsoft.com/office/powerpoint/2010/main" val="1239298422"/>
       </p:ext>
     </p:extLst>
   </p:cSld>
@@ -2001,546 +2062,6 @@
 </file>
 
 <file path=ppt/notesSlides/notesSlide22.xml><?xml version="1.0" encoding="utf-8"?>
-<p:notes xmlns:a="http://schemas.openxmlformats.org/drawingml/2006/main" xmlns:r="http://schemas.openxmlformats.org/officeDocument/2006/relationships" xmlns:p="http://schemas.openxmlformats.org/presentationml/2006/main">
-  <p:cSld>
-    <p:spTree>
-      <p:nvGrpSpPr>
-        <p:cNvPr id="1" name="">
-          <a:extLst>
-            <a:ext uri="{FF2B5EF4-FFF2-40B4-BE49-F238E27FC236}">
-              <a16:creationId xmlns:a16="http://schemas.microsoft.com/office/drawing/2014/main" id="{8C5A0910-7419-E396-257A-EC30AF26ED23}"/>
-            </a:ext>
-          </a:extLst>
-        </p:cNvPr>
-        <p:cNvGrpSpPr/>
-        <p:nvPr/>
-      </p:nvGrpSpPr>
-      <p:grpSpPr>
-        <a:xfrm>
-          <a:off x="0" y="0"/>
-          <a:ext cx="0" cy="0"/>
-          <a:chOff x="0" y="0"/>
-          <a:chExt cx="0" cy="0"/>
-        </a:xfrm>
-      </p:grpSpPr>
-      <p:sp>
-        <p:nvSpPr>
-          <p:cNvPr id="2" name="Slide Image Placeholder 1">
-            <a:extLst>
-              <a:ext uri="{FF2B5EF4-FFF2-40B4-BE49-F238E27FC236}">
-                <a16:creationId xmlns:a16="http://schemas.microsoft.com/office/drawing/2014/main" id="{CA4CB104-39C4-6180-F754-DBA894E658B1}"/>
-              </a:ext>
-            </a:extLst>
-          </p:cNvPr>
-          <p:cNvSpPr>
-            <a:spLocks noGrp="1" noRot="1" noChangeAspect="1"/>
-          </p:cNvSpPr>
-          <p:nvPr>
-            <p:ph type="sldImg"/>
-          </p:nvPr>
-        </p:nvSpPr>
-        <p:spPr/>
-      </p:sp>
-      <p:sp>
-        <p:nvSpPr>
-          <p:cNvPr id="3" name="Notes Placeholder 2">
-            <a:extLst>
-              <a:ext uri="{FF2B5EF4-FFF2-40B4-BE49-F238E27FC236}">
-                <a16:creationId xmlns:a16="http://schemas.microsoft.com/office/drawing/2014/main" id="{316A7AB8-EA7B-0749-BBEE-5349009CDDE9}"/>
-              </a:ext>
-            </a:extLst>
-          </p:cNvPr>
-          <p:cNvSpPr>
-            <a:spLocks noGrp="1"/>
-          </p:cNvSpPr>
-          <p:nvPr>
-            <p:ph type="body" idx="1"/>
-          </p:nvPr>
-        </p:nvSpPr>
-        <p:spPr/>
-        <p:txBody>
-          <a:bodyPr/>
-          <a:lstStyle/>
-          <a:p>
-            <a:endParaRPr lang="en-US" dirty="0"/>
-          </a:p>
-        </p:txBody>
-      </p:sp>
-      <p:sp>
-        <p:nvSpPr>
-          <p:cNvPr id="4" name="Slide Number Placeholder 3">
-            <a:extLst>
-              <a:ext uri="{FF2B5EF4-FFF2-40B4-BE49-F238E27FC236}">
-                <a16:creationId xmlns:a16="http://schemas.microsoft.com/office/drawing/2014/main" id="{D7216838-4C4F-3ABD-91F1-460E048D38A9}"/>
-              </a:ext>
-            </a:extLst>
-          </p:cNvPr>
-          <p:cNvSpPr>
-            <a:spLocks noGrp="1"/>
-          </p:cNvSpPr>
-          <p:nvPr>
-            <p:ph type="sldNum" sz="quarter" idx="5"/>
-          </p:nvPr>
-        </p:nvSpPr>
-        <p:spPr/>
-        <p:txBody>
-          <a:bodyPr/>
-          <a:lstStyle/>
-          <a:p>
-            <a:fld id="{FF78EFD2-C9A0-A146-8CE9-0A2B7CC7B867}" type="slidenum">
-              <a:rPr lang="en-US" smtClean="0"/>
-              <a:t>24</a:t>
-            </a:fld>
-            <a:endParaRPr lang="en-US"/>
-          </a:p>
-        </p:txBody>
-      </p:sp>
-    </p:spTree>
-    <p:extLst>
-      <p:ext uri="{BB962C8B-B14F-4D97-AF65-F5344CB8AC3E}">
-        <p14:creationId xmlns:p14="http://schemas.microsoft.com/office/powerpoint/2010/main" val="1425434521"/>
-      </p:ext>
-    </p:extLst>
-  </p:cSld>
-  <p:clrMapOvr>
-    <a:masterClrMapping/>
-  </p:clrMapOvr>
-</p:notes>
-</file>
-
-<file path=ppt/notesSlides/notesSlide23.xml><?xml version="1.0" encoding="utf-8"?>
-<p:notes xmlns:a="http://schemas.openxmlformats.org/drawingml/2006/main" xmlns:r="http://schemas.openxmlformats.org/officeDocument/2006/relationships" xmlns:p="http://schemas.openxmlformats.org/presentationml/2006/main">
-  <p:cSld>
-    <p:spTree>
-      <p:nvGrpSpPr>
-        <p:cNvPr id="1" name="">
-          <a:extLst>
-            <a:ext uri="{FF2B5EF4-FFF2-40B4-BE49-F238E27FC236}">
-              <a16:creationId xmlns:a16="http://schemas.microsoft.com/office/drawing/2014/main" id="{E34803FD-EABC-BC6E-2E0D-37E469BF81B3}"/>
-            </a:ext>
-          </a:extLst>
-        </p:cNvPr>
-        <p:cNvGrpSpPr/>
-        <p:nvPr/>
-      </p:nvGrpSpPr>
-      <p:grpSpPr>
-        <a:xfrm>
-          <a:off x="0" y="0"/>
-          <a:ext cx="0" cy="0"/>
-          <a:chOff x="0" y="0"/>
-          <a:chExt cx="0" cy="0"/>
-        </a:xfrm>
-      </p:grpSpPr>
-      <p:sp>
-        <p:nvSpPr>
-          <p:cNvPr id="2" name="Slide Image Placeholder 1">
-            <a:extLst>
-              <a:ext uri="{FF2B5EF4-FFF2-40B4-BE49-F238E27FC236}">
-                <a16:creationId xmlns:a16="http://schemas.microsoft.com/office/drawing/2014/main" id="{DE568B56-A6EE-ECC4-038B-D9406B477BC9}"/>
-              </a:ext>
-            </a:extLst>
-          </p:cNvPr>
-          <p:cNvSpPr>
-            <a:spLocks noGrp="1" noRot="1" noChangeAspect="1"/>
-          </p:cNvSpPr>
-          <p:nvPr>
-            <p:ph type="sldImg"/>
-          </p:nvPr>
-        </p:nvSpPr>
-        <p:spPr/>
-      </p:sp>
-      <p:sp>
-        <p:nvSpPr>
-          <p:cNvPr id="3" name="Notes Placeholder 2">
-            <a:extLst>
-              <a:ext uri="{FF2B5EF4-FFF2-40B4-BE49-F238E27FC236}">
-                <a16:creationId xmlns:a16="http://schemas.microsoft.com/office/drawing/2014/main" id="{7DAEAD02-A4DA-CA45-D292-1792DA7898C0}"/>
-              </a:ext>
-            </a:extLst>
-          </p:cNvPr>
-          <p:cNvSpPr>
-            <a:spLocks noGrp="1"/>
-          </p:cNvSpPr>
-          <p:nvPr>
-            <p:ph type="body" idx="1"/>
-          </p:nvPr>
-        </p:nvSpPr>
-        <p:spPr/>
-        <p:txBody>
-          <a:bodyPr/>
-          <a:lstStyle/>
-          <a:p>
-            <a:endParaRPr lang="en-US" dirty="0"/>
-          </a:p>
-        </p:txBody>
-      </p:sp>
-      <p:sp>
-        <p:nvSpPr>
-          <p:cNvPr id="4" name="Slide Number Placeholder 3">
-            <a:extLst>
-              <a:ext uri="{FF2B5EF4-FFF2-40B4-BE49-F238E27FC236}">
-                <a16:creationId xmlns:a16="http://schemas.microsoft.com/office/drawing/2014/main" id="{85DE40D7-D78E-9B35-F70E-7F418DA40CB8}"/>
-              </a:ext>
-            </a:extLst>
-          </p:cNvPr>
-          <p:cNvSpPr>
-            <a:spLocks noGrp="1"/>
-          </p:cNvSpPr>
-          <p:nvPr>
-            <p:ph type="sldNum" sz="quarter" idx="5"/>
-          </p:nvPr>
-        </p:nvSpPr>
-        <p:spPr/>
-        <p:txBody>
-          <a:bodyPr/>
-          <a:lstStyle/>
-          <a:p>
-            <a:fld id="{FF78EFD2-C9A0-A146-8CE9-0A2B7CC7B867}" type="slidenum">
-              <a:rPr lang="en-US" smtClean="0"/>
-              <a:t>25</a:t>
-            </a:fld>
-            <a:endParaRPr lang="en-US"/>
-          </a:p>
-        </p:txBody>
-      </p:sp>
-    </p:spTree>
-    <p:extLst>
-      <p:ext uri="{BB962C8B-B14F-4D97-AF65-F5344CB8AC3E}">
-        <p14:creationId xmlns:p14="http://schemas.microsoft.com/office/powerpoint/2010/main" val="671812920"/>
-      </p:ext>
-    </p:extLst>
-  </p:cSld>
-  <p:clrMapOvr>
-    <a:masterClrMapping/>
-  </p:clrMapOvr>
-</p:notes>
-</file>
-
-<file path=ppt/notesSlides/notesSlide24.xml><?xml version="1.0" encoding="utf-8"?>
-<p:notes xmlns:a="http://schemas.openxmlformats.org/drawingml/2006/main" xmlns:r="http://schemas.openxmlformats.org/officeDocument/2006/relationships" xmlns:p="http://schemas.openxmlformats.org/presentationml/2006/main">
-  <p:cSld>
-    <p:spTree>
-      <p:nvGrpSpPr>
-        <p:cNvPr id="1" name="">
-          <a:extLst>
-            <a:ext uri="{FF2B5EF4-FFF2-40B4-BE49-F238E27FC236}">
-              <a16:creationId xmlns:a16="http://schemas.microsoft.com/office/drawing/2014/main" id="{BF1E02DA-CEFE-C4B3-483D-393F8551BEFE}"/>
-            </a:ext>
-          </a:extLst>
-        </p:cNvPr>
-        <p:cNvGrpSpPr/>
-        <p:nvPr/>
-      </p:nvGrpSpPr>
-      <p:grpSpPr>
-        <a:xfrm>
-          <a:off x="0" y="0"/>
-          <a:ext cx="0" cy="0"/>
-          <a:chOff x="0" y="0"/>
-          <a:chExt cx="0" cy="0"/>
-        </a:xfrm>
-      </p:grpSpPr>
-      <p:sp>
-        <p:nvSpPr>
-          <p:cNvPr id="2" name="Slide Image Placeholder 1">
-            <a:extLst>
-              <a:ext uri="{FF2B5EF4-FFF2-40B4-BE49-F238E27FC236}">
-                <a16:creationId xmlns:a16="http://schemas.microsoft.com/office/drawing/2014/main" id="{763419BC-4F4F-065A-34BC-268FA6E3E075}"/>
-              </a:ext>
-            </a:extLst>
-          </p:cNvPr>
-          <p:cNvSpPr>
-            <a:spLocks noGrp="1" noRot="1" noChangeAspect="1"/>
-          </p:cNvSpPr>
-          <p:nvPr>
-            <p:ph type="sldImg"/>
-          </p:nvPr>
-        </p:nvSpPr>
-        <p:spPr/>
-      </p:sp>
-      <p:sp>
-        <p:nvSpPr>
-          <p:cNvPr id="3" name="Notes Placeholder 2">
-            <a:extLst>
-              <a:ext uri="{FF2B5EF4-FFF2-40B4-BE49-F238E27FC236}">
-                <a16:creationId xmlns:a16="http://schemas.microsoft.com/office/drawing/2014/main" id="{8AF2DFE0-531C-6E5F-8F05-AC51C44BE58D}"/>
-              </a:ext>
-            </a:extLst>
-          </p:cNvPr>
-          <p:cNvSpPr>
-            <a:spLocks noGrp="1"/>
-          </p:cNvSpPr>
-          <p:nvPr>
-            <p:ph type="body" idx="1"/>
-          </p:nvPr>
-        </p:nvSpPr>
-        <p:spPr/>
-        <p:txBody>
-          <a:bodyPr/>
-          <a:lstStyle/>
-          <a:p>
-            <a:endParaRPr lang="en-US" dirty="0"/>
-          </a:p>
-        </p:txBody>
-      </p:sp>
-      <p:sp>
-        <p:nvSpPr>
-          <p:cNvPr id="4" name="Slide Number Placeholder 3">
-            <a:extLst>
-              <a:ext uri="{FF2B5EF4-FFF2-40B4-BE49-F238E27FC236}">
-                <a16:creationId xmlns:a16="http://schemas.microsoft.com/office/drawing/2014/main" id="{73235EC2-A2E9-2C90-6F4B-EBF62F6D1396}"/>
-              </a:ext>
-            </a:extLst>
-          </p:cNvPr>
-          <p:cNvSpPr>
-            <a:spLocks noGrp="1"/>
-          </p:cNvSpPr>
-          <p:nvPr>
-            <p:ph type="sldNum" sz="quarter" idx="5"/>
-          </p:nvPr>
-        </p:nvSpPr>
-        <p:spPr/>
-        <p:txBody>
-          <a:bodyPr/>
-          <a:lstStyle/>
-          <a:p>
-            <a:fld id="{FF78EFD2-C9A0-A146-8CE9-0A2B7CC7B867}" type="slidenum">
-              <a:rPr lang="en-US" smtClean="0"/>
-              <a:t>26</a:t>
-            </a:fld>
-            <a:endParaRPr lang="en-US"/>
-          </a:p>
-        </p:txBody>
-      </p:sp>
-    </p:spTree>
-    <p:extLst>
-      <p:ext uri="{BB962C8B-B14F-4D97-AF65-F5344CB8AC3E}">
-        <p14:creationId xmlns:p14="http://schemas.microsoft.com/office/powerpoint/2010/main" val="1496489557"/>
-      </p:ext>
-    </p:extLst>
-  </p:cSld>
-  <p:clrMapOvr>
-    <a:masterClrMapping/>
-  </p:clrMapOvr>
-</p:notes>
-</file>
-
-<file path=ppt/notesSlides/notesSlide25.xml><?xml version="1.0" encoding="utf-8"?>
-<p:notes xmlns:a="http://schemas.openxmlformats.org/drawingml/2006/main" xmlns:r="http://schemas.openxmlformats.org/officeDocument/2006/relationships" xmlns:p="http://schemas.openxmlformats.org/presentationml/2006/main">
-  <p:cSld>
-    <p:spTree>
-      <p:nvGrpSpPr>
-        <p:cNvPr id="1" name="">
-          <a:extLst>
-            <a:ext uri="{FF2B5EF4-FFF2-40B4-BE49-F238E27FC236}">
-              <a16:creationId xmlns:a16="http://schemas.microsoft.com/office/drawing/2014/main" id="{B5455373-0106-4BC1-6B35-5503BF503834}"/>
-            </a:ext>
-          </a:extLst>
-        </p:cNvPr>
-        <p:cNvGrpSpPr/>
-        <p:nvPr/>
-      </p:nvGrpSpPr>
-      <p:grpSpPr>
-        <a:xfrm>
-          <a:off x="0" y="0"/>
-          <a:ext cx="0" cy="0"/>
-          <a:chOff x="0" y="0"/>
-          <a:chExt cx="0" cy="0"/>
-        </a:xfrm>
-      </p:grpSpPr>
-      <p:sp>
-        <p:nvSpPr>
-          <p:cNvPr id="2" name="Slide Image Placeholder 1">
-            <a:extLst>
-              <a:ext uri="{FF2B5EF4-FFF2-40B4-BE49-F238E27FC236}">
-                <a16:creationId xmlns:a16="http://schemas.microsoft.com/office/drawing/2014/main" id="{A304AB3A-FAF1-28E5-5334-BF9AEE65CDF1}"/>
-              </a:ext>
-            </a:extLst>
-          </p:cNvPr>
-          <p:cNvSpPr>
-            <a:spLocks noGrp="1" noRot="1" noChangeAspect="1"/>
-          </p:cNvSpPr>
-          <p:nvPr>
-            <p:ph type="sldImg"/>
-          </p:nvPr>
-        </p:nvSpPr>
-        <p:spPr/>
-      </p:sp>
-      <p:sp>
-        <p:nvSpPr>
-          <p:cNvPr id="3" name="Notes Placeholder 2">
-            <a:extLst>
-              <a:ext uri="{FF2B5EF4-FFF2-40B4-BE49-F238E27FC236}">
-                <a16:creationId xmlns:a16="http://schemas.microsoft.com/office/drawing/2014/main" id="{D9FCC686-0B5A-7E70-99B4-45911CF21E89}"/>
-              </a:ext>
-            </a:extLst>
-          </p:cNvPr>
-          <p:cNvSpPr>
-            <a:spLocks noGrp="1"/>
-          </p:cNvSpPr>
-          <p:nvPr>
-            <p:ph type="body" idx="1"/>
-          </p:nvPr>
-        </p:nvSpPr>
-        <p:spPr/>
-        <p:txBody>
-          <a:bodyPr/>
-          <a:lstStyle/>
-          <a:p>
-            <a:endParaRPr lang="en-US" dirty="0"/>
-          </a:p>
-        </p:txBody>
-      </p:sp>
-      <p:sp>
-        <p:nvSpPr>
-          <p:cNvPr id="4" name="Slide Number Placeholder 3">
-            <a:extLst>
-              <a:ext uri="{FF2B5EF4-FFF2-40B4-BE49-F238E27FC236}">
-                <a16:creationId xmlns:a16="http://schemas.microsoft.com/office/drawing/2014/main" id="{AF07DA20-89DA-2B17-1867-A2975B879601}"/>
-              </a:ext>
-            </a:extLst>
-          </p:cNvPr>
-          <p:cNvSpPr>
-            <a:spLocks noGrp="1"/>
-          </p:cNvSpPr>
-          <p:nvPr>
-            <p:ph type="sldNum" sz="quarter" idx="5"/>
-          </p:nvPr>
-        </p:nvSpPr>
-        <p:spPr/>
-        <p:txBody>
-          <a:bodyPr/>
-          <a:lstStyle/>
-          <a:p>
-            <a:fld id="{FF78EFD2-C9A0-A146-8CE9-0A2B7CC7B867}" type="slidenum">
-              <a:rPr lang="en-US" smtClean="0"/>
-              <a:t>27</a:t>
-            </a:fld>
-            <a:endParaRPr lang="en-US"/>
-          </a:p>
-        </p:txBody>
-      </p:sp>
-    </p:spTree>
-    <p:extLst>
-      <p:ext uri="{BB962C8B-B14F-4D97-AF65-F5344CB8AC3E}">
-        <p14:creationId xmlns:p14="http://schemas.microsoft.com/office/powerpoint/2010/main" val="3866021849"/>
-      </p:ext>
-    </p:extLst>
-  </p:cSld>
-  <p:clrMapOvr>
-    <a:masterClrMapping/>
-  </p:clrMapOvr>
-</p:notes>
-</file>
-
-<file path=ppt/notesSlides/notesSlide26.xml><?xml version="1.0" encoding="utf-8"?>
-<p:notes xmlns:a="http://schemas.openxmlformats.org/drawingml/2006/main" xmlns:r="http://schemas.openxmlformats.org/officeDocument/2006/relationships" xmlns:p="http://schemas.openxmlformats.org/presentationml/2006/main">
-  <p:cSld>
-    <p:spTree>
-      <p:nvGrpSpPr>
-        <p:cNvPr id="1" name="">
-          <a:extLst>
-            <a:ext uri="{FF2B5EF4-FFF2-40B4-BE49-F238E27FC236}">
-              <a16:creationId xmlns:a16="http://schemas.microsoft.com/office/drawing/2014/main" id="{52EAA044-D8CF-6D34-F12D-31A9F9A769DE}"/>
-            </a:ext>
-          </a:extLst>
-        </p:cNvPr>
-        <p:cNvGrpSpPr/>
-        <p:nvPr/>
-      </p:nvGrpSpPr>
-      <p:grpSpPr>
-        <a:xfrm>
-          <a:off x="0" y="0"/>
-          <a:ext cx="0" cy="0"/>
-          <a:chOff x="0" y="0"/>
-          <a:chExt cx="0" cy="0"/>
-        </a:xfrm>
-      </p:grpSpPr>
-      <p:sp>
-        <p:nvSpPr>
-          <p:cNvPr id="2" name="Slide Image Placeholder 1">
-            <a:extLst>
-              <a:ext uri="{FF2B5EF4-FFF2-40B4-BE49-F238E27FC236}">
-                <a16:creationId xmlns:a16="http://schemas.microsoft.com/office/drawing/2014/main" id="{1FCB08AC-6983-BB43-48AE-3FBB70A73E42}"/>
-              </a:ext>
-            </a:extLst>
-          </p:cNvPr>
-          <p:cNvSpPr>
-            <a:spLocks noGrp="1" noRot="1" noChangeAspect="1"/>
-          </p:cNvSpPr>
-          <p:nvPr>
-            <p:ph type="sldImg"/>
-          </p:nvPr>
-        </p:nvSpPr>
-        <p:spPr/>
-      </p:sp>
-      <p:sp>
-        <p:nvSpPr>
-          <p:cNvPr id="3" name="Notes Placeholder 2">
-            <a:extLst>
-              <a:ext uri="{FF2B5EF4-FFF2-40B4-BE49-F238E27FC236}">
-                <a16:creationId xmlns:a16="http://schemas.microsoft.com/office/drawing/2014/main" id="{6181D450-00B8-3D29-11F2-B3F24B386FCF}"/>
-              </a:ext>
-            </a:extLst>
-          </p:cNvPr>
-          <p:cNvSpPr>
-            <a:spLocks noGrp="1"/>
-          </p:cNvSpPr>
-          <p:nvPr>
-            <p:ph type="body" idx="1"/>
-          </p:nvPr>
-        </p:nvSpPr>
-        <p:spPr/>
-        <p:txBody>
-          <a:bodyPr/>
-          <a:lstStyle/>
-          <a:p>
-            <a:endParaRPr lang="en-US" dirty="0"/>
-          </a:p>
-        </p:txBody>
-      </p:sp>
-      <p:sp>
-        <p:nvSpPr>
-          <p:cNvPr id="4" name="Slide Number Placeholder 3">
-            <a:extLst>
-              <a:ext uri="{FF2B5EF4-FFF2-40B4-BE49-F238E27FC236}">
-                <a16:creationId xmlns:a16="http://schemas.microsoft.com/office/drawing/2014/main" id="{84F17BEC-AB79-5B29-F611-73506680AA7C}"/>
-              </a:ext>
-            </a:extLst>
-          </p:cNvPr>
-          <p:cNvSpPr>
-            <a:spLocks noGrp="1"/>
-          </p:cNvSpPr>
-          <p:nvPr>
-            <p:ph type="sldNum" sz="quarter" idx="5"/>
-          </p:nvPr>
-        </p:nvSpPr>
-        <p:spPr/>
-        <p:txBody>
-          <a:bodyPr/>
-          <a:lstStyle/>
-          <a:p>
-            <a:fld id="{FF78EFD2-C9A0-A146-8CE9-0A2B7CC7B867}" type="slidenum">
-              <a:rPr lang="en-US" smtClean="0"/>
-              <a:t>28</a:t>
-            </a:fld>
-            <a:endParaRPr lang="en-US"/>
-          </a:p>
-        </p:txBody>
-      </p:sp>
-    </p:spTree>
-    <p:extLst>
-      <p:ext uri="{BB962C8B-B14F-4D97-AF65-F5344CB8AC3E}">
-        <p14:creationId xmlns:p14="http://schemas.microsoft.com/office/powerpoint/2010/main" val="1273647382"/>
-      </p:ext>
-    </p:extLst>
-  </p:cSld>
-  <p:clrMapOvr>
-    <a:masterClrMapping/>
-  </p:clrMapOvr>
-</p:notes>
-</file>
-
-<file path=ppt/notesSlides/notesSlide27.xml><?xml version="1.0" encoding="utf-8"?>
 <p:notes xmlns:a="http://schemas.openxmlformats.org/drawingml/2006/main" xmlns:r="http://schemas.openxmlformats.org/officeDocument/2006/relationships" xmlns:p="http://schemas.openxmlformats.org/presentationml/2006/main">
   <p:cSld>
     <p:spTree>
@@ -2629,7 +2150,7 @@
           <a:p>
             <a:fld id="{FF78EFD2-C9A0-A146-8CE9-0A2B7CC7B867}" type="slidenum">
               <a:rPr lang="en-US" smtClean="0"/>
-              <a:t>29</a:t>
+              <a:t>22</a:t>
             </a:fld>
             <a:endParaRPr lang="en-US"/>
           </a:p>
@@ -2648,7 +2169,7 @@
 </p:notes>
 </file>
 
-<file path=ppt/notesSlides/notesSlide28.xml><?xml version="1.0" encoding="utf-8"?>
+<file path=ppt/notesSlides/notesSlide23.xml><?xml version="1.0" encoding="utf-8"?>
 <p:notes xmlns:a="http://schemas.openxmlformats.org/drawingml/2006/main" xmlns:r="http://schemas.openxmlformats.org/officeDocument/2006/relationships" xmlns:p="http://schemas.openxmlformats.org/presentationml/2006/main">
   <p:cSld>
     <p:spTree>
@@ -2737,7 +2258,7 @@
           <a:p>
             <a:fld id="{FF78EFD2-C9A0-A146-8CE9-0A2B7CC7B867}" type="slidenum">
               <a:rPr lang="en-US" smtClean="0"/>
-              <a:t>30</a:t>
+              <a:t>23</a:t>
             </a:fld>
             <a:endParaRPr lang="en-US"/>
           </a:p>
@@ -2747,6 +2268,546 @@
     <p:extLst>
       <p:ext uri="{BB962C8B-B14F-4D97-AF65-F5344CB8AC3E}">
         <p14:creationId xmlns:p14="http://schemas.microsoft.com/office/powerpoint/2010/main" val="1635997544"/>
+      </p:ext>
+    </p:extLst>
+  </p:cSld>
+  <p:clrMapOvr>
+    <a:masterClrMapping/>
+  </p:clrMapOvr>
+</p:notes>
+</file>
+
+<file path=ppt/notesSlides/notesSlide24.xml><?xml version="1.0" encoding="utf-8"?>
+<p:notes xmlns:a="http://schemas.openxmlformats.org/drawingml/2006/main" xmlns:r="http://schemas.openxmlformats.org/officeDocument/2006/relationships" xmlns:p="http://schemas.openxmlformats.org/presentationml/2006/main">
+  <p:cSld>
+    <p:spTree>
+      <p:nvGrpSpPr>
+        <p:cNvPr id="1" name="">
+          <a:extLst>
+            <a:ext uri="{FF2B5EF4-FFF2-40B4-BE49-F238E27FC236}">
+              <a16:creationId xmlns:a16="http://schemas.microsoft.com/office/drawing/2014/main" id="{2262CA67-3AB4-FBB0-E2D7-32B7E8AEF0CF}"/>
+            </a:ext>
+          </a:extLst>
+        </p:cNvPr>
+        <p:cNvGrpSpPr/>
+        <p:nvPr/>
+      </p:nvGrpSpPr>
+      <p:grpSpPr>
+        <a:xfrm>
+          <a:off x="0" y="0"/>
+          <a:ext cx="0" cy="0"/>
+          <a:chOff x="0" y="0"/>
+          <a:chExt cx="0" cy="0"/>
+        </a:xfrm>
+      </p:grpSpPr>
+      <p:sp>
+        <p:nvSpPr>
+          <p:cNvPr id="2" name="Slide Image Placeholder 1">
+            <a:extLst>
+              <a:ext uri="{FF2B5EF4-FFF2-40B4-BE49-F238E27FC236}">
+                <a16:creationId xmlns:a16="http://schemas.microsoft.com/office/drawing/2014/main" id="{69BC4016-6E3D-53E9-1123-73C78B776EB7}"/>
+              </a:ext>
+            </a:extLst>
+          </p:cNvPr>
+          <p:cNvSpPr>
+            <a:spLocks noGrp="1" noRot="1" noChangeAspect="1"/>
+          </p:cNvSpPr>
+          <p:nvPr>
+            <p:ph type="sldImg"/>
+          </p:nvPr>
+        </p:nvSpPr>
+        <p:spPr/>
+      </p:sp>
+      <p:sp>
+        <p:nvSpPr>
+          <p:cNvPr id="3" name="Notes Placeholder 2">
+            <a:extLst>
+              <a:ext uri="{FF2B5EF4-FFF2-40B4-BE49-F238E27FC236}">
+                <a16:creationId xmlns:a16="http://schemas.microsoft.com/office/drawing/2014/main" id="{425E472F-081E-46C6-46AC-1A3ED8F97434}"/>
+              </a:ext>
+            </a:extLst>
+          </p:cNvPr>
+          <p:cNvSpPr>
+            <a:spLocks noGrp="1"/>
+          </p:cNvSpPr>
+          <p:nvPr>
+            <p:ph type="body" idx="1"/>
+          </p:nvPr>
+        </p:nvSpPr>
+        <p:spPr/>
+        <p:txBody>
+          <a:bodyPr/>
+          <a:lstStyle/>
+          <a:p>
+            <a:endParaRPr lang="en-US" dirty="0"/>
+          </a:p>
+        </p:txBody>
+      </p:sp>
+      <p:sp>
+        <p:nvSpPr>
+          <p:cNvPr id="4" name="Slide Number Placeholder 3">
+            <a:extLst>
+              <a:ext uri="{FF2B5EF4-FFF2-40B4-BE49-F238E27FC236}">
+                <a16:creationId xmlns:a16="http://schemas.microsoft.com/office/drawing/2014/main" id="{ED198EE8-9EBF-6D60-DD80-EF340BD2BDC3}"/>
+              </a:ext>
+            </a:extLst>
+          </p:cNvPr>
+          <p:cNvSpPr>
+            <a:spLocks noGrp="1"/>
+          </p:cNvSpPr>
+          <p:nvPr>
+            <p:ph type="sldNum" sz="quarter" idx="5"/>
+          </p:nvPr>
+        </p:nvSpPr>
+        <p:spPr/>
+        <p:txBody>
+          <a:bodyPr/>
+          <a:lstStyle/>
+          <a:p>
+            <a:fld id="{FF78EFD2-C9A0-A146-8CE9-0A2B7CC7B867}" type="slidenum">
+              <a:rPr lang="en-US" smtClean="0"/>
+              <a:t>24</a:t>
+            </a:fld>
+            <a:endParaRPr lang="en-US"/>
+          </a:p>
+        </p:txBody>
+      </p:sp>
+    </p:spTree>
+    <p:extLst>
+      <p:ext uri="{BB962C8B-B14F-4D97-AF65-F5344CB8AC3E}">
+        <p14:creationId xmlns:p14="http://schemas.microsoft.com/office/powerpoint/2010/main" val="2192137336"/>
+      </p:ext>
+    </p:extLst>
+  </p:cSld>
+  <p:clrMapOvr>
+    <a:masterClrMapping/>
+  </p:clrMapOvr>
+</p:notes>
+</file>
+
+<file path=ppt/notesSlides/notesSlide25.xml><?xml version="1.0" encoding="utf-8"?>
+<p:notes xmlns:a="http://schemas.openxmlformats.org/drawingml/2006/main" xmlns:r="http://schemas.openxmlformats.org/officeDocument/2006/relationships" xmlns:p="http://schemas.openxmlformats.org/presentationml/2006/main">
+  <p:cSld>
+    <p:spTree>
+      <p:nvGrpSpPr>
+        <p:cNvPr id="1" name="">
+          <a:extLst>
+            <a:ext uri="{FF2B5EF4-FFF2-40B4-BE49-F238E27FC236}">
+              <a16:creationId xmlns:a16="http://schemas.microsoft.com/office/drawing/2014/main" id="{F96DDB57-5698-2EB0-944F-9C2E9F30674C}"/>
+            </a:ext>
+          </a:extLst>
+        </p:cNvPr>
+        <p:cNvGrpSpPr/>
+        <p:nvPr/>
+      </p:nvGrpSpPr>
+      <p:grpSpPr>
+        <a:xfrm>
+          <a:off x="0" y="0"/>
+          <a:ext cx="0" cy="0"/>
+          <a:chOff x="0" y="0"/>
+          <a:chExt cx="0" cy="0"/>
+        </a:xfrm>
+      </p:grpSpPr>
+      <p:sp>
+        <p:nvSpPr>
+          <p:cNvPr id="2" name="Slide Image Placeholder 1">
+            <a:extLst>
+              <a:ext uri="{FF2B5EF4-FFF2-40B4-BE49-F238E27FC236}">
+                <a16:creationId xmlns:a16="http://schemas.microsoft.com/office/drawing/2014/main" id="{0BD3B962-9D68-91B8-AE53-052C3B188F42}"/>
+              </a:ext>
+            </a:extLst>
+          </p:cNvPr>
+          <p:cNvSpPr>
+            <a:spLocks noGrp="1" noRot="1" noChangeAspect="1"/>
+          </p:cNvSpPr>
+          <p:nvPr>
+            <p:ph type="sldImg"/>
+          </p:nvPr>
+        </p:nvSpPr>
+        <p:spPr/>
+      </p:sp>
+      <p:sp>
+        <p:nvSpPr>
+          <p:cNvPr id="3" name="Notes Placeholder 2">
+            <a:extLst>
+              <a:ext uri="{FF2B5EF4-FFF2-40B4-BE49-F238E27FC236}">
+                <a16:creationId xmlns:a16="http://schemas.microsoft.com/office/drawing/2014/main" id="{23A1C86C-7AAD-F570-6613-8F517BA115FE}"/>
+              </a:ext>
+            </a:extLst>
+          </p:cNvPr>
+          <p:cNvSpPr>
+            <a:spLocks noGrp="1"/>
+          </p:cNvSpPr>
+          <p:nvPr>
+            <p:ph type="body" idx="1"/>
+          </p:nvPr>
+        </p:nvSpPr>
+        <p:spPr/>
+        <p:txBody>
+          <a:bodyPr/>
+          <a:lstStyle/>
+          <a:p>
+            <a:endParaRPr lang="en-US" dirty="0"/>
+          </a:p>
+        </p:txBody>
+      </p:sp>
+      <p:sp>
+        <p:nvSpPr>
+          <p:cNvPr id="4" name="Slide Number Placeholder 3">
+            <a:extLst>
+              <a:ext uri="{FF2B5EF4-FFF2-40B4-BE49-F238E27FC236}">
+                <a16:creationId xmlns:a16="http://schemas.microsoft.com/office/drawing/2014/main" id="{EC260D48-45CA-076F-D379-6E5279A15570}"/>
+              </a:ext>
+            </a:extLst>
+          </p:cNvPr>
+          <p:cNvSpPr>
+            <a:spLocks noGrp="1"/>
+          </p:cNvSpPr>
+          <p:nvPr>
+            <p:ph type="sldNum" sz="quarter" idx="5"/>
+          </p:nvPr>
+        </p:nvSpPr>
+        <p:spPr/>
+        <p:txBody>
+          <a:bodyPr/>
+          <a:lstStyle/>
+          <a:p>
+            <a:fld id="{FF78EFD2-C9A0-A146-8CE9-0A2B7CC7B867}" type="slidenum">
+              <a:rPr lang="en-US" smtClean="0"/>
+              <a:t>25</a:t>
+            </a:fld>
+            <a:endParaRPr lang="en-US"/>
+          </a:p>
+        </p:txBody>
+      </p:sp>
+    </p:spTree>
+    <p:extLst>
+      <p:ext uri="{BB962C8B-B14F-4D97-AF65-F5344CB8AC3E}">
+        <p14:creationId xmlns:p14="http://schemas.microsoft.com/office/powerpoint/2010/main" val="2838015205"/>
+      </p:ext>
+    </p:extLst>
+  </p:cSld>
+  <p:clrMapOvr>
+    <a:masterClrMapping/>
+  </p:clrMapOvr>
+</p:notes>
+</file>
+
+<file path=ppt/notesSlides/notesSlide26.xml><?xml version="1.0" encoding="utf-8"?>
+<p:notes xmlns:a="http://schemas.openxmlformats.org/drawingml/2006/main" xmlns:r="http://schemas.openxmlformats.org/officeDocument/2006/relationships" xmlns:p="http://schemas.openxmlformats.org/presentationml/2006/main">
+  <p:cSld>
+    <p:spTree>
+      <p:nvGrpSpPr>
+        <p:cNvPr id="1" name="">
+          <a:extLst>
+            <a:ext uri="{FF2B5EF4-FFF2-40B4-BE49-F238E27FC236}">
+              <a16:creationId xmlns:a16="http://schemas.microsoft.com/office/drawing/2014/main" id="{B0465BE6-03C1-F652-2011-F427EEC5D4CC}"/>
+            </a:ext>
+          </a:extLst>
+        </p:cNvPr>
+        <p:cNvGrpSpPr/>
+        <p:nvPr/>
+      </p:nvGrpSpPr>
+      <p:grpSpPr>
+        <a:xfrm>
+          <a:off x="0" y="0"/>
+          <a:ext cx="0" cy="0"/>
+          <a:chOff x="0" y="0"/>
+          <a:chExt cx="0" cy="0"/>
+        </a:xfrm>
+      </p:grpSpPr>
+      <p:sp>
+        <p:nvSpPr>
+          <p:cNvPr id="2" name="Slide Image Placeholder 1">
+            <a:extLst>
+              <a:ext uri="{FF2B5EF4-FFF2-40B4-BE49-F238E27FC236}">
+                <a16:creationId xmlns:a16="http://schemas.microsoft.com/office/drawing/2014/main" id="{77BA6DEF-8493-D55A-E8B3-A1B4BA9BF81F}"/>
+              </a:ext>
+            </a:extLst>
+          </p:cNvPr>
+          <p:cNvSpPr>
+            <a:spLocks noGrp="1" noRot="1" noChangeAspect="1"/>
+          </p:cNvSpPr>
+          <p:nvPr>
+            <p:ph type="sldImg"/>
+          </p:nvPr>
+        </p:nvSpPr>
+        <p:spPr/>
+      </p:sp>
+      <p:sp>
+        <p:nvSpPr>
+          <p:cNvPr id="3" name="Notes Placeholder 2">
+            <a:extLst>
+              <a:ext uri="{FF2B5EF4-FFF2-40B4-BE49-F238E27FC236}">
+                <a16:creationId xmlns:a16="http://schemas.microsoft.com/office/drawing/2014/main" id="{56CB29B2-A15A-A728-BCB0-844EBB61A112}"/>
+              </a:ext>
+            </a:extLst>
+          </p:cNvPr>
+          <p:cNvSpPr>
+            <a:spLocks noGrp="1"/>
+          </p:cNvSpPr>
+          <p:nvPr>
+            <p:ph type="body" idx="1"/>
+          </p:nvPr>
+        </p:nvSpPr>
+        <p:spPr/>
+        <p:txBody>
+          <a:bodyPr/>
+          <a:lstStyle/>
+          <a:p>
+            <a:endParaRPr lang="en-US" dirty="0"/>
+          </a:p>
+        </p:txBody>
+      </p:sp>
+      <p:sp>
+        <p:nvSpPr>
+          <p:cNvPr id="4" name="Slide Number Placeholder 3">
+            <a:extLst>
+              <a:ext uri="{FF2B5EF4-FFF2-40B4-BE49-F238E27FC236}">
+                <a16:creationId xmlns:a16="http://schemas.microsoft.com/office/drawing/2014/main" id="{FC27B35E-1FEE-2C68-64F2-294A26988336}"/>
+              </a:ext>
+            </a:extLst>
+          </p:cNvPr>
+          <p:cNvSpPr>
+            <a:spLocks noGrp="1"/>
+          </p:cNvSpPr>
+          <p:nvPr>
+            <p:ph type="sldNum" sz="quarter" idx="5"/>
+          </p:nvPr>
+        </p:nvSpPr>
+        <p:spPr/>
+        <p:txBody>
+          <a:bodyPr/>
+          <a:lstStyle/>
+          <a:p>
+            <a:fld id="{FF78EFD2-C9A0-A146-8CE9-0A2B7CC7B867}" type="slidenum">
+              <a:rPr lang="en-US" smtClean="0"/>
+              <a:t>26</a:t>
+            </a:fld>
+            <a:endParaRPr lang="en-US"/>
+          </a:p>
+        </p:txBody>
+      </p:sp>
+    </p:spTree>
+    <p:extLst>
+      <p:ext uri="{BB962C8B-B14F-4D97-AF65-F5344CB8AC3E}">
+        <p14:creationId xmlns:p14="http://schemas.microsoft.com/office/powerpoint/2010/main" val="2075489549"/>
+      </p:ext>
+    </p:extLst>
+  </p:cSld>
+  <p:clrMapOvr>
+    <a:masterClrMapping/>
+  </p:clrMapOvr>
+</p:notes>
+</file>
+
+<file path=ppt/notesSlides/notesSlide27.xml><?xml version="1.0" encoding="utf-8"?>
+<p:notes xmlns:a="http://schemas.openxmlformats.org/drawingml/2006/main" xmlns:r="http://schemas.openxmlformats.org/officeDocument/2006/relationships" xmlns:p="http://schemas.openxmlformats.org/presentationml/2006/main">
+  <p:cSld>
+    <p:spTree>
+      <p:nvGrpSpPr>
+        <p:cNvPr id="1" name="">
+          <a:extLst>
+            <a:ext uri="{FF2B5EF4-FFF2-40B4-BE49-F238E27FC236}">
+              <a16:creationId xmlns:a16="http://schemas.microsoft.com/office/drawing/2014/main" id="{44030876-8145-A546-ADB6-0A2B98CF597B}"/>
+            </a:ext>
+          </a:extLst>
+        </p:cNvPr>
+        <p:cNvGrpSpPr/>
+        <p:nvPr/>
+      </p:nvGrpSpPr>
+      <p:grpSpPr>
+        <a:xfrm>
+          <a:off x="0" y="0"/>
+          <a:ext cx="0" cy="0"/>
+          <a:chOff x="0" y="0"/>
+          <a:chExt cx="0" cy="0"/>
+        </a:xfrm>
+      </p:grpSpPr>
+      <p:sp>
+        <p:nvSpPr>
+          <p:cNvPr id="2" name="Slide Image Placeholder 1">
+            <a:extLst>
+              <a:ext uri="{FF2B5EF4-FFF2-40B4-BE49-F238E27FC236}">
+                <a16:creationId xmlns:a16="http://schemas.microsoft.com/office/drawing/2014/main" id="{A9E795B4-E898-EE1D-98DD-68E07CA4E65D}"/>
+              </a:ext>
+            </a:extLst>
+          </p:cNvPr>
+          <p:cNvSpPr>
+            <a:spLocks noGrp="1" noRot="1" noChangeAspect="1"/>
+          </p:cNvSpPr>
+          <p:nvPr>
+            <p:ph type="sldImg"/>
+          </p:nvPr>
+        </p:nvSpPr>
+        <p:spPr/>
+      </p:sp>
+      <p:sp>
+        <p:nvSpPr>
+          <p:cNvPr id="3" name="Notes Placeholder 2">
+            <a:extLst>
+              <a:ext uri="{FF2B5EF4-FFF2-40B4-BE49-F238E27FC236}">
+                <a16:creationId xmlns:a16="http://schemas.microsoft.com/office/drawing/2014/main" id="{04896E44-CBA6-6AB8-864A-FFE280542298}"/>
+              </a:ext>
+            </a:extLst>
+          </p:cNvPr>
+          <p:cNvSpPr>
+            <a:spLocks noGrp="1"/>
+          </p:cNvSpPr>
+          <p:nvPr>
+            <p:ph type="body" idx="1"/>
+          </p:nvPr>
+        </p:nvSpPr>
+        <p:spPr/>
+        <p:txBody>
+          <a:bodyPr/>
+          <a:lstStyle/>
+          <a:p>
+            <a:endParaRPr lang="en-US" dirty="0"/>
+          </a:p>
+        </p:txBody>
+      </p:sp>
+      <p:sp>
+        <p:nvSpPr>
+          <p:cNvPr id="4" name="Slide Number Placeholder 3">
+            <a:extLst>
+              <a:ext uri="{FF2B5EF4-FFF2-40B4-BE49-F238E27FC236}">
+                <a16:creationId xmlns:a16="http://schemas.microsoft.com/office/drawing/2014/main" id="{5F5E707C-C2DF-1F33-763A-B5213E26FBBD}"/>
+              </a:ext>
+            </a:extLst>
+          </p:cNvPr>
+          <p:cNvSpPr>
+            <a:spLocks noGrp="1"/>
+          </p:cNvSpPr>
+          <p:nvPr>
+            <p:ph type="sldNum" sz="quarter" idx="5"/>
+          </p:nvPr>
+        </p:nvSpPr>
+        <p:spPr/>
+        <p:txBody>
+          <a:bodyPr/>
+          <a:lstStyle/>
+          <a:p>
+            <a:fld id="{FF78EFD2-C9A0-A146-8CE9-0A2B7CC7B867}" type="slidenum">
+              <a:rPr lang="en-US" smtClean="0"/>
+              <a:t>27</a:t>
+            </a:fld>
+            <a:endParaRPr lang="en-US"/>
+          </a:p>
+        </p:txBody>
+      </p:sp>
+    </p:spTree>
+    <p:extLst>
+      <p:ext uri="{BB962C8B-B14F-4D97-AF65-F5344CB8AC3E}">
+        <p14:creationId xmlns:p14="http://schemas.microsoft.com/office/powerpoint/2010/main" val="1647986956"/>
+      </p:ext>
+    </p:extLst>
+  </p:cSld>
+  <p:clrMapOvr>
+    <a:masterClrMapping/>
+  </p:clrMapOvr>
+</p:notes>
+</file>
+
+<file path=ppt/notesSlides/notesSlide28.xml><?xml version="1.0" encoding="utf-8"?>
+<p:notes xmlns:a="http://schemas.openxmlformats.org/drawingml/2006/main" xmlns:r="http://schemas.openxmlformats.org/officeDocument/2006/relationships" xmlns:p="http://schemas.openxmlformats.org/presentationml/2006/main">
+  <p:cSld>
+    <p:spTree>
+      <p:nvGrpSpPr>
+        <p:cNvPr id="1" name="">
+          <a:extLst>
+            <a:ext uri="{FF2B5EF4-FFF2-40B4-BE49-F238E27FC236}">
+              <a16:creationId xmlns:a16="http://schemas.microsoft.com/office/drawing/2014/main" id="{F6B4059A-51D7-D829-2D81-3F53E85ACCC5}"/>
+            </a:ext>
+          </a:extLst>
+        </p:cNvPr>
+        <p:cNvGrpSpPr/>
+        <p:nvPr/>
+      </p:nvGrpSpPr>
+      <p:grpSpPr>
+        <a:xfrm>
+          <a:off x="0" y="0"/>
+          <a:ext cx="0" cy="0"/>
+          <a:chOff x="0" y="0"/>
+          <a:chExt cx="0" cy="0"/>
+        </a:xfrm>
+      </p:grpSpPr>
+      <p:sp>
+        <p:nvSpPr>
+          <p:cNvPr id="2" name="Slide Image Placeholder 1">
+            <a:extLst>
+              <a:ext uri="{FF2B5EF4-FFF2-40B4-BE49-F238E27FC236}">
+                <a16:creationId xmlns:a16="http://schemas.microsoft.com/office/drawing/2014/main" id="{160C34A1-B6AF-41FC-BA68-43430D278A56}"/>
+              </a:ext>
+            </a:extLst>
+          </p:cNvPr>
+          <p:cNvSpPr>
+            <a:spLocks noGrp="1" noRot="1" noChangeAspect="1"/>
+          </p:cNvSpPr>
+          <p:nvPr>
+            <p:ph type="sldImg"/>
+          </p:nvPr>
+        </p:nvSpPr>
+        <p:spPr/>
+      </p:sp>
+      <p:sp>
+        <p:nvSpPr>
+          <p:cNvPr id="3" name="Notes Placeholder 2">
+            <a:extLst>
+              <a:ext uri="{FF2B5EF4-FFF2-40B4-BE49-F238E27FC236}">
+                <a16:creationId xmlns:a16="http://schemas.microsoft.com/office/drawing/2014/main" id="{AF1A2D59-F955-0BF8-717A-5509EAC43B4F}"/>
+              </a:ext>
+            </a:extLst>
+          </p:cNvPr>
+          <p:cNvSpPr>
+            <a:spLocks noGrp="1"/>
+          </p:cNvSpPr>
+          <p:nvPr>
+            <p:ph type="body" idx="1"/>
+          </p:nvPr>
+        </p:nvSpPr>
+        <p:spPr/>
+        <p:txBody>
+          <a:bodyPr/>
+          <a:lstStyle/>
+          <a:p>
+            <a:endParaRPr lang="en-US" dirty="0"/>
+          </a:p>
+        </p:txBody>
+      </p:sp>
+      <p:sp>
+        <p:nvSpPr>
+          <p:cNvPr id="4" name="Slide Number Placeholder 3">
+            <a:extLst>
+              <a:ext uri="{FF2B5EF4-FFF2-40B4-BE49-F238E27FC236}">
+                <a16:creationId xmlns:a16="http://schemas.microsoft.com/office/drawing/2014/main" id="{2F98257A-360B-ED00-664E-4FDD4E215425}"/>
+              </a:ext>
+            </a:extLst>
+          </p:cNvPr>
+          <p:cNvSpPr>
+            <a:spLocks noGrp="1"/>
+          </p:cNvSpPr>
+          <p:nvPr>
+            <p:ph type="sldNum" sz="quarter" idx="5"/>
+          </p:nvPr>
+        </p:nvSpPr>
+        <p:spPr/>
+        <p:txBody>
+          <a:bodyPr/>
+          <a:lstStyle/>
+          <a:p>
+            <a:fld id="{FF78EFD2-C9A0-A146-8CE9-0A2B7CC7B867}" type="slidenum">
+              <a:rPr lang="en-US" smtClean="0"/>
+              <a:t>28</a:t>
+            </a:fld>
+            <a:endParaRPr lang="en-US"/>
+          </a:p>
+        </p:txBody>
+      </p:sp>
+    </p:spTree>
+    <p:extLst>
+      <p:ext uri="{BB962C8B-B14F-4D97-AF65-F5344CB8AC3E}">
+        <p14:creationId xmlns:p14="http://schemas.microsoft.com/office/powerpoint/2010/main" val="3999923027"/>
       </p:ext>
     </p:extLst>
   </p:cSld>
@@ -2764,7 +2825,7 @@
         <p:cNvPr id="1" name="">
           <a:extLst>
             <a:ext uri="{FF2B5EF4-FFF2-40B4-BE49-F238E27FC236}">
-              <a16:creationId xmlns:a16="http://schemas.microsoft.com/office/drawing/2014/main" id="{446F8929-7A42-7C96-C5BD-34037A02DB15}"/>
+              <a16:creationId xmlns:a16="http://schemas.microsoft.com/office/drawing/2014/main" id="{4ADC7844-1F54-6B17-BD85-AEFB2F8C49DB}"/>
             </a:ext>
           </a:extLst>
         </p:cNvPr>
@@ -2784,7 +2845,7 @@
           <p:cNvPr id="2" name="Slide Image Placeholder 1">
             <a:extLst>
               <a:ext uri="{FF2B5EF4-FFF2-40B4-BE49-F238E27FC236}">
-                <a16:creationId xmlns:a16="http://schemas.microsoft.com/office/drawing/2014/main" id="{343FFA9F-E92B-F20F-F04A-438E61FD2244}"/>
+                <a16:creationId xmlns:a16="http://schemas.microsoft.com/office/drawing/2014/main" id="{47131CC6-0373-6CFD-EDEC-697757F6A57D}"/>
               </a:ext>
             </a:extLst>
           </p:cNvPr>
@@ -2802,7 +2863,7 @@
           <p:cNvPr id="3" name="Notes Placeholder 2">
             <a:extLst>
               <a:ext uri="{FF2B5EF4-FFF2-40B4-BE49-F238E27FC236}">
-                <a16:creationId xmlns:a16="http://schemas.microsoft.com/office/drawing/2014/main" id="{D5643895-826A-353E-7103-DC747F7AD020}"/>
+                <a16:creationId xmlns:a16="http://schemas.microsoft.com/office/drawing/2014/main" id="{A103FAEB-C114-F0DE-F882-C4B9879650DF}"/>
               </a:ext>
             </a:extLst>
           </p:cNvPr>
@@ -2818,6 +2879,29 @@
           <a:bodyPr/>
           <a:lstStyle/>
           <a:p>
+            <a:pPr marL="0" marR="0" lvl="0" indent="0" algn="l" defTabSz="914400" rtl="0" eaLnBrk="1" fontAlgn="auto" latinLnBrk="0" hangingPunct="1">
+              <a:lnSpc>
+                <a:spcPct val="100000"/>
+              </a:lnSpc>
+              <a:spcBef>
+                <a:spcPts val="0"/>
+              </a:spcBef>
+              <a:spcAft>
+                <a:spcPts val="0"/>
+              </a:spcAft>
+              <a:buClrTx/>
+              <a:buSzTx/>
+              <a:buFontTx/>
+              <a:buNone/>
+              <a:tabLst/>
+              <a:defRPr/>
+            </a:pPr>
+            <a:r>
+              <a:rPr lang="en-US" dirty="0"/>
+              <a:t>In research, APIs can help us collect structured data from platforms, databases, or services.</a:t>
+            </a:r>
+          </a:p>
+          <a:p>
             <a:endParaRPr lang="en-US" dirty="0"/>
           </a:p>
         </p:txBody>
@@ -2827,7 +2911,7 @@
           <p:cNvPr id="4" name="Slide Number Placeholder 3">
             <a:extLst>
               <a:ext uri="{FF2B5EF4-FFF2-40B4-BE49-F238E27FC236}">
-                <a16:creationId xmlns:a16="http://schemas.microsoft.com/office/drawing/2014/main" id="{98F2DC81-BD6E-FDB7-CD22-5F7ED7338375}"/>
+                <a16:creationId xmlns:a16="http://schemas.microsoft.com/office/drawing/2014/main" id="{5C62715C-307F-44B9-7AAB-1A31649FFD12}"/>
               </a:ext>
             </a:extLst>
           </p:cNvPr>
@@ -2845,7 +2929,7 @@
           <a:p>
             <a:fld id="{FF78EFD2-C9A0-A146-8CE9-0A2B7CC7B867}" type="slidenum">
               <a:rPr lang="en-US" smtClean="0"/>
-              <a:t>31</a:t>
+              <a:t>29</a:t>
             </a:fld>
             <a:endParaRPr lang="en-US"/>
           </a:p>
@@ -2854,7 +2938,7 @@
     </p:spTree>
     <p:extLst>
       <p:ext uri="{BB962C8B-B14F-4D97-AF65-F5344CB8AC3E}">
-        <p14:creationId xmlns:p14="http://schemas.microsoft.com/office/powerpoint/2010/main" val="3535309460"/>
+        <p14:creationId xmlns:p14="http://schemas.microsoft.com/office/powerpoint/2010/main" val="3270840237"/>
       </p:ext>
     </p:extLst>
   </p:cSld>
@@ -2980,7 +3064,7 @@
         <p:cNvPr id="1" name="">
           <a:extLst>
             <a:ext uri="{FF2B5EF4-FFF2-40B4-BE49-F238E27FC236}">
-              <a16:creationId xmlns:a16="http://schemas.microsoft.com/office/drawing/2014/main" id="{2262CA67-3AB4-FBB0-E2D7-32B7E8AEF0CF}"/>
+              <a16:creationId xmlns:a16="http://schemas.microsoft.com/office/drawing/2014/main" id="{0622ED16-FBE9-20D7-BB46-76C1843FD729}"/>
             </a:ext>
           </a:extLst>
         </p:cNvPr>
@@ -3000,7 +3084,7 @@
           <p:cNvPr id="2" name="Slide Image Placeholder 1">
             <a:extLst>
               <a:ext uri="{FF2B5EF4-FFF2-40B4-BE49-F238E27FC236}">
-                <a16:creationId xmlns:a16="http://schemas.microsoft.com/office/drawing/2014/main" id="{69BC4016-6E3D-53E9-1123-73C78B776EB7}"/>
+                <a16:creationId xmlns:a16="http://schemas.microsoft.com/office/drawing/2014/main" id="{281ECAF1-1509-7F11-DDFE-83E267EE6CC6}"/>
               </a:ext>
             </a:extLst>
           </p:cNvPr>
@@ -3018,7 +3102,7 @@
           <p:cNvPr id="3" name="Notes Placeholder 2">
             <a:extLst>
               <a:ext uri="{FF2B5EF4-FFF2-40B4-BE49-F238E27FC236}">
-                <a16:creationId xmlns:a16="http://schemas.microsoft.com/office/drawing/2014/main" id="{425E472F-081E-46C6-46AC-1A3ED8F97434}"/>
+                <a16:creationId xmlns:a16="http://schemas.microsoft.com/office/drawing/2014/main" id="{3E41390C-F971-DAE8-8544-B46F6020D865}"/>
               </a:ext>
             </a:extLst>
           </p:cNvPr>
@@ -3034,6 +3118,180 @@
           <a:bodyPr/>
           <a:lstStyle/>
           <a:p>
+            <a:pPr rtl="0" fontAlgn="base"/>
+            <a:r>
+              <a:rPr lang="en-US" sz="1200" b="0" i="0" u="none" strike="noStrike" kern="1200" dirty="0">
+                <a:solidFill>
+                  <a:schemeClr val="tx1"/>
+                </a:solidFill>
+                <a:effectLst/>
+                <a:latin typeface="+mn-lt"/>
+                <a:ea typeface="+mn-ea"/>
+                <a:cs typeface="+mn-cs"/>
+              </a:rPr>
+              <a:t>Images taken from: https://</a:t>
+            </a:r>
+            <a:r>
+              <a:rPr lang="en-US" sz="1200" b="0" i="0" u="none" strike="noStrike" kern="1200" dirty="0" err="1">
+                <a:solidFill>
+                  <a:schemeClr val="tx1"/>
+                </a:solidFill>
+                <a:effectLst/>
+                <a:latin typeface="+mn-lt"/>
+                <a:ea typeface="+mn-ea"/>
+                <a:cs typeface="+mn-cs"/>
+              </a:rPr>
+              <a:t>www.geeksforgeeks.org</a:t>
+            </a:r>
+            <a:r>
+              <a:rPr lang="en-US" sz="1200" b="0" i="0" u="none" strike="noStrike" kern="1200" dirty="0">
+                <a:solidFill>
+                  <a:schemeClr val="tx1"/>
+                </a:solidFill>
+                <a:effectLst/>
+                <a:latin typeface="+mn-lt"/>
+                <a:ea typeface="+mn-ea"/>
+                <a:cs typeface="+mn-cs"/>
+              </a:rPr>
+              <a:t>/software-testing/what-is-an-</a:t>
+            </a:r>
+            <a:r>
+              <a:rPr lang="en-US" sz="1200" b="0" i="0" u="none" strike="noStrike" kern="1200" dirty="0" err="1">
+                <a:solidFill>
+                  <a:schemeClr val="tx1"/>
+                </a:solidFill>
+                <a:effectLst/>
+                <a:latin typeface="+mn-lt"/>
+                <a:ea typeface="+mn-ea"/>
+                <a:cs typeface="+mn-cs"/>
+              </a:rPr>
+              <a:t>api</a:t>
+            </a:r>
+            <a:r>
+              <a:rPr lang="en-US" sz="1200" b="0" i="0" u="none" strike="noStrike" kern="1200" dirty="0">
+                <a:solidFill>
+                  <a:schemeClr val="tx1"/>
+                </a:solidFill>
+                <a:effectLst/>
+                <a:latin typeface="+mn-lt"/>
+                <a:ea typeface="+mn-ea"/>
+                <a:cs typeface="+mn-cs"/>
+              </a:rPr>
+              <a:t>/</a:t>
+            </a:r>
+          </a:p>
+          <a:p>
+            <a:pPr rtl="0" fontAlgn="base"/>
+            <a:endParaRPr lang="en-US" sz="1200" b="0" i="0" u="none" strike="noStrike" kern="1200" dirty="0">
+              <a:solidFill>
+                <a:schemeClr val="tx1"/>
+              </a:solidFill>
+              <a:effectLst/>
+              <a:latin typeface="+mn-lt"/>
+              <a:ea typeface="+mn-ea"/>
+              <a:cs typeface="+mn-cs"/>
+            </a:endParaRPr>
+          </a:p>
+          <a:p>
+            <a:pPr rtl="0" fontAlgn="base"/>
+            <a:endParaRPr lang="en-US" sz="1200" b="0" i="0" u="none" strike="noStrike" kern="1200" dirty="0">
+              <a:solidFill>
+                <a:schemeClr val="tx1"/>
+              </a:solidFill>
+              <a:effectLst/>
+              <a:latin typeface="+mn-lt"/>
+              <a:ea typeface="+mn-ea"/>
+              <a:cs typeface="+mn-cs"/>
+            </a:endParaRPr>
+          </a:p>
+          <a:p>
+            <a:pPr rtl="0" fontAlgn="base"/>
+            <a:endParaRPr lang="en-US" sz="1200" b="0" i="0" u="none" strike="noStrike" kern="1200" dirty="0">
+              <a:solidFill>
+                <a:schemeClr val="tx1"/>
+              </a:solidFill>
+              <a:effectLst/>
+              <a:latin typeface="+mn-lt"/>
+              <a:ea typeface="+mn-ea"/>
+              <a:cs typeface="+mn-cs"/>
+            </a:endParaRPr>
+          </a:p>
+          <a:p>
+            <a:pPr rtl="0" fontAlgn="base"/>
+            <a:r>
+              <a:rPr lang="en-US" sz="1200" b="0" i="0" u="none" strike="noStrike" kern="1200" dirty="0">
+                <a:solidFill>
+                  <a:schemeClr val="tx1"/>
+                </a:solidFill>
+                <a:effectLst/>
+                <a:latin typeface="+mn-lt"/>
+                <a:ea typeface="+mn-ea"/>
+                <a:cs typeface="+mn-cs"/>
+              </a:rPr>
+              <a:t>Imagine you’re at a restaurant:</a:t>
+            </a:r>
+          </a:p>
+          <a:p>
+            <a:pPr fontAlgn="base"/>
+            <a:r>
+              <a:rPr lang="en-US" sz="1200" b="0" i="0" u="none" strike="noStrike" kern="1200" dirty="0">
+                <a:solidFill>
+                  <a:schemeClr val="tx1"/>
+                </a:solidFill>
+                <a:effectLst/>
+                <a:latin typeface="+mn-lt"/>
+                <a:ea typeface="+mn-ea"/>
+                <a:cs typeface="+mn-cs"/>
+              </a:rPr>
+              <a:t>You (the client) place an order with the waiter.</a:t>
+            </a:r>
+          </a:p>
+          <a:p>
+            <a:pPr fontAlgn="base"/>
+            <a:r>
+              <a:rPr lang="en-US" sz="1200" b="0" i="0" u="none" strike="noStrike" kern="1200" dirty="0">
+                <a:solidFill>
+                  <a:schemeClr val="tx1"/>
+                </a:solidFill>
+                <a:effectLst/>
+                <a:latin typeface="+mn-lt"/>
+                <a:ea typeface="+mn-ea"/>
+                <a:cs typeface="+mn-cs"/>
+              </a:rPr>
+              <a:t>The waiter (the API) conveys your request to the chef (the server).</a:t>
+            </a:r>
+          </a:p>
+          <a:p>
+            <a:pPr fontAlgn="base"/>
+            <a:r>
+              <a:rPr lang="en-US" sz="1200" b="0" i="0" u="none" strike="noStrike" kern="1200" dirty="0">
+                <a:solidFill>
+                  <a:schemeClr val="tx1"/>
+                </a:solidFill>
+                <a:effectLst/>
+                <a:latin typeface="+mn-lt"/>
+                <a:ea typeface="+mn-ea"/>
+                <a:cs typeface="+mn-cs"/>
+              </a:rPr>
+              <a:t>The chef prepares the food (processes the request) and gives it to the waiter.</a:t>
+            </a:r>
+          </a:p>
+          <a:p>
+            <a:pPr fontAlgn="base"/>
+            <a:r>
+              <a:rPr lang="en-US" sz="1200" b="0" i="0" u="none" strike="noStrike" kern="1200" dirty="0">
+                <a:solidFill>
+                  <a:schemeClr val="tx1"/>
+                </a:solidFill>
+                <a:effectLst/>
+                <a:latin typeface="+mn-lt"/>
+                <a:ea typeface="+mn-ea"/>
+                <a:cs typeface="+mn-cs"/>
+              </a:rPr>
+              <a:t>The waiter delivers it back to your table (response).</a:t>
+            </a:r>
+          </a:p>
+          <a:p>
             <a:endParaRPr lang="en-US" dirty="0"/>
           </a:p>
         </p:txBody>
@@ -3043,7 +3301,7 @@
           <p:cNvPr id="4" name="Slide Number Placeholder 3">
             <a:extLst>
               <a:ext uri="{FF2B5EF4-FFF2-40B4-BE49-F238E27FC236}">
-                <a16:creationId xmlns:a16="http://schemas.microsoft.com/office/drawing/2014/main" id="{ED198EE8-9EBF-6D60-DD80-EF340BD2BDC3}"/>
+                <a16:creationId xmlns:a16="http://schemas.microsoft.com/office/drawing/2014/main" id="{D17C6DFD-53E9-3741-10AE-DFFB7B896666}"/>
               </a:ext>
             </a:extLst>
           </p:cNvPr>
@@ -3061,7 +3319,7 @@
           <a:p>
             <a:fld id="{FF78EFD2-C9A0-A146-8CE9-0A2B7CC7B867}" type="slidenum">
               <a:rPr lang="en-US" smtClean="0"/>
-              <a:t>32</a:t>
+              <a:t>30</a:t>
             </a:fld>
             <a:endParaRPr lang="en-US"/>
           </a:p>
@@ -3070,7 +3328,7 @@
     </p:spTree>
     <p:extLst>
       <p:ext uri="{BB962C8B-B14F-4D97-AF65-F5344CB8AC3E}">
-        <p14:creationId xmlns:p14="http://schemas.microsoft.com/office/powerpoint/2010/main" val="2192137336"/>
+        <p14:creationId xmlns:p14="http://schemas.microsoft.com/office/powerpoint/2010/main" val="3341870626"/>
       </p:ext>
     </p:extLst>
   </p:cSld>
@@ -3088,7 +3346,7 @@
         <p:cNvPr id="1" name="">
           <a:extLst>
             <a:ext uri="{FF2B5EF4-FFF2-40B4-BE49-F238E27FC236}">
-              <a16:creationId xmlns:a16="http://schemas.microsoft.com/office/drawing/2014/main" id="{F96DDB57-5698-2EB0-944F-9C2E9F30674C}"/>
+              <a16:creationId xmlns:a16="http://schemas.microsoft.com/office/drawing/2014/main" id="{14E9B45F-1925-C993-4D16-2EDD49557B8A}"/>
             </a:ext>
           </a:extLst>
         </p:cNvPr>
@@ -3108,7 +3366,7 @@
           <p:cNvPr id="2" name="Slide Image Placeholder 1">
             <a:extLst>
               <a:ext uri="{FF2B5EF4-FFF2-40B4-BE49-F238E27FC236}">
-                <a16:creationId xmlns:a16="http://schemas.microsoft.com/office/drawing/2014/main" id="{0BD3B962-9D68-91B8-AE53-052C3B188F42}"/>
+                <a16:creationId xmlns:a16="http://schemas.microsoft.com/office/drawing/2014/main" id="{C49CA2D9-9456-F7EC-8DC1-C8F665EFD72C}"/>
               </a:ext>
             </a:extLst>
           </p:cNvPr>
@@ -3126,7 +3384,7 @@
           <p:cNvPr id="3" name="Notes Placeholder 2">
             <a:extLst>
               <a:ext uri="{FF2B5EF4-FFF2-40B4-BE49-F238E27FC236}">
-                <a16:creationId xmlns:a16="http://schemas.microsoft.com/office/drawing/2014/main" id="{23A1C86C-7AAD-F570-6613-8F517BA115FE}"/>
+                <a16:creationId xmlns:a16="http://schemas.microsoft.com/office/drawing/2014/main" id="{0C9EACDC-32C1-C9B0-6E22-4ECA6772DB85}"/>
               </a:ext>
             </a:extLst>
           </p:cNvPr>
@@ -3151,7 +3409,7 @@
           <p:cNvPr id="4" name="Slide Number Placeholder 3">
             <a:extLst>
               <a:ext uri="{FF2B5EF4-FFF2-40B4-BE49-F238E27FC236}">
-                <a16:creationId xmlns:a16="http://schemas.microsoft.com/office/drawing/2014/main" id="{EC260D48-45CA-076F-D379-6E5279A15570}"/>
+                <a16:creationId xmlns:a16="http://schemas.microsoft.com/office/drawing/2014/main" id="{B076A8F6-FBFE-C7A4-1FE6-3C975A358E90}"/>
               </a:ext>
             </a:extLst>
           </p:cNvPr>
@@ -3169,7 +3427,7 @@
           <a:p>
             <a:fld id="{FF78EFD2-C9A0-A146-8CE9-0A2B7CC7B867}" type="slidenum">
               <a:rPr lang="en-US" smtClean="0"/>
-              <a:t>33</a:t>
+              <a:t>31</a:t>
             </a:fld>
             <a:endParaRPr lang="en-US"/>
           </a:p>
@@ -3178,7 +3436,7 @@
     </p:spTree>
     <p:extLst>
       <p:ext uri="{BB962C8B-B14F-4D97-AF65-F5344CB8AC3E}">
-        <p14:creationId xmlns:p14="http://schemas.microsoft.com/office/powerpoint/2010/main" val="2838015205"/>
+        <p14:creationId xmlns:p14="http://schemas.microsoft.com/office/powerpoint/2010/main" val="1888415515"/>
       </p:ext>
     </p:extLst>
   </p:cSld>
@@ -3196,7 +3454,7 @@
         <p:cNvPr id="1" name="">
           <a:extLst>
             <a:ext uri="{FF2B5EF4-FFF2-40B4-BE49-F238E27FC236}">
-              <a16:creationId xmlns:a16="http://schemas.microsoft.com/office/drawing/2014/main" id="{B0465BE6-03C1-F652-2011-F427EEC5D4CC}"/>
+              <a16:creationId xmlns:a16="http://schemas.microsoft.com/office/drawing/2014/main" id="{8276AB12-E4BE-2895-5942-8EB3594FC13C}"/>
             </a:ext>
           </a:extLst>
         </p:cNvPr>
@@ -3216,7 +3474,7 @@
           <p:cNvPr id="2" name="Slide Image Placeholder 1">
             <a:extLst>
               <a:ext uri="{FF2B5EF4-FFF2-40B4-BE49-F238E27FC236}">
-                <a16:creationId xmlns:a16="http://schemas.microsoft.com/office/drawing/2014/main" id="{77BA6DEF-8493-D55A-E8B3-A1B4BA9BF81F}"/>
+                <a16:creationId xmlns:a16="http://schemas.microsoft.com/office/drawing/2014/main" id="{6E17AFE7-48E9-FF99-5E65-E91DF6095D03}"/>
               </a:ext>
             </a:extLst>
           </p:cNvPr>
@@ -3234,7 +3492,7 @@
           <p:cNvPr id="3" name="Notes Placeholder 2">
             <a:extLst>
               <a:ext uri="{FF2B5EF4-FFF2-40B4-BE49-F238E27FC236}">
-                <a16:creationId xmlns:a16="http://schemas.microsoft.com/office/drawing/2014/main" id="{56CB29B2-A15A-A728-BCB0-844EBB61A112}"/>
+                <a16:creationId xmlns:a16="http://schemas.microsoft.com/office/drawing/2014/main" id="{BBFE2B31-C66D-6B10-48B6-0240355441A5}"/>
               </a:ext>
             </a:extLst>
           </p:cNvPr>
@@ -3259,7 +3517,7 @@
           <p:cNvPr id="4" name="Slide Number Placeholder 3">
             <a:extLst>
               <a:ext uri="{FF2B5EF4-FFF2-40B4-BE49-F238E27FC236}">
-                <a16:creationId xmlns:a16="http://schemas.microsoft.com/office/drawing/2014/main" id="{FC27B35E-1FEE-2C68-64F2-294A26988336}"/>
+                <a16:creationId xmlns:a16="http://schemas.microsoft.com/office/drawing/2014/main" id="{3D606F75-A8C9-FA91-51FD-42BB66D7058F}"/>
               </a:ext>
             </a:extLst>
           </p:cNvPr>
@@ -3277,7 +3535,7 @@
           <a:p>
             <a:fld id="{FF78EFD2-C9A0-A146-8CE9-0A2B7CC7B867}" type="slidenum">
               <a:rPr lang="en-US" smtClean="0"/>
-              <a:t>34</a:t>
+              <a:t>32</a:t>
             </a:fld>
             <a:endParaRPr lang="en-US"/>
           </a:p>
@@ -3286,7 +3544,7 @@
     </p:spTree>
     <p:extLst>
       <p:ext uri="{BB962C8B-B14F-4D97-AF65-F5344CB8AC3E}">
-        <p14:creationId xmlns:p14="http://schemas.microsoft.com/office/powerpoint/2010/main" val="2075489549"/>
+        <p14:creationId xmlns:p14="http://schemas.microsoft.com/office/powerpoint/2010/main" val="1675293660"/>
       </p:ext>
     </p:extLst>
   </p:cSld>
@@ -3301,13 +3559,7 @@
   <p:cSld>
     <p:spTree>
       <p:nvGrpSpPr>
-        <p:cNvPr id="1" name="">
-          <a:extLst>
-            <a:ext uri="{FF2B5EF4-FFF2-40B4-BE49-F238E27FC236}">
-              <a16:creationId xmlns:a16="http://schemas.microsoft.com/office/drawing/2014/main" id="{44030876-8145-A546-ADB6-0A2B98CF597B}"/>
-            </a:ext>
-          </a:extLst>
-        </p:cNvPr>
+        <p:cNvPr id="1" name=""/>
         <p:cNvGrpSpPr/>
         <p:nvPr/>
       </p:nvGrpSpPr>
@@ -3321,13 +3573,7 @@
       </p:grpSpPr>
       <p:sp>
         <p:nvSpPr>
-          <p:cNvPr id="2" name="Slide Image Placeholder 1">
-            <a:extLst>
-              <a:ext uri="{FF2B5EF4-FFF2-40B4-BE49-F238E27FC236}">
-                <a16:creationId xmlns:a16="http://schemas.microsoft.com/office/drawing/2014/main" id="{A9E795B4-E898-EE1D-98DD-68E07CA4E65D}"/>
-              </a:ext>
-            </a:extLst>
-          </p:cNvPr>
+          <p:cNvPr id="2" name="Slide Image Placeholder 1"/>
           <p:cNvSpPr>
             <a:spLocks noGrp="1" noRot="1" noChangeAspect="1"/>
           </p:cNvSpPr>
@@ -3339,13 +3585,7 @@
       </p:sp>
       <p:sp>
         <p:nvSpPr>
-          <p:cNvPr id="3" name="Notes Placeholder 2">
-            <a:extLst>
-              <a:ext uri="{FF2B5EF4-FFF2-40B4-BE49-F238E27FC236}">
-                <a16:creationId xmlns:a16="http://schemas.microsoft.com/office/drawing/2014/main" id="{04896E44-CBA6-6AB8-864A-FFE280542298}"/>
-              </a:ext>
-            </a:extLst>
-          </p:cNvPr>
+          <p:cNvPr id="3" name="Notes Placeholder 2"/>
           <p:cNvSpPr>
             <a:spLocks noGrp="1"/>
           </p:cNvSpPr>
@@ -3358,19 +3598,82 @@
           <a:bodyPr/>
           <a:lstStyle/>
           <a:p>
-            <a:endParaRPr lang="en-US" dirty="0"/>
-          </a:p>
-        </p:txBody>
-      </p:sp>
-      <p:sp>
-        <p:nvSpPr>
-          <p:cNvPr id="4" name="Slide Number Placeholder 3">
-            <a:extLst>
-              <a:ext uri="{FF2B5EF4-FFF2-40B4-BE49-F238E27FC236}">
-                <a16:creationId xmlns:a16="http://schemas.microsoft.com/office/drawing/2014/main" id="{5F5E707C-C2DF-1F33-763A-B5213E26FBBD}"/>
-              </a:ext>
-            </a:extLst>
-          </p:cNvPr>
+            <a:pPr marL="0" marR="0" lvl="0" indent="0" algn="l" defTabSz="914400" rtl="0" eaLnBrk="1" fontAlgn="auto" latinLnBrk="0" hangingPunct="1">
+              <a:lnSpc>
+                <a:spcPct val="100000"/>
+              </a:lnSpc>
+              <a:spcBef>
+                <a:spcPts val="0"/>
+              </a:spcBef>
+              <a:spcAft>
+                <a:spcPts val="0"/>
+              </a:spcAft>
+              <a:buClrTx/>
+              <a:buSzTx/>
+              <a:buFontTx/>
+              <a:buNone/>
+              <a:tabLst/>
+              <a:defRPr/>
+            </a:pPr>
+            <a:r>
+              <a:rPr lang="en-US" sz="1200" dirty="0">
+                <a:solidFill>
+                  <a:schemeClr val="accent1"/>
+                </a:solidFill>
+              </a:rPr>
+              <a:t>e.g., </a:t>
+            </a:r>
+            <a:r>
+              <a:rPr lang="en-US" sz="1200" dirty="0" err="1">
+                <a:solidFill>
+                  <a:schemeClr val="accent1"/>
+                </a:solidFill>
+              </a:rPr>
+              <a:t>MediaWiki</a:t>
+            </a:r>
+            <a:r>
+              <a:rPr lang="en-US" sz="1200" dirty="0">
+                <a:solidFill>
+                  <a:schemeClr val="accent1"/>
+                </a:solidFill>
+              </a:rPr>
+              <a:t> API: https://</a:t>
+            </a:r>
+            <a:r>
+              <a:rPr lang="en-US" sz="1200" dirty="0" err="1">
+                <a:solidFill>
+                  <a:schemeClr val="accent1"/>
+                </a:solidFill>
+              </a:rPr>
+              <a:t>en.wikipedia.org</a:t>
+            </a:r>
+            <a:r>
+              <a:rPr lang="en-US" sz="1200" dirty="0">
+                <a:solidFill>
+                  <a:schemeClr val="accent1"/>
+                </a:solidFill>
+              </a:rPr>
+              <a:t>/w/</a:t>
+            </a:r>
+            <a:r>
+              <a:rPr lang="en-US" sz="1200" dirty="0" err="1">
+                <a:solidFill>
+                  <a:schemeClr val="accent1"/>
+                </a:solidFill>
+              </a:rPr>
+              <a:t>api.php</a:t>
+            </a:r>
+            <a:endParaRPr lang="en-US" sz="1200" dirty="0">
+              <a:solidFill>
+                <a:schemeClr val="accent1"/>
+              </a:solidFill>
+            </a:endParaRPr>
+          </a:p>
+        </p:txBody>
+      </p:sp>
+      <p:sp>
+        <p:nvSpPr>
+          <p:cNvPr id="4" name="Slide Number Placeholder 3"/>
           <p:cNvSpPr>
             <a:spLocks noGrp="1"/>
           </p:cNvSpPr>
@@ -3385,7 +3688,7 @@
           <a:p>
             <a:fld id="{FF78EFD2-C9A0-A146-8CE9-0A2B7CC7B867}" type="slidenum">
               <a:rPr lang="en-US" smtClean="0"/>
-              <a:t>35</a:t>
+              <a:t>33</a:t>
             </a:fld>
             <a:endParaRPr lang="en-US"/>
           </a:p>
@@ -3394,223 +3697,7 @@
     </p:spTree>
     <p:extLst>
       <p:ext uri="{BB962C8B-B14F-4D97-AF65-F5344CB8AC3E}">
-        <p14:creationId xmlns:p14="http://schemas.microsoft.com/office/powerpoint/2010/main" val="1647986956"/>
-      </p:ext>
-    </p:extLst>
-  </p:cSld>
-  <p:clrMapOvr>
-    <a:masterClrMapping/>
-  </p:clrMapOvr>
-</p:notes>
-</file>
-
-<file path=ppt/notesSlides/notesSlide34.xml><?xml version="1.0" encoding="utf-8"?>
-<p:notes xmlns:a="http://schemas.openxmlformats.org/drawingml/2006/main" xmlns:r="http://schemas.openxmlformats.org/officeDocument/2006/relationships" xmlns:p="http://schemas.openxmlformats.org/presentationml/2006/main">
-  <p:cSld>
-    <p:spTree>
-      <p:nvGrpSpPr>
-        <p:cNvPr id="1" name="">
-          <a:extLst>
-            <a:ext uri="{FF2B5EF4-FFF2-40B4-BE49-F238E27FC236}">
-              <a16:creationId xmlns:a16="http://schemas.microsoft.com/office/drawing/2014/main" id="{74CBF3F9-EF2E-FF5F-203E-EE0C8149770E}"/>
-            </a:ext>
-          </a:extLst>
-        </p:cNvPr>
-        <p:cNvGrpSpPr/>
-        <p:nvPr/>
-      </p:nvGrpSpPr>
-      <p:grpSpPr>
-        <a:xfrm>
-          <a:off x="0" y="0"/>
-          <a:ext cx="0" cy="0"/>
-          <a:chOff x="0" y="0"/>
-          <a:chExt cx="0" cy="0"/>
-        </a:xfrm>
-      </p:grpSpPr>
-      <p:sp>
-        <p:nvSpPr>
-          <p:cNvPr id="2" name="Slide Image Placeholder 1">
-            <a:extLst>
-              <a:ext uri="{FF2B5EF4-FFF2-40B4-BE49-F238E27FC236}">
-                <a16:creationId xmlns:a16="http://schemas.microsoft.com/office/drawing/2014/main" id="{35A24FD9-C085-7481-A501-31B0F0D7FB2E}"/>
-              </a:ext>
-            </a:extLst>
-          </p:cNvPr>
-          <p:cNvSpPr>
-            <a:spLocks noGrp="1" noRot="1" noChangeAspect="1"/>
-          </p:cNvSpPr>
-          <p:nvPr>
-            <p:ph type="sldImg"/>
-          </p:nvPr>
-        </p:nvSpPr>
-        <p:spPr/>
-      </p:sp>
-      <p:sp>
-        <p:nvSpPr>
-          <p:cNvPr id="3" name="Notes Placeholder 2">
-            <a:extLst>
-              <a:ext uri="{FF2B5EF4-FFF2-40B4-BE49-F238E27FC236}">
-                <a16:creationId xmlns:a16="http://schemas.microsoft.com/office/drawing/2014/main" id="{2CBFB925-0445-635D-1E05-EB38D9352787}"/>
-              </a:ext>
-            </a:extLst>
-          </p:cNvPr>
-          <p:cNvSpPr>
-            <a:spLocks noGrp="1"/>
-          </p:cNvSpPr>
-          <p:nvPr>
-            <p:ph type="body" idx="1"/>
-          </p:nvPr>
-        </p:nvSpPr>
-        <p:spPr/>
-        <p:txBody>
-          <a:bodyPr/>
-          <a:lstStyle/>
-          <a:p>
-            <a:endParaRPr lang="en-US" dirty="0"/>
-          </a:p>
-        </p:txBody>
-      </p:sp>
-      <p:sp>
-        <p:nvSpPr>
-          <p:cNvPr id="4" name="Slide Number Placeholder 3">
-            <a:extLst>
-              <a:ext uri="{FF2B5EF4-FFF2-40B4-BE49-F238E27FC236}">
-                <a16:creationId xmlns:a16="http://schemas.microsoft.com/office/drawing/2014/main" id="{82335D29-3589-3AB1-4AF3-859F0BB112F8}"/>
-              </a:ext>
-            </a:extLst>
-          </p:cNvPr>
-          <p:cNvSpPr>
-            <a:spLocks noGrp="1"/>
-          </p:cNvSpPr>
-          <p:nvPr>
-            <p:ph type="sldNum" sz="quarter" idx="5"/>
-          </p:nvPr>
-        </p:nvSpPr>
-        <p:spPr/>
-        <p:txBody>
-          <a:bodyPr/>
-          <a:lstStyle/>
-          <a:p>
-            <a:fld id="{FF78EFD2-C9A0-A146-8CE9-0A2B7CC7B867}" type="slidenum">
-              <a:rPr lang="en-US" smtClean="0"/>
-              <a:t>36</a:t>
-            </a:fld>
-            <a:endParaRPr lang="en-US"/>
-          </a:p>
-        </p:txBody>
-      </p:sp>
-    </p:spTree>
-    <p:extLst>
-      <p:ext uri="{BB962C8B-B14F-4D97-AF65-F5344CB8AC3E}">
-        <p14:creationId xmlns:p14="http://schemas.microsoft.com/office/powerpoint/2010/main" val="1375190092"/>
-      </p:ext>
-    </p:extLst>
-  </p:cSld>
-  <p:clrMapOvr>
-    <a:masterClrMapping/>
-  </p:clrMapOvr>
-</p:notes>
-</file>
-
-<file path=ppt/notesSlides/notesSlide35.xml><?xml version="1.0" encoding="utf-8"?>
-<p:notes xmlns:a="http://schemas.openxmlformats.org/drawingml/2006/main" xmlns:r="http://schemas.openxmlformats.org/officeDocument/2006/relationships" xmlns:p="http://schemas.openxmlformats.org/presentationml/2006/main">
-  <p:cSld>
-    <p:spTree>
-      <p:nvGrpSpPr>
-        <p:cNvPr id="1" name="">
-          <a:extLst>
-            <a:ext uri="{FF2B5EF4-FFF2-40B4-BE49-F238E27FC236}">
-              <a16:creationId xmlns:a16="http://schemas.microsoft.com/office/drawing/2014/main" id="{F6B4059A-51D7-D829-2D81-3F53E85ACCC5}"/>
-            </a:ext>
-          </a:extLst>
-        </p:cNvPr>
-        <p:cNvGrpSpPr/>
-        <p:nvPr/>
-      </p:nvGrpSpPr>
-      <p:grpSpPr>
-        <a:xfrm>
-          <a:off x="0" y="0"/>
-          <a:ext cx="0" cy="0"/>
-          <a:chOff x="0" y="0"/>
-          <a:chExt cx="0" cy="0"/>
-        </a:xfrm>
-      </p:grpSpPr>
-      <p:sp>
-        <p:nvSpPr>
-          <p:cNvPr id="2" name="Slide Image Placeholder 1">
-            <a:extLst>
-              <a:ext uri="{FF2B5EF4-FFF2-40B4-BE49-F238E27FC236}">
-                <a16:creationId xmlns:a16="http://schemas.microsoft.com/office/drawing/2014/main" id="{160C34A1-B6AF-41FC-BA68-43430D278A56}"/>
-              </a:ext>
-            </a:extLst>
-          </p:cNvPr>
-          <p:cNvSpPr>
-            <a:spLocks noGrp="1" noRot="1" noChangeAspect="1"/>
-          </p:cNvSpPr>
-          <p:nvPr>
-            <p:ph type="sldImg"/>
-          </p:nvPr>
-        </p:nvSpPr>
-        <p:spPr/>
-      </p:sp>
-      <p:sp>
-        <p:nvSpPr>
-          <p:cNvPr id="3" name="Notes Placeholder 2">
-            <a:extLst>
-              <a:ext uri="{FF2B5EF4-FFF2-40B4-BE49-F238E27FC236}">
-                <a16:creationId xmlns:a16="http://schemas.microsoft.com/office/drawing/2014/main" id="{AF1A2D59-F955-0BF8-717A-5509EAC43B4F}"/>
-              </a:ext>
-            </a:extLst>
-          </p:cNvPr>
-          <p:cNvSpPr>
-            <a:spLocks noGrp="1"/>
-          </p:cNvSpPr>
-          <p:nvPr>
-            <p:ph type="body" idx="1"/>
-          </p:nvPr>
-        </p:nvSpPr>
-        <p:spPr/>
-        <p:txBody>
-          <a:bodyPr/>
-          <a:lstStyle/>
-          <a:p>
-            <a:endParaRPr lang="en-US" dirty="0"/>
-          </a:p>
-        </p:txBody>
-      </p:sp>
-      <p:sp>
-        <p:nvSpPr>
-          <p:cNvPr id="4" name="Slide Number Placeholder 3">
-            <a:extLst>
-              <a:ext uri="{FF2B5EF4-FFF2-40B4-BE49-F238E27FC236}">
-                <a16:creationId xmlns:a16="http://schemas.microsoft.com/office/drawing/2014/main" id="{2F98257A-360B-ED00-664E-4FDD4E215425}"/>
-              </a:ext>
-            </a:extLst>
-          </p:cNvPr>
-          <p:cNvSpPr>
-            <a:spLocks noGrp="1"/>
-          </p:cNvSpPr>
-          <p:nvPr>
-            <p:ph type="sldNum" sz="quarter" idx="5"/>
-          </p:nvPr>
-        </p:nvSpPr>
-        <p:spPr/>
-        <p:txBody>
-          <a:bodyPr/>
-          <a:lstStyle/>
-          <a:p>
-            <a:fld id="{FF78EFD2-C9A0-A146-8CE9-0A2B7CC7B867}" type="slidenum">
-              <a:rPr lang="en-US" smtClean="0"/>
-              <a:t>37</a:t>
-            </a:fld>
-            <a:endParaRPr lang="en-US"/>
-          </a:p>
-        </p:txBody>
-      </p:sp>
-    </p:spTree>
-    <p:extLst>
-      <p:ext uri="{BB962C8B-B14F-4D97-AF65-F5344CB8AC3E}">
-        <p14:creationId xmlns:p14="http://schemas.microsoft.com/office/powerpoint/2010/main" val="3999923027"/>
+        <p14:creationId xmlns:p14="http://schemas.microsoft.com/office/powerpoint/2010/main" val="3404265225"/>
       </p:ext>
     </p:extLst>
   </p:cSld>
@@ -3736,114 +3823,6 @@
         <p:cNvPr id="1" name="">
           <a:extLst>
             <a:ext uri="{FF2B5EF4-FFF2-40B4-BE49-F238E27FC236}">
-              <a16:creationId xmlns:a16="http://schemas.microsoft.com/office/drawing/2014/main" id="{AB6B99A8-0AB1-C67B-9370-B1F1C06668AB}"/>
-            </a:ext>
-          </a:extLst>
-        </p:cNvPr>
-        <p:cNvGrpSpPr/>
-        <p:nvPr/>
-      </p:nvGrpSpPr>
-      <p:grpSpPr>
-        <a:xfrm>
-          <a:off x="0" y="0"/>
-          <a:ext cx="0" cy="0"/>
-          <a:chOff x="0" y="0"/>
-          <a:chExt cx="0" cy="0"/>
-        </a:xfrm>
-      </p:grpSpPr>
-      <p:sp>
-        <p:nvSpPr>
-          <p:cNvPr id="2" name="Slide Image Placeholder 1">
-            <a:extLst>
-              <a:ext uri="{FF2B5EF4-FFF2-40B4-BE49-F238E27FC236}">
-                <a16:creationId xmlns:a16="http://schemas.microsoft.com/office/drawing/2014/main" id="{696BAC29-4A26-AFBE-AEBF-784DCA82E660}"/>
-              </a:ext>
-            </a:extLst>
-          </p:cNvPr>
-          <p:cNvSpPr>
-            <a:spLocks noGrp="1" noRot="1" noChangeAspect="1"/>
-          </p:cNvSpPr>
-          <p:nvPr>
-            <p:ph type="sldImg"/>
-          </p:nvPr>
-        </p:nvSpPr>
-        <p:spPr/>
-      </p:sp>
-      <p:sp>
-        <p:nvSpPr>
-          <p:cNvPr id="3" name="Notes Placeholder 2">
-            <a:extLst>
-              <a:ext uri="{FF2B5EF4-FFF2-40B4-BE49-F238E27FC236}">
-                <a16:creationId xmlns:a16="http://schemas.microsoft.com/office/drawing/2014/main" id="{3C3640A0-C22E-2466-A6D7-177128889A54}"/>
-              </a:ext>
-            </a:extLst>
-          </p:cNvPr>
-          <p:cNvSpPr>
-            <a:spLocks noGrp="1"/>
-          </p:cNvSpPr>
-          <p:nvPr>
-            <p:ph type="body" idx="1"/>
-          </p:nvPr>
-        </p:nvSpPr>
-        <p:spPr/>
-        <p:txBody>
-          <a:bodyPr/>
-          <a:lstStyle/>
-          <a:p>
-            <a:endParaRPr lang="en-US" dirty="0"/>
-          </a:p>
-        </p:txBody>
-      </p:sp>
-      <p:sp>
-        <p:nvSpPr>
-          <p:cNvPr id="4" name="Slide Number Placeholder 3">
-            <a:extLst>
-              <a:ext uri="{FF2B5EF4-FFF2-40B4-BE49-F238E27FC236}">
-                <a16:creationId xmlns:a16="http://schemas.microsoft.com/office/drawing/2014/main" id="{E8E9BF96-6756-D535-A1BB-D5B8B522DB57}"/>
-              </a:ext>
-            </a:extLst>
-          </p:cNvPr>
-          <p:cNvSpPr>
-            <a:spLocks noGrp="1"/>
-          </p:cNvSpPr>
-          <p:nvPr>
-            <p:ph type="sldNum" sz="quarter" idx="5"/>
-          </p:nvPr>
-        </p:nvSpPr>
-        <p:spPr/>
-        <p:txBody>
-          <a:bodyPr/>
-          <a:lstStyle/>
-          <a:p>
-            <a:fld id="{FF78EFD2-C9A0-A146-8CE9-0A2B7CC7B867}" type="slidenum">
-              <a:rPr lang="en-US" smtClean="0"/>
-              <a:t>5</a:t>
-            </a:fld>
-            <a:endParaRPr lang="en-US"/>
-          </a:p>
-        </p:txBody>
-      </p:sp>
-    </p:spTree>
-    <p:extLst>
-      <p:ext uri="{BB962C8B-B14F-4D97-AF65-F5344CB8AC3E}">
-        <p14:creationId xmlns:p14="http://schemas.microsoft.com/office/powerpoint/2010/main" val="2083634815"/>
-      </p:ext>
-    </p:extLst>
-  </p:cSld>
-  <p:clrMapOvr>
-    <a:masterClrMapping/>
-  </p:clrMapOvr>
-</p:notes>
-</file>
-
-<file path=ppt/notesSlides/notesSlide6.xml><?xml version="1.0" encoding="utf-8"?>
-<p:notes xmlns:a="http://schemas.openxmlformats.org/drawingml/2006/main" xmlns:r="http://schemas.openxmlformats.org/officeDocument/2006/relationships" xmlns:p="http://schemas.openxmlformats.org/presentationml/2006/main">
-  <p:cSld>
-    <p:spTree>
-      <p:nvGrpSpPr>
-        <p:cNvPr id="1" name="">
-          <a:extLst>
-            <a:ext uri="{FF2B5EF4-FFF2-40B4-BE49-F238E27FC236}">
               <a16:creationId xmlns:a16="http://schemas.microsoft.com/office/drawing/2014/main" id="{AF30FC9D-359D-2615-87AF-EC04D7A81BC1}"/>
             </a:ext>
           </a:extLst>
@@ -3925,7 +3904,7 @@
           <a:p>
             <a:fld id="{FF78EFD2-C9A0-A146-8CE9-0A2B7CC7B867}" type="slidenum">
               <a:rPr lang="en-US" smtClean="0"/>
-              <a:t>6</a:t>
+              <a:t>5</a:t>
             </a:fld>
             <a:endParaRPr lang="en-US"/>
           </a:p>
@@ -3944,7 +3923,7 @@
 </p:notes>
 </file>
 
-<file path=ppt/notesSlides/notesSlide7.xml><?xml version="1.0" encoding="utf-8"?>
+<file path=ppt/notesSlides/notesSlide6.xml><?xml version="1.0" encoding="utf-8"?>
 <p:notes xmlns:a="http://schemas.openxmlformats.org/drawingml/2006/main" xmlns:r="http://schemas.openxmlformats.org/officeDocument/2006/relationships" xmlns:p="http://schemas.openxmlformats.org/presentationml/2006/main">
   <p:cSld>
     <p:spTree>
@@ -4006,7 +3985,7 @@
           <a:bodyPr/>
           <a:lstStyle/>
           <a:p>
-            <a:endParaRPr lang="en-US" dirty="0"/>
+            <a:endParaRPr lang="en-US" u="sng" dirty="0"/>
           </a:p>
         </p:txBody>
       </p:sp>
@@ -4016,6 +3995,114 @@
             <a:extLst>
               <a:ext uri="{FF2B5EF4-FFF2-40B4-BE49-F238E27FC236}">
                 <a16:creationId xmlns:a16="http://schemas.microsoft.com/office/drawing/2014/main" id="{8C148104-6DD9-54BF-8195-AFFA93D5241A}"/>
+              </a:ext>
+            </a:extLst>
+          </p:cNvPr>
+          <p:cNvSpPr>
+            <a:spLocks noGrp="1"/>
+          </p:cNvSpPr>
+          <p:nvPr>
+            <p:ph type="sldNum" sz="quarter" idx="5"/>
+          </p:nvPr>
+        </p:nvSpPr>
+        <p:spPr/>
+        <p:txBody>
+          <a:bodyPr/>
+          <a:lstStyle/>
+          <a:p>
+            <a:fld id="{FF78EFD2-C9A0-A146-8CE9-0A2B7CC7B867}" type="slidenum">
+              <a:rPr lang="en-US" smtClean="0"/>
+              <a:t>6</a:t>
+            </a:fld>
+            <a:endParaRPr lang="en-US"/>
+          </a:p>
+        </p:txBody>
+      </p:sp>
+    </p:spTree>
+    <p:extLst>
+      <p:ext uri="{BB962C8B-B14F-4D97-AF65-F5344CB8AC3E}">
+        <p14:creationId xmlns:p14="http://schemas.microsoft.com/office/powerpoint/2010/main" val="71316591"/>
+      </p:ext>
+    </p:extLst>
+  </p:cSld>
+  <p:clrMapOvr>
+    <a:masterClrMapping/>
+  </p:clrMapOvr>
+</p:notes>
+</file>
+
+<file path=ppt/notesSlides/notesSlide7.xml><?xml version="1.0" encoding="utf-8"?>
+<p:notes xmlns:a="http://schemas.openxmlformats.org/drawingml/2006/main" xmlns:r="http://schemas.openxmlformats.org/officeDocument/2006/relationships" xmlns:p="http://schemas.openxmlformats.org/presentationml/2006/main">
+  <p:cSld>
+    <p:spTree>
+      <p:nvGrpSpPr>
+        <p:cNvPr id="1" name="">
+          <a:extLst>
+            <a:ext uri="{FF2B5EF4-FFF2-40B4-BE49-F238E27FC236}">
+              <a16:creationId xmlns:a16="http://schemas.microsoft.com/office/drawing/2014/main" id="{333AF461-58B0-D395-A871-961C6BC6BB3B}"/>
+            </a:ext>
+          </a:extLst>
+        </p:cNvPr>
+        <p:cNvGrpSpPr/>
+        <p:nvPr/>
+      </p:nvGrpSpPr>
+      <p:grpSpPr>
+        <a:xfrm>
+          <a:off x="0" y="0"/>
+          <a:ext cx="0" cy="0"/>
+          <a:chOff x="0" y="0"/>
+          <a:chExt cx="0" cy="0"/>
+        </a:xfrm>
+      </p:grpSpPr>
+      <p:sp>
+        <p:nvSpPr>
+          <p:cNvPr id="2" name="Slide Image Placeholder 1">
+            <a:extLst>
+              <a:ext uri="{FF2B5EF4-FFF2-40B4-BE49-F238E27FC236}">
+                <a16:creationId xmlns:a16="http://schemas.microsoft.com/office/drawing/2014/main" id="{3ECC7E86-313C-A5EA-0CD2-FB59D24609FA}"/>
+              </a:ext>
+            </a:extLst>
+          </p:cNvPr>
+          <p:cNvSpPr>
+            <a:spLocks noGrp="1" noRot="1" noChangeAspect="1"/>
+          </p:cNvSpPr>
+          <p:nvPr>
+            <p:ph type="sldImg"/>
+          </p:nvPr>
+        </p:nvSpPr>
+        <p:spPr/>
+      </p:sp>
+      <p:sp>
+        <p:nvSpPr>
+          <p:cNvPr id="3" name="Notes Placeholder 2">
+            <a:extLst>
+              <a:ext uri="{FF2B5EF4-FFF2-40B4-BE49-F238E27FC236}">
+                <a16:creationId xmlns:a16="http://schemas.microsoft.com/office/drawing/2014/main" id="{EF1DC760-6FA5-BABA-D10F-0180330B836C}"/>
+              </a:ext>
+            </a:extLst>
+          </p:cNvPr>
+          <p:cNvSpPr>
+            <a:spLocks noGrp="1"/>
+          </p:cNvSpPr>
+          <p:nvPr>
+            <p:ph type="body" idx="1"/>
+          </p:nvPr>
+        </p:nvSpPr>
+        <p:spPr/>
+        <p:txBody>
+          <a:bodyPr/>
+          <a:lstStyle/>
+          <a:p>
+            <a:endParaRPr lang="en-US" u="sng" dirty="0"/>
+          </a:p>
+        </p:txBody>
+      </p:sp>
+      <p:sp>
+        <p:nvSpPr>
+          <p:cNvPr id="4" name="Slide Number Placeholder 3">
+            <a:extLst>
+              <a:ext uri="{FF2B5EF4-FFF2-40B4-BE49-F238E27FC236}">
+                <a16:creationId xmlns:a16="http://schemas.microsoft.com/office/drawing/2014/main" id="{8F3C093C-FBB8-FE92-B956-F9768664754E}"/>
               </a:ext>
             </a:extLst>
           </p:cNvPr>
@@ -4042,7 +4129,7 @@
     </p:spTree>
     <p:extLst>
       <p:ext uri="{BB962C8B-B14F-4D97-AF65-F5344CB8AC3E}">
-        <p14:creationId xmlns:p14="http://schemas.microsoft.com/office/powerpoint/2010/main" val="71316591"/>
+        <p14:creationId xmlns:p14="http://schemas.microsoft.com/office/powerpoint/2010/main" val="3061922108"/>
       </p:ext>
     </p:extLst>
   </p:cSld>
@@ -4060,7 +4147,7 @@
         <p:cNvPr id="1" name="">
           <a:extLst>
             <a:ext uri="{FF2B5EF4-FFF2-40B4-BE49-F238E27FC236}">
-              <a16:creationId xmlns:a16="http://schemas.microsoft.com/office/drawing/2014/main" id="{17D630A1-51AF-4AA5-B310-D2EE8F6F28C3}"/>
+              <a16:creationId xmlns:a16="http://schemas.microsoft.com/office/drawing/2014/main" id="{A3A4D285-F323-8A1E-0CEF-F8959EDB5532}"/>
             </a:ext>
           </a:extLst>
         </p:cNvPr>
@@ -4080,7 +4167,7 @@
           <p:cNvPr id="2" name="Slide Image Placeholder 1">
             <a:extLst>
               <a:ext uri="{FF2B5EF4-FFF2-40B4-BE49-F238E27FC236}">
-                <a16:creationId xmlns:a16="http://schemas.microsoft.com/office/drawing/2014/main" id="{D3EA8466-FAD5-F5D9-D537-1575D7A6281C}"/>
+                <a16:creationId xmlns:a16="http://schemas.microsoft.com/office/drawing/2014/main" id="{5AC7CA7B-3B39-4E73-9231-66ECE5AB3227}"/>
               </a:ext>
             </a:extLst>
           </p:cNvPr>
@@ -4098,7 +4185,7 @@
           <p:cNvPr id="3" name="Notes Placeholder 2">
             <a:extLst>
               <a:ext uri="{FF2B5EF4-FFF2-40B4-BE49-F238E27FC236}">
-                <a16:creationId xmlns:a16="http://schemas.microsoft.com/office/drawing/2014/main" id="{5A0DBFD6-8333-7860-522D-0B05F36509AF}"/>
+                <a16:creationId xmlns:a16="http://schemas.microsoft.com/office/drawing/2014/main" id="{B60A216E-F796-26D6-5CB4-C1713829F354}"/>
               </a:ext>
             </a:extLst>
           </p:cNvPr>
@@ -4114,7 +4201,7 @@
           <a:bodyPr/>
           <a:lstStyle/>
           <a:p>
-            <a:endParaRPr lang="en-US" dirty="0"/>
+            <a:endParaRPr lang="en-US" u="sng" dirty="0"/>
           </a:p>
         </p:txBody>
       </p:sp>
@@ -4123,7 +4210,7 @@
           <p:cNvPr id="4" name="Slide Number Placeholder 3">
             <a:extLst>
               <a:ext uri="{FF2B5EF4-FFF2-40B4-BE49-F238E27FC236}">
-                <a16:creationId xmlns:a16="http://schemas.microsoft.com/office/drawing/2014/main" id="{1709851C-CEC8-62E5-AEF3-53D5B21C9BDE}"/>
+                <a16:creationId xmlns:a16="http://schemas.microsoft.com/office/drawing/2014/main" id="{6BAD8E47-21D6-DF0F-70EB-A6049A5737F7}"/>
               </a:ext>
             </a:extLst>
           </p:cNvPr>
@@ -4150,7 +4237,7 @@
     </p:spTree>
     <p:extLst>
       <p:ext uri="{BB962C8B-B14F-4D97-AF65-F5344CB8AC3E}">
-        <p14:creationId xmlns:p14="http://schemas.microsoft.com/office/powerpoint/2010/main" val="702886052"/>
+        <p14:creationId xmlns:p14="http://schemas.microsoft.com/office/powerpoint/2010/main" val="1223874438"/>
       </p:ext>
     </p:extLst>
   </p:cSld>
@@ -4168,7 +4255,7 @@
         <p:cNvPr id="1" name="">
           <a:extLst>
             <a:ext uri="{FF2B5EF4-FFF2-40B4-BE49-F238E27FC236}">
-              <a16:creationId xmlns:a16="http://schemas.microsoft.com/office/drawing/2014/main" id="{D6AEB9A2-3CEC-D6BF-F211-2FF88A3A48A3}"/>
+              <a16:creationId xmlns:a16="http://schemas.microsoft.com/office/drawing/2014/main" id="{D20A7850-14F2-68C5-8A06-D2F017FDEF3B}"/>
             </a:ext>
           </a:extLst>
         </p:cNvPr>
@@ -4188,7 +4275,7 @@
           <p:cNvPr id="2" name="Slide Image Placeholder 1">
             <a:extLst>
               <a:ext uri="{FF2B5EF4-FFF2-40B4-BE49-F238E27FC236}">
-                <a16:creationId xmlns:a16="http://schemas.microsoft.com/office/drawing/2014/main" id="{EF9EA029-44DB-A3F1-1AA3-4D278FDF5293}"/>
+                <a16:creationId xmlns:a16="http://schemas.microsoft.com/office/drawing/2014/main" id="{D762E806-BC20-E995-DAE2-37F43F025574}"/>
               </a:ext>
             </a:extLst>
           </p:cNvPr>
@@ -4206,7 +4293,7 @@
           <p:cNvPr id="3" name="Notes Placeholder 2">
             <a:extLst>
               <a:ext uri="{FF2B5EF4-FFF2-40B4-BE49-F238E27FC236}">
-                <a16:creationId xmlns:a16="http://schemas.microsoft.com/office/drawing/2014/main" id="{7629AF7E-45E6-2C02-DF01-E1A3FDB54F4C}"/>
+                <a16:creationId xmlns:a16="http://schemas.microsoft.com/office/drawing/2014/main" id="{4FDD7048-312E-C7BB-1DF3-D4CDFACE5162}"/>
               </a:ext>
             </a:extLst>
           </p:cNvPr>
@@ -4231,7 +4318,7 @@
           <p:cNvPr id="4" name="Slide Number Placeholder 3">
             <a:extLst>
               <a:ext uri="{FF2B5EF4-FFF2-40B4-BE49-F238E27FC236}">
-                <a16:creationId xmlns:a16="http://schemas.microsoft.com/office/drawing/2014/main" id="{9E06945F-B847-9C7D-4527-F8E88FF7F43D}"/>
+                <a16:creationId xmlns:a16="http://schemas.microsoft.com/office/drawing/2014/main" id="{88962D5A-5EFE-CC99-1BD6-7F9515522180}"/>
               </a:ext>
             </a:extLst>
           </p:cNvPr>
@@ -4258,7 +4345,7 @@
     </p:spTree>
     <p:extLst>
       <p:ext uri="{BB962C8B-B14F-4D97-AF65-F5344CB8AC3E}">
-        <p14:creationId xmlns:p14="http://schemas.microsoft.com/office/powerpoint/2010/main" val="1978881549"/>
+        <p14:creationId xmlns:p14="http://schemas.microsoft.com/office/powerpoint/2010/main" val="3284948924"/>
       </p:ext>
     </p:extLst>
   </p:cSld>
@@ -4415,7 +4502,7 @@
           <a:p>
             <a:fld id="{7796CB8E-DCBE-814A-907C-3F1002299140}" type="datetimeFigureOut">
               <a:rPr lang="en-US" smtClean="0"/>
-              <a:t>6/26/26</a:t>
+              <a:t>6/29/26</a:t>
             </a:fld>
             <a:endParaRPr lang="en-US"/>
           </a:p>
@@ -4613,7 +4700,7 @@
           <a:p>
             <a:fld id="{7796CB8E-DCBE-814A-907C-3F1002299140}" type="datetimeFigureOut">
               <a:rPr lang="en-US" smtClean="0"/>
-              <a:t>6/26/26</a:t>
+              <a:t>6/29/26</a:t>
             </a:fld>
             <a:endParaRPr lang="en-US"/>
           </a:p>
@@ -4821,7 +4908,7 @@
           <a:p>
             <a:fld id="{7796CB8E-DCBE-814A-907C-3F1002299140}" type="datetimeFigureOut">
               <a:rPr lang="en-US" smtClean="0"/>
-              <a:t>6/26/26</a:t>
+              <a:t>6/29/26</a:t>
             </a:fld>
             <a:endParaRPr lang="en-US"/>
           </a:p>
@@ -5019,7 +5106,7 @@
           <a:p>
             <a:fld id="{7796CB8E-DCBE-814A-907C-3F1002299140}" type="datetimeFigureOut">
               <a:rPr lang="en-US" smtClean="0"/>
-              <a:t>6/26/26</a:t>
+              <a:t>6/29/26</a:t>
             </a:fld>
             <a:endParaRPr lang="en-US"/>
           </a:p>
@@ -5294,7 +5381,7 @@
           <a:p>
             <a:fld id="{7796CB8E-DCBE-814A-907C-3F1002299140}" type="datetimeFigureOut">
               <a:rPr lang="en-US" smtClean="0"/>
-              <a:t>6/26/26</a:t>
+              <a:t>6/29/26</a:t>
             </a:fld>
             <a:endParaRPr lang="en-US"/>
           </a:p>
@@ -5559,7 +5646,7 @@
           <a:p>
             <a:fld id="{7796CB8E-DCBE-814A-907C-3F1002299140}" type="datetimeFigureOut">
               <a:rPr lang="en-US" smtClean="0"/>
-              <a:t>6/26/26</a:t>
+              <a:t>6/29/26</a:t>
             </a:fld>
             <a:endParaRPr lang="en-US"/>
           </a:p>
@@ -5971,7 +6058,7 @@
           <a:p>
             <a:fld id="{7796CB8E-DCBE-814A-907C-3F1002299140}" type="datetimeFigureOut">
               <a:rPr lang="en-US" smtClean="0"/>
-              <a:t>6/26/26</a:t>
+              <a:t>6/29/26</a:t>
             </a:fld>
             <a:endParaRPr lang="en-US"/>
           </a:p>
@@ -6112,7 +6199,7 @@
           <a:p>
             <a:fld id="{7796CB8E-DCBE-814A-907C-3F1002299140}" type="datetimeFigureOut">
               <a:rPr lang="en-US" smtClean="0"/>
-              <a:t>6/26/26</a:t>
+              <a:t>6/29/26</a:t>
             </a:fld>
             <a:endParaRPr lang="en-US"/>
           </a:p>
@@ -6225,7 +6312,7 @@
           <a:p>
             <a:fld id="{7796CB8E-DCBE-814A-907C-3F1002299140}" type="datetimeFigureOut">
               <a:rPr lang="en-US" smtClean="0"/>
-              <a:t>6/26/26</a:t>
+              <a:t>6/29/26</a:t>
             </a:fld>
             <a:endParaRPr lang="en-US"/>
           </a:p>
@@ -6536,7 +6623,7 @@
           <a:p>
             <a:fld id="{7796CB8E-DCBE-814A-907C-3F1002299140}" type="datetimeFigureOut">
               <a:rPr lang="en-US" smtClean="0"/>
-              <a:t>6/26/26</a:t>
+              <a:t>6/29/26</a:t>
             </a:fld>
             <a:endParaRPr lang="en-US"/>
           </a:p>
@@ -6824,7 +6911,7 @@
           <a:p>
             <a:fld id="{7796CB8E-DCBE-814A-907C-3F1002299140}" type="datetimeFigureOut">
               <a:rPr lang="en-US" smtClean="0"/>
-              <a:t>6/26/26</a:t>
+              <a:t>6/29/26</a:t>
             </a:fld>
             <a:endParaRPr lang="en-US"/>
           </a:p>
@@ -7065,7 +7152,7 @@
           <a:p>
             <a:fld id="{7796CB8E-DCBE-814A-907C-3F1002299140}" type="datetimeFigureOut">
               <a:rPr lang="en-US" smtClean="0"/>
-              <a:t>6/26/26</a:t>
+              <a:t>6/29/26</a:t>
             </a:fld>
             <a:endParaRPr lang="en-US"/>
           </a:p>
@@ -7770,7 +7857,7 @@
           <p:cNvPr id="2" name="Title 1">
             <a:extLst>
               <a:ext uri="{FF2B5EF4-FFF2-40B4-BE49-F238E27FC236}">
-                <a16:creationId xmlns:a16="http://schemas.microsoft.com/office/drawing/2014/main" id="{6993DE8A-7D78-FEB2-281F-187600E25280}"/>
+                <a16:creationId xmlns:a16="http://schemas.microsoft.com/office/drawing/2014/main" id="{71229BF8-5FC7-E80A-487C-9E6097900E90}"/>
               </a:ext>
             </a:extLst>
           </p:cNvPr>
@@ -7786,371 +7873,11 @@
           <a:bodyPr/>
           <a:lstStyle/>
           <a:p>
-            <a:endParaRPr lang="en-US"/>
-          </a:p>
-        </p:txBody>
-      </p:sp>
-      <p:sp>
-        <p:nvSpPr>
-          <p:cNvPr id="3" name="Content Placeholder 2">
-            <a:extLst>
-              <a:ext uri="{FF2B5EF4-FFF2-40B4-BE49-F238E27FC236}">
-                <a16:creationId xmlns:a16="http://schemas.microsoft.com/office/drawing/2014/main" id="{B5ADB583-9D0D-A367-045F-41EA30E582A6}"/>
-              </a:ext>
-            </a:extLst>
-          </p:cNvPr>
-          <p:cNvSpPr>
-            <a:spLocks noGrp="1"/>
-          </p:cNvSpPr>
-          <p:nvPr>
-            <p:ph idx="1"/>
-          </p:nvPr>
-        </p:nvSpPr>
-        <p:spPr/>
-        <p:txBody>
-          <a:bodyPr/>
-          <a:lstStyle/>
-          <a:p>
-            <a:pPr marL="0" indent="0">
-              <a:buNone/>
-            </a:pPr>
-            <a:endParaRPr lang="en-US" dirty="0"/>
-          </a:p>
-          <a:p>
-            <a:pPr marL="0" indent="0">
-              <a:buNone/>
-            </a:pPr>
-            <a:r>
-              <a:rPr lang="en-US" dirty="0"/>
-              <a:t>Briefly explain final paper because they should keep it in mind</a:t>
-            </a:r>
-          </a:p>
-          <a:p>
-            <a:pPr marL="0" indent="0">
-              <a:buNone/>
-            </a:pPr>
-            <a:endParaRPr lang="en-US" dirty="0"/>
-          </a:p>
-        </p:txBody>
-      </p:sp>
-    </p:spTree>
-    <p:extLst>
-      <p:ext uri="{BB962C8B-B14F-4D97-AF65-F5344CB8AC3E}">
-        <p14:creationId xmlns:p14="http://schemas.microsoft.com/office/powerpoint/2010/main" val="1640137650"/>
-      </p:ext>
-    </p:extLst>
-  </p:cSld>
-  <p:clrMapOvr>
-    <a:masterClrMapping/>
-  </p:clrMapOvr>
-</p:sld>
-</file>
-
-<file path=ppt/slides/slide11.xml><?xml version="1.0" encoding="utf-8"?>
-<p:sld xmlns:a="http://schemas.openxmlformats.org/drawingml/2006/main" xmlns:r="http://schemas.openxmlformats.org/officeDocument/2006/relationships" xmlns:p="http://schemas.openxmlformats.org/presentationml/2006/main">
-  <p:cSld>
-    <p:spTree>
-      <p:nvGrpSpPr>
-        <p:cNvPr id="1" name="">
-          <a:extLst>
-            <a:ext uri="{FF2B5EF4-FFF2-40B4-BE49-F238E27FC236}">
-              <a16:creationId xmlns:a16="http://schemas.microsoft.com/office/drawing/2014/main" id="{AA0F5F68-8867-ADFC-2CC0-57ADE4B72969}"/>
-            </a:ext>
-          </a:extLst>
-        </p:cNvPr>
-        <p:cNvGrpSpPr/>
-        <p:nvPr/>
-      </p:nvGrpSpPr>
-      <p:grpSpPr>
-        <a:xfrm>
-          <a:off x="0" y="0"/>
-          <a:ext cx="0" cy="0"/>
-          <a:chOff x="0" y="0"/>
-          <a:chExt cx="0" cy="0"/>
-        </a:xfrm>
-      </p:grpSpPr>
-      <p:sp>
-        <p:nvSpPr>
-          <p:cNvPr id="2" name="Title 1">
-            <a:extLst>
-              <a:ext uri="{FF2B5EF4-FFF2-40B4-BE49-F238E27FC236}">
-                <a16:creationId xmlns:a16="http://schemas.microsoft.com/office/drawing/2014/main" id="{CED78116-D5DC-7B06-6139-283B278697C8}"/>
-              </a:ext>
-            </a:extLst>
-          </p:cNvPr>
-          <p:cNvSpPr>
-            <a:spLocks noGrp="1"/>
-          </p:cNvSpPr>
-          <p:nvPr>
-            <p:ph type="title"/>
-          </p:nvPr>
-        </p:nvSpPr>
-        <p:spPr/>
-        <p:txBody>
-          <a:bodyPr/>
-          <a:lstStyle/>
-          <a:p>
             <a:r>
               <a:rPr lang="en-US" dirty="0">
                 <a:solidFill>
                   <a:schemeClr val="accent1"/>
                 </a:solidFill>
-              </a:rPr>
-              <a:t>ECTS and Grading</a:t>
-            </a:r>
-          </a:p>
-        </p:txBody>
-      </p:sp>
-      <p:sp>
-        <p:nvSpPr>
-          <p:cNvPr id="3" name="Content Placeholder 2">
-            <a:extLst>
-              <a:ext uri="{FF2B5EF4-FFF2-40B4-BE49-F238E27FC236}">
-                <a16:creationId xmlns:a16="http://schemas.microsoft.com/office/drawing/2014/main" id="{39F5CD14-2E36-0D54-6D2B-BE8E2F1ADB89}"/>
-              </a:ext>
-            </a:extLst>
-          </p:cNvPr>
-          <p:cNvSpPr>
-            <a:spLocks noGrp="1"/>
-          </p:cNvSpPr>
-          <p:nvPr>
-            <p:ph idx="1"/>
-          </p:nvPr>
-        </p:nvSpPr>
-        <p:spPr>
-          <a:xfrm>
-            <a:off x="838200" y="1720525"/>
-            <a:ext cx="10515600" cy="4351338"/>
-          </a:xfrm>
-        </p:spPr>
-        <p:txBody>
-          <a:bodyPr/>
-          <a:lstStyle/>
-          <a:p>
-            <a:pPr marL="0" indent="0">
-              <a:buNone/>
-            </a:pPr>
-            <a:r>
-              <a:rPr lang="en-US" dirty="0">
-                <a:solidFill>
-                  <a:schemeClr val="accent1"/>
-                </a:solidFill>
-              </a:rPr>
-              <a:t>50% Attendance and Daily Assignments (2 ECTS)</a:t>
-            </a:r>
-          </a:p>
-          <a:p>
-            <a:r>
-              <a:rPr lang="en-US" dirty="0">
-                <a:solidFill>
-                  <a:schemeClr val="accent1"/>
-                </a:solidFill>
-              </a:rPr>
-              <a:t>Min. 90% attendance</a:t>
-            </a:r>
-          </a:p>
-          <a:p>
-            <a:r>
-              <a:rPr lang="en-US" dirty="0">
-                <a:solidFill>
-                  <a:schemeClr val="accent1"/>
-                </a:solidFill>
-              </a:rPr>
-              <a:t>Submission of all daily exercises</a:t>
-            </a:r>
-          </a:p>
-          <a:p>
-            <a:pPr marL="0" indent="0">
-              <a:buNone/>
-            </a:pPr>
-            <a:endParaRPr lang="en-US" dirty="0">
-              <a:solidFill>
-                <a:schemeClr val="accent1"/>
-              </a:solidFill>
-            </a:endParaRPr>
-          </a:p>
-          <a:p>
-            <a:pPr marL="0" indent="0">
-              <a:buNone/>
-            </a:pPr>
-            <a:r>
-              <a:rPr lang="en-US" dirty="0">
-                <a:solidFill>
-                  <a:schemeClr val="accent1"/>
-                </a:solidFill>
-              </a:rPr>
-              <a:t>50% Final Paper (2 ECTS)</a:t>
-            </a:r>
-          </a:p>
-          <a:p>
-            <a:pPr marL="0" indent="0">
-              <a:buNone/>
-            </a:pPr>
-            <a:endParaRPr lang="en-US" dirty="0">
-              <a:solidFill>
-                <a:schemeClr val="accent1"/>
-              </a:solidFill>
-            </a:endParaRPr>
-          </a:p>
-        </p:txBody>
-      </p:sp>
-    </p:spTree>
-    <p:extLst>
-      <p:ext uri="{BB962C8B-B14F-4D97-AF65-F5344CB8AC3E}">
-        <p14:creationId xmlns:p14="http://schemas.microsoft.com/office/powerpoint/2010/main" val="4059272468"/>
-      </p:ext>
-    </p:extLst>
-  </p:cSld>
-  <p:clrMapOvr>
-    <a:masterClrMapping/>
-  </p:clrMapOvr>
-</p:sld>
-</file>
-
-<file path=ppt/slides/slide12.xml><?xml version="1.0" encoding="utf-8"?>
-<p:sld xmlns:a="http://schemas.openxmlformats.org/drawingml/2006/main" xmlns:r="http://schemas.openxmlformats.org/officeDocument/2006/relationships" xmlns:p="http://schemas.openxmlformats.org/presentationml/2006/main">
-  <p:cSld>
-    <p:spTree>
-      <p:nvGrpSpPr>
-        <p:cNvPr id="1" name="">
-          <a:extLst>
-            <a:ext uri="{FF2B5EF4-FFF2-40B4-BE49-F238E27FC236}">
-              <a16:creationId xmlns:a16="http://schemas.microsoft.com/office/drawing/2014/main" id="{85E80DE3-FBA4-A051-3F96-384FE17E399B}"/>
-            </a:ext>
-          </a:extLst>
-        </p:cNvPr>
-        <p:cNvGrpSpPr/>
-        <p:nvPr/>
-      </p:nvGrpSpPr>
-      <p:grpSpPr>
-        <a:xfrm>
-          <a:off x="0" y="0"/>
-          <a:ext cx="0" cy="0"/>
-          <a:chOff x="0" y="0"/>
-          <a:chExt cx="0" cy="0"/>
-        </a:xfrm>
-      </p:grpSpPr>
-      <p:sp>
-        <p:nvSpPr>
-          <p:cNvPr id="2" name="Title 1">
-            <a:extLst>
-              <a:ext uri="{FF2B5EF4-FFF2-40B4-BE49-F238E27FC236}">
-                <a16:creationId xmlns:a16="http://schemas.microsoft.com/office/drawing/2014/main" id="{C9529E7A-4FDE-E925-FA96-F6B3095A690A}"/>
-              </a:ext>
-            </a:extLst>
-          </p:cNvPr>
-          <p:cNvSpPr>
-            <a:spLocks noGrp="1"/>
-          </p:cNvSpPr>
-          <p:nvPr>
-            <p:ph type="title"/>
-          </p:nvPr>
-        </p:nvSpPr>
-        <p:spPr/>
-        <p:txBody>
-          <a:bodyPr/>
-          <a:lstStyle/>
-          <a:p>
-            <a:r>
-              <a:rPr lang="en-US" dirty="0">
-                <a:solidFill>
-                  <a:schemeClr val="accent1"/>
-                </a:solidFill>
-              </a:rPr>
-              <a:t>Grading</a:t>
-            </a:r>
-          </a:p>
-        </p:txBody>
-      </p:sp>
-      <p:pic>
-        <p:nvPicPr>
-          <p:cNvPr id="4" name="Picture 3">
-            <a:extLst>
-              <a:ext uri="{FF2B5EF4-FFF2-40B4-BE49-F238E27FC236}">
-                <a16:creationId xmlns:a16="http://schemas.microsoft.com/office/drawing/2014/main" id="{47AC9BD2-B650-45AB-8BC1-39D47D680C81}"/>
-              </a:ext>
-            </a:extLst>
-          </p:cNvPr>
-          <p:cNvPicPr>
-            <a:picLocks noChangeAspect="1"/>
-          </p:cNvPicPr>
-          <p:nvPr/>
-        </p:nvPicPr>
-        <p:blipFill>
-          <a:blip r:embed="rId3"/>
-          <a:stretch>
-            <a:fillRect/>
-          </a:stretch>
-        </p:blipFill>
-        <p:spPr>
-          <a:xfrm>
-            <a:off x="2209800" y="1391537"/>
-            <a:ext cx="7772400" cy="4074925"/>
-          </a:xfrm>
-          <a:prstGeom prst="rect">
-            <a:avLst/>
-          </a:prstGeom>
-        </p:spPr>
-      </p:pic>
-    </p:spTree>
-    <p:extLst>
-      <p:ext uri="{BB962C8B-B14F-4D97-AF65-F5344CB8AC3E}">
-        <p14:creationId xmlns:p14="http://schemas.microsoft.com/office/powerpoint/2010/main" val="1296220257"/>
-      </p:ext>
-    </p:extLst>
-  </p:cSld>
-  <p:clrMapOvr>
-    <a:masterClrMapping/>
-  </p:clrMapOvr>
-</p:sld>
-</file>
-
-<file path=ppt/slides/slide13.xml><?xml version="1.0" encoding="utf-8"?>
-<p:sld xmlns:a="http://schemas.openxmlformats.org/drawingml/2006/main" xmlns:r="http://schemas.openxmlformats.org/officeDocument/2006/relationships" xmlns:p="http://schemas.openxmlformats.org/presentationml/2006/main">
-  <p:cSld>
-    <p:spTree>
-      <p:nvGrpSpPr>
-        <p:cNvPr id="1" name=""/>
-        <p:cNvGrpSpPr/>
-        <p:nvPr/>
-      </p:nvGrpSpPr>
-      <p:grpSpPr>
-        <a:xfrm>
-          <a:off x="0" y="0"/>
-          <a:ext cx="0" cy="0"/>
-          <a:chOff x="0" y="0"/>
-          <a:chExt cx="0" cy="0"/>
-        </a:xfrm>
-      </p:grpSpPr>
-      <p:sp>
-        <p:nvSpPr>
-          <p:cNvPr id="2" name="Title 1">
-            <a:extLst>
-              <a:ext uri="{FF2B5EF4-FFF2-40B4-BE49-F238E27FC236}">
-                <a16:creationId xmlns:a16="http://schemas.microsoft.com/office/drawing/2014/main" id="{71229BF8-5FC7-E80A-487C-9E6097900E90}"/>
-              </a:ext>
-            </a:extLst>
-          </p:cNvPr>
-          <p:cNvSpPr>
-            <a:spLocks noGrp="1"/>
-          </p:cNvSpPr>
-          <p:nvPr>
-            <p:ph type="title"/>
-          </p:nvPr>
-        </p:nvSpPr>
-        <p:spPr/>
-        <p:txBody>
-          <a:bodyPr/>
-          <a:lstStyle/>
-          <a:p>
-            <a:r>
-              <a:rPr lang="en-US" dirty="0">
-                <a:solidFill>
-                  <a:schemeClr val="accent1"/>
-                </a:solidFill>
-                <a:highlight>
-                  <a:srgbClr val="FFFF00"/>
-                </a:highlight>
               </a:rPr>
               <a:t>Course Material on GitHub</a:t>
             </a:r>
@@ -8226,13 +7953,34 @@
               <a:buNone/>
             </a:pPr>
             <a:r>
+              <a:rPr lang="en-US" dirty="0">
+                <a:solidFill>
+                  <a:schemeClr val="accent1"/>
+                </a:solidFill>
+              </a:rPr>
+              <a:t>https://</a:t>
+            </a:r>
+            <a:r>
               <a:rPr lang="en-US" dirty="0" err="1">
                 <a:solidFill>
                   <a:schemeClr val="accent1"/>
                 </a:solidFill>
-                <a:highlight>
-                  <a:srgbClr val="FFFF00"/>
-                </a:highlight>
+              </a:rPr>
+              <a:t>github.com</a:t>
+            </a:r>
+            <a:r>
+              <a:rPr lang="en-US" dirty="0">
+                <a:solidFill>
+                  <a:schemeClr val="accent1"/>
+                </a:solidFill>
+              </a:rPr>
+              <a:t>/</a:t>
+            </a:r>
+            <a:r>
+              <a:rPr lang="en-US" dirty="0" err="1">
+                <a:solidFill>
+                  <a:schemeClr val="accent1"/>
+                </a:solidFill>
               </a:rPr>
               <a:t>noellelebe</a:t>
             </a:r>
@@ -8241,17 +7989,25 @@
                 <a:solidFill>
                   <a:schemeClr val="accent1"/>
                 </a:solidFill>
-                <a:highlight>
-                  <a:srgbClr val="FFFF00"/>
-                </a:highlight>
               </a:rPr>
               <a:t>/</a:t>
             </a:r>
-            <a:endParaRPr lang="en-US" dirty="0">
-              <a:solidFill>
-                <a:schemeClr val="accent1"/>
-              </a:solidFill>
-            </a:endParaRPr>
+            <a:r>
+              <a:rPr lang="en-US" dirty="0" err="1">
+                <a:solidFill>
+                  <a:schemeClr val="accent1"/>
+                </a:solidFill>
+              </a:rPr>
+              <a:t>methodsNET_vlop</a:t>
+            </a:r>
+            <a:r>
+              <a:rPr lang="en-US" dirty="0">
+                <a:solidFill>
+                  <a:schemeClr val="accent1"/>
+                </a:solidFill>
+              </a:rPr>
+              <a:t>-course-materials</a:t>
+            </a:r>
           </a:p>
         </p:txBody>
       </p:sp>
@@ -8268,7 +8024,7 @@
 </p:sld>
 </file>
 
-<file path=ppt/slides/slide14.xml><?xml version="1.0" encoding="utf-8"?>
+<file path=ppt/slides/slide11.xml><?xml version="1.0" encoding="utf-8"?>
 <p:sld xmlns:a="http://schemas.openxmlformats.org/drawingml/2006/main" xmlns:r="http://schemas.openxmlformats.org/officeDocument/2006/relationships" xmlns:p="http://schemas.openxmlformats.org/presentationml/2006/main">
   <p:cSld>
     <p:spTree>
@@ -8395,7 +8151,7 @@
 </p:sld>
 </file>
 
-<file path=ppt/slides/slide15.xml><?xml version="1.0" encoding="utf-8"?>
+<file path=ppt/slides/slide12.xml><?xml version="1.0" encoding="utf-8"?>
 <p:sld xmlns:a="http://schemas.openxmlformats.org/drawingml/2006/main" xmlns:r="http://schemas.openxmlformats.org/officeDocument/2006/relationships" xmlns:p="http://schemas.openxmlformats.org/presentationml/2006/main">
   <p:cSld>
     <p:spTree>
@@ -8444,9 +8200,6 @@
                 <a:solidFill>
                   <a:schemeClr val="accent1"/>
                 </a:solidFill>
-                <a:highlight>
-                  <a:srgbClr val="FFFF00"/>
-                </a:highlight>
               </a:rPr>
               <a:t>Introduction</a:t>
             </a:r>
@@ -8538,6 +8291,17 @@
                 </a:solidFill>
               </a:rPr>
               <a:t>What kind of data you would like to collect or access</a:t>
+            </a:r>
+          </a:p>
+          <a:p>
+            <a:pPr lvl="1"/>
+            <a:r>
+              <a:rPr lang="en-US" dirty="0">
+                <a:solidFill>
+                  <a:schemeClr val="accent1"/>
+                </a:solidFill>
+              </a:rPr>
+              <a:t>…</a:t>
             </a:r>
           </a:p>
         </p:txBody>
@@ -8555,7 +8319,7 @@
 </p:sld>
 </file>
 
-<file path=ppt/slides/slide16.xml><?xml version="1.0" encoding="utf-8"?>
+<file path=ppt/slides/slide13.xml><?xml version="1.0" encoding="utf-8"?>
 <p:sld xmlns:a="http://schemas.openxmlformats.org/drawingml/2006/main" xmlns:r="http://schemas.openxmlformats.org/officeDocument/2006/relationships" xmlns:p="http://schemas.openxmlformats.org/presentationml/2006/main">
   <p:cSld>
     <p:spTree>
@@ -8671,43 +8435,56 @@
           </a:p>
           <a:p>
             <a:r>
+              <a:rPr lang="en-US" sz="2400" u="sng" dirty="0">
+                <a:solidFill>
+                  <a:schemeClr val="accent1"/>
+                </a:solidFill>
+              </a:rPr>
+              <a:t>The technical route</a:t>
+            </a:r>
+            <a:r>
               <a:rPr lang="en-US" sz="2400" dirty="0">
                 <a:solidFill>
                   <a:schemeClr val="accent1"/>
                 </a:solidFill>
               </a:rPr>
-              <a:t>the technical route: such as API, scraping, dashboard, download</a:t>
-            </a:r>
-          </a:p>
-          <a:p>
+              <a:t>: such as API, scraping, dashboard, download</a:t>
+            </a:r>
+          </a:p>
+          <a:p>
+            <a:r>
+              <a:rPr lang="en-US" sz="2400" u="sng" dirty="0">
+                <a:solidFill>
+                  <a:schemeClr val="accent1"/>
+                </a:solidFill>
+              </a:rPr>
+              <a:t>The rules</a:t>
+            </a:r>
             <a:r>
               <a:rPr lang="en-US" sz="2400" dirty="0">
                 <a:solidFill>
                   <a:schemeClr val="accent1"/>
                 </a:solidFill>
               </a:rPr>
-              <a:t>the rules: </a:t>
+              <a:t>: such as terms of service, eligibility, law, terms, regulation, data protection</a:t>
+            </a:r>
+          </a:p>
+          <a:p>
+            <a:r>
+              <a:rPr lang="en-US" sz="2400" u="sng" dirty="0">
+                <a:solidFill>
+                  <a:schemeClr val="accent1"/>
+                </a:solidFill>
+              </a:rPr>
+              <a:t>The limits</a:t>
             </a:r>
             <a:r>
               <a:rPr lang="en-US" sz="2400" dirty="0">
                 <a:solidFill>
                   <a:schemeClr val="accent1"/>
                 </a:solidFill>
-                <a:highlight>
-                  <a:srgbClr val="FFFF00"/>
-                </a:highlight>
-              </a:rPr>
-              <a:t>such as terms of service, eligibility, law, terms, regulation, data protection</a:t>
-            </a:r>
-          </a:p>
-          <a:p>
-            <a:r>
-              <a:rPr lang="en-US" sz="2400" dirty="0">
-                <a:solidFill>
-                  <a:schemeClr val="accent1"/>
-                </a:solidFill>
-              </a:rPr>
-              <a:t>the limits: such as fields, rate limits, time periods, and records are available</a:t>
+              </a:rPr>
+              <a:t>: such as fields, rate limits, time periods, and records are available</a:t>
             </a:r>
           </a:p>
           <a:p>
@@ -8735,7 +8512,7 @@
 </p:sld>
 </file>
 
-<file path=ppt/slides/slide17.xml><?xml version="1.0" encoding="utf-8"?>
+<file path=ppt/slides/slide14.xml><?xml version="1.0" encoding="utf-8"?>
 <p:sld xmlns:a="http://schemas.openxmlformats.org/drawingml/2006/main" xmlns:r="http://schemas.openxmlformats.org/officeDocument/2006/relationships" xmlns:p="http://schemas.openxmlformats.org/presentationml/2006/main">
   <p:cSld>
     <p:spTree>
@@ -8855,6 +8632,16 @@
                   <a:schemeClr val="accent1"/>
                 </a:solidFill>
               </a:rPr>
+              <a:t>what gets filtered, ranked, hidden, or removed</a:t>
+            </a:r>
+          </a:p>
+          <a:p>
+            <a:r>
+              <a:rPr lang="en-US" sz="2400" dirty="0">
+                <a:solidFill>
+                  <a:schemeClr val="accent1"/>
+                </a:solidFill>
+              </a:rPr>
               <a:t>what laws and terms permit</a:t>
             </a:r>
           </a:p>
@@ -8867,23 +8654,6 @@
               </a:rPr>
               <a:t>what technical systems return</a:t>
             </a:r>
-          </a:p>
-          <a:p>
-            <a:r>
-              <a:rPr lang="en-US" sz="2400" dirty="0">
-                <a:solidFill>
-                  <a:schemeClr val="accent1"/>
-                </a:solidFill>
-              </a:rPr>
-              <a:t>what gets filtered, ranked, hidden, or removed</a:t>
-            </a:r>
-          </a:p>
-          <a:p>
-            <a:endParaRPr lang="en-US" dirty="0">
-              <a:solidFill>
-                <a:schemeClr val="accent1"/>
-              </a:solidFill>
-            </a:endParaRPr>
           </a:p>
         </p:txBody>
       </p:sp>
@@ -8900,7 +8670,7 @@
 </p:sld>
 </file>
 
-<file path=ppt/slides/slide18.xml><?xml version="1.0" encoding="utf-8"?>
+<file path=ppt/slides/slide15.xml><?xml version="1.0" encoding="utf-8"?>
 <p:sld xmlns:a="http://schemas.openxmlformats.org/drawingml/2006/main" xmlns:r="http://schemas.openxmlformats.org/officeDocument/2006/relationships" xmlns:p="http://schemas.openxmlformats.org/presentationml/2006/main">
   <p:cSld>
     <p:spTree>
@@ -9038,19 +8808,6 @@
                 <a:solidFill>
                   <a:schemeClr val="accent1"/>
                 </a:solidFill>
-                <a:highlight>
-                  <a:srgbClr val="FFFF00"/>
-                </a:highlight>
-              </a:rPr>
-              <a:t>Ad libraries / ad repositories</a:t>
-            </a:r>
-          </a:p>
-          <a:p>
-            <a:r>
-              <a:rPr lang="en-US" sz="2400" dirty="0">
-                <a:solidFill>
-                  <a:schemeClr val="accent1"/>
-                </a:solidFill>
               </a:rPr>
               <a:t>DSA-based researcher access</a:t>
             </a:r>
@@ -9080,7 +8837,7 @@
 </p:sld>
 </file>
 
-<file path=ppt/slides/slide19.xml><?xml version="1.0" encoding="utf-8"?>
+<file path=ppt/slides/slide16.xml><?xml version="1.0" encoding="utf-8"?>
 <p:sld xmlns:a="http://schemas.openxmlformats.org/drawingml/2006/main" xmlns:r="http://schemas.openxmlformats.org/officeDocument/2006/relationships" xmlns:p="http://schemas.openxmlformats.org/presentationml/2006/main">
   <p:cSld>
     <p:spTree>
@@ -9278,6 +9035,782 @@
     <p:extLst>
       <p:ext uri="{BB962C8B-B14F-4D97-AF65-F5344CB8AC3E}">
         <p14:creationId xmlns:p14="http://schemas.microsoft.com/office/powerpoint/2010/main" val="1033258951"/>
+      </p:ext>
+    </p:extLst>
+  </p:cSld>
+  <p:clrMapOvr>
+    <a:masterClrMapping/>
+  </p:clrMapOvr>
+</p:sld>
+</file>
+
+<file path=ppt/slides/slide17.xml><?xml version="1.0" encoding="utf-8"?>
+<p:sld xmlns:a="http://schemas.openxmlformats.org/drawingml/2006/main" xmlns:r="http://schemas.openxmlformats.org/officeDocument/2006/relationships" xmlns:p="http://schemas.openxmlformats.org/presentationml/2006/main">
+  <p:cSld>
+    <p:spTree>
+      <p:nvGrpSpPr>
+        <p:cNvPr id="1" name="">
+          <a:extLst>
+            <a:ext uri="{FF2B5EF4-FFF2-40B4-BE49-F238E27FC236}">
+              <a16:creationId xmlns:a16="http://schemas.microsoft.com/office/drawing/2014/main" id="{6F85FCED-5867-3CEC-4C21-A289828F72A9}"/>
+            </a:ext>
+          </a:extLst>
+        </p:cNvPr>
+        <p:cNvGrpSpPr/>
+        <p:nvPr/>
+      </p:nvGrpSpPr>
+      <p:grpSpPr>
+        <a:xfrm>
+          <a:off x="0" y="0"/>
+          <a:ext cx="0" cy="0"/>
+          <a:chOff x="0" y="0"/>
+          <a:chExt cx="0" cy="0"/>
+        </a:xfrm>
+      </p:grpSpPr>
+      <p:sp>
+        <p:nvSpPr>
+          <p:cNvPr id="2" name="Title 1">
+            <a:extLst>
+              <a:ext uri="{FF2B5EF4-FFF2-40B4-BE49-F238E27FC236}">
+                <a16:creationId xmlns:a16="http://schemas.microsoft.com/office/drawing/2014/main" id="{AEDFAAF4-E704-EAC2-F0BA-30C3C9E64250}"/>
+              </a:ext>
+            </a:extLst>
+          </p:cNvPr>
+          <p:cNvSpPr>
+            <a:spLocks noGrp="1"/>
+          </p:cNvSpPr>
+          <p:nvPr>
+            <p:ph type="title"/>
+          </p:nvPr>
+        </p:nvSpPr>
+        <p:spPr/>
+        <p:txBody>
+          <a:bodyPr/>
+          <a:lstStyle/>
+          <a:p>
+            <a:r>
+              <a:rPr lang="en-US" dirty="0">
+                <a:solidFill>
+                  <a:schemeClr val="accent1"/>
+                </a:solidFill>
+              </a:rPr>
+              <a:t>Application Programming Interface (APIs)</a:t>
+            </a:r>
+          </a:p>
+        </p:txBody>
+      </p:sp>
+      <p:sp>
+        <p:nvSpPr>
+          <p:cNvPr id="3" name="Content Placeholder 2">
+            <a:extLst>
+              <a:ext uri="{FF2B5EF4-FFF2-40B4-BE49-F238E27FC236}">
+                <a16:creationId xmlns:a16="http://schemas.microsoft.com/office/drawing/2014/main" id="{EBFBB2FC-8B49-9FCE-AA15-B17490AAD194}"/>
+              </a:ext>
+            </a:extLst>
+          </p:cNvPr>
+          <p:cNvSpPr>
+            <a:spLocks noGrp="1"/>
+          </p:cNvSpPr>
+          <p:nvPr>
+            <p:ph idx="1"/>
+          </p:nvPr>
+        </p:nvSpPr>
+        <p:spPr>
+          <a:xfrm>
+            <a:off x="838200" y="1720525"/>
+            <a:ext cx="5257800" cy="4351338"/>
+          </a:xfrm>
+        </p:spPr>
+        <p:txBody>
+          <a:bodyPr/>
+          <a:lstStyle/>
+          <a:p>
+            <a:pPr marL="0" indent="0">
+              <a:buNone/>
+            </a:pPr>
+            <a:r>
+              <a:rPr lang="en-US" dirty="0">
+                <a:solidFill>
+                  <a:schemeClr val="accent1"/>
+                </a:solidFill>
+              </a:rPr>
+              <a:t>Strengths:</a:t>
+            </a:r>
+          </a:p>
+          <a:p>
+            <a:r>
+              <a:rPr lang="en-US" dirty="0">
+                <a:solidFill>
+                  <a:schemeClr val="accent1"/>
+                </a:solidFill>
+              </a:rPr>
+              <a:t>structured responses</a:t>
+            </a:r>
+          </a:p>
+          <a:p>
+            <a:r>
+              <a:rPr lang="en-US" dirty="0">
+                <a:solidFill>
+                  <a:schemeClr val="accent1"/>
+                </a:solidFill>
+              </a:rPr>
+              <a:t>explicit parameters</a:t>
+            </a:r>
+          </a:p>
+          <a:p>
+            <a:r>
+              <a:rPr lang="en-US" dirty="0">
+                <a:solidFill>
+                  <a:schemeClr val="accent1"/>
+                </a:solidFill>
+              </a:rPr>
+              <a:t>reproducible requests</a:t>
+            </a:r>
+          </a:p>
+          <a:p>
+            <a:r>
+              <a:rPr lang="en-US" dirty="0">
+                <a:solidFill>
+                  <a:schemeClr val="accent1"/>
+                </a:solidFill>
+              </a:rPr>
+              <a:t>often easier to document</a:t>
+            </a:r>
+          </a:p>
+          <a:p>
+            <a:r>
+              <a:rPr lang="en-US" dirty="0">
+                <a:solidFill>
+                  <a:schemeClr val="accent1"/>
+                </a:solidFill>
+              </a:rPr>
+              <a:t>…</a:t>
+            </a:r>
+          </a:p>
+        </p:txBody>
+      </p:sp>
+      <p:sp>
+        <p:nvSpPr>
+          <p:cNvPr id="4" name="Content Placeholder 2">
+            <a:extLst>
+              <a:ext uri="{FF2B5EF4-FFF2-40B4-BE49-F238E27FC236}">
+                <a16:creationId xmlns:a16="http://schemas.microsoft.com/office/drawing/2014/main" id="{873C2B2A-F5CA-9A72-7FF2-8D4E3E72C4D8}"/>
+              </a:ext>
+            </a:extLst>
+          </p:cNvPr>
+          <p:cNvSpPr txBox="1">
+            <a:spLocks/>
+          </p:cNvSpPr>
+          <p:nvPr/>
+        </p:nvSpPr>
+        <p:spPr>
+          <a:xfrm>
+            <a:off x="6095999" y="1690688"/>
+            <a:ext cx="5802775" cy="4351338"/>
+          </a:xfrm>
+          <a:prstGeom prst="rect">
+            <a:avLst/>
+          </a:prstGeom>
+        </p:spPr>
+        <p:txBody>
+          <a:bodyPr vert="horz" lIns="91440" tIns="45720" rIns="91440" bIns="45720" rtlCol="0">
+            <a:normAutofit/>
+          </a:bodyPr>
+          <a:lstStyle>
+            <a:lvl1pPr marL="228600" indent="-228600" algn="l" defTabSz="914400" rtl="0" eaLnBrk="1" latinLnBrk="0" hangingPunct="1">
+              <a:lnSpc>
+                <a:spcPct val="90000"/>
+              </a:lnSpc>
+              <a:spcBef>
+                <a:spcPts val="1000"/>
+              </a:spcBef>
+              <a:buFont typeface="Arial" panose="020B0604020202020204" pitchFamily="34" charset="0"/>
+              <a:buChar char="•"/>
+              <a:defRPr sz="2800" kern="1200">
+                <a:solidFill>
+                  <a:schemeClr val="tx1"/>
+                </a:solidFill>
+                <a:latin typeface="+mn-lt"/>
+                <a:ea typeface="+mn-ea"/>
+                <a:cs typeface="+mn-cs"/>
+              </a:defRPr>
+            </a:lvl1pPr>
+            <a:lvl2pPr marL="685800" indent="-228600" algn="l" defTabSz="914400" rtl="0" eaLnBrk="1" latinLnBrk="0" hangingPunct="1">
+              <a:lnSpc>
+                <a:spcPct val="90000"/>
+              </a:lnSpc>
+              <a:spcBef>
+                <a:spcPts val="500"/>
+              </a:spcBef>
+              <a:buFont typeface="Arial" panose="020B0604020202020204" pitchFamily="34" charset="0"/>
+              <a:buChar char="•"/>
+              <a:defRPr sz="2400" kern="1200">
+                <a:solidFill>
+                  <a:schemeClr val="tx1"/>
+                </a:solidFill>
+                <a:latin typeface="+mn-lt"/>
+                <a:ea typeface="+mn-ea"/>
+                <a:cs typeface="+mn-cs"/>
+              </a:defRPr>
+            </a:lvl2pPr>
+            <a:lvl3pPr marL="1143000" indent="-228600" algn="l" defTabSz="914400" rtl="0" eaLnBrk="1" latinLnBrk="0" hangingPunct="1">
+              <a:lnSpc>
+                <a:spcPct val="90000"/>
+              </a:lnSpc>
+              <a:spcBef>
+                <a:spcPts val="500"/>
+              </a:spcBef>
+              <a:buFont typeface="Arial" panose="020B0604020202020204" pitchFamily="34" charset="0"/>
+              <a:buChar char="•"/>
+              <a:defRPr sz="2000" kern="1200">
+                <a:solidFill>
+                  <a:schemeClr val="tx1"/>
+                </a:solidFill>
+                <a:latin typeface="+mn-lt"/>
+                <a:ea typeface="+mn-ea"/>
+                <a:cs typeface="+mn-cs"/>
+              </a:defRPr>
+            </a:lvl3pPr>
+            <a:lvl4pPr marL="1600200" indent="-228600" algn="l" defTabSz="914400" rtl="0" eaLnBrk="1" latinLnBrk="0" hangingPunct="1">
+              <a:lnSpc>
+                <a:spcPct val="90000"/>
+              </a:lnSpc>
+              <a:spcBef>
+                <a:spcPts val="500"/>
+              </a:spcBef>
+              <a:buFont typeface="Arial" panose="020B0604020202020204" pitchFamily="34" charset="0"/>
+              <a:buChar char="•"/>
+              <a:defRPr sz="1800" kern="1200">
+                <a:solidFill>
+                  <a:schemeClr val="tx1"/>
+                </a:solidFill>
+                <a:latin typeface="+mn-lt"/>
+                <a:ea typeface="+mn-ea"/>
+                <a:cs typeface="+mn-cs"/>
+              </a:defRPr>
+            </a:lvl4pPr>
+            <a:lvl5pPr marL="2057400" indent="-228600" algn="l" defTabSz="914400" rtl="0" eaLnBrk="1" latinLnBrk="0" hangingPunct="1">
+              <a:lnSpc>
+                <a:spcPct val="90000"/>
+              </a:lnSpc>
+              <a:spcBef>
+                <a:spcPts val="500"/>
+              </a:spcBef>
+              <a:buFont typeface="Arial" panose="020B0604020202020204" pitchFamily="34" charset="0"/>
+              <a:buChar char="•"/>
+              <a:defRPr sz="1800" kern="1200">
+                <a:solidFill>
+                  <a:schemeClr val="tx1"/>
+                </a:solidFill>
+                <a:latin typeface="+mn-lt"/>
+                <a:ea typeface="+mn-ea"/>
+                <a:cs typeface="+mn-cs"/>
+              </a:defRPr>
+            </a:lvl5pPr>
+            <a:lvl6pPr marL="2514600" indent="-228600" algn="l" defTabSz="914400" rtl="0" eaLnBrk="1" latinLnBrk="0" hangingPunct="1">
+              <a:lnSpc>
+                <a:spcPct val="90000"/>
+              </a:lnSpc>
+              <a:spcBef>
+                <a:spcPts val="500"/>
+              </a:spcBef>
+              <a:buFont typeface="Arial" panose="020B0604020202020204" pitchFamily="34" charset="0"/>
+              <a:buChar char="•"/>
+              <a:defRPr sz="1800" kern="1200">
+                <a:solidFill>
+                  <a:schemeClr val="tx1"/>
+                </a:solidFill>
+                <a:latin typeface="+mn-lt"/>
+                <a:ea typeface="+mn-ea"/>
+                <a:cs typeface="+mn-cs"/>
+              </a:defRPr>
+            </a:lvl6pPr>
+            <a:lvl7pPr marL="2971800" indent="-228600" algn="l" defTabSz="914400" rtl="0" eaLnBrk="1" latinLnBrk="0" hangingPunct="1">
+              <a:lnSpc>
+                <a:spcPct val="90000"/>
+              </a:lnSpc>
+              <a:spcBef>
+                <a:spcPts val="500"/>
+              </a:spcBef>
+              <a:buFont typeface="Arial" panose="020B0604020202020204" pitchFamily="34" charset="0"/>
+              <a:buChar char="•"/>
+              <a:defRPr sz="1800" kern="1200">
+                <a:solidFill>
+                  <a:schemeClr val="tx1"/>
+                </a:solidFill>
+                <a:latin typeface="+mn-lt"/>
+                <a:ea typeface="+mn-ea"/>
+                <a:cs typeface="+mn-cs"/>
+              </a:defRPr>
+            </a:lvl7pPr>
+            <a:lvl8pPr marL="3429000" indent="-228600" algn="l" defTabSz="914400" rtl="0" eaLnBrk="1" latinLnBrk="0" hangingPunct="1">
+              <a:lnSpc>
+                <a:spcPct val="90000"/>
+              </a:lnSpc>
+              <a:spcBef>
+                <a:spcPts val="500"/>
+              </a:spcBef>
+              <a:buFont typeface="Arial" panose="020B0604020202020204" pitchFamily="34" charset="0"/>
+              <a:buChar char="•"/>
+              <a:defRPr sz="1800" kern="1200">
+                <a:solidFill>
+                  <a:schemeClr val="tx1"/>
+                </a:solidFill>
+                <a:latin typeface="+mn-lt"/>
+                <a:ea typeface="+mn-ea"/>
+                <a:cs typeface="+mn-cs"/>
+              </a:defRPr>
+            </a:lvl8pPr>
+            <a:lvl9pPr marL="3886200" indent="-228600" algn="l" defTabSz="914400" rtl="0" eaLnBrk="1" latinLnBrk="0" hangingPunct="1">
+              <a:lnSpc>
+                <a:spcPct val="90000"/>
+              </a:lnSpc>
+              <a:spcBef>
+                <a:spcPts val="500"/>
+              </a:spcBef>
+              <a:buFont typeface="Arial" panose="020B0604020202020204" pitchFamily="34" charset="0"/>
+              <a:buChar char="•"/>
+              <a:defRPr sz="1800" kern="1200">
+                <a:solidFill>
+                  <a:schemeClr val="tx1"/>
+                </a:solidFill>
+                <a:latin typeface="+mn-lt"/>
+                <a:ea typeface="+mn-ea"/>
+                <a:cs typeface="+mn-cs"/>
+              </a:defRPr>
+            </a:lvl9pPr>
+          </a:lstStyle>
+          <a:p>
+            <a:pPr marL="0" indent="0">
+              <a:buNone/>
+            </a:pPr>
+            <a:r>
+              <a:rPr lang="en-US" dirty="0">
+                <a:solidFill>
+                  <a:schemeClr val="accent1"/>
+                </a:solidFill>
+              </a:rPr>
+              <a:t>Limitations:</a:t>
+            </a:r>
+          </a:p>
+          <a:p>
+            <a:r>
+              <a:rPr lang="en-US" sz="2400" dirty="0">
+                <a:solidFill>
+                  <a:schemeClr val="accent1"/>
+                </a:solidFill>
+              </a:rPr>
+              <a:t>platform decides fields and limits</a:t>
+            </a:r>
+          </a:p>
+          <a:p>
+            <a:r>
+              <a:rPr lang="en-US" sz="2400" dirty="0">
+                <a:solidFill>
+                  <a:schemeClr val="accent1"/>
+                </a:solidFill>
+              </a:rPr>
+              <a:t>rate limits and authentication</a:t>
+            </a:r>
+          </a:p>
+          <a:p>
+            <a:r>
+              <a:rPr lang="en-US" sz="2400" dirty="0">
+                <a:solidFill>
+                  <a:schemeClr val="accent1"/>
+                </a:solidFill>
+              </a:rPr>
+              <a:t>missing deleted/hidden/ranked content</a:t>
+            </a:r>
+          </a:p>
+          <a:p>
+            <a:r>
+              <a:rPr lang="en-US" sz="2400" dirty="0">
+                <a:solidFill>
+                  <a:schemeClr val="accent1"/>
+                </a:solidFill>
+              </a:rPr>
+              <a:t>API data may not match user experience</a:t>
+            </a:r>
+          </a:p>
+          <a:p>
+            <a:r>
+              <a:rPr lang="en-US" sz="2400" dirty="0">
+                <a:solidFill>
+                  <a:schemeClr val="accent1"/>
+                </a:solidFill>
+              </a:rPr>
+              <a:t>…</a:t>
+            </a:r>
+          </a:p>
+        </p:txBody>
+      </p:sp>
+    </p:spTree>
+    <p:extLst>
+      <p:ext uri="{BB962C8B-B14F-4D97-AF65-F5344CB8AC3E}">
+        <p14:creationId xmlns:p14="http://schemas.microsoft.com/office/powerpoint/2010/main" val="3093061389"/>
+      </p:ext>
+    </p:extLst>
+  </p:cSld>
+  <p:clrMapOvr>
+    <a:masterClrMapping/>
+  </p:clrMapOvr>
+</p:sld>
+</file>
+
+<file path=ppt/slides/slide18.xml><?xml version="1.0" encoding="utf-8"?>
+<p:sld xmlns:a="http://schemas.openxmlformats.org/drawingml/2006/main" xmlns:r="http://schemas.openxmlformats.org/officeDocument/2006/relationships" xmlns:p="http://schemas.openxmlformats.org/presentationml/2006/main">
+  <p:cSld>
+    <p:spTree>
+      <p:nvGrpSpPr>
+        <p:cNvPr id="1" name="">
+          <a:extLst>
+            <a:ext uri="{FF2B5EF4-FFF2-40B4-BE49-F238E27FC236}">
+              <a16:creationId xmlns:a16="http://schemas.microsoft.com/office/drawing/2014/main" id="{6EC81003-1423-E720-7073-B9D958F454BB}"/>
+            </a:ext>
+          </a:extLst>
+        </p:cNvPr>
+        <p:cNvGrpSpPr/>
+        <p:nvPr/>
+      </p:nvGrpSpPr>
+      <p:grpSpPr>
+        <a:xfrm>
+          <a:off x="0" y="0"/>
+          <a:ext cx="0" cy="0"/>
+          <a:chOff x="0" y="0"/>
+          <a:chExt cx="0" cy="0"/>
+        </a:xfrm>
+      </p:grpSpPr>
+      <p:sp>
+        <p:nvSpPr>
+          <p:cNvPr id="2" name="Title 1">
+            <a:extLst>
+              <a:ext uri="{FF2B5EF4-FFF2-40B4-BE49-F238E27FC236}">
+                <a16:creationId xmlns:a16="http://schemas.microsoft.com/office/drawing/2014/main" id="{871B0238-5E7C-682D-C652-A6A3EFC6167C}"/>
+              </a:ext>
+            </a:extLst>
+          </p:cNvPr>
+          <p:cNvSpPr>
+            <a:spLocks noGrp="1"/>
+          </p:cNvSpPr>
+          <p:nvPr>
+            <p:ph type="title"/>
+          </p:nvPr>
+        </p:nvSpPr>
+        <p:spPr/>
+        <p:txBody>
+          <a:bodyPr/>
+          <a:lstStyle/>
+          <a:p>
+            <a:r>
+              <a:rPr lang="en-US" dirty="0">
+                <a:solidFill>
+                  <a:schemeClr val="accent1"/>
+                </a:solidFill>
+              </a:rPr>
+              <a:t>Platform Research Tools</a:t>
+            </a:r>
+          </a:p>
+        </p:txBody>
+      </p:sp>
+      <p:sp>
+        <p:nvSpPr>
+          <p:cNvPr id="3" name="Content Placeholder 2">
+            <a:extLst>
+              <a:ext uri="{FF2B5EF4-FFF2-40B4-BE49-F238E27FC236}">
+                <a16:creationId xmlns:a16="http://schemas.microsoft.com/office/drawing/2014/main" id="{A499C35C-DD6C-0D3F-B153-6102EEB3EBC3}"/>
+              </a:ext>
+            </a:extLst>
+          </p:cNvPr>
+          <p:cNvSpPr>
+            <a:spLocks noGrp="1"/>
+          </p:cNvSpPr>
+          <p:nvPr>
+            <p:ph idx="1"/>
+          </p:nvPr>
+        </p:nvSpPr>
+        <p:spPr>
+          <a:xfrm>
+            <a:off x="838200" y="1720525"/>
+            <a:ext cx="10515600" cy="4351338"/>
+          </a:xfrm>
+        </p:spPr>
+        <p:txBody>
+          <a:bodyPr/>
+          <a:lstStyle/>
+          <a:p>
+            <a:pPr marL="0" indent="0">
+              <a:buNone/>
+            </a:pPr>
+            <a:r>
+              <a:rPr lang="en-US" dirty="0">
+                <a:solidFill>
+                  <a:schemeClr val="accent1"/>
+                </a:solidFill>
+              </a:rPr>
+              <a:t>Platform-provided or platform-mediated systems for research/transparency access</a:t>
+            </a:r>
+          </a:p>
+          <a:p>
+            <a:pPr marL="0" indent="0">
+              <a:buNone/>
+            </a:pPr>
+            <a:r>
+              <a:rPr lang="en-US" dirty="0">
+                <a:solidFill>
+                  <a:schemeClr val="accent1"/>
+                </a:solidFill>
+              </a:rPr>
+              <a:t>Examples:</a:t>
+            </a:r>
+          </a:p>
+          <a:p>
+            <a:r>
+              <a:rPr lang="en-US" sz="2400" dirty="0">
+                <a:solidFill>
+                  <a:schemeClr val="accent1"/>
+                </a:solidFill>
+              </a:rPr>
+              <a:t>Meta Content Library</a:t>
+            </a:r>
+          </a:p>
+          <a:p>
+            <a:r>
+              <a:rPr lang="en-US" sz="2400" dirty="0">
+                <a:solidFill>
+                  <a:schemeClr val="accent1"/>
+                </a:solidFill>
+              </a:rPr>
+              <a:t>TikTok Research API</a:t>
+            </a:r>
+          </a:p>
+          <a:p>
+            <a:r>
+              <a:rPr lang="en-US" sz="2400" dirty="0">
+                <a:solidFill>
+                  <a:schemeClr val="accent1"/>
+                </a:solidFill>
+              </a:rPr>
+              <a:t>YouTube Data API</a:t>
+            </a:r>
+          </a:p>
+          <a:p>
+            <a:r>
+              <a:rPr lang="en-US" sz="2400" dirty="0">
+                <a:solidFill>
+                  <a:schemeClr val="accent1"/>
+                </a:solidFill>
+              </a:rPr>
+              <a:t>platform transparency dashboards</a:t>
+            </a:r>
+          </a:p>
+          <a:p>
+            <a:r>
+              <a:rPr lang="en-US" sz="2400" dirty="0">
+                <a:solidFill>
+                  <a:schemeClr val="accent1"/>
+                </a:solidFill>
+              </a:rPr>
+              <a:t>downloadable platform reports</a:t>
+            </a:r>
+          </a:p>
+          <a:p>
+            <a:pPr marL="0" indent="0">
+              <a:buNone/>
+            </a:pPr>
+            <a:endParaRPr lang="en-US" dirty="0">
+              <a:solidFill>
+                <a:schemeClr val="accent1"/>
+              </a:solidFill>
+            </a:endParaRPr>
+          </a:p>
+        </p:txBody>
+      </p:sp>
+    </p:spTree>
+    <p:extLst>
+      <p:ext uri="{BB962C8B-B14F-4D97-AF65-F5344CB8AC3E}">
+        <p14:creationId xmlns:p14="http://schemas.microsoft.com/office/powerpoint/2010/main" val="1331255853"/>
+      </p:ext>
+    </p:extLst>
+  </p:cSld>
+  <p:clrMapOvr>
+    <a:masterClrMapping/>
+  </p:clrMapOvr>
+</p:sld>
+</file>
+
+<file path=ppt/slides/slide19.xml><?xml version="1.0" encoding="utf-8"?>
+<p:sld xmlns:a="http://schemas.openxmlformats.org/drawingml/2006/main" xmlns:r="http://schemas.openxmlformats.org/officeDocument/2006/relationships" xmlns:p="http://schemas.openxmlformats.org/presentationml/2006/main">
+  <p:cSld>
+    <p:spTree>
+      <p:nvGrpSpPr>
+        <p:cNvPr id="1" name="">
+          <a:extLst>
+            <a:ext uri="{FF2B5EF4-FFF2-40B4-BE49-F238E27FC236}">
+              <a16:creationId xmlns:a16="http://schemas.microsoft.com/office/drawing/2014/main" id="{817727D5-E676-1EAA-6C59-A27B4E3A51DB}"/>
+            </a:ext>
+          </a:extLst>
+        </p:cNvPr>
+        <p:cNvGrpSpPr/>
+        <p:nvPr/>
+      </p:nvGrpSpPr>
+      <p:grpSpPr>
+        <a:xfrm>
+          <a:off x="0" y="0"/>
+          <a:ext cx="0" cy="0"/>
+          <a:chOff x="0" y="0"/>
+          <a:chExt cx="0" cy="0"/>
+        </a:xfrm>
+      </p:grpSpPr>
+      <p:sp>
+        <p:nvSpPr>
+          <p:cNvPr id="2" name="Title 1">
+            <a:extLst>
+              <a:ext uri="{FF2B5EF4-FFF2-40B4-BE49-F238E27FC236}">
+                <a16:creationId xmlns:a16="http://schemas.microsoft.com/office/drawing/2014/main" id="{BAE7202B-33AB-A05D-3BAA-FF6A292EE0B9}"/>
+              </a:ext>
+            </a:extLst>
+          </p:cNvPr>
+          <p:cNvSpPr>
+            <a:spLocks noGrp="1"/>
+          </p:cNvSpPr>
+          <p:nvPr>
+            <p:ph type="title"/>
+          </p:nvPr>
+        </p:nvSpPr>
+        <p:spPr/>
+        <p:txBody>
+          <a:bodyPr/>
+          <a:lstStyle/>
+          <a:p>
+            <a:r>
+              <a:rPr lang="en-US" dirty="0">
+                <a:solidFill>
+                  <a:schemeClr val="accent1"/>
+                </a:solidFill>
+              </a:rPr>
+              <a:t>Web Scraping</a:t>
+            </a:r>
+          </a:p>
+        </p:txBody>
+      </p:sp>
+      <p:sp>
+        <p:nvSpPr>
+          <p:cNvPr id="3" name="Content Placeholder 2">
+            <a:extLst>
+              <a:ext uri="{FF2B5EF4-FFF2-40B4-BE49-F238E27FC236}">
+                <a16:creationId xmlns:a16="http://schemas.microsoft.com/office/drawing/2014/main" id="{2BE79331-EC8D-5108-C22F-E547A2A52021}"/>
+              </a:ext>
+            </a:extLst>
+          </p:cNvPr>
+          <p:cNvSpPr>
+            <a:spLocks noGrp="1"/>
+          </p:cNvSpPr>
+          <p:nvPr>
+            <p:ph idx="1"/>
+          </p:nvPr>
+        </p:nvSpPr>
+        <p:spPr>
+          <a:xfrm>
+            <a:off x="838200" y="1720525"/>
+            <a:ext cx="10515600" cy="4351338"/>
+          </a:xfrm>
+        </p:spPr>
+        <p:txBody>
+          <a:bodyPr/>
+          <a:lstStyle/>
+          <a:p>
+            <a:pPr marL="0" indent="0">
+              <a:buNone/>
+            </a:pPr>
+            <a:r>
+              <a:rPr lang="en-US" dirty="0">
+                <a:solidFill>
+                  <a:schemeClr val="accent1"/>
+                </a:solidFill>
+              </a:rPr>
+              <a:t>With web scraping, we can collect data from web pages</a:t>
+            </a:r>
+          </a:p>
+          <a:p>
+            <a:pPr marL="0" indent="0">
+              <a:buNone/>
+            </a:pPr>
+            <a:r>
+              <a:rPr lang="en-US" dirty="0">
+                <a:solidFill>
+                  <a:schemeClr val="accent1"/>
+                </a:solidFill>
+              </a:rPr>
+              <a:t>Useful when:</a:t>
+            </a:r>
+          </a:p>
+          <a:p>
+            <a:r>
+              <a:rPr lang="en-US" sz="2400" dirty="0">
+                <a:solidFill>
+                  <a:schemeClr val="accent1"/>
+                </a:solidFill>
+              </a:rPr>
+              <a:t>there is no suitable API</a:t>
+            </a:r>
+          </a:p>
+          <a:p>
+            <a:r>
+              <a:rPr lang="en-US" sz="2400" dirty="0">
+                <a:solidFill>
+                  <a:schemeClr val="accent1"/>
+                </a:solidFill>
+              </a:rPr>
+              <a:t>the public interface itself matters</a:t>
+            </a:r>
+          </a:p>
+          <a:p>
+            <a:r>
+              <a:rPr lang="en-US" sz="2400" dirty="0">
+                <a:solidFill>
+                  <a:schemeClr val="accent1"/>
+                </a:solidFill>
+              </a:rPr>
+              <a:t>data are visible in HTML</a:t>
+            </a:r>
+          </a:p>
+          <a:p>
+            <a:r>
+              <a:rPr lang="en-US" sz="2400" dirty="0">
+                <a:solidFill>
+                  <a:schemeClr val="accent1"/>
+                </a:solidFill>
+              </a:rPr>
+              <a:t>…</a:t>
+            </a:r>
+          </a:p>
+          <a:p>
+            <a:pPr marL="0" indent="0">
+              <a:buNone/>
+            </a:pPr>
+            <a:endParaRPr lang="en-US" dirty="0">
+              <a:solidFill>
+                <a:schemeClr val="accent1"/>
+              </a:solidFill>
+            </a:endParaRPr>
+          </a:p>
+          <a:p>
+            <a:pPr marL="0" indent="0">
+              <a:buNone/>
+            </a:pPr>
+            <a:endParaRPr lang="en-US" dirty="0">
+              <a:solidFill>
+                <a:schemeClr val="accent1"/>
+              </a:solidFill>
+            </a:endParaRPr>
+          </a:p>
+        </p:txBody>
+      </p:sp>
+    </p:spTree>
+    <p:extLst>
+      <p:ext uri="{BB962C8B-B14F-4D97-AF65-F5344CB8AC3E}">
+        <p14:creationId xmlns:p14="http://schemas.microsoft.com/office/powerpoint/2010/main" val="490916571"/>
       </p:ext>
     </p:extLst>
   </p:cSld>
@@ -9387,11 +9920,8 @@
                 <a:solidFill>
                   <a:schemeClr val="accent1"/>
                 </a:solidFill>
-                <a:highlight>
-                  <a:srgbClr val="FFFF00"/>
-                </a:highlight>
-              </a:rPr>
-              <a:t>Overview of access regimes</a:t>
+              </a:rPr>
+              <a:t>Brief overview of access regimes</a:t>
             </a:r>
           </a:p>
           <a:p>
@@ -9400,11 +9930,8 @@
                 <a:solidFill>
                   <a:schemeClr val="accent1"/>
                 </a:solidFill>
-                <a:highlight>
-                  <a:srgbClr val="FFFF00"/>
-                </a:highlight>
-              </a:rPr>
-              <a:t>API Basics and First Request</a:t>
+              </a:rPr>
+              <a:t>API Basics and first request</a:t>
             </a:r>
           </a:p>
           <a:p>
@@ -9413,9 +9940,6 @@
                 <a:solidFill>
                   <a:schemeClr val="accent1"/>
                 </a:solidFill>
-                <a:highlight>
-                  <a:srgbClr val="FFFF00"/>
-                </a:highlight>
               </a:rPr>
               <a:t>In-class exercise</a:t>
             </a:r>
@@ -9443,7 +9967,7 @@
         <p:cNvPr id="1" name="">
           <a:extLst>
             <a:ext uri="{FF2B5EF4-FFF2-40B4-BE49-F238E27FC236}">
-              <a16:creationId xmlns:a16="http://schemas.microsoft.com/office/drawing/2014/main" id="{087CD3F5-C242-B6B1-1133-A2068066DD0F}"/>
+              <a16:creationId xmlns:a16="http://schemas.microsoft.com/office/drawing/2014/main" id="{91096C4C-D37E-2AFA-72FE-5B3D6D88EC36}"/>
             </a:ext>
           </a:extLst>
         </p:cNvPr>
@@ -9463,7 +9987,7 @@
           <p:cNvPr id="2" name="Title 1">
             <a:extLst>
               <a:ext uri="{FF2B5EF4-FFF2-40B4-BE49-F238E27FC236}">
-                <a16:creationId xmlns:a16="http://schemas.microsoft.com/office/drawing/2014/main" id="{53036915-8E87-9E14-0E36-8D827C5A355C}"/>
+                <a16:creationId xmlns:a16="http://schemas.microsoft.com/office/drawing/2014/main" id="{E094D2BA-9944-7BF2-983E-5243100D4293}"/>
               </a:ext>
             </a:extLst>
           </p:cNvPr>
@@ -9485,7 +10009,7 @@
                   <a:schemeClr val="accent1"/>
                 </a:solidFill>
               </a:rPr>
-              <a:t>Application Programming Interface (APIs)</a:t>
+              <a:t>Web Scraping</a:t>
             </a:r>
           </a:p>
         </p:txBody>
@@ -9495,7 +10019,7 @@
           <p:cNvPr id="3" name="Content Placeholder 2">
             <a:extLst>
               <a:ext uri="{FF2B5EF4-FFF2-40B4-BE49-F238E27FC236}">
-                <a16:creationId xmlns:a16="http://schemas.microsoft.com/office/drawing/2014/main" id="{CCB1944F-E47B-46B2-E39A-689F11BF37EF}"/>
+                <a16:creationId xmlns:a16="http://schemas.microsoft.com/office/drawing/2014/main" id="{71034C3E-022F-7CCF-3430-64CCD8679D05}"/>
               </a:ext>
             </a:extLst>
           </p:cNvPr>
@@ -9509,7 +10033,7 @@
         <p:spPr>
           <a:xfrm>
             <a:off x="838200" y="1720525"/>
-            <a:ext cx="10515600" cy="4351338"/>
+            <a:ext cx="5257800" cy="4351338"/>
           </a:xfrm>
         </p:spPr>
         <p:txBody>
@@ -9530,12 +10054,271 @@
           </a:p>
           <a:p>
             <a:r>
+              <a:rPr lang="en-US" dirty="0">
+                <a:solidFill>
+                  <a:schemeClr val="accent1"/>
+                </a:solidFill>
+              </a:rPr>
+              <a:t>observes browser-facing content</a:t>
+            </a:r>
+          </a:p>
+          <a:p>
+            <a:r>
+              <a:rPr lang="en-US" dirty="0">
+                <a:solidFill>
+                  <a:schemeClr val="accent1"/>
+                </a:solidFill>
+              </a:rPr>
+              <a:t>flexible across websites</a:t>
+            </a:r>
+          </a:p>
+          <a:p>
+            <a:r>
+              <a:rPr lang="en-US" dirty="0">
+                <a:solidFill>
+                  <a:schemeClr val="accent1"/>
+                </a:solidFill>
+              </a:rPr>
+              <a:t>can capture layout/context</a:t>
+            </a:r>
+          </a:p>
+          <a:p>
+            <a:pPr marL="0" indent="0">
+              <a:buNone/>
+            </a:pPr>
+            <a:r>
+              <a:rPr lang="en-US" dirty="0">
+                <a:solidFill>
+                  <a:schemeClr val="accent1"/>
+                </a:solidFill>
+              </a:rPr>
+              <a:t>…</a:t>
+            </a:r>
+          </a:p>
+          <a:p>
+            <a:pPr marL="0" indent="0">
+              <a:buNone/>
+            </a:pPr>
+            <a:endParaRPr lang="en-US" dirty="0">
+              <a:solidFill>
+                <a:schemeClr val="accent1"/>
+              </a:solidFill>
+            </a:endParaRPr>
+          </a:p>
+        </p:txBody>
+      </p:sp>
+      <p:sp>
+        <p:nvSpPr>
+          <p:cNvPr id="4" name="Content Placeholder 2">
+            <a:extLst>
+              <a:ext uri="{FF2B5EF4-FFF2-40B4-BE49-F238E27FC236}">
+                <a16:creationId xmlns:a16="http://schemas.microsoft.com/office/drawing/2014/main" id="{A9B7B13C-0906-97A8-E234-1C7E75F54591}"/>
+              </a:ext>
+            </a:extLst>
+          </p:cNvPr>
+          <p:cNvSpPr txBox="1">
+            <a:spLocks/>
+          </p:cNvSpPr>
+          <p:nvPr/>
+        </p:nvSpPr>
+        <p:spPr>
+          <a:xfrm>
+            <a:off x="6096000" y="1690688"/>
+            <a:ext cx="5352326" cy="4351338"/>
+          </a:xfrm>
+          <a:prstGeom prst="rect">
+            <a:avLst/>
+          </a:prstGeom>
+        </p:spPr>
+        <p:txBody>
+          <a:bodyPr vert="horz" lIns="91440" tIns="45720" rIns="91440" bIns="45720" rtlCol="0">
+            <a:normAutofit/>
+          </a:bodyPr>
+          <a:lstStyle>
+            <a:lvl1pPr marL="228600" indent="-228600" algn="l" defTabSz="914400" rtl="0" eaLnBrk="1" latinLnBrk="0" hangingPunct="1">
+              <a:lnSpc>
+                <a:spcPct val="90000"/>
+              </a:lnSpc>
+              <a:spcBef>
+                <a:spcPts val="1000"/>
+              </a:spcBef>
+              <a:buFont typeface="Arial" panose="020B0604020202020204" pitchFamily="34" charset="0"/>
+              <a:buChar char="•"/>
+              <a:defRPr sz="2800" kern="1200">
+                <a:solidFill>
+                  <a:schemeClr val="tx1"/>
+                </a:solidFill>
+                <a:latin typeface="+mn-lt"/>
+                <a:ea typeface="+mn-ea"/>
+                <a:cs typeface="+mn-cs"/>
+              </a:defRPr>
+            </a:lvl1pPr>
+            <a:lvl2pPr marL="685800" indent="-228600" algn="l" defTabSz="914400" rtl="0" eaLnBrk="1" latinLnBrk="0" hangingPunct="1">
+              <a:lnSpc>
+                <a:spcPct val="90000"/>
+              </a:lnSpc>
+              <a:spcBef>
+                <a:spcPts val="500"/>
+              </a:spcBef>
+              <a:buFont typeface="Arial" panose="020B0604020202020204" pitchFamily="34" charset="0"/>
+              <a:buChar char="•"/>
+              <a:defRPr sz="2400" kern="1200">
+                <a:solidFill>
+                  <a:schemeClr val="tx1"/>
+                </a:solidFill>
+                <a:latin typeface="+mn-lt"/>
+                <a:ea typeface="+mn-ea"/>
+                <a:cs typeface="+mn-cs"/>
+              </a:defRPr>
+            </a:lvl2pPr>
+            <a:lvl3pPr marL="1143000" indent="-228600" algn="l" defTabSz="914400" rtl="0" eaLnBrk="1" latinLnBrk="0" hangingPunct="1">
+              <a:lnSpc>
+                <a:spcPct val="90000"/>
+              </a:lnSpc>
+              <a:spcBef>
+                <a:spcPts val="500"/>
+              </a:spcBef>
+              <a:buFont typeface="Arial" panose="020B0604020202020204" pitchFamily="34" charset="0"/>
+              <a:buChar char="•"/>
+              <a:defRPr sz="2000" kern="1200">
+                <a:solidFill>
+                  <a:schemeClr val="tx1"/>
+                </a:solidFill>
+                <a:latin typeface="+mn-lt"/>
+                <a:ea typeface="+mn-ea"/>
+                <a:cs typeface="+mn-cs"/>
+              </a:defRPr>
+            </a:lvl3pPr>
+            <a:lvl4pPr marL="1600200" indent="-228600" algn="l" defTabSz="914400" rtl="0" eaLnBrk="1" latinLnBrk="0" hangingPunct="1">
+              <a:lnSpc>
+                <a:spcPct val="90000"/>
+              </a:lnSpc>
+              <a:spcBef>
+                <a:spcPts val="500"/>
+              </a:spcBef>
+              <a:buFont typeface="Arial" panose="020B0604020202020204" pitchFamily="34" charset="0"/>
+              <a:buChar char="•"/>
+              <a:defRPr sz="1800" kern="1200">
+                <a:solidFill>
+                  <a:schemeClr val="tx1"/>
+                </a:solidFill>
+                <a:latin typeface="+mn-lt"/>
+                <a:ea typeface="+mn-ea"/>
+                <a:cs typeface="+mn-cs"/>
+              </a:defRPr>
+            </a:lvl4pPr>
+            <a:lvl5pPr marL="2057400" indent="-228600" algn="l" defTabSz="914400" rtl="0" eaLnBrk="1" latinLnBrk="0" hangingPunct="1">
+              <a:lnSpc>
+                <a:spcPct val="90000"/>
+              </a:lnSpc>
+              <a:spcBef>
+                <a:spcPts val="500"/>
+              </a:spcBef>
+              <a:buFont typeface="Arial" panose="020B0604020202020204" pitchFamily="34" charset="0"/>
+              <a:buChar char="•"/>
+              <a:defRPr sz="1800" kern="1200">
+                <a:solidFill>
+                  <a:schemeClr val="tx1"/>
+                </a:solidFill>
+                <a:latin typeface="+mn-lt"/>
+                <a:ea typeface="+mn-ea"/>
+                <a:cs typeface="+mn-cs"/>
+              </a:defRPr>
+            </a:lvl5pPr>
+            <a:lvl6pPr marL="2514600" indent="-228600" algn="l" defTabSz="914400" rtl="0" eaLnBrk="1" latinLnBrk="0" hangingPunct="1">
+              <a:lnSpc>
+                <a:spcPct val="90000"/>
+              </a:lnSpc>
+              <a:spcBef>
+                <a:spcPts val="500"/>
+              </a:spcBef>
+              <a:buFont typeface="Arial" panose="020B0604020202020204" pitchFamily="34" charset="0"/>
+              <a:buChar char="•"/>
+              <a:defRPr sz="1800" kern="1200">
+                <a:solidFill>
+                  <a:schemeClr val="tx1"/>
+                </a:solidFill>
+                <a:latin typeface="+mn-lt"/>
+                <a:ea typeface="+mn-ea"/>
+                <a:cs typeface="+mn-cs"/>
+              </a:defRPr>
+            </a:lvl6pPr>
+            <a:lvl7pPr marL="2971800" indent="-228600" algn="l" defTabSz="914400" rtl="0" eaLnBrk="1" latinLnBrk="0" hangingPunct="1">
+              <a:lnSpc>
+                <a:spcPct val="90000"/>
+              </a:lnSpc>
+              <a:spcBef>
+                <a:spcPts val="500"/>
+              </a:spcBef>
+              <a:buFont typeface="Arial" panose="020B0604020202020204" pitchFamily="34" charset="0"/>
+              <a:buChar char="•"/>
+              <a:defRPr sz="1800" kern="1200">
+                <a:solidFill>
+                  <a:schemeClr val="tx1"/>
+                </a:solidFill>
+                <a:latin typeface="+mn-lt"/>
+                <a:ea typeface="+mn-ea"/>
+                <a:cs typeface="+mn-cs"/>
+              </a:defRPr>
+            </a:lvl7pPr>
+            <a:lvl8pPr marL="3429000" indent="-228600" algn="l" defTabSz="914400" rtl="0" eaLnBrk="1" latinLnBrk="0" hangingPunct="1">
+              <a:lnSpc>
+                <a:spcPct val="90000"/>
+              </a:lnSpc>
+              <a:spcBef>
+                <a:spcPts val="500"/>
+              </a:spcBef>
+              <a:buFont typeface="Arial" panose="020B0604020202020204" pitchFamily="34" charset="0"/>
+              <a:buChar char="•"/>
+              <a:defRPr sz="1800" kern="1200">
+                <a:solidFill>
+                  <a:schemeClr val="tx1"/>
+                </a:solidFill>
+                <a:latin typeface="+mn-lt"/>
+                <a:ea typeface="+mn-ea"/>
+                <a:cs typeface="+mn-cs"/>
+              </a:defRPr>
+            </a:lvl8pPr>
+            <a:lvl9pPr marL="3886200" indent="-228600" algn="l" defTabSz="914400" rtl="0" eaLnBrk="1" latinLnBrk="0" hangingPunct="1">
+              <a:lnSpc>
+                <a:spcPct val="90000"/>
+              </a:lnSpc>
+              <a:spcBef>
+                <a:spcPts val="500"/>
+              </a:spcBef>
+              <a:buFont typeface="Arial" panose="020B0604020202020204" pitchFamily="34" charset="0"/>
+              <a:buChar char="•"/>
+              <a:defRPr sz="1800" kern="1200">
+                <a:solidFill>
+                  <a:schemeClr val="tx1"/>
+                </a:solidFill>
+                <a:latin typeface="+mn-lt"/>
+                <a:ea typeface="+mn-ea"/>
+                <a:cs typeface="+mn-cs"/>
+              </a:defRPr>
+            </a:lvl9pPr>
+          </a:lstStyle>
+          <a:p>
+            <a:pPr marL="0" indent="0">
+              <a:buNone/>
+            </a:pPr>
+            <a:r>
+              <a:rPr lang="en-US" dirty="0">
+                <a:solidFill>
+                  <a:schemeClr val="accent1"/>
+                </a:solidFill>
+              </a:rPr>
+              <a:t>Limitations:</a:t>
+            </a:r>
+          </a:p>
+          <a:p>
+            <a:r>
               <a:rPr lang="en-US" sz="2400" dirty="0">
                 <a:solidFill>
                   <a:schemeClr val="accent1"/>
                 </a:solidFill>
               </a:rPr>
-              <a:t>structured responses</a:t>
+              <a:t>fragile selectors</a:t>
             </a:r>
           </a:p>
           <a:p>
@@ -9545,7 +10328,7 @@
                   <a:schemeClr val="accent1"/>
                 </a:solidFill>
               </a:rPr>
-              <a:t>explicit parameters</a:t>
+              <a:t>dynamic pages may hide content from requests</a:t>
             </a:r>
           </a:p>
           <a:p>
@@ -9555,7 +10338,7 @@
                   <a:schemeClr val="accent1"/>
                 </a:solidFill>
               </a:rPr>
-              <a:t>reproducible requests</a:t>
+              <a:t>pages can change without warning</a:t>
             </a:r>
           </a:p>
           <a:p>
@@ -9565,10 +10348,13 @@
                   <a:schemeClr val="accent1"/>
                 </a:solidFill>
               </a:rPr>
-              <a:t>often easier to document</a:t>
-            </a:r>
-          </a:p>
-          <a:p>
+              <a:t>legal/ethical constraints</a:t>
+            </a:r>
+          </a:p>
+          <a:p>
+            <a:pPr marL="0" indent="0">
+              <a:buNone/>
+            </a:pPr>
             <a:r>
               <a:rPr lang="en-US" sz="2400" dirty="0">
                 <a:solidFill>
@@ -9577,13 +10363,24 @@
               </a:rPr>
               <a:t>…</a:t>
             </a:r>
+          </a:p>
+          <a:p>
+            <a:pPr marL="0" indent="0">
+              <a:buFont typeface="Arial" panose="020B0604020202020204" pitchFamily="34" charset="0"/>
+              <a:buNone/>
+            </a:pPr>
+            <a:endParaRPr lang="en-US" dirty="0">
+              <a:solidFill>
+                <a:schemeClr val="accent1"/>
+              </a:solidFill>
+            </a:endParaRPr>
           </a:p>
         </p:txBody>
       </p:sp>
     </p:spTree>
     <p:extLst>
       <p:ext uri="{BB962C8B-B14F-4D97-AF65-F5344CB8AC3E}">
-        <p14:creationId xmlns:p14="http://schemas.microsoft.com/office/powerpoint/2010/main" val="4075116205"/>
+        <p14:creationId xmlns:p14="http://schemas.microsoft.com/office/powerpoint/2010/main" val="431266242"/>
       </p:ext>
     </p:extLst>
   </p:cSld>
@@ -9601,7 +10398,7 @@
         <p:cNvPr id="1" name="">
           <a:extLst>
             <a:ext uri="{FF2B5EF4-FFF2-40B4-BE49-F238E27FC236}">
-              <a16:creationId xmlns:a16="http://schemas.microsoft.com/office/drawing/2014/main" id="{871FCB30-7146-8156-FED5-5E71F8ADBE46}"/>
+              <a16:creationId xmlns:a16="http://schemas.microsoft.com/office/drawing/2014/main" id="{3F787A8E-2204-AE00-F268-C2A7D74740CC}"/>
             </a:ext>
           </a:extLst>
         </p:cNvPr>
@@ -9621,7 +10418,7 @@
           <p:cNvPr id="2" name="Title 1">
             <a:extLst>
               <a:ext uri="{FF2B5EF4-FFF2-40B4-BE49-F238E27FC236}">
-                <a16:creationId xmlns:a16="http://schemas.microsoft.com/office/drawing/2014/main" id="{8FD6F6F9-5999-E75B-7830-BBFCB33430D4}"/>
+                <a16:creationId xmlns:a16="http://schemas.microsoft.com/office/drawing/2014/main" id="{72B26E73-AF84-D637-2F3E-00A03B6A1659}"/>
               </a:ext>
             </a:extLst>
           </p:cNvPr>
@@ -9643,7 +10440,7 @@
                   <a:schemeClr val="accent1"/>
                 </a:solidFill>
               </a:rPr>
-              <a:t>Application Programming Interface (APIs)</a:t>
+              <a:t>Browser Automation</a:t>
             </a:r>
           </a:p>
         </p:txBody>
@@ -9653,7 +10450,7 @@
           <p:cNvPr id="3" name="Content Placeholder 2">
             <a:extLst>
               <a:ext uri="{FF2B5EF4-FFF2-40B4-BE49-F238E27FC236}">
-                <a16:creationId xmlns:a16="http://schemas.microsoft.com/office/drawing/2014/main" id="{10126D2F-E58C-F763-BDA7-98FC0AD74633}"/>
+                <a16:creationId xmlns:a16="http://schemas.microsoft.com/office/drawing/2014/main" id="{DC647414-CC22-620D-B647-80F20AED8484}"/>
               </a:ext>
             </a:extLst>
           </p:cNvPr>
@@ -9667,7 +10464,7 @@
         <p:spPr>
           <a:xfrm>
             <a:off x="838200" y="1720525"/>
-            <a:ext cx="10515600" cy="4351338"/>
+            <a:ext cx="5257800" cy="4351338"/>
           </a:xfrm>
         </p:spPr>
         <p:txBody>
@@ -9683,7 +10480,7 @@
                   <a:schemeClr val="accent1"/>
                 </a:solidFill>
               </a:rPr>
-              <a:t>Limitations:</a:t>
+              <a:t>Useful when:</a:t>
             </a:r>
           </a:p>
           <a:p>
@@ -9693,7 +10490,7 @@
                   <a:schemeClr val="accent1"/>
                 </a:solidFill>
               </a:rPr>
-              <a:t>platform decides fields and limits</a:t>
+              <a:t>designed for transparency</a:t>
             </a:r>
           </a:p>
           <a:p>
@@ -9703,7 +10500,7 @@
                   <a:schemeClr val="accent1"/>
                 </a:solidFill>
               </a:rPr>
-              <a:t>rate limits and authentication</a:t>
+              <a:t>often searchable</a:t>
             </a:r>
           </a:p>
           <a:p>
@@ -9713,27 +10510,7 @@
                   <a:schemeClr val="accent1"/>
                 </a:solidFill>
               </a:rPr>
-              <a:t>missing deleted/hidden/ranked content</a:t>
-            </a:r>
-          </a:p>
-          <a:p>
-            <a:r>
-              <a:rPr lang="en-US" sz="2400" dirty="0">
-                <a:solidFill>
-                  <a:schemeClr val="accent1"/>
-                </a:solidFill>
-              </a:rPr>
-              <a:t>API data may not match user experience</a:t>
-            </a:r>
-          </a:p>
-          <a:p>
-            <a:r>
-              <a:rPr lang="en-US" sz="2400" dirty="0">
-                <a:solidFill>
-                  <a:schemeClr val="accent1"/>
-                </a:solidFill>
-              </a:rPr>
-              <a:t>…</a:t>
+              <a:t>useful for moderation or advertising research</a:t>
             </a:r>
           </a:p>
           <a:p>
@@ -9748,10 +10525,268 @@
           </a:p>
         </p:txBody>
       </p:sp>
+      <p:sp>
+        <p:nvSpPr>
+          <p:cNvPr id="4" name="Content Placeholder 2">
+            <a:extLst>
+              <a:ext uri="{FF2B5EF4-FFF2-40B4-BE49-F238E27FC236}">
+                <a16:creationId xmlns:a16="http://schemas.microsoft.com/office/drawing/2014/main" id="{7EDF7131-4FA3-1492-916A-4DC38587AAA1}"/>
+              </a:ext>
+            </a:extLst>
+          </p:cNvPr>
+          <p:cNvSpPr txBox="1">
+            <a:spLocks/>
+          </p:cNvSpPr>
+          <p:nvPr/>
+        </p:nvSpPr>
+        <p:spPr>
+          <a:xfrm>
+            <a:off x="6095999" y="1690688"/>
+            <a:ext cx="5802775" cy="4351338"/>
+          </a:xfrm>
+          <a:prstGeom prst="rect">
+            <a:avLst/>
+          </a:prstGeom>
+        </p:spPr>
+        <p:txBody>
+          <a:bodyPr vert="horz" lIns="91440" tIns="45720" rIns="91440" bIns="45720" rtlCol="0">
+            <a:normAutofit/>
+          </a:bodyPr>
+          <a:lstStyle>
+            <a:lvl1pPr marL="228600" indent="-228600" algn="l" defTabSz="914400" rtl="0" eaLnBrk="1" latinLnBrk="0" hangingPunct="1">
+              <a:lnSpc>
+                <a:spcPct val="90000"/>
+              </a:lnSpc>
+              <a:spcBef>
+                <a:spcPts val="1000"/>
+              </a:spcBef>
+              <a:buFont typeface="Arial" panose="020B0604020202020204" pitchFamily="34" charset="0"/>
+              <a:buChar char="•"/>
+              <a:defRPr sz="2800" kern="1200">
+                <a:solidFill>
+                  <a:schemeClr val="tx1"/>
+                </a:solidFill>
+                <a:latin typeface="+mn-lt"/>
+                <a:ea typeface="+mn-ea"/>
+                <a:cs typeface="+mn-cs"/>
+              </a:defRPr>
+            </a:lvl1pPr>
+            <a:lvl2pPr marL="685800" indent="-228600" algn="l" defTabSz="914400" rtl="0" eaLnBrk="1" latinLnBrk="0" hangingPunct="1">
+              <a:lnSpc>
+                <a:spcPct val="90000"/>
+              </a:lnSpc>
+              <a:spcBef>
+                <a:spcPts val="500"/>
+              </a:spcBef>
+              <a:buFont typeface="Arial" panose="020B0604020202020204" pitchFamily="34" charset="0"/>
+              <a:buChar char="•"/>
+              <a:defRPr sz="2400" kern="1200">
+                <a:solidFill>
+                  <a:schemeClr val="tx1"/>
+                </a:solidFill>
+                <a:latin typeface="+mn-lt"/>
+                <a:ea typeface="+mn-ea"/>
+                <a:cs typeface="+mn-cs"/>
+              </a:defRPr>
+            </a:lvl2pPr>
+            <a:lvl3pPr marL="1143000" indent="-228600" algn="l" defTabSz="914400" rtl="0" eaLnBrk="1" latinLnBrk="0" hangingPunct="1">
+              <a:lnSpc>
+                <a:spcPct val="90000"/>
+              </a:lnSpc>
+              <a:spcBef>
+                <a:spcPts val="500"/>
+              </a:spcBef>
+              <a:buFont typeface="Arial" panose="020B0604020202020204" pitchFamily="34" charset="0"/>
+              <a:buChar char="•"/>
+              <a:defRPr sz="2000" kern="1200">
+                <a:solidFill>
+                  <a:schemeClr val="tx1"/>
+                </a:solidFill>
+                <a:latin typeface="+mn-lt"/>
+                <a:ea typeface="+mn-ea"/>
+                <a:cs typeface="+mn-cs"/>
+              </a:defRPr>
+            </a:lvl3pPr>
+            <a:lvl4pPr marL="1600200" indent="-228600" algn="l" defTabSz="914400" rtl="0" eaLnBrk="1" latinLnBrk="0" hangingPunct="1">
+              <a:lnSpc>
+                <a:spcPct val="90000"/>
+              </a:lnSpc>
+              <a:spcBef>
+                <a:spcPts val="500"/>
+              </a:spcBef>
+              <a:buFont typeface="Arial" panose="020B0604020202020204" pitchFamily="34" charset="0"/>
+              <a:buChar char="•"/>
+              <a:defRPr sz="1800" kern="1200">
+                <a:solidFill>
+                  <a:schemeClr val="tx1"/>
+                </a:solidFill>
+                <a:latin typeface="+mn-lt"/>
+                <a:ea typeface="+mn-ea"/>
+                <a:cs typeface="+mn-cs"/>
+              </a:defRPr>
+            </a:lvl4pPr>
+            <a:lvl5pPr marL="2057400" indent="-228600" algn="l" defTabSz="914400" rtl="0" eaLnBrk="1" latinLnBrk="0" hangingPunct="1">
+              <a:lnSpc>
+                <a:spcPct val="90000"/>
+              </a:lnSpc>
+              <a:spcBef>
+                <a:spcPts val="500"/>
+              </a:spcBef>
+              <a:buFont typeface="Arial" panose="020B0604020202020204" pitchFamily="34" charset="0"/>
+              <a:buChar char="•"/>
+              <a:defRPr sz="1800" kern="1200">
+                <a:solidFill>
+                  <a:schemeClr val="tx1"/>
+                </a:solidFill>
+                <a:latin typeface="+mn-lt"/>
+                <a:ea typeface="+mn-ea"/>
+                <a:cs typeface="+mn-cs"/>
+              </a:defRPr>
+            </a:lvl5pPr>
+            <a:lvl6pPr marL="2514600" indent="-228600" algn="l" defTabSz="914400" rtl="0" eaLnBrk="1" latinLnBrk="0" hangingPunct="1">
+              <a:lnSpc>
+                <a:spcPct val="90000"/>
+              </a:lnSpc>
+              <a:spcBef>
+                <a:spcPts val="500"/>
+              </a:spcBef>
+              <a:buFont typeface="Arial" panose="020B0604020202020204" pitchFamily="34" charset="0"/>
+              <a:buChar char="•"/>
+              <a:defRPr sz="1800" kern="1200">
+                <a:solidFill>
+                  <a:schemeClr val="tx1"/>
+                </a:solidFill>
+                <a:latin typeface="+mn-lt"/>
+                <a:ea typeface="+mn-ea"/>
+                <a:cs typeface="+mn-cs"/>
+              </a:defRPr>
+            </a:lvl6pPr>
+            <a:lvl7pPr marL="2971800" indent="-228600" algn="l" defTabSz="914400" rtl="0" eaLnBrk="1" latinLnBrk="0" hangingPunct="1">
+              <a:lnSpc>
+                <a:spcPct val="90000"/>
+              </a:lnSpc>
+              <a:spcBef>
+                <a:spcPts val="500"/>
+              </a:spcBef>
+              <a:buFont typeface="Arial" panose="020B0604020202020204" pitchFamily="34" charset="0"/>
+              <a:buChar char="•"/>
+              <a:defRPr sz="1800" kern="1200">
+                <a:solidFill>
+                  <a:schemeClr val="tx1"/>
+                </a:solidFill>
+                <a:latin typeface="+mn-lt"/>
+                <a:ea typeface="+mn-ea"/>
+                <a:cs typeface="+mn-cs"/>
+              </a:defRPr>
+            </a:lvl7pPr>
+            <a:lvl8pPr marL="3429000" indent="-228600" algn="l" defTabSz="914400" rtl="0" eaLnBrk="1" latinLnBrk="0" hangingPunct="1">
+              <a:lnSpc>
+                <a:spcPct val="90000"/>
+              </a:lnSpc>
+              <a:spcBef>
+                <a:spcPts val="500"/>
+              </a:spcBef>
+              <a:buFont typeface="Arial" panose="020B0604020202020204" pitchFamily="34" charset="0"/>
+              <a:buChar char="•"/>
+              <a:defRPr sz="1800" kern="1200">
+                <a:solidFill>
+                  <a:schemeClr val="tx1"/>
+                </a:solidFill>
+                <a:latin typeface="+mn-lt"/>
+                <a:ea typeface="+mn-ea"/>
+                <a:cs typeface="+mn-cs"/>
+              </a:defRPr>
+            </a:lvl8pPr>
+            <a:lvl9pPr marL="3886200" indent="-228600" algn="l" defTabSz="914400" rtl="0" eaLnBrk="1" latinLnBrk="0" hangingPunct="1">
+              <a:lnSpc>
+                <a:spcPct val="90000"/>
+              </a:lnSpc>
+              <a:spcBef>
+                <a:spcPts val="500"/>
+              </a:spcBef>
+              <a:buFont typeface="Arial" panose="020B0604020202020204" pitchFamily="34" charset="0"/>
+              <a:buChar char="•"/>
+              <a:defRPr sz="1800" kern="1200">
+                <a:solidFill>
+                  <a:schemeClr val="tx1"/>
+                </a:solidFill>
+                <a:latin typeface="+mn-lt"/>
+                <a:ea typeface="+mn-ea"/>
+                <a:cs typeface="+mn-cs"/>
+              </a:defRPr>
+            </a:lvl9pPr>
+          </a:lstStyle>
+          <a:p>
+            <a:pPr marL="0" indent="0">
+              <a:buFont typeface="Arial" panose="020B0604020202020204" pitchFamily="34" charset="0"/>
+              <a:buNone/>
+            </a:pPr>
+            <a:r>
+              <a:rPr lang="en-US" dirty="0">
+                <a:solidFill>
+                  <a:schemeClr val="accent1"/>
+                </a:solidFill>
+              </a:rPr>
+              <a:t>Limitations:</a:t>
+            </a:r>
+          </a:p>
+          <a:p>
+            <a:r>
+              <a:rPr lang="en-US" sz="2400" dirty="0">
+                <a:solidFill>
+                  <a:schemeClr val="accent1"/>
+                </a:solidFill>
+              </a:rPr>
+              <a:t>slower and more brittle</a:t>
+            </a:r>
+          </a:p>
+          <a:p>
+            <a:r>
+              <a:rPr lang="en-US" sz="2400" dirty="0">
+                <a:solidFill>
+                  <a:schemeClr val="accent1"/>
+                </a:solidFill>
+              </a:rPr>
+              <a:t>more server load</a:t>
+            </a:r>
+          </a:p>
+          <a:p>
+            <a:r>
+              <a:rPr lang="en-US" sz="2400" dirty="0">
+                <a:solidFill>
+                  <a:schemeClr val="accent1"/>
+                </a:solidFill>
+              </a:rPr>
+              <a:t>waiting/scrolling choices can affect results</a:t>
+            </a:r>
+          </a:p>
+          <a:p>
+            <a:r>
+              <a:rPr lang="en-US" sz="2400" dirty="0">
+                <a:solidFill>
+                  <a:schemeClr val="accent1"/>
+                </a:solidFill>
+              </a:rPr>
+              <a:t>should not be used to bypass controls</a:t>
+            </a:r>
+          </a:p>
+          <a:p>
+            <a:pPr marL="0" indent="0">
+              <a:buFont typeface="Arial" panose="020B0604020202020204" pitchFamily="34" charset="0"/>
+              <a:buNone/>
+            </a:pPr>
+            <a:endParaRPr lang="en-US" dirty="0">
+              <a:solidFill>
+                <a:schemeClr val="accent1"/>
+              </a:solidFill>
+            </a:endParaRPr>
+          </a:p>
+        </p:txBody>
+      </p:sp>
     </p:spTree>
     <p:extLst>
       <p:ext uri="{BB962C8B-B14F-4D97-AF65-F5344CB8AC3E}">
-        <p14:creationId xmlns:p14="http://schemas.microsoft.com/office/powerpoint/2010/main" val="1815937841"/>
+        <p14:creationId xmlns:p14="http://schemas.microsoft.com/office/powerpoint/2010/main" val="1630702811"/>
       </p:ext>
     </p:extLst>
   </p:cSld>
@@ -9762,1141 +10797,6 @@
 </file>
 
 <file path=ppt/slides/slide22.xml><?xml version="1.0" encoding="utf-8"?>
-<p:sld xmlns:a="http://schemas.openxmlformats.org/drawingml/2006/main" xmlns:r="http://schemas.openxmlformats.org/officeDocument/2006/relationships" xmlns:p="http://schemas.openxmlformats.org/presentationml/2006/main">
-  <p:cSld>
-    <p:spTree>
-      <p:nvGrpSpPr>
-        <p:cNvPr id="1" name="">
-          <a:extLst>
-            <a:ext uri="{FF2B5EF4-FFF2-40B4-BE49-F238E27FC236}">
-              <a16:creationId xmlns:a16="http://schemas.microsoft.com/office/drawing/2014/main" id="{817727D5-E676-1EAA-6C59-A27B4E3A51DB}"/>
-            </a:ext>
-          </a:extLst>
-        </p:cNvPr>
-        <p:cNvGrpSpPr/>
-        <p:nvPr/>
-      </p:nvGrpSpPr>
-      <p:grpSpPr>
-        <a:xfrm>
-          <a:off x="0" y="0"/>
-          <a:ext cx="0" cy="0"/>
-          <a:chOff x="0" y="0"/>
-          <a:chExt cx="0" cy="0"/>
-        </a:xfrm>
-      </p:grpSpPr>
-      <p:sp>
-        <p:nvSpPr>
-          <p:cNvPr id="2" name="Title 1">
-            <a:extLst>
-              <a:ext uri="{FF2B5EF4-FFF2-40B4-BE49-F238E27FC236}">
-                <a16:creationId xmlns:a16="http://schemas.microsoft.com/office/drawing/2014/main" id="{BAE7202B-33AB-A05D-3BAA-FF6A292EE0B9}"/>
-              </a:ext>
-            </a:extLst>
-          </p:cNvPr>
-          <p:cNvSpPr>
-            <a:spLocks noGrp="1"/>
-          </p:cNvSpPr>
-          <p:nvPr>
-            <p:ph type="title"/>
-          </p:nvPr>
-        </p:nvSpPr>
-        <p:spPr/>
-        <p:txBody>
-          <a:bodyPr/>
-          <a:lstStyle/>
-          <a:p>
-            <a:r>
-              <a:rPr lang="en-US" dirty="0">
-                <a:solidFill>
-                  <a:schemeClr val="accent1"/>
-                </a:solidFill>
-              </a:rPr>
-              <a:t>Web Scraping</a:t>
-            </a:r>
-          </a:p>
-        </p:txBody>
-      </p:sp>
-      <p:sp>
-        <p:nvSpPr>
-          <p:cNvPr id="3" name="Content Placeholder 2">
-            <a:extLst>
-              <a:ext uri="{FF2B5EF4-FFF2-40B4-BE49-F238E27FC236}">
-                <a16:creationId xmlns:a16="http://schemas.microsoft.com/office/drawing/2014/main" id="{2BE79331-EC8D-5108-C22F-E547A2A52021}"/>
-              </a:ext>
-            </a:extLst>
-          </p:cNvPr>
-          <p:cNvSpPr>
-            <a:spLocks noGrp="1"/>
-          </p:cNvSpPr>
-          <p:nvPr>
-            <p:ph idx="1"/>
-          </p:nvPr>
-        </p:nvSpPr>
-        <p:spPr>
-          <a:xfrm>
-            <a:off x="838200" y="1720525"/>
-            <a:ext cx="10515600" cy="4351338"/>
-          </a:xfrm>
-        </p:spPr>
-        <p:txBody>
-          <a:bodyPr/>
-          <a:lstStyle/>
-          <a:p>
-            <a:pPr marL="0" indent="0">
-              <a:buNone/>
-            </a:pPr>
-            <a:r>
-              <a:rPr lang="en-US" dirty="0">
-                <a:solidFill>
-                  <a:schemeClr val="accent1"/>
-                </a:solidFill>
-              </a:rPr>
-              <a:t>With web scraping, we can collect data from web pages</a:t>
-            </a:r>
-          </a:p>
-          <a:p>
-            <a:pPr marL="0" indent="0">
-              <a:buNone/>
-            </a:pPr>
-            <a:r>
-              <a:rPr lang="en-US" dirty="0">
-                <a:solidFill>
-                  <a:schemeClr val="accent1"/>
-                </a:solidFill>
-              </a:rPr>
-              <a:t>Useful when:</a:t>
-            </a:r>
-          </a:p>
-          <a:p>
-            <a:r>
-              <a:rPr lang="en-US" sz="2400" dirty="0">
-                <a:solidFill>
-                  <a:schemeClr val="accent1"/>
-                </a:solidFill>
-              </a:rPr>
-              <a:t>there is no suitable API</a:t>
-            </a:r>
-          </a:p>
-          <a:p>
-            <a:r>
-              <a:rPr lang="en-US" sz="2400" dirty="0">
-                <a:solidFill>
-                  <a:schemeClr val="accent1"/>
-                </a:solidFill>
-              </a:rPr>
-              <a:t>the public interface itself matters</a:t>
-            </a:r>
-          </a:p>
-          <a:p>
-            <a:r>
-              <a:rPr lang="en-US" sz="2400" dirty="0">
-                <a:solidFill>
-                  <a:schemeClr val="accent1"/>
-                </a:solidFill>
-              </a:rPr>
-              <a:t>data are visible in HTML</a:t>
-            </a:r>
-          </a:p>
-          <a:p>
-            <a:r>
-              <a:rPr lang="en-US" sz="2400" dirty="0">
-                <a:solidFill>
-                  <a:schemeClr val="accent1"/>
-                </a:solidFill>
-              </a:rPr>
-              <a:t>…</a:t>
-            </a:r>
-          </a:p>
-          <a:p>
-            <a:pPr marL="0" indent="0">
-              <a:buNone/>
-            </a:pPr>
-            <a:endParaRPr lang="en-US" dirty="0">
-              <a:solidFill>
-                <a:schemeClr val="accent1"/>
-              </a:solidFill>
-            </a:endParaRPr>
-          </a:p>
-          <a:p>
-            <a:pPr marL="0" indent="0">
-              <a:buNone/>
-            </a:pPr>
-            <a:endParaRPr lang="en-US" dirty="0">
-              <a:solidFill>
-                <a:schemeClr val="accent1"/>
-              </a:solidFill>
-            </a:endParaRPr>
-          </a:p>
-        </p:txBody>
-      </p:sp>
-    </p:spTree>
-    <p:extLst>
-      <p:ext uri="{BB962C8B-B14F-4D97-AF65-F5344CB8AC3E}">
-        <p14:creationId xmlns:p14="http://schemas.microsoft.com/office/powerpoint/2010/main" val="490916571"/>
-      </p:ext>
-    </p:extLst>
-  </p:cSld>
-  <p:clrMapOvr>
-    <a:masterClrMapping/>
-  </p:clrMapOvr>
-</p:sld>
-</file>
-
-<file path=ppt/slides/slide23.xml><?xml version="1.0" encoding="utf-8"?>
-<p:sld xmlns:a="http://schemas.openxmlformats.org/drawingml/2006/main" xmlns:r="http://schemas.openxmlformats.org/officeDocument/2006/relationships" xmlns:p="http://schemas.openxmlformats.org/presentationml/2006/main">
-  <p:cSld>
-    <p:spTree>
-      <p:nvGrpSpPr>
-        <p:cNvPr id="1" name="">
-          <a:extLst>
-            <a:ext uri="{FF2B5EF4-FFF2-40B4-BE49-F238E27FC236}">
-              <a16:creationId xmlns:a16="http://schemas.microsoft.com/office/drawing/2014/main" id="{9AD4D4D6-D623-A111-B765-562E02C7AED4}"/>
-            </a:ext>
-          </a:extLst>
-        </p:cNvPr>
-        <p:cNvGrpSpPr/>
-        <p:nvPr/>
-      </p:nvGrpSpPr>
-      <p:grpSpPr>
-        <a:xfrm>
-          <a:off x="0" y="0"/>
-          <a:ext cx="0" cy="0"/>
-          <a:chOff x="0" y="0"/>
-          <a:chExt cx="0" cy="0"/>
-        </a:xfrm>
-      </p:grpSpPr>
-      <p:sp>
-        <p:nvSpPr>
-          <p:cNvPr id="2" name="Title 1">
-            <a:extLst>
-              <a:ext uri="{FF2B5EF4-FFF2-40B4-BE49-F238E27FC236}">
-                <a16:creationId xmlns:a16="http://schemas.microsoft.com/office/drawing/2014/main" id="{0D217258-0D22-7B99-B701-8A4FA4E1C671}"/>
-              </a:ext>
-            </a:extLst>
-          </p:cNvPr>
-          <p:cNvSpPr>
-            <a:spLocks noGrp="1"/>
-          </p:cNvSpPr>
-          <p:nvPr>
-            <p:ph type="title"/>
-          </p:nvPr>
-        </p:nvSpPr>
-        <p:spPr/>
-        <p:txBody>
-          <a:bodyPr/>
-          <a:lstStyle/>
-          <a:p>
-            <a:r>
-              <a:rPr lang="en-US" dirty="0">
-                <a:solidFill>
-                  <a:schemeClr val="accent1"/>
-                </a:solidFill>
-              </a:rPr>
-              <a:t>Web Scraping</a:t>
-            </a:r>
-          </a:p>
-        </p:txBody>
-      </p:sp>
-      <p:sp>
-        <p:nvSpPr>
-          <p:cNvPr id="3" name="Content Placeholder 2">
-            <a:extLst>
-              <a:ext uri="{FF2B5EF4-FFF2-40B4-BE49-F238E27FC236}">
-                <a16:creationId xmlns:a16="http://schemas.microsoft.com/office/drawing/2014/main" id="{E1C5ED71-1747-EEB7-6B64-6B9B4C614BCB}"/>
-              </a:ext>
-            </a:extLst>
-          </p:cNvPr>
-          <p:cNvSpPr>
-            <a:spLocks noGrp="1"/>
-          </p:cNvSpPr>
-          <p:nvPr>
-            <p:ph idx="1"/>
-          </p:nvPr>
-        </p:nvSpPr>
-        <p:spPr>
-          <a:xfrm>
-            <a:off x="838200" y="1720525"/>
-            <a:ext cx="10515600" cy="4351338"/>
-          </a:xfrm>
-        </p:spPr>
-        <p:txBody>
-          <a:bodyPr/>
-          <a:lstStyle/>
-          <a:p>
-            <a:pPr marL="0" indent="0">
-              <a:buNone/>
-            </a:pPr>
-            <a:r>
-              <a:rPr lang="en-US" dirty="0">
-                <a:solidFill>
-                  <a:schemeClr val="accent1"/>
-                </a:solidFill>
-              </a:rPr>
-              <a:t>Strengths:</a:t>
-            </a:r>
-          </a:p>
-          <a:p>
-            <a:r>
-              <a:rPr lang="en-US" sz="2400" dirty="0">
-                <a:solidFill>
-                  <a:schemeClr val="accent1"/>
-                </a:solidFill>
-              </a:rPr>
-              <a:t>observes browser-facing content</a:t>
-            </a:r>
-          </a:p>
-          <a:p>
-            <a:r>
-              <a:rPr lang="en-US" sz="2400" dirty="0">
-                <a:solidFill>
-                  <a:schemeClr val="accent1"/>
-                </a:solidFill>
-              </a:rPr>
-              <a:t>flexible across websites</a:t>
-            </a:r>
-          </a:p>
-          <a:p>
-            <a:r>
-              <a:rPr lang="en-US" sz="2400" dirty="0">
-                <a:solidFill>
-                  <a:schemeClr val="accent1"/>
-                </a:solidFill>
-              </a:rPr>
-              <a:t>can capture layout/context</a:t>
-            </a:r>
-          </a:p>
-          <a:p>
-            <a:r>
-              <a:rPr lang="en-US" sz="2400" dirty="0">
-                <a:solidFill>
-                  <a:schemeClr val="accent1"/>
-                </a:solidFill>
-              </a:rPr>
-              <a:t>…</a:t>
-            </a:r>
-          </a:p>
-          <a:p>
-            <a:pPr marL="0" indent="0">
-              <a:buNone/>
-            </a:pPr>
-            <a:endParaRPr lang="en-US" dirty="0">
-              <a:solidFill>
-                <a:schemeClr val="accent1"/>
-              </a:solidFill>
-            </a:endParaRPr>
-          </a:p>
-        </p:txBody>
-      </p:sp>
-    </p:spTree>
-    <p:extLst>
-      <p:ext uri="{BB962C8B-B14F-4D97-AF65-F5344CB8AC3E}">
-        <p14:creationId xmlns:p14="http://schemas.microsoft.com/office/powerpoint/2010/main" val="1123106815"/>
-      </p:ext>
-    </p:extLst>
-  </p:cSld>
-  <p:clrMapOvr>
-    <a:masterClrMapping/>
-  </p:clrMapOvr>
-</p:sld>
-</file>
-
-<file path=ppt/slides/slide24.xml><?xml version="1.0" encoding="utf-8"?>
-<p:sld xmlns:a="http://schemas.openxmlformats.org/drawingml/2006/main" xmlns:r="http://schemas.openxmlformats.org/officeDocument/2006/relationships" xmlns:p="http://schemas.openxmlformats.org/presentationml/2006/main">
-  <p:cSld>
-    <p:spTree>
-      <p:nvGrpSpPr>
-        <p:cNvPr id="1" name="">
-          <a:extLst>
-            <a:ext uri="{FF2B5EF4-FFF2-40B4-BE49-F238E27FC236}">
-              <a16:creationId xmlns:a16="http://schemas.microsoft.com/office/drawing/2014/main" id="{1545D1C1-593A-B718-B6A9-F35DD0BF7C2D}"/>
-            </a:ext>
-          </a:extLst>
-        </p:cNvPr>
-        <p:cNvGrpSpPr/>
-        <p:nvPr/>
-      </p:nvGrpSpPr>
-      <p:grpSpPr>
-        <a:xfrm>
-          <a:off x="0" y="0"/>
-          <a:ext cx="0" cy="0"/>
-          <a:chOff x="0" y="0"/>
-          <a:chExt cx="0" cy="0"/>
-        </a:xfrm>
-      </p:grpSpPr>
-      <p:sp>
-        <p:nvSpPr>
-          <p:cNvPr id="2" name="Title 1">
-            <a:extLst>
-              <a:ext uri="{FF2B5EF4-FFF2-40B4-BE49-F238E27FC236}">
-                <a16:creationId xmlns:a16="http://schemas.microsoft.com/office/drawing/2014/main" id="{5F89C7E4-C10C-5C4E-961A-302AFD495983}"/>
-              </a:ext>
-            </a:extLst>
-          </p:cNvPr>
-          <p:cNvSpPr>
-            <a:spLocks noGrp="1"/>
-          </p:cNvSpPr>
-          <p:nvPr>
-            <p:ph type="title"/>
-          </p:nvPr>
-        </p:nvSpPr>
-        <p:spPr/>
-        <p:txBody>
-          <a:bodyPr/>
-          <a:lstStyle/>
-          <a:p>
-            <a:r>
-              <a:rPr lang="en-US" dirty="0">
-                <a:solidFill>
-                  <a:schemeClr val="accent1"/>
-                </a:solidFill>
-              </a:rPr>
-              <a:t>Web Scraping</a:t>
-            </a:r>
-          </a:p>
-        </p:txBody>
-      </p:sp>
-      <p:sp>
-        <p:nvSpPr>
-          <p:cNvPr id="3" name="Content Placeholder 2">
-            <a:extLst>
-              <a:ext uri="{FF2B5EF4-FFF2-40B4-BE49-F238E27FC236}">
-                <a16:creationId xmlns:a16="http://schemas.microsoft.com/office/drawing/2014/main" id="{390DE0CF-E4CB-BFBB-3A9F-CE68F0592130}"/>
-              </a:ext>
-            </a:extLst>
-          </p:cNvPr>
-          <p:cNvSpPr>
-            <a:spLocks noGrp="1"/>
-          </p:cNvSpPr>
-          <p:nvPr>
-            <p:ph idx="1"/>
-          </p:nvPr>
-        </p:nvSpPr>
-        <p:spPr>
-          <a:xfrm>
-            <a:off x="838200" y="1720525"/>
-            <a:ext cx="10515600" cy="4351338"/>
-          </a:xfrm>
-        </p:spPr>
-        <p:txBody>
-          <a:bodyPr/>
-          <a:lstStyle/>
-          <a:p>
-            <a:pPr marL="0" indent="0">
-              <a:buNone/>
-            </a:pPr>
-            <a:r>
-              <a:rPr lang="en-US" dirty="0">
-                <a:solidFill>
-                  <a:schemeClr val="accent1"/>
-                </a:solidFill>
-              </a:rPr>
-              <a:t>Limitations:</a:t>
-            </a:r>
-          </a:p>
-          <a:p>
-            <a:r>
-              <a:rPr lang="en-US" sz="2400" dirty="0">
-                <a:solidFill>
-                  <a:schemeClr val="accent1"/>
-                </a:solidFill>
-              </a:rPr>
-              <a:t>fragile selectors</a:t>
-            </a:r>
-          </a:p>
-          <a:p>
-            <a:r>
-              <a:rPr lang="en-US" sz="2400" dirty="0">
-                <a:solidFill>
-                  <a:schemeClr val="accent1"/>
-                </a:solidFill>
-              </a:rPr>
-              <a:t>dynamic pages may hide content from requests</a:t>
-            </a:r>
-          </a:p>
-          <a:p>
-            <a:r>
-              <a:rPr lang="en-US" sz="2400" dirty="0">
-                <a:solidFill>
-                  <a:schemeClr val="accent1"/>
-                </a:solidFill>
-              </a:rPr>
-              <a:t>pages can change without warning</a:t>
-            </a:r>
-          </a:p>
-          <a:p>
-            <a:r>
-              <a:rPr lang="en-US" sz="2400" dirty="0">
-                <a:solidFill>
-                  <a:schemeClr val="accent1"/>
-                </a:solidFill>
-              </a:rPr>
-              <a:t>legal/ethical constraints</a:t>
-            </a:r>
-          </a:p>
-          <a:p>
-            <a:r>
-              <a:rPr lang="en-US" sz="2400" dirty="0">
-                <a:solidFill>
-                  <a:schemeClr val="accent1"/>
-                </a:solidFill>
-              </a:rPr>
-              <a:t>…</a:t>
-            </a:r>
-          </a:p>
-          <a:p>
-            <a:pPr marL="0" indent="0">
-              <a:buNone/>
-            </a:pPr>
-            <a:endParaRPr lang="en-US" dirty="0">
-              <a:solidFill>
-                <a:schemeClr val="accent1"/>
-              </a:solidFill>
-            </a:endParaRPr>
-          </a:p>
-        </p:txBody>
-      </p:sp>
-    </p:spTree>
-    <p:extLst>
-      <p:ext uri="{BB962C8B-B14F-4D97-AF65-F5344CB8AC3E}">
-        <p14:creationId xmlns:p14="http://schemas.microsoft.com/office/powerpoint/2010/main" val="175636831"/>
-      </p:ext>
-    </p:extLst>
-  </p:cSld>
-  <p:clrMapOvr>
-    <a:masterClrMapping/>
-  </p:clrMapOvr>
-</p:sld>
-</file>
-
-<file path=ppt/slides/slide25.xml><?xml version="1.0" encoding="utf-8"?>
-<p:sld xmlns:a="http://schemas.openxmlformats.org/drawingml/2006/main" xmlns:r="http://schemas.openxmlformats.org/officeDocument/2006/relationships" xmlns:p="http://schemas.openxmlformats.org/presentationml/2006/main">
-  <p:cSld>
-    <p:spTree>
-      <p:nvGrpSpPr>
-        <p:cNvPr id="1" name="">
-          <a:extLst>
-            <a:ext uri="{FF2B5EF4-FFF2-40B4-BE49-F238E27FC236}">
-              <a16:creationId xmlns:a16="http://schemas.microsoft.com/office/drawing/2014/main" id="{ED55B5C0-3379-971F-7644-2EE7A30ED847}"/>
-            </a:ext>
-          </a:extLst>
-        </p:cNvPr>
-        <p:cNvGrpSpPr/>
-        <p:nvPr/>
-      </p:nvGrpSpPr>
-      <p:grpSpPr>
-        <a:xfrm>
-          <a:off x="0" y="0"/>
-          <a:ext cx="0" cy="0"/>
-          <a:chOff x="0" y="0"/>
-          <a:chExt cx="0" cy="0"/>
-        </a:xfrm>
-      </p:grpSpPr>
-      <p:sp>
-        <p:nvSpPr>
-          <p:cNvPr id="2" name="Title 1">
-            <a:extLst>
-              <a:ext uri="{FF2B5EF4-FFF2-40B4-BE49-F238E27FC236}">
-                <a16:creationId xmlns:a16="http://schemas.microsoft.com/office/drawing/2014/main" id="{87615D23-0728-8D1E-A76F-C6B07BCD11E4}"/>
-              </a:ext>
-            </a:extLst>
-          </p:cNvPr>
-          <p:cNvSpPr>
-            <a:spLocks noGrp="1"/>
-          </p:cNvSpPr>
-          <p:nvPr>
-            <p:ph type="title"/>
-          </p:nvPr>
-        </p:nvSpPr>
-        <p:spPr/>
-        <p:txBody>
-          <a:bodyPr/>
-          <a:lstStyle/>
-          <a:p>
-            <a:r>
-              <a:rPr lang="en-US" dirty="0">
-                <a:solidFill>
-                  <a:schemeClr val="accent1"/>
-                </a:solidFill>
-              </a:rPr>
-              <a:t>Browser Automation</a:t>
-            </a:r>
-          </a:p>
-        </p:txBody>
-      </p:sp>
-      <p:sp>
-        <p:nvSpPr>
-          <p:cNvPr id="3" name="Content Placeholder 2">
-            <a:extLst>
-              <a:ext uri="{FF2B5EF4-FFF2-40B4-BE49-F238E27FC236}">
-                <a16:creationId xmlns:a16="http://schemas.microsoft.com/office/drawing/2014/main" id="{17A18860-DAB0-7026-17DF-85C141207922}"/>
-              </a:ext>
-            </a:extLst>
-          </p:cNvPr>
-          <p:cNvSpPr>
-            <a:spLocks noGrp="1"/>
-          </p:cNvSpPr>
-          <p:nvPr>
-            <p:ph idx="1"/>
-          </p:nvPr>
-        </p:nvSpPr>
-        <p:spPr>
-          <a:xfrm>
-            <a:off x="838200" y="1720525"/>
-            <a:ext cx="10515600" cy="4351338"/>
-          </a:xfrm>
-        </p:spPr>
-        <p:txBody>
-          <a:bodyPr/>
-          <a:lstStyle/>
-          <a:p>
-            <a:pPr marL="0" indent="0">
-              <a:buNone/>
-            </a:pPr>
-            <a:r>
-              <a:rPr lang="en-US" dirty="0">
-                <a:solidFill>
-                  <a:schemeClr val="accent1"/>
-                </a:solidFill>
-              </a:rPr>
-              <a:t>Browser automation controls a real browser with code.</a:t>
-            </a:r>
-          </a:p>
-          <a:p>
-            <a:pPr marL="0" indent="0">
-              <a:buNone/>
-            </a:pPr>
-            <a:r>
-              <a:rPr lang="en-US" dirty="0">
-                <a:solidFill>
-                  <a:schemeClr val="accent1"/>
-                </a:solidFill>
-              </a:rPr>
-              <a:t>Examples:</a:t>
-            </a:r>
-          </a:p>
-          <a:p>
-            <a:r>
-              <a:rPr lang="en-US" sz="2400" dirty="0">
-                <a:solidFill>
-                  <a:schemeClr val="accent1"/>
-                </a:solidFill>
-              </a:rPr>
-              <a:t>Selenium</a:t>
-            </a:r>
-          </a:p>
-          <a:p>
-            <a:r>
-              <a:rPr lang="en-US" sz="2400" dirty="0">
-                <a:solidFill>
-                  <a:schemeClr val="accent1"/>
-                </a:solidFill>
-              </a:rPr>
-              <a:t>Playwright</a:t>
-            </a:r>
-          </a:p>
-          <a:p>
-            <a:pPr marL="0" indent="0">
-              <a:buNone/>
-            </a:pPr>
-            <a:endParaRPr lang="en-US" dirty="0">
-              <a:solidFill>
-                <a:schemeClr val="accent1"/>
-              </a:solidFill>
-            </a:endParaRPr>
-          </a:p>
-        </p:txBody>
-      </p:sp>
-    </p:spTree>
-    <p:extLst>
-      <p:ext uri="{BB962C8B-B14F-4D97-AF65-F5344CB8AC3E}">
-        <p14:creationId xmlns:p14="http://schemas.microsoft.com/office/powerpoint/2010/main" val="3238597606"/>
-      </p:ext>
-    </p:extLst>
-  </p:cSld>
-  <p:clrMapOvr>
-    <a:masterClrMapping/>
-  </p:clrMapOvr>
-</p:sld>
-</file>
-
-<file path=ppt/slides/slide26.xml><?xml version="1.0" encoding="utf-8"?>
-<p:sld xmlns:a="http://schemas.openxmlformats.org/drawingml/2006/main" xmlns:r="http://schemas.openxmlformats.org/officeDocument/2006/relationships" xmlns:p="http://schemas.openxmlformats.org/presentationml/2006/main">
-  <p:cSld>
-    <p:spTree>
-      <p:nvGrpSpPr>
-        <p:cNvPr id="1" name="">
-          <a:extLst>
-            <a:ext uri="{FF2B5EF4-FFF2-40B4-BE49-F238E27FC236}">
-              <a16:creationId xmlns:a16="http://schemas.microsoft.com/office/drawing/2014/main" id="{59AFBA2C-D8C3-2B27-1CF4-469B09BB5981}"/>
-            </a:ext>
-          </a:extLst>
-        </p:cNvPr>
-        <p:cNvGrpSpPr/>
-        <p:nvPr/>
-      </p:nvGrpSpPr>
-      <p:grpSpPr>
-        <a:xfrm>
-          <a:off x="0" y="0"/>
-          <a:ext cx="0" cy="0"/>
-          <a:chOff x="0" y="0"/>
-          <a:chExt cx="0" cy="0"/>
-        </a:xfrm>
-      </p:grpSpPr>
-      <p:sp>
-        <p:nvSpPr>
-          <p:cNvPr id="2" name="Title 1">
-            <a:extLst>
-              <a:ext uri="{FF2B5EF4-FFF2-40B4-BE49-F238E27FC236}">
-                <a16:creationId xmlns:a16="http://schemas.microsoft.com/office/drawing/2014/main" id="{A0CE75E5-1980-604B-EAA3-D2EA945A0D97}"/>
-              </a:ext>
-            </a:extLst>
-          </p:cNvPr>
-          <p:cNvSpPr>
-            <a:spLocks noGrp="1"/>
-          </p:cNvSpPr>
-          <p:nvPr>
-            <p:ph type="title"/>
-          </p:nvPr>
-        </p:nvSpPr>
-        <p:spPr/>
-        <p:txBody>
-          <a:bodyPr/>
-          <a:lstStyle/>
-          <a:p>
-            <a:r>
-              <a:rPr lang="en-US" dirty="0">
-                <a:solidFill>
-                  <a:schemeClr val="accent1"/>
-                </a:solidFill>
-              </a:rPr>
-              <a:t>Browser Automation</a:t>
-            </a:r>
-          </a:p>
-        </p:txBody>
-      </p:sp>
-      <p:sp>
-        <p:nvSpPr>
-          <p:cNvPr id="3" name="Content Placeholder 2">
-            <a:extLst>
-              <a:ext uri="{FF2B5EF4-FFF2-40B4-BE49-F238E27FC236}">
-                <a16:creationId xmlns:a16="http://schemas.microsoft.com/office/drawing/2014/main" id="{0A5B6FCE-E11E-C897-9A17-FA311EFC2C7C}"/>
-              </a:ext>
-            </a:extLst>
-          </p:cNvPr>
-          <p:cNvSpPr>
-            <a:spLocks noGrp="1"/>
-          </p:cNvSpPr>
-          <p:nvPr>
-            <p:ph idx="1"/>
-          </p:nvPr>
-        </p:nvSpPr>
-        <p:spPr>
-          <a:xfrm>
-            <a:off x="838200" y="1720525"/>
-            <a:ext cx="10515600" cy="4351338"/>
-          </a:xfrm>
-        </p:spPr>
-        <p:txBody>
-          <a:bodyPr/>
-          <a:lstStyle/>
-          <a:p>
-            <a:pPr marL="0" indent="0">
-              <a:buNone/>
-            </a:pPr>
-            <a:r>
-              <a:rPr lang="en-US" dirty="0">
-                <a:solidFill>
-                  <a:schemeClr val="accent1"/>
-                </a:solidFill>
-              </a:rPr>
-              <a:t>Useful when:</a:t>
-            </a:r>
-          </a:p>
-          <a:p>
-            <a:r>
-              <a:rPr lang="en-US" dirty="0">
-                <a:solidFill>
-                  <a:schemeClr val="accent1"/>
-                </a:solidFill>
-              </a:rPr>
-              <a:t>content loads through JavaScript</a:t>
-            </a:r>
-          </a:p>
-          <a:p>
-            <a:r>
-              <a:rPr lang="en-US" dirty="0">
-                <a:solidFill>
-                  <a:schemeClr val="accent1"/>
-                </a:solidFill>
-              </a:rPr>
-              <a:t>scrolling/clicking is needed</a:t>
-            </a:r>
-          </a:p>
-          <a:p>
-            <a:r>
-              <a:rPr lang="en-US" dirty="0">
-                <a:solidFill>
-                  <a:schemeClr val="accent1"/>
-                </a:solidFill>
-              </a:rPr>
-              <a:t>screenshots or rendered DOM are important</a:t>
-            </a:r>
-          </a:p>
-          <a:p>
-            <a:pPr marL="0" indent="0">
-              <a:buNone/>
-            </a:pPr>
-            <a:endParaRPr lang="en-US" dirty="0">
-              <a:solidFill>
-                <a:schemeClr val="accent1"/>
-              </a:solidFill>
-            </a:endParaRPr>
-          </a:p>
-        </p:txBody>
-      </p:sp>
-    </p:spTree>
-    <p:extLst>
-      <p:ext uri="{BB962C8B-B14F-4D97-AF65-F5344CB8AC3E}">
-        <p14:creationId xmlns:p14="http://schemas.microsoft.com/office/powerpoint/2010/main" val="1384931923"/>
-      </p:ext>
-    </p:extLst>
-  </p:cSld>
-  <p:clrMapOvr>
-    <a:masterClrMapping/>
-  </p:clrMapOvr>
-</p:sld>
-</file>
-
-<file path=ppt/slides/slide27.xml><?xml version="1.0" encoding="utf-8"?>
-<p:sld xmlns:a="http://schemas.openxmlformats.org/drawingml/2006/main" xmlns:r="http://schemas.openxmlformats.org/officeDocument/2006/relationships" xmlns:p="http://schemas.openxmlformats.org/presentationml/2006/main">
-  <p:cSld>
-    <p:spTree>
-      <p:nvGrpSpPr>
-        <p:cNvPr id="1" name="">
-          <a:extLst>
-            <a:ext uri="{FF2B5EF4-FFF2-40B4-BE49-F238E27FC236}">
-              <a16:creationId xmlns:a16="http://schemas.microsoft.com/office/drawing/2014/main" id="{A77242E4-6AD7-32A3-9D86-3789DD939876}"/>
-            </a:ext>
-          </a:extLst>
-        </p:cNvPr>
-        <p:cNvGrpSpPr/>
-        <p:nvPr/>
-      </p:nvGrpSpPr>
-      <p:grpSpPr>
-        <a:xfrm>
-          <a:off x="0" y="0"/>
-          <a:ext cx="0" cy="0"/>
-          <a:chOff x="0" y="0"/>
-          <a:chExt cx="0" cy="0"/>
-        </a:xfrm>
-      </p:grpSpPr>
-      <p:sp>
-        <p:nvSpPr>
-          <p:cNvPr id="2" name="Title 1">
-            <a:extLst>
-              <a:ext uri="{FF2B5EF4-FFF2-40B4-BE49-F238E27FC236}">
-                <a16:creationId xmlns:a16="http://schemas.microsoft.com/office/drawing/2014/main" id="{E4E9F1D7-3DD3-4EA0-893E-C144E262A964}"/>
-              </a:ext>
-            </a:extLst>
-          </p:cNvPr>
-          <p:cNvSpPr>
-            <a:spLocks noGrp="1"/>
-          </p:cNvSpPr>
-          <p:nvPr>
-            <p:ph type="title"/>
-          </p:nvPr>
-        </p:nvSpPr>
-        <p:spPr/>
-        <p:txBody>
-          <a:bodyPr/>
-          <a:lstStyle/>
-          <a:p>
-            <a:r>
-              <a:rPr lang="en-US" dirty="0">
-                <a:solidFill>
-                  <a:schemeClr val="accent1"/>
-                </a:solidFill>
-              </a:rPr>
-              <a:t>Browser Automation</a:t>
-            </a:r>
-          </a:p>
-        </p:txBody>
-      </p:sp>
-      <p:sp>
-        <p:nvSpPr>
-          <p:cNvPr id="3" name="Content Placeholder 2">
-            <a:extLst>
-              <a:ext uri="{FF2B5EF4-FFF2-40B4-BE49-F238E27FC236}">
-                <a16:creationId xmlns:a16="http://schemas.microsoft.com/office/drawing/2014/main" id="{844F4322-1DDF-75E2-5D95-7257014CE5F6}"/>
-              </a:ext>
-            </a:extLst>
-          </p:cNvPr>
-          <p:cNvSpPr>
-            <a:spLocks noGrp="1"/>
-          </p:cNvSpPr>
-          <p:nvPr>
-            <p:ph idx="1"/>
-          </p:nvPr>
-        </p:nvSpPr>
-        <p:spPr>
-          <a:xfrm>
-            <a:off x="838200" y="1720525"/>
-            <a:ext cx="10515600" cy="4351338"/>
-          </a:xfrm>
-        </p:spPr>
-        <p:txBody>
-          <a:bodyPr/>
-          <a:lstStyle/>
-          <a:p>
-            <a:pPr marL="0" indent="0">
-              <a:buNone/>
-            </a:pPr>
-            <a:r>
-              <a:rPr lang="en-US" dirty="0">
-                <a:solidFill>
-                  <a:schemeClr val="accent1"/>
-                </a:solidFill>
-              </a:rPr>
-              <a:t>Limitations:</a:t>
-            </a:r>
-          </a:p>
-          <a:p>
-            <a:r>
-              <a:rPr lang="en-US" dirty="0">
-                <a:solidFill>
-                  <a:schemeClr val="accent1"/>
-                </a:solidFill>
-              </a:rPr>
-              <a:t>slower and more brittle</a:t>
-            </a:r>
-          </a:p>
-          <a:p>
-            <a:r>
-              <a:rPr lang="en-US" dirty="0">
-                <a:solidFill>
-                  <a:schemeClr val="accent1"/>
-                </a:solidFill>
-              </a:rPr>
-              <a:t>more server load</a:t>
-            </a:r>
-          </a:p>
-          <a:p>
-            <a:r>
-              <a:rPr lang="en-US" dirty="0">
-                <a:solidFill>
-                  <a:schemeClr val="accent1"/>
-                </a:solidFill>
-              </a:rPr>
-              <a:t>waiting/scrolling choices affect results</a:t>
-            </a:r>
-          </a:p>
-          <a:p>
-            <a:r>
-              <a:rPr lang="en-US" dirty="0">
-                <a:solidFill>
-                  <a:schemeClr val="accent1"/>
-                </a:solidFill>
-              </a:rPr>
-              <a:t>should not be used to bypass controls</a:t>
-            </a:r>
-          </a:p>
-        </p:txBody>
-      </p:sp>
-    </p:spTree>
-    <p:extLst>
-      <p:ext uri="{BB962C8B-B14F-4D97-AF65-F5344CB8AC3E}">
-        <p14:creationId xmlns:p14="http://schemas.microsoft.com/office/powerpoint/2010/main" val="4141173779"/>
-      </p:ext>
-    </p:extLst>
-  </p:cSld>
-  <p:clrMapOvr>
-    <a:masterClrMapping/>
-  </p:clrMapOvr>
-</p:sld>
-</file>
-
-<file path=ppt/slides/slide28.xml><?xml version="1.0" encoding="utf-8"?>
-<p:sld xmlns:a="http://schemas.openxmlformats.org/drawingml/2006/main" xmlns:r="http://schemas.openxmlformats.org/officeDocument/2006/relationships" xmlns:p="http://schemas.openxmlformats.org/presentationml/2006/main">
-  <p:cSld>
-    <p:spTree>
-      <p:nvGrpSpPr>
-        <p:cNvPr id="1" name="">
-          <a:extLst>
-            <a:ext uri="{FF2B5EF4-FFF2-40B4-BE49-F238E27FC236}">
-              <a16:creationId xmlns:a16="http://schemas.microsoft.com/office/drawing/2014/main" id="{6EC81003-1423-E720-7073-B9D958F454BB}"/>
-            </a:ext>
-          </a:extLst>
-        </p:cNvPr>
-        <p:cNvGrpSpPr/>
-        <p:nvPr/>
-      </p:nvGrpSpPr>
-      <p:grpSpPr>
-        <a:xfrm>
-          <a:off x="0" y="0"/>
-          <a:ext cx="0" cy="0"/>
-          <a:chOff x="0" y="0"/>
-          <a:chExt cx="0" cy="0"/>
-        </a:xfrm>
-      </p:grpSpPr>
-      <p:sp>
-        <p:nvSpPr>
-          <p:cNvPr id="2" name="Title 1">
-            <a:extLst>
-              <a:ext uri="{FF2B5EF4-FFF2-40B4-BE49-F238E27FC236}">
-                <a16:creationId xmlns:a16="http://schemas.microsoft.com/office/drawing/2014/main" id="{871B0238-5E7C-682D-C652-A6A3EFC6167C}"/>
-              </a:ext>
-            </a:extLst>
-          </p:cNvPr>
-          <p:cNvSpPr>
-            <a:spLocks noGrp="1"/>
-          </p:cNvSpPr>
-          <p:nvPr>
-            <p:ph type="title"/>
-          </p:nvPr>
-        </p:nvSpPr>
-        <p:spPr/>
-        <p:txBody>
-          <a:bodyPr/>
-          <a:lstStyle/>
-          <a:p>
-            <a:r>
-              <a:rPr lang="en-US" dirty="0">
-                <a:solidFill>
-                  <a:schemeClr val="accent1"/>
-                </a:solidFill>
-              </a:rPr>
-              <a:t>Platform Research Tools</a:t>
-            </a:r>
-          </a:p>
-        </p:txBody>
-      </p:sp>
-      <p:sp>
-        <p:nvSpPr>
-          <p:cNvPr id="3" name="Content Placeholder 2">
-            <a:extLst>
-              <a:ext uri="{FF2B5EF4-FFF2-40B4-BE49-F238E27FC236}">
-                <a16:creationId xmlns:a16="http://schemas.microsoft.com/office/drawing/2014/main" id="{A499C35C-DD6C-0D3F-B153-6102EEB3EBC3}"/>
-              </a:ext>
-            </a:extLst>
-          </p:cNvPr>
-          <p:cNvSpPr>
-            <a:spLocks noGrp="1"/>
-          </p:cNvSpPr>
-          <p:nvPr>
-            <p:ph idx="1"/>
-          </p:nvPr>
-        </p:nvSpPr>
-        <p:spPr>
-          <a:xfrm>
-            <a:off x="838200" y="1720525"/>
-            <a:ext cx="10515600" cy="4351338"/>
-          </a:xfrm>
-        </p:spPr>
-        <p:txBody>
-          <a:bodyPr/>
-          <a:lstStyle/>
-          <a:p>
-            <a:pPr marL="0" indent="0">
-              <a:buNone/>
-            </a:pPr>
-            <a:r>
-              <a:rPr lang="en-US" dirty="0">
-                <a:solidFill>
-                  <a:schemeClr val="accent1"/>
-                </a:solidFill>
-              </a:rPr>
-              <a:t>Platform-provided or platform-mediated systems for research/transparency access</a:t>
-            </a:r>
-          </a:p>
-          <a:p>
-            <a:pPr marL="0" indent="0">
-              <a:buNone/>
-            </a:pPr>
-            <a:r>
-              <a:rPr lang="en-US" dirty="0">
-                <a:solidFill>
-                  <a:schemeClr val="accent1"/>
-                </a:solidFill>
-              </a:rPr>
-              <a:t>Examples:</a:t>
-            </a:r>
-          </a:p>
-          <a:p>
-            <a:r>
-              <a:rPr lang="en-US" sz="2400" dirty="0">
-                <a:solidFill>
-                  <a:schemeClr val="accent1"/>
-                </a:solidFill>
-              </a:rPr>
-              <a:t>Meta Content Library</a:t>
-            </a:r>
-          </a:p>
-          <a:p>
-            <a:r>
-              <a:rPr lang="en-US" sz="2400" dirty="0">
-                <a:solidFill>
-                  <a:schemeClr val="accent1"/>
-                </a:solidFill>
-              </a:rPr>
-              <a:t>TikTok Research API</a:t>
-            </a:r>
-          </a:p>
-          <a:p>
-            <a:r>
-              <a:rPr lang="en-US" sz="2400" dirty="0">
-                <a:solidFill>
-                  <a:schemeClr val="accent1"/>
-                </a:solidFill>
-              </a:rPr>
-              <a:t>YouTube Data API</a:t>
-            </a:r>
-          </a:p>
-          <a:p>
-            <a:r>
-              <a:rPr lang="en-US" sz="2400" dirty="0">
-                <a:solidFill>
-                  <a:schemeClr val="accent1"/>
-                </a:solidFill>
-              </a:rPr>
-              <a:t>platform transparency dashboards</a:t>
-            </a:r>
-          </a:p>
-          <a:p>
-            <a:r>
-              <a:rPr lang="en-US" sz="2400" dirty="0">
-                <a:solidFill>
-                  <a:schemeClr val="accent1"/>
-                </a:solidFill>
-              </a:rPr>
-              <a:t>downloadable platform reports</a:t>
-            </a:r>
-          </a:p>
-          <a:p>
-            <a:pPr marL="0" indent="0">
-              <a:buNone/>
-            </a:pPr>
-            <a:endParaRPr lang="en-US" dirty="0">
-              <a:solidFill>
-                <a:schemeClr val="accent1"/>
-              </a:solidFill>
-            </a:endParaRPr>
-          </a:p>
-        </p:txBody>
-      </p:sp>
-    </p:spTree>
-    <p:extLst>
-      <p:ext uri="{BB962C8B-B14F-4D97-AF65-F5344CB8AC3E}">
-        <p14:creationId xmlns:p14="http://schemas.microsoft.com/office/powerpoint/2010/main" val="1331255853"/>
-      </p:ext>
-    </p:extLst>
-  </p:cSld>
-  <p:clrMapOvr>
-    <a:masterClrMapping/>
-  </p:clrMapOvr>
-</p:sld>
-</file>
-
-<file path=ppt/slides/slide29.xml><?xml version="1.0" encoding="utf-8"?>
 <p:sld xmlns:a="http://schemas.openxmlformats.org/drawingml/2006/main" xmlns:r="http://schemas.openxmlformats.org/officeDocument/2006/relationships" xmlns:p="http://schemas.openxmlformats.org/presentationml/2006/main">
   <p:cSld>
     <p:spTree>
@@ -11067,298 +10967,7 @@
 </p:sld>
 </file>
 
-<file path=ppt/slides/slide3.xml><?xml version="1.0" encoding="utf-8"?>
-<p:sld xmlns:a="http://schemas.openxmlformats.org/drawingml/2006/main" xmlns:r="http://schemas.openxmlformats.org/officeDocument/2006/relationships" xmlns:p="http://schemas.openxmlformats.org/presentationml/2006/main">
-  <p:cSld>
-    <p:spTree>
-      <p:nvGrpSpPr>
-        <p:cNvPr id="1" name="">
-          <a:extLst>
-            <a:ext uri="{FF2B5EF4-FFF2-40B4-BE49-F238E27FC236}">
-              <a16:creationId xmlns:a16="http://schemas.microsoft.com/office/drawing/2014/main" id="{8938B18D-2295-1BCD-EFEB-056633601900}"/>
-            </a:ext>
-          </a:extLst>
-        </p:cNvPr>
-        <p:cNvGrpSpPr/>
-        <p:nvPr/>
-      </p:nvGrpSpPr>
-      <p:grpSpPr>
-        <a:xfrm>
-          <a:off x="0" y="0"/>
-          <a:ext cx="0" cy="0"/>
-          <a:chOff x="0" y="0"/>
-          <a:chExt cx="0" cy="0"/>
-        </a:xfrm>
-      </p:grpSpPr>
-      <p:sp>
-        <p:nvSpPr>
-          <p:cNvPr id="2" name="Title 1">
-            <a:extLst>
-              <a:ext uri="{FF2B5EF4-FFF2-40B4-BE49-F238E27FC236}">
-                <a16:creationId xmlns:a16="http://schemas.microsoft.com/office/drawing/2014/main" id="{43BDE2AF-BD61-1F43-B7FF-3DEE4FB03D4E}"/>
-              </a:ext>
-            </a:extLst>
-          </p:cNvPr>
-          <p:cNvSpPr>
-            <a:spLocks noGrp="1"/>
-          </p:cNvSpPr>
-          <p:nvPr>
-            <p:ph type="title"/>
-          </p:nvPr>
-        </p:nvSpPr>
-        <p:spPr/>
-        <p:txBody>
-          <a:bodyPr/>
-          <a:lstStyle/>
-          <a:p>
-            <a:r>
-              <a:rPr lang="en-US" dirty="0">
-                <a:solidFill>
-                  <a:schemeClr val="accent1"/>
-                </a:solidFill>
-              </a:rPr>
-              <a:t>Collecting Platform Data: Course Overview</a:t>
-            </a:r>
-          </a:p>
-        </p:txBody>
-      </p:sp>
-      <p:sp>
-        <p:nvSpPr>
-          <p:cNvPr id="3" name="Content Placeholder 2">
-            <a:extLst>
-              <a:ext uri="{FF2B5EF4-FFF2-40B4-BE49-F238E27FC236}">
-                <a16:creationId xmlns:a16="http://schemas.microsoft.com/office/drawing/2014/main" id="{3B9E53FB-AB37-ADE7-64F1-0F539F6F0EC9}"/>
-              </a:ext>
-            </a:extLst>
-          </p:cNvPr>
-          <p:cNvSpPr>
-            <a:spLocks noGrp="1"/>
-          </p:cNvSpPr>
-          <p:nvPr>
-            <p:ph idx="1"/>
-          </p:nvPr>
-        </p:nvSpPr>
-        <p:spPr>
-          <a:xfrm>
-            <a:off x="1102474" y="1839349"/>
-            <a:ext cx="9951349" cy="2390229"/>
-          </a:xfrm>
-        </p:spPr>
-        <p:txBody>
-          <a:bodyPr>
-            <a:noAutofit/>
-          </a:bodyPr>
-          <a:lstStyle/>
-          <a:p>
-            <a:pPr marL="0" indent="0">
-              <a:buNone/>
-            </a:pPr>
-            <a:r>
-              <a:rPr lang="en-US" sz="3200" dirty="0">
-                <a:solidFill>
-                  <a:schemeClr val="accent1"/>
-                </a:solidFill>
-              </a:rPr>
-              <a:t>Goal</a:t>
-            </a:r>
-          </a:p>
-          <a:p>
-            <a:pPr marL="0" indent="0">
-              <a:buNone/>
-            </a:pPr>
-            <a:r>
-              <a:rPr lang="en-US" sz="2500" dirty="0">
-                <a:solidFill>
-                  <a:schemeClr val="accent1"/>
-                </a:solidFill>
-              </a:rPr>
-              <a:t>Learn how to </a:t>
-            </a:r>
-            <a:r>
-              <a:rPr lang="en-US" sz="2500" b="1" dirty="0">
-                <a:solidFill>
-                  <a:schemeClr val="accent1"/>
-                </a:solidFill>
-              </a:rPr>
-              <a:t>collect</a:t>
-            </a:r>
-            <a:r>
-              <a:rPr lang="en-US" sz="2500" dirty="0">
-                <a:solidFill>
-                  <a:schemeClr val="accent1"/>
-                </a:solidFill>
-              </a:rPr>
-              <a:t>, </a:t>
-            </a:r>
-            <a:r>
-              <a:rPr lang="en-US" sz="2500" b="1" dirty="0">
-                <a:solidFill>
-                  <a:schemeClr val="accent1"/>
-                </a:solidFill>
-              </a:rPr>
-              <a:t>document</a:t>
-            </a:r>
-            <a:r>
-              <a:rPr lang="en-US" sz="2500" dirty="0">
-                <a:solidFill>
-                  <a:schemeClr val="accent1"/>
-                </a:solidFill>
-              </a:rPr>
-              <a:t>, and </a:t>
-            </a:r>
-            <a:r>
-              <a:rPr lang="en-US" sz="2500" b="1" dirty="0">
-                <a:solidFill>
-                  <a:schemeClr val="accent1"/>
-                </a:solidFill>
-              </a:rPr>
-              <a:t>critically</a:t>
-            </a:r>
-            <a:r>
-              <a:rPr lang="en-US" sz="2500" dirty="0">
-                <a:solidFill>
-                  <a:schemeClr val="accent1"/>
-                </a:solidFill>
-              </a:rPr>
-              <a:t> </a:t>
-            </a:r>
-            <a:r>
-              <a:rPr lang="en-US" sz="2500" b="1" dirty="0">
-                <a:solidFill>
-                  <a:schemeClr val="accent1"/>
-                </a:solidFill>
-              </a:rPr>
-              <a:t>assess</a:t>
-            </a:r>
-            <a:r>
-              <a:rPr lang="en-US" sz="2500" dirty="0">
-                <a:solidFill>
-                  <a:schemeClr val="accent1"/>
-                </a:solidFill>
-              </a:rPr>
-              <a:t> data from online platforms.</a:t>
-            </a:r>
-          </a:p>
-          <a:p>
-            <a:pPr marL="0" indent="0">
-              <a:buNone/>
-            </a:pPr>
-            <a:endParaRPr lang="en-US" sz="2500" dirty="0">
-              <a:solidFill>
-                <a:schemeClr val="accent1"/>
-              </a:solidFill>
-            </a:endParaRPr>
-          </a:p>
-          <a:p>
-            <a:pPr marL="0" indent="0">
-              <a:buNone/>
-            </a:pPr>
-            <a:r>
-              <a:rPr lang="en-US" sz="3200" dirty="0">
-                <a:solidFill>
-                  <a:schemeClr val="accent1"/>
-                </a:solidFill>
-              </a:rPr>
-              <a:t>Outcome</a:t>
-            </a:r>
-          </a:p>
-          <a:p>
-            <a:pPr marL="0" indent="0">
-              <a:buNone/>
-            </a:pPr>
-            <a:r>
-              <a:rPr lang="en-US" sz="2500" dirty="0">
-                <a:solidFill>
-                  <a:schemeClr val="accent1"/>
-                </a:solidFill>
-              </a:rPr>
-              <a:t>By the end of the week, participants can </a:t>
-            </a:r>
-            <a:r>
-              <a:rPr lang="en-US" sz="2500" b="1" dirty="0">
-                <a:solidFill>
-                  <a:schemeClr val="accent1"/>
-                </a:solidFill>
-              </a:rPr>
-              <a:t>design</a:t>
-            </a:r>
-            <a:r>
-              <a:rPr lang="en-US" sz="2500" dirty="0">
-                <a:solidFill>
-                  <a:schemeClr val="accent1"/>
-                </a:solidFill>
-              </a:rPr>
-              <a:t> and </a:t>
-            </a:r>
-            <a:r>
-              <a:rPr lang="en-US" sz="2500" b="1" dirty="0">
-                <a:solidFill>
-                  <a:schemeClr val="accent1"/>
-                </a:solidFill>
-              </a:rPr>
-              <a:t>critique</a:t>
-            </a:r>
-            <a:r>
-              <a:rPr lang="en-US" sz="2500" dirty="0">
-                <a:solidFill>
-                  <a:schemeClr val="accent1"/>
-                </a:solidFill>
-              </a:rPr>
-              <a:t> a </a:t>
-            </a:r>
-            <a:r>
-              <a:rPr lang="en-US" sz="2500" b="1" dirty="0">
-                <a:solidFill>
-                  <a:schemeClr val="accent1"/>
-                </a:solidFill>
-              </a:rPr>
-              <a:t>reproducible platform data collection </a:t>
-            </a:r>
-            <a:r>
-              <a:rPr lang="en-US" sz="2500" dirty="0">
-                <a:solidFill>
-                  <a:schemeClr val="accent1"/>
-                </a:solidFill>
-              </a:rPr>
-              <a:t>workflow.</a:t>
-            </a:r>
-          </a:p>
-          <a:p>
-            <a:pPr marL="0" indent="0">
-              <a:buNone/>
-            </a:pPr>
-            <a:endParaRPr lang="en-US" sz="2500" dirty="0">
-              <a:solidFill>
-                <a:schemeClr val="accent1"/>
-              </a:solidFill>
-            </a:endParaRPr>
-          </a:p>
-          <a:p>
-            <a:pPr marL="0" indent="0">
-              <a:buNone/>
-            </a:pPr>
-            <a:endParaRPr lang="en-US" sz="3200" dirty="0">
-              <a:solidFill>
-                <a:schemeClr val="accent1"/>
-              </a:solidFill>
-            </a:endParaRPr>
-          </a:p>
-        </p:txBody>
-      </p:sp>
-    </p:spTree>
-    <p:extLst>
-      <p:ext uri="{BB962C8B-B14F-4D97-AF65-F5344CB8AC3E}">
-        <p14:creationId xmlns:p14="http://schemas.microsoft.com/office/powerpoint/2010/main" val="1493801983"/>
-      </p:ext>
-    </p:extLst>
-  </p:cSld>
-  <p:clrMapOvr>
-    <a:masterClrMapping/>
-  </p:clrMapOvr>
-</p:sld>
-</file>
-
-<file path=ppt/slides/slide30.xml><?xml version="1.0" encoding="utf-8"?>
+<file path=ppt/slides/slide23.xml><?xml version="1.0" encoding="utf-8"?>
 <p:sld xmlns:a="http://schemas.openxmlformats.org/drawingml/2006/main" xmlns:r="http://schemas.openxmlformats.org/officeDocument/2006/relationships" xmlns:p="http://schemas.openxmlformats.org/presentationml/2006/main">
   <p:cSld>
     <p:spTree>
@@ -11432,7 +11041,7 @@
         <p:spPr>
           <a:xfrm>
             <a:off x="838200" y="1720525"/>
-            <a:ext cx="10515600" cy="4351338"/>
+            <a:ext cx="5257800" cy="4351338"/>
           </a:xfrm>
         </p:spPr>
         <p:txBody>
@@ -11483,6 +11092,264 @@
           </a:p>
           <a:p>
             <a:pPr marL="0" indent="0">
+              <a:buNone/>
+            </a:pPr>
+            <a:endParaRPr lang="en-US" dirty="0">
+              <a:solidFill>
+                <a:schemeClr val="accent1"/>
+              </a:solidFill>
+            </a:endParaRPr>
+          </a:p>
+        </p:txBody>
+      </p:sp>
+      <p:sp>
+        <p:nvSpPr>
+          <p:cNvPr id="4" name="Content Placeholder 2">
+            <a:extLst>
+              <a:ext uri="{FF2B5EF4-FFF2-40B4-BE49-F238E27FC236}">
+                <a16:creationId xmlns:a16="http://schemas.microsoft.com/office/drawing/2014/main" id="{2CDD237D-127C-1B67-EC00-A508D3A684CE}"/>
+              </a:ext>
+            </a:extLst>
+          </p:cNvPr>
+          <p:cNvSpPr txBox="1">
+            <a:spLocks/>
+          </p:cNvSpPr>
+          <p:nvPr/>
+        </p:nvSpPr>
+        <p:spPr>
+          <a:xfrm>
+            <a:off x="6096000" y="1690688"/>
+            <a:ext cx="5352326" cy="4351338"/>
+          </a:xfrm>
+          <a:prstGeom prst="rect">
+            <a:avLst/>
+          </a:prstGeom>
+        </p:spPr>
+        <p:txBody>
+          <a:bodyPr vert="horz" lIns="91440" tIns="45720" rIns="91440" bIns="45720" rtlCol="0">
+            <a:normAutofit/>
+          </a:bodyPr>
+          <a:lstStyle>
+            <a:lvl1pPr marL="228600" indent="-228600" algn="l" defTabSz="914400" rtl="0" eaLnBrk="1" latinLnBrk="0" hangingPunct="1">
+              <a:lnSpc>
+                <a:spcPct val="90000"/>
+              </a:lnSpc>
+              <a:spcBef>
+                <a:spcPts val="1000"/>
+              </a:spcBef>
+              <a:buFont typeface="Arial" panose="020B0604020202020204" pitchFamily="34" charset="0"/>
+              <a:buChar char="•"/>
+              <a:defRPr sz="2800" kern="1200">
+                <a:solidFill>
+                  <a:schemeClr val="tx1"/>
+                </a:solidFill>
+                <a:latin typeface="+mn-lt"/>
+                <a:ea typeface="+mn-ea"/>
+                <a:cs typeface="+mn-cs"/>
+              </a:defRPr>
+            </a:lvl1pPr>
+            <a:lvl2pPr marL="685800" indent="-228600" algn="l" defTabSz="914400" rtl="0" eaLnBrk="1" latinLnBrk="0" hangingPunct="1">
+              <a:lnSpc>
+                <a:spcPct val="90000"/>
+              </a:lnSpc>
+              <a:spcBef>
+                <a:spcPts val="500"/>
+              </a:spcBef>
+              <a:buFont typeface="Arial" panose="020B0604020202020204" pitchFamily="34" charset="0"/>
+              <a:buChar char="•"/>
+              <a:defRPr sz="2400" kern="1200">
+                <a:solidFill>
+                  <a:schemeClr val="tx1"/>
+                </a:solidFill>
+                <a:latin typeface="+mn-lt"/>
+                <a:ea typeface="+mn-ea"/>
+                <a:cs typeface="+mn-cs"/>
+              </a:defRPr>
+            </a:lvl2pPr>
+            <a:lvl3pPr marL="1143000" indent="-228600" algn="l" defTabSz="914400" rtl="0" eaLnBrk="1" latinLnBrk="0" hangingPunct="1">
+              <a:lnSpc>
+                <a:spcPct val="90000"/>
+              </a:lnSpc>
+              <a:spcBef>
+                <a:spcPts val="500"/>
+              </a:spcBef>
+              <a:buFont typeface="Arial" panose="020B0604020202020204" pitchFamily="34" charset="0"/>
+              <a:buChar char="•"/>
+              <a:defRPr sz="2000" kern="1200">
+                <a:solidFill>
+                  <a:schemeClr val="tx1"/>
+                </a:solidFill>
+                <a:latin typeface="+mn-lt"/>
+                <a:ea typeface="+mn-ea"/>
+                <a:cs typeface="+mn-cs"/>
+              </a:defRPr>
+            </a:lvl3pPr>
+            <a:lvl4pPr marL="1600200" indent="-228600" algn="l" defTabSz="914400" rtl="0" eaLnBrk="1" latinLnBrk="0" hangingPunct="1">
+              <a:lnSpc>
+                <a:spcPct val="90000"/>
+              </a:lnSpc>
+              <a:spcBef>
+                <a:spcPts val="500"/>
+              </a:spcBef>
+              <a:buFont typeface="Arial" panose="020B0604020202020204" pitchFamily="34" charset="0"/>
+              <a:buChar char="•"/>
+              <a:defRPr sz="1800" kern="1200">
+                <a:solidFill>
+                  <a:schemeClr val="tx1"/>
+                </a:solidFill>
+                <a:latin typeface="+mn-lt"/>
+                <a:ea typeface="+mn-ea"/>
+                <a:cs typeface="+mn-cs"/>
+              </a:defRPr>
+            </a:lvl4pPr>
+            <a:lvl5pPr marL="2057400" indent="-228600" algn="l" defTabSz="914400" rtl="0" eaLnBrk="1" latinLnBrk="0" hangingPunct="1">
+              <a:lnSpc>
+                <a:spcPct val="90000"/>
+              </a:lnSpc>
+              <a:spcBef>
+                <a:spcPts val="500"/>
+              </a:spcBef>
+              <a:buFont typeface="Arial" panose="020B0604020202020204" pitchFamily="34" charset="0"/>
+              <a:buChar char="•"/>
+              <a:defRPr sz="1800" kern="1200">
+                <a:solidFill>
+                  <a:schemeClr val="tx1"/>
+                </a:solidFill>
+                <a:latin typeface="+mn-lt"/>
+                <a:ea typeface="+mn-ea"/>
+                <a:cs typeface="+mn-cs"/>
+              </a:defRPr>
+            </a:lvl5pPr>
+            <a:lvl6pPr marL="2514600" indent="-228600" algn="l" defTabSz="914400" rtl="0" eaLnBrk="1" latinLnBrk="0" hangingPunct="1">
+              <a:lnSpc>
+                <a:spcPct val="90000"/>
+              </a:lnSpc>
+              <a:spcBef>
+                <a:spcPts val="500"/>
+              </a:spcBef>
+              <a:buFont typeface="Arial" panose="020B0604020202020204" pitchFamily="34" charset="0"/>
+              <a:buChar char="•"/>
+              <a:defRPr sz="1800" kern="1200">
+                <a:solidFill>
+                  <a:schemeClr val="tx1"/>
+                </a:solidFill>
+                <a:latin typeface="+mn-lt"/>
+                <a:ea typeface="+mn-ea"/>
+                <a:cs typeface="+mn-cs"/>
+              </a:defRPr>
+            </a:lvl6pPr>
+            <a:lvl7pPr marL="2971800" indent="-228600" algn="l" defTabSz="914400" rtl="0" eaLnBrk="1" latinLnBrk="0" hangingPunct="1">
+              <a:lnSpc>
+                <a:spcPct val="90000"/>
+              </a:lnSpc>
+              <a:spcBef>
+                <a:spcPts val="500"/>
+              </a:spcBef>
+              <a:buFont typeface="Arial" panose="020B0604020202020204" pitchFamily="34" charset="0"/>
+              <a:buChar char="•"/>
+              <a:defRPr sz="1800" kern="1200">
+                <a:solidFill>
+                  <a:schemeClr val="tx1"/>
+                </a:solidFill>
+                <a:latin typeface="+mn-lt"/>
+                <a:ea typeface="+mn-ea"/>
+                <a:cs typeface="+mn-cs"/>
+              </a:defRPr>
+            </a:lvl7pPr>
+            <a:lvl8pPr marL="3429000" indent="-228600" algn="l" defTabSz="914400" rtl="0" eaLnBrk="1" latinLnBrk="0" hangingPunct="1">
+              <a:lnSpc>
+                <a:spcPct val="90000"/>
+              </a:lnSpc>
+              <a:spcBef>
+                <a:spcPts val="500"/>
+              </a:spcBef>
+              <a:buFont typeface="Arial" panose="020B0604020202020204" pitchFamily="34" charset="0"/>
+              <a:buChar char="•"/>
+              <a:defRPr sz="1800" kern="1200">
+                <a:solidFill>
+                  <a:schemeClr val="tx1"/>
+                </a:solidFill>
+                <a:latin typeface="+mn-lt"/>
+                <a:ea typeface="+mn-ea"/>
+                <a:cs typeface="+mn-cs"/>
+              </a:defRPr>
+            </a:lvl8pPr>
+            <a:lvl9pPr marL="3886200" indent="-228600" algn="l" defTabSz="914400" rtl="0" eaLnBrk="1" latinLnBrk="0" hangingPunct="1">
+              <a:lnSpc>
+                <a:spcPct val="90000"/>
+              </a:lnSpc>
+              <a:spcBef>
+                <a:spcPts val="500"/>
+              </a:spcBef>
+              <a:buFont typeface="Arial" panose="020B0604020202020204" pitchFamily="34" charset="0"/>
+              <a:buChar char="•"/>
+              <a:defRPr sz="1800" kern="1200">
+                <a:solidFill>
+                  <a:schemeClr val="tx1"/>
+                </a:solidFill>
+                <a:latin typeface="+mn-lt"/>
+                <a:ea typeface="+mn-ea"/>
+                <a:cs typeface="+mn-cs"/>
+              </a:defRPr>
+            </a:lvl9pPr>
+          </a:lstStyle>
+          <a:p>
+            <a:pPr marL="0" indent="0">
+              <a:buFont typeface="Arial" panose="020B0604020202020204" pitchFamily="34" charset="0"/>
+              <a:buNone/>
+            </a:pPr>
+            <a:r>
+              <a:rPr lang="en-US">
+                <a:solidFill>
+                  <a:schemeClr val="accent1"/>
+                </a:solidFill>
+              </a:rPr>
+              <a:t>Limitations:</a:t>
+            </a:r>
+          </a:p>
+          <a:p>
+            <a:r>
+              <a:rPr lang="en-US" sz="2400">
+                <a:solidFill>
+                  <a:schemeClr val="accent1"/>
+                </a:solidFill>
+              </a:rPr>
+              <a:t>partial reporting</a:t>
+            </a:r>
+          </a:p>
+          <a:p>
+            <a:r>
+              <a:rPr lang="en-US" sz="2400">
+                <a:solidFill>
+                  <a:schemeClr val="accent1"/>
+                </a:solidFill>
+              </a:rPr>
+              <a:t>platform-defined categories</a:t>
+            </a:r>
+          </a:p>
+          <a:p>
+            <a:r>
+              <a:rPr lang="en-US" sz="2400">
+                <a:solidFill>
+                  <a:schemeClr val="accent1"/>
+                </a:solidFill>
+              </a:rPr>
+              <a:t>missing context</a:t>
+            </a:r>
+          </a:p>
+          <a:p>
+            <a:r>
+              <a:rPr lang="en-US" sz="2400">
+                <a:solidFill>
+                  <a:schemeClr val="accent1"/>
+                </a:solidFill>
+              </a:rPr>
+              <a:t>varying quality and completeness</a:t>
+            </a:r>
+          </a:p>
+          <a:p>
+            <a:pPr marL="0" indent="0">
+              <a:buFont typeface="Arial" panose="020B0604020202020204" pitchFamily="34" charset="0"/>
               <a:buNone/>
             </a:pPr>
             <a:endParaRPr lang="en-US" dirty="0">
@@ -11506,165 +11373,7 @@
 </p:sld>
 </file>
 
-<file path=ppt/slides/slide31.xml><?xml version="1.0" encoding="utf-8"?>
-<p:sld xmlns:a="http://schemas.openxmlformats.org/drawingml/2006/main" xmlns:r="http://schemas.openxmlformats.org/officeDocument/2006/relationships" xmlns:p="http://schemas.openxmlformats.org/presentationml/2006/main">
-  <p:cSld>
-    <p:spTree>
-      <p:nvGrpSpPr>
-        <p:cNvPr id="1" name="">
-          <a:extLst>
-            <a:ext uri="{FF2B5EF4-FFF2-40B4-BE49-F238E27FC236}">
-              <a16:creationId xmlns:a16="http://schemas.microsoft.com/office/drawing/2014/main" id="{6D36C1C4-8C0B-8184-2316-8672833A8E9B}"/>
-            </a:ext>
-          </a:extLst>
-        </p:cNvPr>
-        <p:cNvGrpSpPr/>
-        <p:nvPr/>
-      </p:nvGrpSpPr>
-      <p:grpSpPr>
-        <a:xfrm>
-          <a:off x="0" y="0"/>
-          <a:ext cx="0" cy="0"/>
-          <a:chOff x="0" y="0"/>
-          <a:chExt cx="0" cy="0"/>
-        </a:xfrm>
-      </p:grpSpPr>
-      <p:sp>
-        <p:nvSpPr>
-          <p:cNvPr id="2" name="Title 1">
-            <a:extLst>
-              <a:ext uri="{FF2B5EF4-FFF2-40B4-BE49-F238E27FC236}">
-                <a16:creationId xmlns:a16="http://schemas.microsoft.com/office/drawing/2014/main" id="{AC4DE9CD-DB61-2090-FA1D-BC53310C8462}"/>
-              </a:ext>
-            </a:extLst>
-          </p:cNvPr>
-          <p:cNvSpPr>
-            <a:spLocks noGrp="1"/>
-          </p:cNvSpPr>
-          <p:nvPr>
-            <p:ph type="title"/>
-          </p:nvPr>
-        </p:nvSpPr>
-        <p:spPr/>
-        <p:txBody>
-          <a:bodyPr/>
-          <a:lstStyle/>
-          <a:p>
-            <a:r>
-              <a:rPr lang="en-US" dirty="0">
-                <a:solidFill>
-                  <a:schemeClr val="accent1"/>
-                </a:solidFill>
-              </a:rPr>
-              <a:t>Transparency Databases and Ad Libraries</a:t>
-            </a:r>
-          </a:p>
-        </p:txBody>
-      </p:sp>
-      <p:sp>
-        <p:nvSpPr>
-          <p:cNvPr id="3" name="Content Placeholder 2">
-            <a:extLst>
-              <a:ext uri="{FF2B5EF4-FFF2-40B4-BE49-F238E27FC236}">
-                <a16:creationId xmlns:a16="http://schemas.microsoft.com/office/drawing/2014/main" id="{86BF20CA-27B3-16A8-D160-7B1CE499E5A4}"/>
-              </a:ext>
-            </a:extLst>
-          </p:cNvPr>
-          <p:cNvSpPr>
-            <a:spLocks noGrp="1"/>
-          </p:cNvSpPr>
-          <p:nvPr>
-            <p:ph idx="1"/>
-          </p:nvPr>
-        </p:nvSpPr>
-        <p:spPr>
-          <a:xfrm>
-            <a:off x="838200" y="1720525"/>
-            <a:ext cx="10515600" cy="4351338"/>
-          </a:xfrm>
-        </p:spPr>
-        <p:txBody>
-          <a:bodyPr/>
-          <a:lstStyle/>
-          <a:p>
-            <a:pPr marL="0" indent="0">
-              <a:buNone/>
-            </a:pPr>
-            <a:r>
-              <a:rPr lang="en-US" dirty="0">
-                <a:solidFill>
-                  <a:schemeClr val="accent1"/>
-                </a:solidFill>
-              </a:rPr>
-              <a:t>Limitations:</a:t>
-            </a:r>
-          </a:p>
-          <a:p>
-            <a:r>
-              <a:rPr lang="en-US" sz="2400" dirty="0">
-                <a:solidFill>
-                  <a:schemeClr val="accent1"/>
-                </a:solidFill>
-              </a:rPr>
-              <a:t>partial reporting</a:t>
-            </a:r>
-          </a:p>
-          <a:p>
-            <a:r>
-              <a:rPr lang="en-US" sz="2400" dirty="0">
-                <a:solidFill>
-                  <a:schemeClr val="accent1"/>
-                </a:solidFill>
-              </a:rPr>
-              <a:t>platform-defined categories</a:t>
-            </a:r>
-          </a:p>
-          <a:p>
-            <a:r>
-              <a:rPr lang="en-US" sz="2400" dirty="0">
-                <a:solidFill>
-                  <a:schemeClr val="accent1"/>
-                </a:solidFill>
-              </a:rPr>
-              <a:t>missing context</a:t>
-            </a:r>
-          </a:p>
-          <a:p>
-            <a:r>
-              <a:rPr lang="en-US" sz="2400" dirty="0">
-                <a:solidFill>
-                  <a:schemeClr val="accent1"/>
-                </a:solidFill>
-              </a:rPr>
-              <a:t>varying quality and completeness</a:t>
-            </a:r>
-          </a:p>
-          <a:p>
-            <a:pPr marL="0" indent="0">
-              <a:buNone/>
-            </a:pPr>
-            <a:endParaRPr lang="en-US" dirty="0">
-              <a:solidFill>
-                <a:schemeClr val="accent1"/>
-              </a:solidFill>
-            </a:endParaRPr>
-          </a:p>
-        </p:txBody>
-      </p:sp>
-    </p:spTree>
-    <p:extLst>
-      <p:ext uri="{BB962C8B-B14F-4D97-AF65-F5344CB8AC3E}">
-        <p14:creationId xmlns:p14="http://schemas.microsoft.com/office/powerpoint/2010/main" val="4047941755"/>
-      </p:ext>
-    </p:extLst>
-  </p:cSld>
-  <p:clrMapOvr>
-    <a:masterClrMapping/>
-  </p:clrMapOvr>
-</p:sld>
-</file>
-
-<file path=ppt/slides/slide32.xml><?xml version="1.0" encoding="utf-8"?>
+<file path=ppt/slides/slide24.xml><?xml version="1.0" encoding="utf-8"?>
 <p:sld xmlns:a="http://schemas.openxmlformats.org/drawingml/2006/main" xmlns:r="http://schemas.openxmlformats.org/officeDocument/2006/relationships" xmlns:p="http://schemas.openxmlformats.org/presentationml/2006/main">
   <p:cSld>
     <p:spTree>
@@ -11835,7 +11544,7 @@
 </p:sld>
 </file>
 
-<file path=ppt/slides/slide33.xml><?xml version="1.0" encoding="utf-8"?>
+<file path=ppt/slides/slide25.xml><?xml version="1.0" encoding="utf-8"?>
 <p:sld xmlns:a="http://schemas.openxmlformats.org/drawingml/2006/main" xmlns:r="http://schemas.openxmlformats.org/officeDocument/2006/relationships" xmlns:p="http://schemas.openxmlformats.org/presentationml/2006/main">
   <p:cSld>
     <p:spTree>
@@ -11993,7 +11702,7 @@
 </p:sld>
 </file>
 
-<file path=ppt/slides/slide34.xml><?xml version="1.0" encoding="utf-8"?>
+<file path=ppt/slides/slide26.xml><?xml version="1.0" encoding="utf-8"?>
 <p:sld xmlns:a="http://schemas.openxmlformats.org/drawingml/2006/main" xmlns:r="http://schemas.openxmlformats.org/officeDocument/2006/relationships" xmlns:p="http://schemas.openxmlformats.org/presentationml/2006/main">
   <p:cSld>
     <p:spTree>
@@ -12171,7 +11880,7 @@
 </p:sld>
 </file>
 
-<file path=ppt/slides/slide35.xml><?xml version="1.0" encoding="utf-8"?>
+<file path=ppt/slides/slide27.xml><?xml version="1.0" encoding="utf-8"?>
 <p:sld xmlns:a="http://schemas.openxmlformats.org/drawingml/2006/main" xmlns:r="http://schemas.openxmlformats.org/officeDocument/2006/relationships" xmlns:p="http://schemas.openxmlformats.org/presentationml/2006/main">
   <p:cSld>
     <p:spTree>
@@ -12306,202 +12015,7 @@
 </p:sld>
 </file>
 
-<file path=ppt/slides/slide36.xml><?xml version="1.0" encoding="utf-8"?>
-<p:sld xmlns:a="http://schemas.openxmlformats.org/drawingml/2006/main" xmlns:r="http://schemas.openxmlformats.org/officeDocument/2006/relationships" xmlns:p="http://schemas.openxmlformats.org/presentationml/2006/main">
-  <p:cSld>
-    <p:spTree>
-      <p:nvGrpSpPr>
-        <p:cNvPr id="1" name="">
-          <a:extLst>
-            <a:ext uri="{FF2B5EF4-FFF2-40B4-BE49-F238E27FC236}">
-              <a16:creationId xmlns:a16="http://schemas.microsoft.com/office/drawing/2014/main" id="{2A541F26-2E64-F026-1655-6DECB308637E}"/>
-            </a:ext>
-          </a:extLst>
-        </p:cNvPr>
-        <p:cNvGrpSpPr/>
-        <p:nvPr/>
-      </p:nvGrpSpPr>
-      <p:grpSpPr>
-        <a:xfrm>
-          <a:off x="0" y="0"/>
-          <a:ext cx="0" cy="0"/>
-          <a:chOff x="0" y="0"/>
-          <a:chExt cx="0" cy="0"/>
-        </a:xfrm>
-      </p:grpSpPr>
-      <p:sp>
-        <p:nvSpPr>
-          <p:cNvPr id="2" name="Title 1">
-            <a:extLst>
-              <a:ext uri="{FF2B5EF4-FFF2-40B4-BE49-F238E27FC236}">
-                <a16:creationId xmlns:a16="http://schemas.microsoft.com/office/drawing/2014/main" id="{1D5224C8-F9CC-9F9E-4341-DEAB0BEFCC44}"/>
-              </a:ext>
-            </a:extLst>
-          </p:cNvPr>
-          <p:cNvSpPr>
-            <a:spLocks noGrp="1"/>
-          </p:cNvSpPr>
-          <p:nvPr>
-            <p:ph type="title"/>
-          </p:nvPr>
-        </p:nvSpPr>
-        <p:spPr/>
-        <p:txBody>
-          <a:bodyPr/>
-          <a:lstStyle/>
-          <a:p>
-            <a:r>
-              <a:rPr lang="en-US" dirty="0">
-                <a:solidFill>
-                  <a:schemeClr val="accent1"/>
-                </a:solidFill>
-              </a:rPr>
-              <a:t>Methodological Questions</a:t>
-            </a:r>
-          </a:p>
-        </p:txBody>
-      </p:sp>
-      <p:sp>
-        <p:nvSpPr>
-          <p:cNvPr id="3" name="Content Placeholder 2">
-            <a:extLst>
-              <a:ext uri="{FF2B5EF4-FFF2-40B4-BE49-F238E27FC236}">
-                <a16:creationId xmlns:a16="http://schemas.microsoft.com/office/drawing/2014/main" id="{124DCE8D-EE6D-0412-1066-A621AC9B8351}"/>
-              </a:ext>
-            </a:extLst>
-          </p:cNvPr>
-          <p:cNvSpPr>
-            <a:spLocks noGrp="1"/>
-          </p:cNvSpPr>
-          <p:nvPr>
-            <p:ph idx="1"/>
-          </p:nvPr>
-        </p:nvSpPr>
-        <p:spPr>
-          <a:xfrm>
-            <a:off x="838200" y="1720525"/>
-            <a:ext cx="10515600" cy="4351338"/>
-          </a:xfrm>
-        </p:spPr>
-        <p:txBody>
-          <a:bodyPr>
-            <a:normAutofit/>
-          </a:bodyPr>
-          <a:lstStyle/>
-          <a:p>
-            <a:pPr marL="0" indent="0">
-              <a:buNone/>
-            </a:pPr>
-            <a:r>
-              <a:rPr lang="en-US" dirty="0">
-                <a:solidFill>
-                  <a:schemeClr val="accent1"/>
-                </a:solidFill>
-              </a:rPr>
-              <a:t>For every dataset, ask:</a:t>
-            </a:r>
-          </a:p>
-          <a:p>
-            <a:pPr lvl="1"/>
-            <a:endParaRPr lang="en-US" sz="2000" dirty="0">
-              <a:solidFill>
-                <a:schemeClr val="accent1"/>
-              </a:solidFill>
-            </a:endParaRPr>
-          </a:p>
-          <a:p>
-            <a:pPr lvl="1"/>
-            <a:r>
-              <a:rPr lang="en-US" sz="2000" dirty="0">
-                <a:solidFill>
-                  <a:schemeClr val="accent1"/>
-                </a:solidFill>
-              </a:rPr>
-              <a:t>What is the unit of observation?</a:t>
-            </a:r>
-          </a:p>
-          <a:p>
-            <a:pPr lvl="1"/>
-            <a:r>
-              <a:rPr lang="en-US" sz="2000" dirty="0">
-                <a:solidFill>
-                  <a:schemeClr val="accent1"/>
-                </a:solidFill>
-              </a:rPr>
-              <a:t>What population can this access route reveal?</a:t>
-            </a:r>
-          </a:p>
-          <a:p>
-            <a:pPr lvl="1"/>
-            <a:r>
-              <a:rPr lang="en-US" sz="2000" dirty="0">
-                <a:solidFill>
-                  <a:schemeClr val="accent1"/>
-                </a:solidFill>
-              </a:rPr>
-              <a:t>What records are excluded?</a:t>
-            </a:r>
-          </a:p>
-          <a:p>
-            <a:pPr lvl="1"/>
-            <a:r>
-              <a:rPr lang="en-US" sz="2000" dirty="0">
-                <a:solidFill>
-                  <a:schemeClr val="accent1"/>
-                </a:solidFill>
-              </a:rPr>
-              <a:t>What parameters shaped collection?</a:t>
-            </a:r>
-          </a:p>
-          <a:p>
-            <a:pPr lvl="1"/>
-            <a:r>
-              <a:rPr lang="en-US" sz="2000" dirty="0">
-                <a:solidFill>
-                  <a:schemeClr val="accent1"/>
-                </a:solidFill>
-              </a:rPr>
-              <a:t>What fields are missing?</a:t>
-            </a:r>
-          </a:p>
-          <a:p>
-            <a:pPr lvl="1"/>
-            <a:r>
-              <a:rPr lang="en-US" sz="2000" dirty="0">
-                <a:solidFill>
-                  <a:schemeClr val="accent1"/>
-                </a:solidFill>
-              </a:rPr>
-              <a:t>Who controls visibility?</a:t>
-            </a:r>
-          </a:p>
-          <a:p>
-            <a:pPr lvl="1"/>
-            <a:r>
-              <a:rPr lang="en-US" sz="2000" dirty="0">
-                <a:solidFill>
-                  <a:schemeClr val="accent1"/>
-                </a:solidFill>
-              </a:rPr>
-              <a:t>Can another researcher reproduce the workflow?</a:t>
-            </a:r>
-          </a:p>
-        </p:txBody>
-      </p:sp>
-    </p:spTree>
-    <p:extLst>
-      <p:ext uri="{BB962C8B-B14F-4D97-AF65-F5344CB8AC3E}">
-        <p14:creationId xmlns:p14="http://schemas.microsoft.com/office/powerpoint/2010/main" val="3690229046"/>
-      </p:ext>
-    </p:extLst>
-  </p:cSld>
-  <p:clrMapOvr>
-    <a:masterClrMapping/>
-  </p:clrMapOvr>
-</p:sld>
-</file>
-
-<file path=ppt/slides/slide37.xml><?xml version="1.0" encoding="utf-8"?>
+<file path=ppt/slides/slide28.xml><?xml version="1.0" encoding="utf-8"?>
 <p:sld xmlns:a="http://schemas.openxmlformats.org/drawingml/2006/main" xmlns:r="http://schemas.openxmlformats.org/officeDocument/2006/relationships" xmlns:p="http://schemas.openxmlformats.org/presentationml/2006/main">
   <p:cSld>
     <p:spTree>
@@ -12619,6 +12133,1179 @@
     <p:extLst>
       <p:ext uri="{BB962C8B-B14F-4D97-AF65-F5344CB8AC3E}">
         <p14:creationId xmlns:p14="http://schemas.microsoft.com/office/powerpoint/2010/main" val="2158123863"/>
+      </p:ext>
+    </p:extLst>
+  </p:cSld>
+  <p:clrMapOvr>
+    <a:masterClrMapping/>
+  </p:clrMapOvr>
+</p:sld>
+</file>
+
+<file path=ppt/slides/slide29.xml><?xml version="1.0" encoding="utf-8"?>
+<p:sld xmlns:a="http://schemas.openxmlformats.org/drawingml/2006/main" xmlns:r="http://schemas.openxmlformats.org/officeDocument/2006/relationships" xmlns:p="http://schemas.openxmlformats.org/presentationml/2006/main">
+  <p:cSld>
+    <p:spTree>
+      <p:nvGrpSpPr>
+        <p:cNvPr id="1" name="">
+          <a:extLst>
+            <a:ext uri="{FF2B5EF4-FFF2-40B4-BE49-F238E27FC236}">
+              <a16:creationId xmlns:a16="http://schemas.microsoft.com/office/drawing/2014/main" id="{A1E40EB5-DBCF-1F14-C1CB-D55131AFA837}"/>
+            </a:ext>
+          </a:extLst>
+        </p:cNvPr>
+        <p:cNvGrpSpPr/>
+        <p:nvPr/>
+      </p:nvGrpSpPr>
+      <p:grpSpPr>
+        <a:xfrm>
+          <a:off x="0" y="0"/>
+          <a:ext cx="0" cy="0"/>
+          <a:chOff x="0" y="0"/>
+          <a:chExt cx="0" cy="0"/>
+        </a:xfrm>
+      </p:grpSpPr>
+      <p:sp>
+        <p:nvSpPr>
+          <p:cNvPr id="2" name="Title 1">
+            <a:extLst>
+              <a:ext uri="{FF2B5EF4-FFF2-40B4-BE49-F238E27FC236}">
+                <a16:creationId xmlns:a16="http://schemas.microsoft.com/office/drawing/2014/main" id="{07265236-7201-C507-D004-5143A309B804}"/>
+              </a:ext>
+            </a:extLst>
+          </p:cNvPr>
+          <p:cNvSpPr>
+            <a:spLocks noGrp="1"/>
+          </p:cNvSpPr>
+          <p:nvPr>
+            <p:ph type="title"/>
+          </p:nvPr>
+        </p:nvSpPr>
+        <p:spPr/>
+        <p:txBody>
+          <a:bodyPr/>
+          <a:lstStyle/>
+          <a:p>
+            <a:r>
+              <a:rPr lang="en-US" dirty="0">
+                <a:solidFill>
+                  <a:schemeClr val="accent1"/>
+                </a:solidFill>
+              </a:rPr>
+              <a:t>What is an API?</a:t>
+            </a:r>
+          </a:p>
+        </p:txBody>
+      </p:sp>
+      <p:sp>
+        <p:nvSpPr>
+          <p:cNvPr id="3" name="Content Placeholder 2">
+            <a:extLst>
+              <a:ext uri="{FF2B5EF4-FFF2-40B4-BE49-F238E27FC236}">
+                <a16:creationId xmlns:a16="http://schemas.microsoft.com/office/drawing/2014/main" id="{0B743A20-1689-6685-94B2-2E203B8AFE78}"/>
+              </a:ext>
+            </a:extLst>
+          </p:cNvPr>
+          <p:cNvSpPr>
+            <a:spLocks noGrp="1"/>
+          </p:cNvSpPr>
+          <p:nvPr>
+            <p:ph idx="1"/>
+          </p:nvPr>
+        </p:nvSpPr>
+        <p:spPr>
+          <a:xfrm>
+            <a:off x="838200" y="1720525"/>
+            <a:ext cx="10515600" cy="4351338"/>
+          </a:xfrm>
+        </p:spPr>
+        <p:txBody>
+          <a:bodyPr/>
+          <a:lstStyle/>
+          <a:p>
+            <a:pPr marL="0" indent="0">
+              <a:buNone/>
+            </a:pPr>
+            <a:r>
+              <a:rPr lang="en-US" dirty="0">
+                <a:solidFill>
+                  <a:schemeClr val="accent1"/>
+                </a:solidFill>
+              </a:rPr>
+              <a:t>API = Application Programming Interface, i.e., a way for software systems to communicate.</a:t>
+            </a:r>
+          </a:p>
+        </p:txBody>
+      </p:sp>
+      <p:pic>
+        <p:nvPicPr>
+          <p:cNvPr id="7" name="Picture 6" descr="frame_3258.webp">
+            <a:extLst>
+              <a:ext uri="{FF2B5EF4-FFF2-40B4-BE49-F238E27FC236}">
+                <a16:creationId xmlns:a16="http://schemas.microsoft.com/office/drawing/2014/main" id="{CF9E2B3E-CB40-445C-8335-CF13A64AF6D6}"/>
+              </a:ext>
+            </a:extLst>
+          </p:cNvPr>
+          <p:cNvPicPr>
+            <a:picLocks noChangeAspect="1"/>
+          </p:cNvPicPr>
+          <p:nvPr/>
+        </p:nvPicPr>
+        <p:blipFill>
+          <a:blip r:embed="rId3"/>
+          <a:stretch>
+            <a:fillRect/>
+          </a:stretch>
+        </p:blipFill>
+        <p:spPr>
+          <a:xfrm>
+            <a:off x="3558059" y="2813913"/>
+            <a:ext cx="5080000" cy="2540000"/>
+          </a:xfrm>
+          <a:prstGeom prst="rect">
+            <a:avLst/>
+          </a:prstGeom>
+        </p:spPr>
+      </p:pic>
+    </p:spTree>
+    <p:extLst>
+      <p:ext uri="{BB962C8B-B14F-4D97-AF65-F5344CB8AC3E}">
+        <p14:creationId xmlns:p14="http://schemas.microsoft.com/office/powerpoint/2010/main" val="1803548280"/>
+      </p:ext>
+    </p:extLst>
+  </p:cSld>
+  <p:clrMapOvr>
+    <a:masterClrMapping/>
+  </p:clrMapOvr>
+</p:sld>
+</file>
+
+<file path=ppt/slides/slide3.xml><?xml version="1.0" encoding="utf-8"?>
+<p:sld xmlns:a="http://schemas.openxmlformats.org/drawingml/2006/main" xmlns:r="http://schemas.openxmlformats.org/officeDocument/2006/relationships" xmlns:p="http://schemas.openxmlformats.org/presentationml/2006/main">
+  <p:cSld>
+    <p:spTree>
+      <p:nvGrpSpPr>
+        <p:cNvPr id="1" name="">
+          <a:extLst>
+            <a:ext uri="{FF2B5EF4-FFF2-40B4-BE49-F238E27FC236}">
+              <a16:creationId xmlns:a16="http://schemas.microsoft.com/office/drawing/2014/main" id="{8938B18D-2295-1BCD-EFEB-056633601900}"/>
+            </a:ext>
+          </a:extLst>
+        </p:cNvPr>
+        <p:cNvGrpSpPr/>
+        <p:nvPr/>
+      </p:nvGrpSpPr>
+      <p:grpSpPr>
+        <a:xfrm>
+          <a:off x="0" y="0"/>
+          <a:ext cx="0" cy="0"/>
+          <a:chOff x="0" y="0"/>
+          <a:chExt cx="0" cy="0"/>
+        </a:xfrm>
+      </p:grpSpPr>
+      <p:sp>
+        <p:nvSpPr>
+          <p:cNvPr id="2" name="Title 1">
+            <a:extLst>
+              <a:ext uri="{FF2B5EF4-FFF2-40B4-BE49-F238E27FC236}">
+                <a16:creationId xmlns:a16="http://schemas.microsoft.com/office/drawing/2014/main" id="{43BDE2AF-BD61-1F43-B7FF-3DEE4FB03D4E}"/>
+              </a:ext>
+            </a:extLst>
+          </p:cNvPr>
+          <p:cNvSpPr>
+            <a:spLocks noGrp="1"/>
+          </p:cNvSpPr>
+          <p:nvPr>
+            <p:ph type="title"/>
+          </p:nvPr>
+        </p:nvSpPr>
+        <p:spPr/>
+        <p:txBody>
+          <a:bodyPr/>
+          <a:lstStyle/>
+          <a:p>
+            <a:r>
+              <a:rPr lang="en-US" dirty="0">
+                <a:solidFill>
+                  <a:schemeClr val="accent1"/>
+                </a:solidFill>
+              </a:rPr>
+              <a:t>Collecting Platform Data: Course Overview</a:t>
+            </a:r>
+          </a:p>
+        </p:txBody>
+      </p:sp>
+      <p:sp>
+        <p:nvSpPr>
+          <p:cNvPr id="3" name="Content Placeholder 2">
+            <a:extLst>
+              <a:ext uri="{FF2B5EF4-FFF2-40B4-BE49-F238E27FC236}">
+                <a16:creationId xmlns:a16="http://schemas.microsoft.com/office/drawing/2014/main" id="{3B9E53FB-AB37-ADE7-64F1-0F539F6F0EC9}"/>
+              </a:ext>
+            </a:extLst>
+          </p:cNvPr>
+          <p:cNvSpPr>
+            <a:spLocks noGrp="1"/>
+          </p:cNvSpPr>
+          <p:nvPr>
+            <p:ph idx="1"/>
+          </p:nvPr>
+        </p:nvSpPr>
+        <p:spPr>
+          <a:xfrm>
+            <a:off x="1102474" y="1839349"/>
+            <a:ext cx="9951349" cy="2390229"/>
+          </a:xfrm>
+        </p:spPr>
+        <p:txBody>
+          <a:bodyPr>
+            <a:noAutofit/>
+          </a:bodyPr>
+          <a:lstStyle/>
+          <a:p>
+            <a:pPr marL="0" indent="0">
+              <a:buNone/>
+            </a:pPr>
+            <a:r>
+              <a:rPr lang="en-US" sz="3200" dirty="0">
+                <a:solidFill>
+                  <a:schemeClr val="accent1"/>
+                </a:solidFill>
+              </a:rPr>
+              <a:t>Goal</a:t>
+            </a:r>
+          </a:p>
+          <a:p>
+            <a:pPr marL="0" indent="0">
+              <a:buNone/>
+            </a:pPr>
+            <a:r>
+              <a:rPr lang="en-US" sz="2500" dirty="0">
+                <a:solidFill>
+                  <a:schemeClr val="accent1"/>
+                </a:solidFill>
+              </a:rPr>
+              <a:t>Learn how to </a:t>
+            </a:r>
+            <a:r>
+              <a:rPr lang="en-US" sz="2500" b="1" dirty="0">
+                <a:solidFill>
+                  <a:schemeClr val="accent1"/>
+                </a:solidFill>
+              </a:rPr>
+              <a:t>collect</a:t>
+            </a:r>
+            <a:r>
+              <a:rPr lang="en-US" sz="2500" dirty="0">
+                <a:solidFill>
+                  <a:schemeClr val="accent1"/>
+                </a:solidFill>
+              </a:rPr>
+              <a:t>, </a:t>
+            </a:r>
+            <a:r>
+              <a:rPr lang="en-US" sz="2500" b="1" dirty="0">
+                <a:solidFill>
+                  <a:schemeClr val="accent1"/>
+                </a:solidFill>
+              </a:rPr>
+              <a:t>document</a:t>
+            </a:r>
+            <a:r>
+              <a:rPr lang="en-US" sz="2500" dirty="0">
+                <a:solidFill>
+                  <a:schemeClr val="accent1"/>
+                </a:solidFill>
+              </a:rPr>
+              <a:t>, and </a:t>
+            </a:r>
+            <a:r>
+              <a:rPr lang="en-US" sz="2500" b="1" dirty="0">
+                <a:solidFill>
+                  <a:schemeClr val="accent1"/>
+                </a:solidFill>
+              </a:rPr>
+              <a:t>critically</a:t>
+            </a:r>
+            <a:r>
+              <a:rPr lang="en-US" sz="2500" dirty="0">
+                <a:solidFill>
+                  <a:schemeClr val="accent1"/>
+                </a:solidFill>
+              </a:rPr>
+              <a:t> </a:t>
+            </a:r>
+            <a:r>
+              <a:rPr lang="en-US" sz="2500" b="1" dirty="0">
+                <a:solidFill>
+                  <a:schemeClr val="accent1"/>
+                </a:solidFill>
+              </a:rPr>
+              <a:t>assess</a:t>
+            </a:r>
+            <a:r>
+              <a:rPr lang="en-US" sz="2500" dirty="0">
+                <a:solidFill>
+                  <a:schemeClr val="accent1"/>
+                </a:solidFill>
+              </a:rPr>
+              <a:t> data from online platforms.</a:t>
+            </a:r>
+          </a:p>
+          <a:p>
+            <a:pPr marL="0" indent="0">
+              <a:buNone/>
+            </a:pPr>
+            <a:endParaRPr lang="en-US" sz="3200" dirty="0">
+              <a:solidFill>
+                <a:schemeClr val="accent1"/>
+              </a:solidFill>
+            </a:endParaRPr>
+          </a:p>
+          <a:p>
+            <a:pPr marL="0" indent="0">
+              <a:buNone/>
+            </a:pPr>
+            <a:r>
+              <a:rPr lang="en-US" sz="2500" dirty="0">
+                <a:solidFill>
+                  <a:schemeClr val="accent1"/>
+                </a:solidFill>
+              </a:rPr>
+              <a:t>By the end of the week, participants can </a:t>
+            </a:r>
+            <a:r>
+              <a:rPr lang="en-US" sz="2500" b="1" dirty="0">
+                <a:solidFill>
+                  <a:schemeClr val="accent1"/>
+                </a:solidFill>
+              </a:rPr>
+              <a:t>design</a:t>
+            </a:r>
+            <a:r>
+              <a:rPr lang="en-US" sz="2500" dirty="0">
+                <a:solidFill>
+                  <a:schemeClr val="accent1"/>
+                </a:solidFill>
+              </a:rPr>
+              <a:t> and </a:t>
+            </a:r>
+            <a:r>
+              <a:rPr lang="en-US" sz="2500" b="1" dirty="0">
+                <a:solidFill>
+                  <a:schemeClr val="accent1"/>
+                </a:solidFill>
+              </a:rPr>
+              <a:t>critique</a:t>
+            </a:r>
+            <a:r>
+              <a:rPr lang="en-US" sz="2500" dirty="0">
+                <a:solidFill>
+                  <a:schemeClr val="accent1"/>
+                </a:solidFill>
+              </a:rPr>
+              <a:t> a </a:t>
+            </a:r>
+            <a:r>
+              <a:rPr lang="en-US" sz="2500" b="1" dirty="0">
+                <a:solidFill>
+                  <a:schemeClr val="accent1"/>
+                </a:solidFill>
+              </a:rPr>
+              <a:t>reproducible platform data collection </a:t>
+            </a:r>
+            <a:r>
+              <a:rPr lang="en-US" sz="2500" dirty="0">
+                <a:solidFill>
+                  <a:schemeClr val="accent1"/>
+                </a:solidFill>
+              </a:rPr>
+              <a:t>workflow.</a:t>
+            </a:r>
+          </a:p>
+          <a:p>
+            <a:pPr marL="0" indent="0">
+              <a:buNone/>
+            </a:pPr>
+            <a:endParaRPr lang="en-US" sz="2500" dirty="0">
+              <a:solidFill>
+                <a:schemeClr val="accent1"/>
+              </a:solidFill>
+            </a:endParaRPr>
+          </a:p>
+          <a:p>
+            <a:pPr marL="0" indent="0">
+              <a:buNone/>
+            </a:pPr>
+            <a:endParaRPr lang="en-US" sz="3200" dirty="0">
+              <a:solidFill>
+                <a:schemeClr val="accent1"/>
+              </a:solidFill>
+            </a:endParaRPr>
+          </a:p>
+        </p:txBody>
+      </p:sp>
+    </p:spTree>
+    <p:extLst>
+      <p:ext uri="{BB962C8B-B14F-4D97-AF65-F5344CB8AC3E}">
+        <p14:creationId xmlns:p14="http://schemas.microsoft.com/office/powerpoint/2010/main" val="1493801983"/>
+      </p:ext>
+    </p:extLst>
+  </p:cSld>
+  <p:clrMapOvr>
+    <a:masterClrMapping/>
+  </p:clrMapOvr>
+</p:sld>
+</file>
+
+<file path=ppt/slides/slide30.xml><?xml version="1.0" encoding="utf-8"?>
+<p:sld xmlns:a="http://schemas.openxmlformats.org/drawingml/2006/main" xmlns:r="http://schemas.openxmlformats.org/officeDocument/2006/relationships" xmlns:p="http://schemas.openxmlformats.org/presentationml/2006/main">
+  <p:cSld>
+    <p:spTree>
+      <p:nvGrpSpPr>
+        <p:cNvPr id="1" name="">
+          <a:extLst>
+            <a:ext uri="{FF2B5EF4-FFF2-40B4-BE49-F238E27FC236}">
+              <a16:creationId xmlns:a16="http://schemas.microsoft.com/office/drawing/2014/main" id="{F84301E6-1F94-2F12-668A-B5414CDBD5F0}"/>
+            </a:ext>
+          </a:extLst>
+        </p:cNvPr>
+        <p:cNvGrpSpPr/>
+        <p:nvPr/>
+      </p:nvGrpSpPr>
+      <p:grpSpPr>
+        <a:xfrm>
+          <a:off x="0" y="0"/>
+          <a:ext cx="0" cy="0"/>
+          <a:chOff x="0" y="0"/>
+          <a:chExt cx="0" cy="0"/>
+        </a:xfrm>
+      </p:grpSpPr>
+      <p:sp>
+        <p:nvSpPr>
+          <p:cNvPr id="2" name="Title 1">
+            <a:extLst>
+              <a:ext uri="{FF2B5EF4-FFF2-40B4-BE49-F238E27FC236}">
+                <a16:creationId xmlns:a16="http://schemas.microsoft.com/office/drawing/2014/main" id="{D6D55418-86A3-AAAE-46DE-A13686D23F80}"/>
+              </a:ext>
+            </a:extLst>
+          </p:cNvPr>
+          <p:cNvSpPr>
+            <a:spLocks noGrp="1"/>
+          </p:cNvSpPr>
+          <p:nvPr>
+            <p:ph type="title"/>
+          </p:nvPr>
+        </p:nvSpPr>
+        <p:spPr/>
+        <p:txBody>
+          <a:bodyPr/>
+          <a:lstStyle/>
+          <a:p>
+            <a:r>
+              <a:rPr lang="en-US" dirty="0">
+                <a:solidFill>
+                  <a:schemeClr val="accent1"/>
+                </a:solidFill>
+              </a:rPr>
+              <a:t>What is an API?</a:t>
+            </a:r>
+          </a:p>
+        </p:txBody>
+      </p:sp>
+      <p:sp>
+        <p:nvSpPr>
+          <p:cNvPr id="3" name="Content Placeholder 2">
+            <a:extLst>
+              <a:ext uri="{FF2B5EF4-FFF2-40B4-BE49-F238E27FC236}">
+                <a16:creationId xmlns:a16="http://schemas.microsoft.com/office/drawing/2014/main" id="{BC4F1094-314C-62A1-A2F9-4D33D618CBC2}"/>
+              </a:ext>
+            </a:extLst>
+          </p:cNvPr>
+          <p:cNvSpPr>
+            <a:spLocks noGrp="1"/>
+          </p:cNvSpPr>
+          <p:nvPr>
+            <p:ph idx="1"/>
+          </p:nvPr>
+        </p:nvSpPr>
+        <p:spPr>
+          <a:xfrm>
+            <a:off x="838200" y="1720525"/>
+            <a:ext cx="10515600" cy="4351338"/>
+          </a:xfrm>
+        </p:spPr>
+        <p:txBody>
+          <a:bodyPr/>
+          <a:lstStyle/>
+          <a:p>
+            <a:pPr marL="0" indent="0">
+              <a:buNone/>
+            </a:pPr>
+            <a:r>
+              <a:rPr lang="en-US" dirty="0">
+                <a:solidFill>
+                  <a:schemeClr val="accent1"/>
+                </a:solidFill>
+              </a:rPr>
+              <a:t>API = Application Programming Interface, i.e., a way for software systems to communicate.</a:t>
+            </a:r>
+          </a:p>
+        </p:txBody>
+      </p:sp>
+      <p:pic>
+        <p:nvPicPr>
+          <p:cNvPr id="4" name="Picture 3" descr="frame_3259.webp">
+            <a:extLst>
+              <a:ext uri="{FF2B5EF4-FFF2-40B4-BE49-F238E27FC236}">
+                <a16:creationId xmlns:a16="http://schemas.microsoft.com/office/drawing/2014/main" id="{5A47F343-33D8-0A3E-00EB-802CB1D011D2}"/>
+              </a:ext>
+            </a:extLst>
+          </p:cNvPr>
+          <p:cNvPicPr>
+            <a:picLocks noChangeAspect="1"/>
+          </p:cNvPicPr>
+          <p:nvPr/>
+        </p:nvPicPr>
+        <p:blipFill>
+          <a:blip r:embed="rId3"/>
+          <a:stretch>
+            <a:fillRect/>
+          </a:stretch>
+        </p:blipFill>
+        <p:spPr>
+          <a:xfrm>
+            <a:off x="3558059" y="2912766"/>
+            <a:ext cx="5080000" cy="2540000"/>
+          </a:xfrm>
+          <a:prstGeom prst="rect">
+            <a:avLst/>
+          </a:prstGeom>
+        </p:spPr>
+      </p:pic>
+    </p:spTree>
+    <p:extLst>
+      <p:ext uri="{BB962C8B-B14F-4D97-AF65-F5344CB8AC3E}">
+        <p14:creationId xmlns:p14="http://schemas.microsoft.com/office/powerpoint/2010/main" val="1341086130"/>
+      </p:ext>
+    </p:extLst>
+  </p:cSld>
+  <p:clrMapOvr>
+    <a:masterClrMapping/>
+  </p:clrMapOvr>
+</p:sld>
+</file>
+
+<file path=ppt/slides/slide31.xml><?xml version="1.0" encoding="utf-8"?>
+<p:sld xmlns:a="http://schemas.openxmlformats.org/drawingml/2006/main" xmlns:r="http://schemas.openxmlformats.org/officeDocument/2006/relationships" xmlns:p="http://schemas.openxmlformats.org/presentationml/2006/main">
+  <p:cSld>
+    <p:spTree>
+      <p:nvGrpSpPr>
+        <p:cNvPr id="1" name="">
+          <a:extLst>
+            <a:ext uri="{FF2B5EF4-FFF2-40B4-BE49-F238E27FC236}">
+              <a16:creationId xmlns:a16="http://schemas.microsoft.com/office/drawing/2014/main" id="{A58260FE-ECFF-0268-05BA-97F7BA8F571F}"/>
+            </a:ext>
+          </a:extLst>
+        </p:cNvPr>
+        <p:cNvGrpSpPr/>
+        <p:nvPr/>
+      </p:nvGrpSpPr>
+      <p:grpSpPr>
+        <a:xfrm>
+          <a:off x="0" y="0"/>
+          <a:ext cx="0" cy="0"/>
+          <a:chOff x="0" y="0"/>
+          <a:chExt cx="0" cy="0"/>
+        </a:xfrm>
+      </p:grpSpPr>
+      <p:sp>
+        <p:nvSpPr>
+          <p:cNvPr id="2" name="Title 1">
+            <a:extLst>
+              <a:ext uri="{FF2B5EF4-FFF2-40B4-BE49-F238E27FC236}">
+                <a16:creationId xmlns:a16="http://schemas.microsoft.com/office/drawing/2014/main" id="{F26F5233-FD9F-505B-FDDB-8ED2028034D1}"/>
+              </a:ext>
+            </a:extLst>
+          </p:cNvPr>
+          <p:cNvSpPr>
+            <a:spLocks noGrp="1"/>
+          </p:cNvSpPr>
+          <p:nvPr>
+            <p:ph type="title"/>
+          </p:nvPr>
+        </p:nvSpPr>
+        <p:spPr/>
+        <p:txBody>
+          <a:bodyPr/>
+          <a:lstStyle/>
+          <a:p>
+            <a:r>
+              <a:rPr lang="en-US" dirty="0">
+                <a:solidFill>
+                  <a:schemeClr val="accent1"/>
+                </a:solidFill>
+              </a:rPr>
+              <a:t>How APIs Work</a:t>
+            </a:r>
+          </a:p>
+        </p:txBody>
+      </p:sp>
+      <p:sp>
+        <p:nvSpPr>
+          <p:cNvPr id="3" name="Content Placeholder 2">
+            <a:extLst>
+              <a:ext uri="{FF2B5EF4-FFF2-40B4-BE49-F238E27FC236}">
+                <a16:creationId xmlns:a16="http://schemas.microsoft.com/office/drawing/2014/main" id="{1253A800-82C6-501F-EC81-0E4693AF784C}"/>
+              </a:ext>
+            </a:extLst>
+          </p:cNvPr>
+          <p:cNvSpPr>
+            <a:spLocks noGrp="1"/>
+          </p:cNvSpPr>
+          <p:nvPr>
+            <p:ph idx="1"/>
+          </p:nvPr>
+        </p:nvSpPr>
+        <p:spPr>
+          <a:xfrm>
+            <a:off x="838200" y="1720525"/>
+            <a:ext cx="10515600" cy="4351338"/>
+          </a:xfrm>
+        </p:spPr>
+        <p:txBody>
+          <a:bodyPr/>
+          <a:lstStyle/>
+          <a:p>
+            <a:pPr marL="0" indent="0">
+              <a:buNone/>
+            </a:pPr>
+            <a:r>
+              <a:rPr lang="en-US" sz="2400" dirty="0">
+                <a:solidFill>
+                  <a:schemeClr val="accent1"/>
+                </a:solidFill>
+              </a:rPr>
+              <a:t>APIs operate through a request response cycle between a client and a server</a:t>
+            </a:r>
+          </a:p>
+          <a:p>
+            <a:pPr marL="0" indent="0">
+              <a:buNone/>
+            </a:pPr>
+            <a:endParaRPr lang="en-US" sz="2400" dirty="0">
+              <a:solidFill>
+                <a:schemeClr val="accent1"/>
+              </a:solidFill>
+            </a:endParaRPr>
+          </a:p>
+          <a:p>
+            <a:r>
+              <a:rPr lang="en-US" sz="2400" b="1" dirty="0">
+                <a:solidFill>
+                  <a:schemeClr val="accent1"/>
+                </a:solidFill>
+              </a:rPr>
+              <a:t>Request</a:t>
+            </a:r>
+            <a:r>
+              <a:rPr lang="en-US" sz="2400" dirty="0">
+                <a:solidFill>
+                  <a:schemeClr val="accent1"/>
+                </a:solidFill>
+              </a:rPr>
+              <a:t>: The client sends a request to an API endpoint (URI).</a:t>
+            </a:r>
+          </a:p>
+          <a:p>
+            <a:r>
+              <a:rPr lang="en-US" sz="2400" b="1" dirty="0">
+                <a:solidFill>
+                  <a:schemeClr val="accent1"/>
+                </a:solidFill>
+              </a:rPr>
+              <a:t>Processing</a:t>
+            </a:r>
+            <a:r>
+              <a:rPr lang="en-US" sz="2400" dirty="0">
+                <a:solidFill>
+                  <a:schemeClr val="accent1"/>
+                </a:solidFill>
+              </a:rPr>
+              <a:t>: The API forwards the request to the server.</a:t>
+            </a:r>
+          </a:p>
+          <a:p>
+            <a:r>
+              <a:rPr lang="en-US" sz="2400" b="1" dirty="0">
+                <a:solidFill>
+                  <a:schemeClr val="accent1"/>
+                </a:solidFill>
+              </a:rPr>
+              <a:t>Response</a:t>
+            </a:r>
+            <a:r>
+              <a:rPr lang="en-US" sz="2400" dirty="0">
+                <a:solidFill>
+                  <a:schemeClr val="accent1"/>
+                </a:solidFill>
+              </a:rPr>
+              <a:t>: The server processes and sends back the requested data.</a:t>
+            </a:r>
+          </a:p>
+          <a:p>
+            <a:r>
+              <a:rPr lang="en-US" sz="2400" b="1" dirty="0">
+                <a:solidFill>
+                  <a:schemeClr val="accent1"/>
+                </a:solidFill>
+              </a:rPr>
+              <a:t>Delivery</a:t>
+            </a:r>
+            <a:r>
+              <a:rPr lang="en-US" sz="2400" dirty="0">
+                <a:solidFill>
+                  <a:schemeClr val="accent1"/>
+                </a:solidFill>
+              </a:rPr>
+              <a:t>: The API returns the server’s response to the client.</a:t>
+            </a:r>
+          </a:p>
+          <a:p>
+            <a:pPr marL="0" indent="0">
+              <a:buNone/>
+            </a:pPr>
+            <a:endParaRPr lang="en-US" sz="2400" dirty="0">
+              <a:solidFill>
+                <a:schemeClr val="accent1"/>
+              </a:solidFill>
+            </a:endParaRPr>
+          </a:p>
+          <a:p>
+            <a:pPr marL="0" indent="0">
+              <a:buNone/>
+            </a:pPr>
+            <a:endParaRPr lang="en-US" sz="2400" dirty="0">
+              <a:solidFill>
+                <a:schemeClr val="accent1"/>
+              </a:solidFill>
+            </a:endParaRPr>
+          </a:p>
+        </p:txBody>
+      </p:sp>
+    </p:spTree>
+    <p:extLst>
+      <p:ext uri="{BB962C8B-B14F-4D97-AF65-F5344CB8AC3E}">
+        <p14:creationId xmlns:p14="http://schemas.microsoft.com/office/powerpoint/2010/main" val="490620624"/>
+      </p:ext>
+    </p:extLst>
+  </p:cSld>
+  <p:clrMapOvr>
+    <a:masterClrMapping/>
+  </p:clrMapOvr>
+</p:sld>
+</file>
+
+<file path=ppt/slides/slide32.xml><?xml version="1.0" encoding="utf-8"?>
+<p:sld xmlns:a="http://schemas.openxmlformats.org/drawingml/2006/main" xmlns:r="http://schemas.openxmlformats.org/officeDocument/2006/relationships" xmlns:p="http://schemas.openxmlformats.org/presentationml/2006/main">
+  <p:cSld>
+    <p:spTree>
+      <p:nvGrpSpPr>
+        <p:cNvPr id="1" name="">
+          <a:extLst>
+            <a:ext uri="{FF2B5EF4-FFF2-40B4-BE49-F238E27FC236}">
+              <a16:creationId xmlns:a16="http://schemas.microsoft.com/office/drawing/2014/main" id="{041C1123-DECD-4079-C438-2430965C355C}"/>
+            </a:ext>
+          </a:extLst>
+        </p:cNvPr>
+        <p:cNvGrpSpPr/>
+        <p:nvPr/>
+      </p:nvGrpSpPr>
+      <p:grpSpPr>
+        <a:xfrm>
+          <a:off x="0" y="0"/>
+          <a:ext cx="0" cy="0"/>
+          <a:chOff x="0" y="0"/>
+          <a:chExt cx="0" cy="0"/>
+        </a:xfrm>
+      </p:grpSpPr>
+      <p:sp>
+        <p:nvSpPr>
+          <p:cNvPr id="2" name="Title 1">
+            <a:extLst>
+              <a:ext uri="{FF2B5EF4-FFF2-40B4-BE49-F238E27FC236}">
+                <a16:creationId xmlns:a16="http://schemas.microsoft.com/office/drawing/2014/main" id="{A28EBC7E-8309-FCF2-B52B-F2D348C66A07}"/>
+              </a:ext>
+            </a:extLst>
+          </p:cNvPr>
+          <p:cNvSpPr>
+            <a:spLocks noGrp="1"/>
+          </p:cNvSpPr>
+          <p:nvPr>
+            <p:ph type="title"/>
+          </p:nvPr>
+        </p:nvSpPr>
+        <p:spPr/>
+        <p:txBody>
+          <a:bodyPr/>
+          <a:lstStyle/>
+          <a:p>
+            <a:r>
+              <a:rPr lang="en-US" dirty="0">
+                <a:solidFill>
+                  <a:schemeClr val="accent1"/>
+                </a:solidFill>
+              </a:rPr>
+              <a:t>Anatomy of an API request</a:t>
+            </a:r>
+          </a:p>
+        </p:txBody>
+      </p:sp>
+      <p:sp>
+        <p:nvSpPr>
+          <p:cNvPr id="3" name="Content Placeholder 2">
+            <a:extLst>
+              <a:ext uri="{FF2B5EF4-FFF2-40B4-BE49-F238E27FC236}">
+                <a16:creationId xmlns:a16="http://schemas.microsoft.com/office/drawing/2014/main" id="{300F8743-820D-4C7B-CC96-CEFB7B708F76}"/>
+              </a:ext>
+            </a:extLst>
+          </p:cNvPr>
+          <p:cNvSpPr>
+            <a:spLocks noGrp="1"/>
+          </p:cNvSpPr>
+          <p:nvPr>
+            <p:ph idx="1"/>
+          </p:nvPr>
+        </p:nvSpPr>
+        <p:spPr>
+          <a:xfrm>
+            <a:off x="838200" y="1720525"/>
+            <a:ext cx="10515600" cy="4351338"/>
+          </a:xfrm>
+        </p:spPr>
+        <p:txBody>
+          <a:bodyPr/>
+          <a:lstStyle/>
+          <a:p>
+            <a:pPr marL="0" indent="0">
+              <a:buNone/>
+            </a:pPr>
+            <a:r>
+              <a:rPr lang="en-US" dirty="0">
+                <a:solidFill>
+                  <a:schemeClr val="accent1"/>
+                </a:solidFill>
+              </a:rPr>
+              <a:t>An API request usually includes:</a:t>
+            </a:r>
+          </a:p>
+          <a:p>
+            <a:r>
+              <a:rPr lang="en-US" sz="2400" b="1" dirty="0">
+                <a:solidFill>
+                  <a:schemeClr val="accent1"/>
+                </a:solidFill>
+              </a:rPr>
+              <a:t>Endpoint</a:t>
+            </a:r>
+            <a:r>
+              <a:rPr lang="en-US" sz="2400" dirty="0">
+                <a:solidFill>
+                  <a:schemeClr val="accent1"/>
+                </a:solidFill>
+              </a:rPr>
+              <a:t>: where the request goes</a:t>
+            </a:r>
+          </a:p>
+          <a:p>
+            <a:r>
+              <a:rPr lang="en-US" sz="2400" b="1" dirty="0">
+                <a:solidFill>
+                  <a:schemeClr val="accent1"/>
+                </a:solidFill>
+              </a:rPr>
+              <a:t>Method</a:t>
+            </a:r>
+            <a:r>
+              <a:rPr lang="en-US" sz="2400" dirty="0">
+                <a:solidFill>
+                  <a:schemeClr val="accent1"/>
+                </a:solidFill>
+              </a:rPr>
+              <a:t>: what kind of request, e.g. GET or POST</a:t>
+            </a:r>
+          </a:p>
+          <a:p>
+            <a:r>
+              <a:rPr lang="en-US" sz="2400" b="1" dirty="0">
+                <a:solidFill>
+                  <a:schemeClr val="accent1"/>
+                </a:solidFill>
+              </a:rPr>
+              <a:t>Parameters</a:t>
+            </a:r>
+            <a:r>
+              <a:rPr lang="en-US" sz="2400" dirty="0">
+                <a:solidFill>
+                  <a:schemeClr val="accent1"/>
+                </a:solidFill>
+              </a:rPr>
+              <a:t>: what we ask for</a:t>
+            </a:r>
+          </a:p>
+          <a:p>
+            <a:r>
+              <a:rPr lang="en-US" sz="2400" b="1" dirty="0">
+                <a:solidFill>
+                  <a:schemeClr val="accent1"/>
+                </a:solidFill>
+              </a:rPr>
+              <a:t>Headers</a:t>
+            </a:r>
+            <a:r>
+              <a:rPr lang="en-US" sz="2400" dirty="0">
+                <a:solidFill>
+                  <a:schemeClr val="accent1"/>
+                </a:solidFill>
+              </a:rPr>
+              <a:t>: metadata about the request</a:t>
+            </a:r>
+          </a:p>
+          <a:p>
+            <a:r>
+              <a:rPr lang="en-US" sz="2400" b="1" dirty="0">
+                <a:solidFill>
+                  <a:schemeClr val="accent1"/>
+                </a:solidFill>
+              </a:rPr>
+              <a:t>Authentication</a:t>
+            </a:r>
+            <a:r>
+              <a:rPr lang="en-US" sz="2400" dirty="0">
+                <a:solidFill>
+                  <a:schemeClr val="accent1"/>
+                </a:solidFill>
+              </a:rPr>
+              <a:t>: key/token if required</a:t>
+            </a:r>
+          </a:p>
+          <a:p>
+            <a:pPr marL="1371600" lvl="3" indent="0">
+              <a:buNone/>
+            </a:pPr>
+            <a:endParaRPr lang="en-US" sz="2400" dirty="0">
+              <a:solidFill>
+                <a:schemeClr val="accent1"/>
+              </a:solidFill>
+            </a:endParaRPr>
+          </a:p>
+        </p:txBody>
+      </p:sp>
+    </p:spTree>
+    <p:extLst>
+      <p:ext uri="{BB962C8B-B14F-4D97-AF65-F5344CB8AC3E}">
+        <p14:creationId xmlns:p14="http://schemas.microsoft.com/office/powerpoint/2010/main" val="611198330"/>
+      </p:ext>
+    </p:extLst>
+  </p:cSld>
+  <p:clrMapOvr>
+    <a:masterClrMapping/>
+  </p:clrMapOvr>
+</p:sld>
+</file>
+
+<file path=ppt/slides/slide33.xml><?xml version="1.0" encoding="utf-8"?>
+<p:sld xmlns:a="http://schemas.openxmlformats.org/drawingml/2006/main" xmlns:r="http://schemas.openxmlformats.org/officeDocument/2006/relationships" xmlns:p="http://schemas.openxmlformats.org/presentationml/2006/main">
+  <p:cSld>
+    <p:spTree>
+      <p:nvGrpSpPr>
+        <p:cNvPr id="1" name=""/>
+        <p:cNvGrpSpPr/>
+        <p:nvPr/>
+      </p:nvGrpSpPr>
+      <p:grpSpPr>
+        <a:xfrm>
+          <a:off x="0" y="0"/>
+          <a:ext cx="0" cy="0"/>
+          <a:chOff x="0" y="0"/>
+          <a:chExt cx="0" cy="0"/>
+        </a:xfrm>
+      </p:grpSpPr>
+      <p:sp>
+        <p:nvSpPr>
+          <p:cNvPr id="2" name="Title 1">
+            <a:extLst>
+              <a:ext uri="{FF2B5EF4-FFF2-40B4-BE49-F238E27FC236}">
+                <a16:creationId xmlns:a16="http://schemas.microsoft.com/office/drawing/2014/main" id="{C01E33A6-E9E2-5A75-86DD-2970D71281C1}"/>
+              </a:ext>
+            </a:extLst>
+          </p:cNvPr>
+          <p:cNvSpPr>
+            <a:spLocks noGrp="1"/>
+          </p:cNvSpPr>
+          <p:nvPr>
+            <p:ph type="title"/>
+          </p:nvPr>
+        </p:nvSpPr>
+        <p:spPr/>
+        <p:txBody>
+          <a:bodyPr/>
+          <a:lstStyle/>
+          <a:p>
+            <a:r>
+              <a:rPr lang="en-US" dirty="0">
+                <a:solidFill>
+                  <a:schemeClr val="accent1"/>
+                </a:solidFill>
+              </a:rPr>
+              <a:t>Agenda for the rest of the day…</a:t>
+            </a:r>
+          </a:p>
+        </p:txBody>
+      </p:sp>
+      <p:sp>
+        <p:nvSpPr>
+          <p:cNvPr id="3" name="Content Placeholder 2">
+            <a:extLst>
+              <a:ext uri="{FF2B5EF4-FFF2-40B4-BE49-F238E27FC236}">
+                <a16:creationId xmlns:a16="http://schemas.microsoft.com/office/drawing/2014/main" id="{91A11D33-6003-721D-CCD9-E1EAA6C583BA}"/>
+              </a:ext>
+            </a:extLst>
+          </p:cNvPr>
+          <p:cNvSpPr>
+            <a:spLocks noGrp="1"/>
+          </p:cNvSpPr>
+          <p:nvPr>
+            <p:ph idx="1"/>
+          </p:nvPr>
+        </p:nvSpPr>
+        <p:spPr>
+          <a:xfrm>
+            <a:off x="838200" y="1720525"/>
+            <a:ext cx="10515600" cy="4351338"/>
+          </a:xfrm>
+        </p:spPr>
+        <p:txBody>
+          <a:bodyPr>
+            <a:normAutofit/>
+          </a:bodyPr>
+          <a:lstStyle/>
+          <a:p>
+            <a:pPr marL="0" indent="0">
+              <a:buNone/>
+            </a:pPr>
+            <a:endParaRPr lang="en-US" dirty="0">
+              <a:solidFill>
+                <a:schemeClr val="accent1"/>
+              </a:solidFill>
+            </a:endParaRPr>
+          </a:p>
+          <a:p>
+            <a:pPr lvl="1"/>
+            <a:r>
+              <a:rPr lang="en-US" sz="2800" dirty="0">
+                <a:solidFill>
+                  <a:schemeClr val="accent1"/>
+                </a:solidFill>
+              </a:rPr>
+              <a:t>send an API request (we use the </a:t>
+            </a:r>
+            <a:r>
+              <a:rPr lang="en-US" sz="2800" b="1" dirty="0" err="1">
+                <a:solidFill>
+                  <a:schemeClr val="accent1"/>
+                </a:solidFill>
+              </a:rPr>
+              <a:t>MediaWiki</a:t>
+            </a:r>
+            <a:r>
+              <a:rPr lang="en-US" sz="2800" b="1" dirty="0">
+                <a:solidFill>
+                  <a:schemeClr val="accent1"/>
+                </a:solidFill>
+              </a:rPr>
+              <a:t> API </a:t>
+            </a:r>
+            <a:r>
+              <a:rPr lang="en-US" sz="2800" dirty="0">
+                <a:solidFill>
+                  <a:schemeClr val="accent1"/>
+                </a:solidFill>
+              </a:rPr>
+              <a:t>as example)</a:t>
+            </a:r>
+          </a:p>
+          <a:p>
+            <a:pPr lvl="1"/>
+            <a:r>
+              <a:rPr lang="en-US" sz="2800" dirty="0">
+                <a:solidFill>
+                  <a:schemeClr val="accent1"/>
+                </a:solidFill>
+              </a:rPr>
+              <a:t>inspect the response</a:t>
+            </a:r>
+          </a:p>
+          <a:p>
+            <a:pPr lvl="1"/>
+            <a:r>
+              <a:rPr lang="en-US" sz="2800" dirty="0">
+                <a:solidFill>
+                  <a:schemeClr val="accent1"/>
+                </a:solidFill>
+              </a:rPr>
+              <a:t>understand JSON</a:t>
+            </a:r>
+          </a:p>
+          <a:p>
+            <a:pPr lvl="1"/>
+            <a:r>
+              <a:rPr lang="en-US" sz="2800" dirty="0">
+                <a:solidFill>
+                  <a:schemeClr val="accent1"/>
+                </a:solidFill>
+              </a:rPr>
+              <a:t>turn search results into a table</a:t>
+            </a:r>
+          </a:p>
+          <a:p>
+            <a:pPr lvl="1"/>
+            <a:r>
+              <a:rPr lang="en-US" sz="2800" dirty="0">
+                <a:solidFill>
+                  <a:schemeClr val="accent1"/>
+                </a:solidFill>
+              </a:rPr>
+              <a:t>follow pagination</a:t>
+            </a:r>
+          </a:p>
+          <a:p>
+            <a:pPr lvl="1"/>
+            <a:r>
+              <a:rPr lang="en-US" sz="2800" dirty="0">
+                <a:solidFill>
+                  <a:schemeClr val="accent1"/>
+                </a:solidFill>
+              </a:rPr>
+              <a:t>retrieve page-level data</a:t>
+            </a:r>
+          </a:p>
+          <a:p>
+            <a:pPr marL="0" indent="0">
+              <a:buNone/>
+            </a:pPr>
+            <a:endParaRPr lang="en-US" dirty="0">
+              <a:solidFill>
+                <a:schemeClr val="accent1"/>
+              </a:solidFill>
+            </a:endParaRPr>
+          </a:p>
+        </p:txBody>
+      </p:sp>
+    </p:spTree>
+    <p:extLst>
+      <p:ext uri="{BB962C8B-B14F-4D97-AF65-F5344CB8AC3E}">
+        <p14:creationId xmlns:p14="http://schemas.microsoft.com/office/powerpoint/2010/main" val="1727965126"/>
       </p:ext>
     </p:extLst>
   </p:cSld>
@@ -12728,7 +13415,7 @@
                   <a:schemeClr val="accent1"/>
                 </a:solidFill>
               </a:rPr>
-              <a:t>APIs</a:t>
+              <a:t>Application Programming Interface (APIs)</a:t>
             </a:r>
           </a:p>
           <a:p>
@@ -12797,129 +13484,6 @@
 </file>
 
 <file path=ppt/slides/slide5.xml><?xml version="1.0" encoding="utf-8"?>
-<p:sld xmlns:a="http://schemas.openxmlformats.org/drawingml/2006/main" xmlns:r="http://schemas.openxmlformats.org/officeDocument/2006/relationships" xmlns:p="http://schemas.openxmlformats.org/presentationml/2006/main">
-  <p:cSld>
-    <p:spTree>
-      <p:nvGrpSpPr>
-        <p:cNvPr id="1" name="">
-          <a:extLst>
-            <a:ext uri="{FF2B5EF4-FFF2-40B4-BE49-F238E27FC236}">
-              <a16:creationId xmlns:a16="http://schemas.microsoft.com/office/drawing/2014/main" id="{7CB5AF5F-2A6F-86A2-48AF-B94ED1DDDF15}"/>
-            </a:ext>
-          </a:extLst>
-        </p:cNvPr>
-        <p:cNvGrpSpPr/>
-        <p:nvPr/>
-      </p:nvGrpSpPr>
-      <p:grpSpPr>
-        <a:xfrm>
-          <a:off x="0" y="0"/>
-          <a:ext cx="0" cy="0"/>
-          <a:chOff x="0" y="0"/>
-          <a:chExt cx="0" cy="0"/>
-        </a:xfrm>
-      </p:grpSpPr>
-      <p:sp>
-        <p:nvSpPr>
-          <p:cNvPr id="2" name="Title 1">
-            <a:extLst>
-              <a:ext uri="{FF2B5EF4-FFF2-40B4-BE49-F238E27FC236}">
-                <a16:creationId xmlns:a16="http://schemas.microsoft.com/office/drawing/2014/main" id="{7D209062-045B-D267-E274-4B9F36BC8005}"/>
-              </a:ext>
-            </a:extLst>
-          </p:cNvPr>
-          <p:cNvSpPr>
-            <a:spLocks noGrp="1"/>
-          </p:cNvSpPr>
-          <p:nvPr>
-            <p:ph type="title"/>
-          </p:nvPr>
-        </p:nvSpPr>
-        <p:spPr/>
-        <p:txBody>
-          <a:bodyPr/>
-          <a:lstStyle/>
-          <a:p>
-            <a:r>
-              <a:rPr lang="en-US" dirty="0">
-                <a:solidFill>
-                  <a:schemeClr val="accent1"/>
-                </a:solidFill>
-              </a:rPr>
-              <a:t>Collecting Platform Data: Course Overview</a:t>
-            </a:r>
-          </a:p>
-        </p:txBody>
-      </p:sp>
-      <p:sp>
-        <p:nvSpPr>
-          <p:cNvPr id="3" name="Content Placeholder 2">
-            <a:extLst>
-              <a:ext uri="{FF2B5EF4-FFF2-40B4-BE49-F238E27FC236}">
-                <a16:creationId xmlns:a16="http://schemas.microsoft.com/office/drawing/2014/main" id="{035DEFA0-A376-8524-3486-12DF024269D4}"/>
-              </a:ext>
-            </a:extLst>
-          </p:cNvPr>
-          <p:cNvSpPr>
-            <a:spLocks noGrp="1"/>
-          </p:cNvSpPr>
-          <p:nvPr>
-            <p:ph idx="1"/>
-          </p:nvPr>
-        </p:nvSpPr>
-        <p:spPr>
-          <a:xfrm>
-            <a:off x="3290087" y="2036114"/>
-            <a:ext cx="4963789" cy="2390229"/>
-          </a:xfrm>
-        </p:spPr>
-        <p:txBody>
-          <a:bodyPr>
-            <a:noAutofit/>
-          </a:bodyPr>
-          <a:lstStyle/>
-          <a:p>
-            <a:pPr marL="0" indent="0">
-              <a:buNone/>
-            </a:pPr>
-            <a:r>
-              <a:rPr lang="en-US" sz="3200" dirty="0">
-                <a:solidFill>
-                  <a:schemeClr val="accent1"/>
-                </a:solidFill>
-              </a:rPr>
-              <a:t>Outcome</a:t>
-            </a:r>
-          </a:p>
-          <a:p>
-            <a:pPr marL="0" indent="0">
-              <a:buNone/>
-            </a:pPr>
-            <a:r>
-              <a:rPr lang="en-US" sz="2500" dirty="0">
-                <a:solidFill>
-                  <a:schemeClr val="accent1"/>
-                </a:solidFill>
-              </a:rPr>
-              <a:t>By the end of the week, participants can design and critique a reproducible platform data collection workflow.</a:t>
-            </a:r>
-          </a:p>
-        </p:txBody>
-      </p:sp>
-    </p:spTree>
-    <p:extLst>
-      <p:ext uri="{BB962C8B-B14F-4D97-AF65-F5344CB8AC3E}">
-        <p14:creationId xmlns:p14="http://schemas.microsoft.com/office/powerpoint/2010/main" val="2380447667"/>
-      </p:ext>
-    </p:extLst>
-  </p:cSld>
-  <p:clrMapOvr>
-    <a:masterClrMapping/>
-  </p:clrMapOvr>
-</p:sld>
-</file>
-
-<file path=ppt/slides/slide6.xml><?xml version="1.0" encoding="utf-8"?>
 <p:sld xmlns:a="http://schemas.openxmlformats.org/drawingml/2006/main" xmlns:r="http://schemas.openxmlformats.org/officeDocument/2006/relationships" xmlns:p="http://schemas.openxmlformats.org/presentationml/2006/main">
   <p:cSld>
     <p:spTree>
@@ -12969,7 +13533,7 @@
                   <a:schemeClr val="accent1"/>
                 </a:solidFill>
               </a:rPr>
-              <a:t>Timelines</a:t>
+              <a:t>The Times</a:t>
             </a:r>
           </a:p>
         </p:txBody>
@@ -13017,7 +13581,7 @@
 </p:sld>
 </file>
 
-<file path=ppt/slides/slide7.xml><?xml version="1.0" encoding="utf-8"?>
+<file path=ppt/slides/slide6.xml><?xml version="1.0" encoding="utf-8"?>
 <p:sld xmlns:a="http://schemas.openxmlformats.org/drawingml/2006/main" xmlns:r="http://schemas.openxmlformats.org/officeDocument/2006/relationships" xmlns:p="http://schemas.openxmlformats.org/presentationml/2006/main">
   <p:cSld>
     <p:spTree>
@@ -13100,6 +13664,19 @@
           </a:bodyPr>
           <a:lstStyle/>
           <a:p>
+            <a:pPr marL="0" indent="0">
+              <a:buNone/>
+            </a:pPr>
+            <a:r>
+              <a:rPr lang="en-US" u="sng" dirty="0">
+                <a:solidFill>
+                  <a:schemeClr val="accent1"/>
+                </a:solidFill>
+              </a:rPr>
+              <a:t>2 ECTS</a:t>
+            </a:r>
+          </a:p>
+          <a:p>
             <a:r>
               <a:rPr lang="en-US" dirty="0">
                 <a:solidFill>
@@ -13116,66 +13693,51 @@
                   <a:schemeClr val="accent1"/>
                 </a:solidFill>
               </a:rPr>
-              <a:t>Daily assignments submitted before the next session</a:t>
-            </a:r>
-          </a:p>
-          <a:p>
-            <a:r>
-              <a:rPr lang="en-US" dirty="0">
-                <a:solidFill>
-                  <a:schemeClr val="accent1"/>
-                </a:solidFill>
-              </a:rPr>
-              <a:t>Final Submission</a:t>
-            </a:r>
-          </a:p>
-          <a:p>
-            <a:pPr lvl="1"/>
-            <a:r>
-              <a:rPr lang="en-US" dirty="0">
-                <a:solidFill>
-                  <a:schemeClr val="accent1"/>
-                </a:solidFill>
-              </a:rPr>
-              <a:t>Project outline, incl. @@@@@ </a:t>
-            </a:r>
+              <a:t>Daily assignments</a:t>
+            </a:r>
+          </a:p>
+          <a:p>
+            <a:pPr marL="0" indent="0">
+              <a:buNone/>
+            </a:pPr>
             <a:endParaRPr lang="en-US" dirty="0">
               <a:solidFill>
                 <a:schemeClr val="accent1"/>
               </a:solidFill>
-              <a:highlight>
-                <a:srgbClr val="FFFF00"/>
-              </a:highlight>
             </a:endParaRPr>
           </a:p>
           <a:p>
-            <a:pPr lvl="1"/>
+            <a:pPr marL="0" indent="0">
+              <a:buNone/>
+            </a:pPr>
+            <a:r>
+              <a:rPr lang="en-US" u="sng" dirty="0">
+                <a:solidFill>
+                  <a:schemeClr val="accent1"/>
+                </a:solidFill>
+              </a:rPr>
+              <a:t>Additional 2 ECTS</a:t>
+            </a:r>
+          </a:p>
+          <a:p>
             <a:r>
               <a:rPr lang="en-US" dirty="0">
                 <a:solidFill>
                   <a:schemeClr val="accent1"/>
                 </a:solidFill>
               </a:rPr>
-              <a:t>Submission until 12.07.2026</a:t>
-            </a:r>
-          </a:p>
-          <a:p>
-            <a:r>
-              <a:rPr lang="en-US" dirty="0">
-                <a:solidFill>
-                  <a:schemeClr val="accent1"/>
-                </a:solidFill>
-              </a:rPr>
-              <a:t>All Submission via </a:t>
-            </a:r>
-            <a:r>
-              <a:rPr lang="en-US" b="1" dirty="0">
-                <a:solidFill>
-                  <a:schemeClr val="accent1"/>
-                </a:solidFill>
-              </a:rPr>
-              <a:t>Moodle</a:t>
-            </a:r>
+              <a:t>Final Submission</a:t>
+            </a:r>
+          </a:p>
+          <a:p>
+            <a:pPr marL="0" indent="0">
+              <a:buNone/>
+            </a:pPr>
+            <a:endParaRPr lang="en-US" dirty="0">
+              <a:solidFill>
+                <a:schemeClr val="accent1"/>
+              </a:solidFill>
+            </a:endParaRPr>
           </a:p>
         </p:txBody>
       </p:sp>
@@ -13183,6 +13745,182 @@
     <p:extLst>
       <p:ext uri="{BB962C8B-B14F-4D97-AF65-F5344CB8AC3E}">
         <p14:creationId xmlns:p14="http://schemas.microsoft.com/office/powerpoint/2010/main" val="1595625191"/>
+      </p:ext>
+    </p:extLst>
+  </p:cSld>
+  <p:clrMapOvr>
+    <a:masterClrMapping/>
+  </p:clrMapOvr>
+</p:sld>
+</file>
+
+<file path=ppt/slides/slide7.xml><?xml version="1.0" encoding="utf-8"?>
+<p:sld xmlns:a="http://schemas.openxmlformats.org/drawingml/2006/main" xmlns:r="http://schemas.openxmlformats.org/officeDocument/2006/relationships" xmlns:p="http://schemas.openxmlformats.org/presentationml/2006/main">
+  <p:cSld>
+    <p:spTree>
+      <p:nvGrpSpPr>
+        <p:cNvPr id="1" name="">
+          <a:extLst>
+            <a:ext uri="{FF2B5EF4-FFF2-40B4-BE49-F238E27FC236}">
+              <a16:creationId xmlns:a16="http://schemas.microsoft.com/office/drawing/2014/main" id="{122E8437-D5D9-FF46-09ED-B5CA0033B706}"/>
+            </a:ext>
+          </a:extLst>
+        </p:cNvPr>
+        <p:cNvGrpSpPr/>
+        <p:nvPr/>
+      </p:nvGrpSpPr>
+      <p:grpSpPr>
+        <a:xfrm>
+          <a:off x="0" y="0"/>
+          <a:ext cx="0" cy="0"/>
+          <a:chOff x="0" y="0"/>
+          <a:chExt cx="0" cy="0"/>
+        </a:xfrm>
+      </p:grpSpPr>
+      <p:sp>
+        <p:nvSpPr>
+          <p:cNvPr id="2" name="Title 1">
+            <a:extLst>
+              <a:ext uri="{FF2B5EF4-FFF2-40B4-BE49-F238E27FC236}">
+                <a16:creationId xmlns:a16="http://schemas.microsoft.com/office/drawing/2014/main" id="{F0FBC180-873F-32F9-DA80-B11FFEC3A0ED}"/>
+              </a:ext>
+            </a:extLst>
+          </p:cNvPr>
+          <p:cNvSpPr>
+            <a:spLocks noGrp="1"/>
+          </p:cNvSpPr>
+          <p:nvPr>
+            <p:ph type="title"/>
+          </p:nvPr>
+        </p:nvSpPr>
+        <p:spPr/>
+        <p:txBody>
+          <a:bodyPr/>
+          <a:lstStyle/>
+          <a:p>
+            <a:r>
+              <a:rPr lang="en-US" dirty="0">
+                <a:solidFill>
+                  <a:schemeClr val="accent1"/>
+                </a:solidFill>
+              </a:rPr>
+              <a:t>Daily Assignments</a:t>
+            </a:r>
+          </a:p>
+        </p:txBody>
+      </p:sp>
+      <p:sp>
+        <p:nvSpPr>
+          <p:cNvPr id="3" name="Content Placeholder 2">
+            <a:extLst>
+              <a:ext uri="{FF2B5EF4-FFF2-40B4-BE49-F238E27FC236}">
+                <a16:creationId xmlns:a16="http://schemas.microsoft.com/office/drawing/2014/main" id="{F21E6BD7-318D-CD93-4DB7-6AAC9094CE7A}"/>
+              </a:ext>
+            </a:extLst>
+          </p:cNvPr>
+          <p:cNvSpPr>
+            <a:spLocks noGrp="1"/>
+          </p:cNvSpPr>
+          <p:nvPr>
+            <p:ph idx="1"/>
+          </p:nvPr>
+        </p:nvSpPr>
+        <p:spPr>
+          <a:xfrm>
+            <a:off x="838200" y="1720525"/>
+            <a:ext cx="10515600" cy="4181511"/>
+          </a:xfrm>
+        </p:spPr>
+        <p:txBody>
+          <a:bodyPr>
+            <a:noAutofit/>
+          </a:bodyPr>
+          <a:lstStyle/>
+          <a:p>
+            <a:pPr marL="0" indent="0">
+              <a:buNone/>
+            </a:pPr>
+            <a:endParaRPr lang="en-US" dirty="0">
+              <a:solidFill>
+                <a:schemeClr val="accent1"/>
+              </a:solidFill>
+            </a:endParaRPr>
+          </a:p>
+          <a:p>
+            <a:r>
+              <a:rPr lang="en-US" dirty="0">
+                <a:solidFill>
+                  <a:schemeClr val="accent1"/>
+                </a:solidFill>
+              </a:rPr>
+              <a:t>Submit in class exercises by end of each day </a:t>
+            </a:r>
+          </a:p>
+          <a:p>
+            <a:r>
+              <a:rPr lang="en-US" dirty="0">
+                <a:solidFill>
+                  <a:schemeClr val="accent1"/>
+                </a:solidFill>
+              </a:rPr>
+              <a:t>.</a:t>
+            </a:r>
+            <a:r>
+              <a:rPr lang="en-US" dirty="0" err="1">
+                <a:solidFill>
+                  <a:schemeClr val="accent1"/>
+                </a:solidFill>
+              </a:rPr>
+              <a:t>py</a:t>
+            </a:r>
+            <a:r>
+              <a:rPr lang="en-US" dirty="0">
+                <a:solidFill>
+                  <a:schemeClr val="accent1"/>
+                </a:solidFill>
+              </a:rPr>
+              <a:t> or .</a:t>
+            </a:r>
+            <a:r>
+              <a:rPr lang="en-US" dirty="0" err="1">
+                <a:solidFill>
+                  <a:schemeClr val="accent1"/>
+                </a:solidFill>
+              </a:rPr>
+              <a:t>ipynb</a:t>
+            </a:r>
+            <a:r>
+              <a:rPr lang="en-US" dirty="0">
+                <a:solidFill>
+                  <a:schemeClr val="accent1"/>
+                </a:solidFill>
+              </a:rPr>
+              <a:t> files only</a:t>
+            </a:r>
+          </a:p>
+          <a:p>
+            <a:r>
+              <a:rPr lang="en-US" dirty="0">
+                <a:solidFill>
+                  <a:schemeClr val="accent1"/>
+                </a:solidFill>
+              </a:rPr>
+              <a:t>Submission via Moodle</a:t>
+            </a:r>
+          </a:p>
+          <a:p>
+            <a:endParaRPr lang="en-US" dirty="0">
+              <a:solidFill>
+                <a:schemeClr val="accent1"/>
+              </a:solidFill>
+            </a:endParaRPr>
+          </a:p>
+        </p:txBody>
+      </p:sp>
+    </p:spTree>
+    <p:extLst>
+      <p:ext uri="{BB962C8B-B14F-4D97-AF65-F5344CB8AC3E}">
+        <p14:creationId xmlns:p14="http://schemas.microsoft.com/office/powerpoint/2010/main" val="4093311938"/>
       </p:ext>
     </p:extLst>
   </p:cSld>
@@ -13200,7 +13938,7 @@
         <p:cNvPr id="1" name="">
           <a:extLst>
             <a:ext uri="{FF2B5EF4-FFF2-40B4-BE49-F238E27FC236}">
-              <a16:creationId xmlns:a16="http://schemas.microsoft.com/office/drawing/2014/main" id="{3403602D-E7A5-B87A-F35D-654CCF58C7F8}"/>
+              <a16:creationId xmlns:a16="http://schemas.microsoft.com/office/drawing/2014/main" id="{418DB3A0-1481-F3D7-E584-FFEDBA37F7AC}"/>
             </a:ext>
           </a:extLst>
         </p:cNvPr>
@@ -13220,7 +13958,7 @@
           <p:cNvPr id="2" name="Title 1">
             <a:extLst>
               <a:ext uri="{FF2B5EF4-FFF2-40B4-BE49-F238E27FC236}">
-                <a16:creationId xmlns:a16="http://schemas.microsoft.com/office/drawing/2014/main" id="{367C363F-037B-2C32-C6E8-FF862E93C87B}"/>
+                <a16:creationId xmlns:a16="http://schemas.microsoft.com/office/drawing/2014/main" id="{70E29F5F-9FAA-8345-C937-AF61494F490D}"/>
               </a:ext>
             </a:extLst>
           </p:cNvPr>
@@ -13242,7 +13980,7 @@
                   <a:schemeClr val="accent1"/>
                 </a:solidFill>
               </a:rPr>
-              <a:t>Grading</a:t>
+              <a:t>Final Submission</a:t>
             </a:r>
           </a:p>
         </p:txBody>
@@ -13252,7 +13990,7 @@
           <p:cNvPr id="3" name="Content Placeholder 2">
             <a:extLst>
               <a:ext uri="{FF2B5EF4-FFF2-40B4-BE49-F238E27FC236}">
-                <a16:creationId xmlns:a16="http://schemas.microsoft.com/office/drawing/2014/main" id="{F7841418-1E82-7B56-67AC-49C701D521F0}"/>
+                <a16:creationId xmlns:a16="http://schemas.microsoft.com/office/drawing/2014/main" id="{DC3AE02C-EC54-2934-A979-911028CCADE5}"/>
               </a:ext>
             </a:extLst>
           </p:cNvPr>
@@ -13266,86 +14004,98 @@
         <p:spPr>
           <a:xfrm>
             <a:off x="838200" y="1720525"/>
-            <a:ext cx="10515600" cy="4351338"/>
+            <a:ext cx="10515600" cy="4181511"/>
           </a:xfrm>
         </p:spPr>
         <p:txBody>
-          <a:bodyPr/>
+          <a:bodyPr>
+            <a:noAutofit/>
+          </a:bodyPr>
           <a:lstStyle/>
           <a:p>
             <a:pPr marL="0" indent="0">
               <a:buNone/>
             </a:pPr>
             <a:r>
-              <a:rPr lang="en-US" u="sng" dirty="0">
-                <a:solidFill>
-                  <a:schemeClr val="accent1"/>
-                </a:solidFill>
-              </a:rPr>
-              <a:t>Daily Assignments</a:t>
-            </a:r>
-          </a:p>
-          <a:p>
-            <a:endParaRPr lang="en-US" dirty="0">
-              <a:solidFill>
-                <a:schemeClr val="accent1"/>
-              </a:solidFill>
-            </a:endParaRPr>
-          </a:p>
-          <a:p>
-            <a:r>
-              <a:rPr lang="en-US" dirty="0">
-                <a:solidFill>
-                  <a:schemeClr val="accent1"/>
-                </a:solidFill>
-              </a:rPr>
-              <a:t>2 ECTS</a:t>
-            </a:r>
-          </a:p>
-          <a:p>
-            <a:r>
-              <a:rPr lang="en-US" dirty="0">
-                <a:solidFill>
-                  <a:schemeClr val="accent1"/>
-                </a:solidFill>
-              </a:rPr>
-              <a:t>Small exercises to be submitted before the next session</a:t>
-            </a:r>
-          </a:p>
-          <a:p>
-            <a:r>
-              <a:rPr lang="en-US" dirty="0">
-                <a:solidFill>
-                  <a:schemeClr val="accent1"/>
-                </a:solidFill>
-              </a:rPr>
-              <a:t>Format: .</a:t>
-            </a:r>
-            <a:r>
-              <a:rPr lang="en-US" dirty="0" err="1">
-                <a:solidFill>
-                  <a:schemeClr val="accent1"/>
-                </a:solidFill>
-              </a:rPr>
-              <a:t>py</a:t>
-            </a:r>
-            <a:r>
-              <a:rPr lang="en-US" dirty="0">
-                <a:solidFill>
-                  <a:schemeClr val="accent1"/>
-                </a:solidFill>
-              </a:rPr>
-              <a:t> or .md files only</a:t>
-            </a:r>
-          </a:p>
-          <a:p>
-            <a:r>
-              <a:rPr lang="en-US" dirty="0">
-                <a:solidFill>
-                  <a:schemeClr val="accent1"/>
-                </a:solidFill>
-              </a:rPr>
-              <a:t>Submission via Moodle</a:t>
+              <a:rPr lang="en-US" sz="2200" dirty="0">
+                <a:solidFill>
+                  <a:schemeClr val="accent1"/>
+                </a:solidFill>
+              </a:rPr>
+              <a:t>Submit a small, well-documented workflow that collects data from an online source relevant to your research.</a:t>
+            </a:r>
+          </a:p>
+          <a:p>
+            <a:pPr marL="0" indent="0">
+              <a:buNone/>
+            </a:pPr>
+            <a:r>
+              <a:rPr lang="en-US" sz="2200" u="sng" dirty="0">
+                <a:solidFill>
+                  <a:schemeClr val="accent1"/>
+                </a:solidFill>
+              </a:rPr>
+              <a:t>Your submission should include:</a:t>
+            </a:r>
+          </a:p>
+          <a:p>
+            <a:r>
+              <a:rPr lang="en-US" sz="1800" dirty="0">
+                <a:solidFill>
+                  <a:schemeClr val="accent1"/>
+                </a:solidFill>
+              </a:rPr>
+              <a:t>a short research question / collection goal</a:t>
+            </a:r>
+          </a:p>
+          <a:p>
+            <a:r>
+              <a:rPr lang="en-US" sz="1800" dirty="0">
+                <a:solidFill>
+                  <a:schemeClr val="accent1"/>
+                </a:solidFill>
+              </a:rPr>
+              <a:t>one chosen data source and access route</a:t>
+            </a:r>
+          </a:p>
+          <a:p>
+            <a:r>
+              <a:rPr lang="en-US" sz="1800" dirty="0">
+                <a:solidFill>
+                  <a:schemeClr val="accent1"/>
+                </a:solidFill>
+              </a:rPr>
+              <a:t>runnable Python script or notebook</a:t>
+            </a:r>
+          </a:p>
+          <a:p>
+            <a:r>
+              <a:rPr lang="en-US" sz="1800" dirty="0">
+                <a:solidFill>
+                  <a:schemeClr val="accent1"/>
+                </a:solidFill>
+              </a:rPr>
+              <a:t>raw and processed data</a:t>
+            </a:r>
+          </a:p>
+          <a:p>
+            <a:r>
+              <a:rPr lang="en-US" sz="1800" dirty="0">
+                <a:solidFill>
+                  <a:schemeClr val="accent1"/>
+                </a:solidFill>
+              </a:rPr>
+              <a:t>provenance note: where the data came from, how collected, parameters/selectors, date, outputs</a:t>
+            </a:r>
+          </a:p>
+          <a:p>
+            <a:r>
+              <a:rPr lang="en-US" sz="1800" dirty="0">
+                <a:solidFill>
+                  <a:schemeClr val="accent1"/>
+                </a:solidFill>
+              </a:rPr>
+              <a:t>short reflection on data quality, limitations, ethics, and access conditions</a:t>
             </a:r>
           </a:p>
         </p:txBody>
@@ -13353,7 +14103,7 @@
     </p:spTree>
     <p:extLst>
       <p:ext uri="{BB962C8B-B14F-4D97-AF65-F5344CB8AC3E}">
-        <p14:creationId xmlns:p14="http://schemas.microsoft.com/office/powerpoint/2010/main" val="3874882163"/>
+        <p14:creationId xmlns:p14="http://schemas.microsoft.com/office/powerpoint/2010/main" val="1523788548"/>
       </p:ext>
     </p:extLst>
   </p:cSld>
@@ -13371,7 +14121,7 @@
         <p:cNvPr id="1" name="">
           <a:extLst>
             <a:ext uri="{FF2B5EF4-FFF2-40B4-BE49-F238E27FC236}">
-              <a16:creationId xmlns:a16="http://schemas.microsoft.com/office/drawing/2014/main" id="{D3B2A06E-7141-7E99-BF21-15F61A0C4D95}"/>
+              <a16:creationId xmlns:a16="http://schemas.microsoft.com/office/drawing/2014/main" id="{85E80DE3-FBA4-A051-3F96-384FE17E399B}"/>
             </a:ext>
           </a:extLst>
         </p:cNvPr>
@@ -13391,7 +14141,7 @@
           <p:cNvPr id="2" name="Title 1">
             <a:extLst>
               <a:ext uri="{FF2B5EF4-FFF2-40B4-BE49-F238E27FC236}">
-                <a16:creationId xmlns:a16="http://schemas.microsoft.com/office/drawing/2014/main" id="{1CDC125C-3684-0117-2BA3-5B946BC62DD2}"/>
+                <a16:creationId xmlns:a16="http://schemas.microsoft.com/office/drawing/2014/main" id="{C9529E7A-4FDE-E925-FA96-F6B3095A690A}"/>
               </a:ext>
             </a:extLst>
           </p:cNvPr>
@@ -13418,133 +14168,40 @@
           </a:p>
         </p:txBody>
       </p:sp>
-      <p:sp>
-        <p:nvSpPr>
-          <p:cNvPr id="3" name="Content Placeholder 2">
-            <a:extLst>
-              <a:ext uri="{FF2B5EF4-FFF2-40B4-BE49-F238E27FC236}">
-                <a16:creationId xmlns:a16="http://schemas.microsoft.com/office/drawing/2014/main" id="{9C0810D6-22CC-AFC4-0F9C-69C221152314}"/>
-              </a:ext>
-            </a:extLst>
-          </p:cNvPr>
-          <p:cNvSpPr>
-            <a:spLocks noGrp="1"/>
-          </p:cNvSpPr>
-          <p:nvPr>
-            <p:ph idx="1"/>
-          </p:nvPr>
-        </p:nvSpPr>
+      <p:pic>
+        <p:nvPicPr>
+          <p:cNvPr id="4" name="Picture 3">
+            <a:extLst>
+              <a:ext uri="{FF2B5EF4-FFF2-40B4-BE49-F238E27FC236}">
+                <a16:creationId xmlns:a16="http://schemas.microsoft.com/office/drawing/2014/main" id="{47AC9BD2-B650-45AB-8BC1-39D47D680C81}"/>
+              </a:ext>
+            </a:extLst>
+          </p:cNvPr>
+          <p:cNvPicPr>
+            <a:picLocks noChangeAspect="1"/>
+          </p:cNvPicPr>
+          <p:nvPr/>
+        </p:nvPicPr>
+        <p:blipFill>
+          <a:blip r:embed="rId3"/>
+          <a:stretch>
+            <a:fillRect/>
+          </a:stretch>
+        </p:blipFill>
         <p:spPr>
           <a:xfrm>
-            <a:off x="838200" y="1720525"/>
-            <a:ext cx="10515600" cy="4351338"/>
+            <a:off x="2209800" y="1391537"/>
+            <a:ext cx="7772400" cy="4074925"/>
           </a:xfrm>
+          <a:prstGeom prst="rect">
+            <a:avLst/>
+          </a:prstGeom>
         </p:spPr>
-        <p:txBody>
-          <a:bodyPr/>
-          <a:lstStyle/>
-          <a:p>
-            <a:pPr marL="0" indent="0">
-              <a:buNone/>
-            </a:pPr>
-            <a:r>
-              <a:rPr lang="en-US" u="sng" dirty="0">
-                <a:solidFill>
-                  <a:schemeClr val="accent1"/>
-                </a:solidFill>
-              </a:rPr>
-              <a:t>Final Submission</a:t>
-            </a:r>
-          </a:p>
-          <a:p>
-            <a:endParaRPr lang="en-US" dirty="0">
-              <a:solidFill>
-                <a:schemeClr val="accent1"/>
-              </a:solidFill>
-            </a:endParaRPr>
-          </a:p>
-          <a:p>
-            <a:r>
-              <a:rPr lang="en-US" dirty="0">
-                <a:solidFill>
-                  <a:schemeClr val="accent1"/>
-                </a:solidFill>
-              </a:rPr>
-              <a:t>2 ECTS</a:t>
-            </a:r>
-          </a:p>
-          <a:p>
-            <a:r>
-              <a:rPr lang="en-US" dirty="0">
-                <a:solidFill>
-                  <a:schemeClr val="accent1"/>
-                </a:solidFill>
-              </a:rPr>
-              <a:t>Project outline, incl. @@@@@ </a:t>
-            </a:r>
-          </a:p>
-          <a:p>
-            <a:r>
-              <a:rPr lang="en-US" dirty="0">
-                <a:solidFill>
-                  <a:schemeClr val="accent1"/>
-                </a:solidFill>
-                <a:highlight>
-                  <a:srgbClr val="FFFF00"/>
-                </a:highlight>
-              </a:rPr>
-              <a:t>Format: .pdf and .</a:t>
-            </a:r>
-            <a:r>
-              <a:rPr lang="en-US" dirty="0" err="1">
-                <a:solidFill>
-                  <a:schemeClr val="accent1"/>
-                </a:solidFill>
-                <a:highlight>
-                  <a:srgbClr val="FFFF00"/>
-                </a:highlight>
-              </a:rPr>
-              <a:t>py</a:t>
-            </a:r>
-            <a:r>
-              <a:rPr lang="en-US" dirty="0">
-                <a:solidFill>
-                  <a:schemeClr val="accent1"/>
-                </a:solidFill>
-                <a:highlight>
-                  <a:srgbClr val="FFFF00"/>
-                </a:highlight>
-              </a:rPr>
-              <a:t> or .md</a:t>
-            </a:r>
-          </a:p>
-          <a:p>
-            <a:r>
-              <a:rPr lang="en-US" dirty="0">
-                <a:solidFill>
-                  <a:schemeClr val="accent1"/>
-                </a:solidFill>
-              </a:rPr>
-              <a:t>Submission via Moodle until </a:t>
-            </a:r>
-            <a:r>
-              <a:rPr lang="en-US" dirty="0">
-                <a:solidFill>
-                  <a:schemeClr val="accent1"/>
-                </a:solidFill>
-                <a:highlight>
-                  <a:srgbClr val="FFFF00"/>
-                </a:highlight>
-              </a:rPr>
-              <a:t>12.07.2026</a:t>
-            </a:r>
-          </a:p>
-        </p:txBody>
-      </p:sp>
+      </p:pic>
     </p:spTree>
     <p:extLst>
       <p:ext uri="{BB962C8B-B14F-4D97-AF65-F5344CB8AC3E}">
-        <p14:creationId xmlns:p14="http://schemas.microsoft.com/office/powerpoint/2010/main" val="2523085911"/>
+        <p14:creationId xmlns:p14="http://schemas.microsoft.com/office/powerpoint/2010/main" val="1296220257"/>
       </p:ext>
     </p:extLst>
   </p:cSld>

--- a/slides/day1_intro.pptx
+++ b/slides/day1_intro.pptx
@@ -5,7 +5,7 @@
     <p:sldMasterId id="2147483648" r:id="rId1"/>
   </p:sldMasterIdLst>
   <p:notesMasterIdLst>
-    <p:notesMasterId r:id="rId35"/>
+    <p:notesMasterId r:id="rId34"/>
   </p:notesMasterIdLst>
   <p:sldIdLst>
     <p:sldId id="256" r:id="rId2"/>
@@ -32,15 +32,14 @@
     <p:sldId id="299" r:id="rId23"/>
     <p:sldId id="300" r:id="rId24"/>
     <p:sldId id="301" r:id="rId25"/>
-    <p:sldId id="302" r:id="rId26"/>
-    <p:sldId id="317" r:id="rId27"/>
-    <p:sldId id="303" r:id="rId28"/>
-    <p:sldId id="318" r:id="rId29"/>
-    <p:sldId id="278" r:id="rId30"/>
-    <p:sldId id="279" r:id="rId31"/>
-    <p:sldId id="262" r:id="rId32"/>
-    <p:sldId id="281" r:id="rId33"/>
-    <p:sldId id="326" r:id="rId34"/>
+    <p:sldId id="327" r:id="rId26"/>
+    <p:sldId id="303" r:id="rId27"/>
+    <p:sldId id="318" r:id="rId28"/>
+    <p:sldId id="278" r:id="rId29"/>
+    <p:sldId id="279" r:id="rId30"/>
+    <p:sldId id="262" r:id="rId31"/>
+    <p:sldId id="281" r:id="rId32"/>
+    <p:sldId id="326" r:id="rId33"/>
   </p:sldIdLst>
   <p:sldSz cx="12192000" cy="6858000"/>
   <p:notesSz cx="6858000" cy="9144000"/>
@@ -2393,7 +2392,7 @@
         <p:cNvPr id="1" name="">
           <a:extLst>
             <a:ext uri="{FF2B5EF4-FFF2-40B4-BE49-F238E27FC236}">
-              <a16:creationId xmlns:a16="http://schemas.microsoft.com/office/drawing/2014/main" id="{F96DDB57-5698-2EB0-944F-9C2E9F30674C}"/>
+              <a16:creationId xmlns:a16="http://schemas.microsoft.com/office/drawing/2014/main" id="{8D9CA44E-4185-3E50-856F-6F6D0123BA90}"/>
             </a:ext>
           </a:extLst>
         </p:cNvPr>
@@ -2413,7 +2412,7 @@
           <p:cNvPr id="2" name="Slide Image Placeholder 1">
             <a:extLst>
               <a:ext uri="{FF2B5EF4-FFF2-40B4-BE49-F238E27FC236}">
-                <a16:creationId xmlns:a16="http://schemas.microsoft.com/office/drawing/2014/main" id="{0BD3B962-9D68-91B8-AE53-052C3B188F42}"/>
+                <a16:creationId xmlns:a16="http://schemas.microsoft.com/office/drawing/2014/main" id="{EE732686-ECA5-351F-17DD-48ECF6A7C804}"/>
               </a:ext>
             </a:extLst>
           </p:cNvPr>
@@ -2431,7 +2430,7 @@
           <p:cNvPr id="3" name="Notes Placeholder 2">
             <a:extLst>
               <a:ext uri="{FF2B5EF4-FFF2-40B4-BE49-F238E27FC236}">
-                <a16:creationId xmlns:a16="http://schemas.microsoft.com/office/drawing/2014/main" id="{23A1C86C-7AAD-F570-6613-8F517BA115FE}"/>
+                <a16:creationId xmlns:a16="http://schemas.microsoft.com/office/drawing/2014/main" id="{27642A89-2895-9EB1-B77E-F996DD3017F2}"/>
               </a:ext>
             </a:extLst>
           </p:cNvPr>
@@ -2456,7 +2455,7 @@
           <p:cNvPr id="4" name="Slide Number Placeholder 3">
             <a:extLst>
               <a:ext uri="{FF2B5EF4-FFF2-40B4-BE49-F238E27FC236}">
-                <a16:creationId xmlns:a16="http://schemas.microsoft.com/office/drawing/2014/main" id="{EC260D48-45CA-076F-D379-6E5279A15570}"/>
+                <a16:creationId xmlns:a16="http://schemas.microsoft.com/office/drawing/2014/main" id="{38DB97B3-6B14-01C8-2D6C-40715B059FB2}"/>
               </a:ext>
             </a:extLst>
           </p:cNvPr>
@@ -2483,7 +2482,7 @@
     </p:spTree>
     <p:extLst>
       <p:ext uri="{BB962C8B-B14F-4D97-AF65-F5344CB8AC3E}">
-        <p14:creationId xmlns:p14="http://schemas.microsoft.com/office/powerpoint/2010/main" val="2838015205"/>
+        <p14:creationId xmlns:p14="http://schemas.microsoft.com/office/powerpoint/2010/main" val="3638055156"/>
       </p:ext>
     </p:extLst>
   </p:cSld>
@@ -2494,114 +2493,6 @@
 </file>
 
 <file path=ppt/notesSlides/notesSlide26.xml><?xml version="1.0" encoding="utf-8"?>
-<p:notes xmlns:a="http://schemas.openxmlformats.org/drawingml/2006/main" xmlns:r="http://schemas.openxmlformats.org/officeDocument/2006/relationships" xmlns:p="http://schemas.openxmlformats.org/presentationml/2006/main">
-  <p:cSld>
-    <p:spTree>
-      <p:nvGrpSpPr>
-        <p:cNvPr id="1" name="">
-          <a:extLst>
-            <a:ext uri="{FF2B5EF4-FFF2-40B4-BE49-F238E27FC236}">
-              <a16:creationId xmlns:a16="http://schemas.microsoft.com/office/drawing/2014/main" id="{B0465BE6-03C1-F652-2011-F427EEC5D4CC}"/>
-            </a:ext>
-          </a:extLst>
-        </p:cNvPr>
-        <p:cNvGrpSpPr/>
-        <p:nvPr/>
-      </p:nvGrpSpPr>
-      <p:grpSpPr>
-        <a:xfrm>
-          <a:off x="0" y="0"/>
-          <a:ext cx="0" cy="0"/>
-          <a:chOff x="0" y="0"/>
-          <a:chExt cx="0" cy="0"/>
-        </a:xfrm>
-      </p:grpSpPr>
-      <p:sp>
-        <p:nvSpPr>
-          <p:cNvPr id="2" name="Slide Image Placeholder 1">
-            <a:extLst>
-              <a:ext uri="{FF2B5EF4-FFF2-40B4-BE49-F238E27FC236}">
-                <a16:creationId xmlns:a16="http://schemas.microsoft.com/office/drawing/2014/main" id="{77BA6DEF-8493-D55A-E8B3-A1B4BA9BF81F}"/>
-              </a:ext>
-            </a:extLst>
-          </p:cNvPr>
-          <p:cNvSpPr>
-            <a:spLocks noGrp="1" noRot="1" noChangeAspect="1"/>
-          </p:cNvSpPr>
-          <p:nvPr>
-            <p:ph type="sldImg"/>
-          </p:nvPr>
-        </p:nvSpPr>
-        <p:spPr/>
-      </p:sp>
-      <p:sp>
-        <p:nvSpPr>
-          <p:cNvPr id="3" name="Notes Placeholder 2">
-            <a:extLst>
-              <a:ext uri="{FF2B5EF4-FFF2-40B4-BE49-F238E27FC236}">
-                <a16:creationId xmlns:a16="http://schemas.microsoft.com/office/drawing/2014/main" id="{56CB29B2-A15A-A728-BCB0-844EBB61A112}"/>
-              </a:ext>
-            </a:extLst>
-          </p:cNvPr>
-          <p:cNvSpPr>
-            <a:spLocks noGrp="1"/>
-          </p:cNvSpPr>
-          <p:nvPr>
-            <p:ph type="body" idx="1"/>
-          </p:nvPr>
-        </p:nvSpPr>
-        <p:spPr/>
-        <p:txBody>
-          <a:bodyPr/>
-          <a:lstStyle/>
-          <a:p>
-            <a:endParaRPr lang="en-US" dirty="0"/>
-          </a:p>
-        </p:txBody>
-      </p:sp>
-      <p:sp>
-        <p:nvSpPr>
-          <p:cNvPr id="4" name="Slide Number Placeholder 3">
-            <a:extLst>
-              <a:ext uri="{FF2B5EF4-FFF2-40B4-BE49-F238E27FC236}">
-                <a16:creationId xmlns:a16="http://schemas.microsoft.com/office/drawing/2014/main" id="{FC27B35E-1FEE-2C68-64F2-294A26988336}"/>
-              </a:ext>
-            </a:extLst>
-          </p:cNvPr>
-          <p:cNvSpPr>
-            <a:spLocks noGrp="1"/>
-          </p:cNvSpPr>
-          <p:nvPr>
-            <p:ph type="sldNum" sz="quarter" idx="5"/>
-          </p:nvPr>
-        </p:nvSpPr>
-        <p:spPr/>
-        <p:txBody>
-          <a:bodyPr/>
-          <a:lstStyle/>
-          <a:p>
-            <a:fld id="{FF78EFD2-C9A0-A146-8CE9-0A2B7CC7B867}" type="slidenum">
-              <a:rPr lang="en-US" smtClean="0"/>
-              <a:t>26</a:t>
-            </a:fld>
-            <a:endParaRPr lang="en-US"/>
-          </a:p>
-        </p:txBody>
-      </p:sp>
-    </p:spTree>
-    <p:extLst>
-      <p:ext uri="{BB962C8B-B14F-4D97-AF65-F5344CB8AC3E}">
-        <p14:creationId xmlns:p14="http://schemas.microsoft.com/office/powerpoint/2010/main" val="2075489549"/>
-      </p:ext>
-    </p:extLst>
-  </p:cSld>
-  <p:clrMapOvr>
-    <a:masterClrMapping/>
-  </p:clrMapOvr>
-</p:notes>
-</file>
-
-<file path=ppt/notesSlides/notesSlide27.xml><?xml version="1.0" encoding="utf-8"?>
 <p:notes xmlns:a="http://schemas.openxmlformats.org/drawingml/2006/main" xmlns:r="http://schemas.openxmlformats.org/officeDocument/2006/relationships" xmlns:p="http://schemas.openxmlformats.org/presentationml/2006/main">
   <p:cSld>
     <p:spTree>
@@ -2690,7 +2581,7 @@
           <a:p>
             <a:fld id="{FF78EFD2-C9A0-A146-8CE9-0A2B7CC7B867}" type="slidenum">
               <a:rPr lang="en-US" smtClean="0"/>
-              <a:t>27</a:t>
+              <a:t>26</a:t>
             </a:fld>
             <a:endParaRPr lang="en-US"/>
           </a:p>
@@ -2709,7 +2600,7 @@
 </p:notes>
 </file>
 
-<file path=ppt/notesSlides/notesSlide28.xml><?xml version="1.0" encoding="utf-8"?>
+<file path=ppt/notesSlides/notesSlide27.xml><?xml version="1.0" encoding="utf-8"?>
 <p:notes xmlns:a="http://schemas.openxmlformats.org/drawingml/2006/main" xmlns:r="http://schemas.openxmlformats.org/officeDocument/2006/relationships" xmlns:p="http://schemas.openxmlformats.org/presentationml/2006/main">
   <p:cSld>
     <p:spTree>
@@ -2798,7 +2689,7 @@
           <a:p>
             <a:fld id="{FF78EFD2-C9A0-A146-8CE9-0A2B7CC7B867}" type="slidenum">
               <a:rPr lang="en-US" smtClean="0"/>
-              <a:t>28</a:t>
+              <a:t>27</a:t>
             </a:fld>
             <a:endParaRPr lang="en-US"/>
           </a:p>
@@ -2817,7 +2708,7 @@
 </p:notes>
 </file>
 
-<file path=ppt/notesSlides/notesSlide29.xml><?xml version="1.0" encoding="utf-8"?>
+<file path=ppt/notesSlides/notesSlide28.xml><?xml version="1.0" encoding="utf-8"?>
 <p:notes xmlns:a="http://schemas.openxmlformats.org/drawingml/2006/main" xmlns:r="http://schemas.openxmlformats.org/officeDocument/2006/relationships" xmlns:p="http://schemas.openxmlformats.org/presentationml/2006/main">
   <p:cSld>
     <p:spTree>
@@ -2929,7 +2820,7 @@
           <a:p>
             <a:fld id="{FF78EFD2-C9A0-A146-8CE9-0A2B7CC7B867}" type="slidenum">
               <a:rPr lang="en-US" smtClean="0"/>
-              <a:t>29</a:t>
+              <a:t>28</a:t>
             </a:fld>
             <a:endParaRPr lang="en-US"/>
           </a:p>
@@ -2939,6 +2830,288 @@
     <p:extLst>
       <p:ext uri="{BB962C8B-B14F-4D97-AF65-F5344CB8AC3E}">
         <p14:creationId xmlns:p14="http://schemas.microsoft.com/office/powerpoint/2010/main" val="3270840237"/>
+      </p:ext>
+    </p:extLst>
+  </p:cSld>
+  <p:clrMapOvr>
+    <a:masterClrMapping/>
+  </p:clrMapOvr>
+</p:notes>
+</file>
+
+<file path=ppt/notesSlides/notesSlide29.xml><?xml version="1.0" encoding="utf-8"?>
+<p:notes xmlns:a="http://schemas.openxmlformats.org/drawingml/2006/main" xmlns:r="http://schemas.openxmlformats.org/officeDocument/2006/relationships" xmlns:p="http://schemas.openxmlformats.org/presentationml/2006/main">
+  <p:cSld>
+    <p:spTree>
+      <p:nvGrpSpPr>
+        <p:cNvPr id="1" name="">
+          <a:extLst>
+            <a:ext uri="{FF2B5EF4-FFF2-40B4-BE49-F238E27FC236}">
+              <a16:creationId xmlns:a16="http://schemas.microsoft.com/office/drawing/2014/main" id="{0622ED16-FBE9-20D7-BB46-76C1843FD729}"/>
+            </a:ext>
+          </a:extLst>
+        </p:cNvPr>
+        <p:cNvGrpSpPr/>
+        <p:nvPr/>
+      </p:nvGrpSpPr>
+      <p:grpSpPr>
+        <a:xfrm>
+          <a:off x="0" y="0"/>
+          <a:ext cx="0" cy="0"/>
+          <a:chOff x="0" y="0"/>
+          <a:chExt cx="0" cy="0"/>
+        </a:xfrm>
+      </p:grpSpPr>
+      <p:sp>
+        <p:nvSpPr>
+          <p:cNvPr id="2" name="Slide Image Placeholder 1">
+            <a:extLst>
+              <a:ext uri="{FF2B5EF4-FFF2-40B4-BE49-F238E27FC236}">
+                <a16:creationId xmlns:a16="http://schemas.microsoft.com/office/drawing/2014/main" id="{281ECAF1-1509-7F11-DDFE-83E267EE6CC6}"/>
+              </a:ext>
+            </a:extLst>
+          </p:cNvPr>
+          <p:cNvSpPr>
+            <a:spLocks noGrp="1" noRot="1" noChangeAspect="1"/>
+          </p:cNvSpPr>
+          <p:nvPr>
+            <p:ph type="sldImg"/>
+          </p:nvPr>
+        </p:nvSpPr>
+        <p:spPr/>
+      </p:sp>
+      <p:sp>
+        <p:nvSpPr>
+          <p:cNvPr id="3" name="Notes Placeholder 2">
+            <a:extLst>
+              <a:ext uri="{FF2B5EF4-FFF2-40B4-BE49-F238E27FC236}">
+                <a16:creationId xmlns:a16="http://schemas.microsoft.com/office/drawing/2014/main" id="{3E41390C-F971-DAE8-8544-B46F6020D865}"/>
+              </a:ext>
+            </a:extLst>
+          </p:cNvPr>
+          <p:cNvSpPr>
+            <a:spLocks noGrp="1"/>
+          </p:cNvSpPr>
+          <p:nvPr>
+            <p:ph type="body" idx="1"/>
+          </p:nvPr>
+        </p:nvSpPr>
+        <p:spPr/>
+        <p:txBody>
+          <a:bodyPr/>
+          <a:lstStyle/>
+          <a:p>
+            <a:pPr rtl="0" fontAlgn="base"/>
+            <a:r>
+              <a:rPr lang="en-US" sz="1200" b="0" i="0" u="none" strike="noStrike" kern="1200" dirty="0">
+                <a:solidFill>
+                  <a:schemeClr val="tx1"/>
+                </a:solidFill>
+                <a:effectLst/>
+                <a:latin typeface="+mn-lt"/>
+                <a:ea typeface="+mn-ea"/>
+                <a:cs typeface="+mn-cs"/>
+              </a:rPr>
+              <a:t>Images taken from: https://</a:t>
+            </a:r>
+            <a:r>
+              <a:rPr lang="en-US" sz="1200" b="0" i="0" u="none" strike="noStrike" kern="1200" dirty="0" err="1">
+                <a:solidFill>
+                  <a:schemeClr val="tx1"/>
+                </a:solidFill>
+                <a:effectLst/>
+                <a:latin typeface="+mn-lt"/>
+                <a:ea typeface="+mn-ea"/>
+                <a:cs typeface="+mn-cs"/>
+              </a:rPr>
+              <a:t>www.geeksforgeeks.org</a:t>
+            </a:r>
+            <a:r>
+              <a:rPr lang="en-US" sz="1200" b="0" i="0" u="none" strike="noStrike" kern="1200" dirty="0">
+                <a:solidFill>
+                  <a:schemeClr val="tx1"/>
+                </a:solidFill>
+                <a:effectLst/>
+                <a:latin typeface="+mn-lt"/>
+                <a:ea typeface="+mn-ea"/>
+                <a:cs typeface="+mn-cs"/>
+              </a:rPr>
+              <a:t>/software-testing/what-is-an-</a:t>
+            </a:r>
+            <a:r>
+              <a:rPr lang="en-US" sz="1200" b="0" i="0" u="none" strike="noStrike" kern="1200" dirty="0" err="1">
+                <a:solidFill>
+                  <a:schemeClr val="tx1"/>
+                </a:solidFill>
+                <a:effectLst/>
+                <a:latin typeface="+mn-lt"/>
+                <a:ea typeface="+mn-ea"/>
+                <a:cs typeface="+mn-cs"/>
+              </a:rPr>
+              <a:t>api</a:t>
+            </a:r>
+            <a:r>
+              <a:rPr lang="en-US" sz="1200" b="0" i="0" u="none" strike="noStrike" kern="1200" dirty="0">
+                <a:solidFill>
+                  <a:schemeClr val="tx1"/>
+                </a:solidFill>
+                <a:effectLst/>
+                <a:latin typeface="+mn-lt"/>
+                <a:ea typeface="+mn-ea"/>
+                <a:cs typeface="+mn-cs"/>
+              </a:rPr>
+              <a:t>/</a:t>
+            </a:r>
+          </a:p>
+          <a:p>
+            <a:pPr rtl="0" fontAlgn="base"/>
+            <a:endParaRPr lang="en-US" sz="1200" b="0" i="0" u="none" strike="noStrike" kern="1200" dirty="0">
+              <a:solidFill>
+                <a:schemeClr val="tx1"/>
+              </a:solidFill>
+              <a:effectLst/>
+              <a:latin typeface="+mn-lt"/>
+              <a:ea typeface="+mn-ea"/>
+              <a:cs typeface="+mn-cs"/>
+            </a:endParaRPr>
+          </a:p>
+          <a:p>
+            <a:pPr rtl="0" fontAlgn="base"/>
+            <a:endParaRPr lang="en-US" sz="1200" b="0" i="0" u="none" strike="noStrike" kern="1200" dirty="0">
+              <a:solidFill>
+                <a:schemeClr val="tx1"/>
+              </a:solidFill>
+              <a:effectLst/>
+              <a:latin typeface="+mn-lt"/>
+              <a:ea typeface="+mn-ea"/>
+              <a:cs typeface="+mn-cs"/>
+            </a:endParaRPr>
+          </a:p>
+          <a:p>
+            <a:pPr rtl="0" fontAlgn="base"/>
+            <a:endParaRPr lang="en-US" sz="1200" b="0" i="0" u="none" strike="noStrike" kern="1200" dirty="0">
+              <a:solidFill>
+                <a:schemeClr val="tx1"/>
+              </a:solidFill>
+              <a:effectLst/>
+              <a:latin typeface="+mn-lt"/>
+              <a:ea typeface="+mn-ea"/>
+              <a:cs typeface="+mn-cs"/>
+            </a:endParaRPr>
+          </a:p>
+          <a:p>
+            <a:pPr rtl="0" fontAlgn="base"/>
+            <a:r>
+              <a:rPr lang="en-US" sz="1200" b="0" i="0" u="none" strike="noStrike" kern="1200" dirty="0">
+                <a:solidFill>
+                  <a:schemeClr val="tx1"/>
+                </a:solidFill>
+                <a:effectLst/>
+                <a:latin typeface="+mn-lt"/>
+                <a:ea typeface="+mn-ea"/>
+                <a:cs typeface="+mn-cs"/>
+              </a:rPr>
+              <a:t>Imagine you’re at a restaurant:</a:t>
+            </a:r>
+          </a:p>
+          <a:p>
+            <a:pPr fontAlgn="base"/>
+            <a:r>
+              <a:rPr lang="en-US" sz="1200" b="0" i="0" u="none" strike="noStrike" kern="1200" dirty="0">
+                <a:solidFill>
+                  <a:schemeClr val="tx1"/>
+                </a:solidFill>
+                <a:effectLst/>
+                <a:latin typeface="+mn-lt"/>
+                <a:ea typeface="+mn-ea"/>
+                <a:cs typeface="+mn-cs"/>
+              </a:rPr>
+              <a:t>You (the client) place an order with the waiter.</a:t>
+            </a:r>
+          </a:p>
+          <a:p>
+            <a:pPr fontAlgn="base"/>
+            <a:r>
+              <a:rPr lang="en-US" sz="1200" b="0" i="0" u="none" strike="noStrike" kern="1200" dirty="0">
+                <a:solidFill>
+                  <a:schemeClr val="tx1"/>
+                </a:solidFill>
+                <a:effectLst/>
+                <a:latin typeface="+mn-lt"/>
+                <a:ea typeface="+mn-ea"/>
+                <a:cs typeface="+mn-cs"/>
+              </a:rPr>
+              <a:t>The waiter (the API) conveys your request to the chef (the server).</a:t>
+            </a:r>
+          </a:p>
+          <a:p>
+            <a:pPr fontAlgn="base"/>
+            <a:r>
+              <a:rPr lang="en-US" sz="1200" b="0" i="0" u="none" strike="noStrike" kern="1200" dirty="0">
+                <a:solidFill>
+                  <a:schemeClr val="tx1"/>
+                </a:solidFill>
+                <a:effectLst/>
+                <a:latin typeface="+mn-lt"/>
+                <a:ea typeface="+mn-ea"/>
+                <a:cs typeface="+mn-cs"/>
+              </a:rPr>
+              <a:t>The chef prepares the food (processes the request) and gives it to the waiter.</a:t>
+            </a:r>
+          </a:p>
+          <a:p>
+            <a:pPr fontAlgn="base"/>
+            <a:r>
+              <a:rPr lang="en-US" sz="1200" b="0" i="0" u="none" strike="noStrike" kern="1200" dirty="0">
+                <a:solidFill>
+                  <a:schemeClr val="tx1"/>
+                </a:solidFill>
+                <a:effectLst/>
+                <a:latin typeface="+mn-lt"/>
+                <a:ea typeface="+mn-ea"/>
+                <a:cs typeface="+mn-cs"/>
+              </a:rPr>
+              <a:t>The waiter delivers it back to your table (response).</a:t>
+            </a:r>
+          </a:p>
+          <a:p>
+            <a:endParaRPr lang="en-US" dirty="0"/>
+          </a:p>
+        </p:txBody>
+      </p:sp>
+      <p:sp>
+        <p:nvSpPr>
+          <p:cNvPr id="4" name="Slide Number Placeholder 3">
+            <a:extLst>
+              <a:ext uri="{FF2B5EF4-FFF2-40B4-BE49-F238E27FC236}">
+                <a16:creationId xmlns:a16="http://schemas.microsoft.com/office/drawing/2014/main" id="{D17C6DFD-53E9-3741-10AE-DFFB7B896666}"/>
+              </a:ext>
+            </a:extLst>
+          </p:cNvPr>
+          <p:cNvSpPr>
+            <a:spLocks noGrp="1"/>
+          </p:cNvSpPr>
+          <p:nvPr>
+            <p:ph type="sldNum" sz="quarter" idx="5"/>
+          </p:nvPr>
+        </p:nvSpPr>
+        <p:spPr/>
+        <p:txBody>
+          <a:bodyPr/>
+          <a:lstStyle/>
+          <a:p>
+            <a:fld id="{FF78EFD2-C9A0-A146-8CE9-0A2B7CC7B867}" type="slidenum">
+              <a:rPr lang="en-US" smtClean="0"/>
+              <a:t>29</a:t>
+            </a:fld>
+            <a:endParaRPr lang="en-US"/>
+          </a:p>
+        </p:txBody>
+      </p:sp>
+    </p:spTree>
+    <p:extLst>
+      <p:ext uri="{BB962C8B-B14F-4D97-AF65-F5344CB8AC3E}">
+        <p14:creationId xmlns:p14="http://schemas.microsoft.com/office/powerpoint/2010/main" val="3341870626"/>
       </p:ext>
     </p:extLst>
   </p:cSld>
@@ -3064,288 +3237,6 @@
         <p:cNvPr id="1" name="">
           <a:extLst>
             <a:ext uri="{FF2B5EF4-FFF2-40B4-BE49-F238E27FC236}">
-              <a16:creationId xmlns:a16="http://schemas.microsoft.com/office/drawing/2014/main" id="{0622ED16-FBE9-20D7-BB46-76C1843FD729}"/>
-            </a:ext>
-          </a:extLst>
-        </p:cNvPr>
-        <p:cNvGrpSpPr/>
-        <p:nvPr/>
-      </p:nvGrpSpPr>
-      <p:grpSpPr>
-        <a:xfrm>
-          <a:off x="0" y="0"/>
-          <a:ext cx="0" cy="0"/>
-          <a:chOff x="0" y="0"/>
-          <a:chExt cx="0" cy="0"/>
-        </a:xfrm>
-      </p:grpSpPr>
-      <p:sp>
-        <p:nvSpPr>
-          <p:cNvPr id="2" name="Slide Image Placeholder 1">
-            <a:extLst>
-              <a:ext uri="{FF2B5EF4-FFF2-40B4-BE49-F238E27FC236}">
-                <a16:creationId xmlns:a16="http://schemas.microsoft.com/office/drawing/2014/main" id="{281ECAF1-1509-7F11-DDFE-83E267EE6CC6}"/>
-              </a:ext>
-            </a:extLst>
-          </p:cNvPr>
-          <p:cNvSpPr>
-            <a:spLocks noGrp="1" noRot="1" noChangeAspect="1"/>
-          </p:cNvSpPr>
-          <p:nvPr>
-            <p:ph type="sldImg"/>
-          </p:nvPr>
-        </p:nvSpPr>
-        <p:spPr/>
-      </p:sp>
-      <p:sp>
-        <p:nvSpPr>
-          <p:cNvPr id="3" name="Notes Placeholder 2">
-            <a:extLst>
-              <a:ext uri="{FF2B5EF4-FFF2-40B4-BE49-F238E27FC236}">
-                <a16:creationId xmlns:a16="http://schemas.microsoft.com/office/drawing/2014/main" id="{3E41390C-F971-DAE8-8544-B46F6020D865}"/>
-              </a:ext>
-            </a:extLst>
-          </p:cNvPr>
-          <p:cNvSpPr>
-            <a:spLocks noGrp="1"/>
-          </p:cNvSpPr>
-          <p:nvPr>
-            <p:ph type="body" idx="1"/>
-          </p:nvPr>
-        </p:nvSpPr>
-        <p:spPr/>
-        <p:txBody>
-          <a:bodyPr/>
-          <a:lstStyle/>
-          <a:p>
-            <a:pPr rtl="0" fontAlgn="base"/>
-            <a:r>
-              <a:rPr lang="en-US" sz="1200" b="0" i="0" u="none" strike="noStrike" kern="1200" dirty="0">
-                <a:solidFill>
-                  <a:schemeClr val="tx1"/>
-                </a:solidFill>
-                <a:effectLst/>
-                <a:latin typeface="+mn-lt"/>
-                <a:ea typeface="+mn-ea"/>
-                <a:cs typeface="+mn-cs"/>
-              </a:rPr>
-              <a:t>Images taken from: https://</a:t>
-            </a:r>
-            <a:r>
-              <a:rPr lang="en-US" sz="1200" b="0" i="0" u="none" strike="noStrike" kern="1200" dirty="0" err="1">
-                <a:solidFill>
-                  <a:schemeClr val="tx1"/>
-                </a:solidFill>
-                <a:effectLst/>
-                <a:latin typeface="+mn-lt"/>
-                <a:ea typeface="+mn-ea"/>
-                <a:cs typeface="+mn-cs"/>
-              </a:rPr>
-              <a:t>www.geeksforgeeks.org</a:t>
-            </a:r>
-            <a:r>
-              <a:rPr lang="en-US" sz="1200" b="0" i="0" u="none" strike="noStrike" kern="1200" dirty="0">
-                <a:solidFill>
-                  <a:schemeClr val="tx1"/>
-                </a:solidFill>
-                <a:effectLst/>
-                <a:latin typeface="+mn-lt"/>
-                <a:ea typeface="+mn-ea"/>
-                <a:cs typeface="+mn-cs"/>
-              </a:rPr>
-              <a:t>/software-testing/what-is-an-</a:t>
-            </a:r>
-            <a:r>
-              <a:rPr lang="en-US" sz="1200" b="0" i="0" u="none" strike="noStrike" kern="1200" dirty="0" err="1">
-                <a:solidFill>
-                  <a:schemeClr val="tx1"/>
-                </a:solidFill>
-                <a:effectLst/>
-                <a:latin typeface="+mn-lt"/>
-                <a:ea typeface="+mn-ea"/>
-                <a:cs typeface="+mn-cs"/>
-              </a:rPr>
-              <a:t>api</a:t>
-            </a:r>
-            <a:r>
-              <a:rPr lang="en-US" sz="1200" b="0" i="0" u="none" strike="noStrike" kern="1200" dirty="0">
-                <a:solidFill>
-                  <a:schemeClr val="tx1"/>
-                </a:solidFill>
-                <a:effectLst/>
-                <a:latin typeface="+mn-lt"/>
-                <a:ea typeface="+mn-ea"/>
-                <a:cs typeface="+mn-cs"/>
-              </a:rPr>
-              <a:t>/</a:t>
-            </a:r>
-          </a:p>
-          <a:p>
-            <a:pPr rtl="0" fontAlgn="base"/>
-            <a:endParaRPr lang="en-US" sz="1200" b="0" i="0" u="none" strike="noStrike" kern="1200" dirty="0">
-              <a:solidFill>
-                <a:schemeClr val="tx1"/>
-              </a:solidFill>
-              <a:effectLst/>
-              <a:latin typeface="+mn-lt"/>
-              <a:ea typeface="+mn-ea"/>
-              <a:cs typeface="+mn-cs"/>
-            </a:endParaRPr>
-          </a:p>
-          <a:p>
-            <a:pPr rtl="0" fontAlgn="base"/>
-            <a:endParaRPr lang="en-US" sz="1200" b="0" i="0" u="none" strike="noStrike" kern="1200" dirty="0">
-              <a:solidFill>
-                <a:schemeClr val="tx1"/>
-              </a:solidFill>
-              <a:effectLst/>
-              <a:latin typeface="+mn-lt"/>
-              <a:ea typeface="+mn-ea"/>
-              <a:cs typeface="+mn-cs"/>
-            </a:endParaRPr>
-          </a:p>
-          <a:p>
-            <a:pPr rtl="0" fontAlgn="base"/>
-            <a:endParaRPr lang="en-US" sz="1200" b="0" i="0" u="none" strike="noStrike" kern="1200" dirty="0">
-              <a:solidFill>
-                <a:schemeClr val="tx1"/>
-              </a:solidFill>
-              <a:effectLst/>
-              <a:latin typeface="+mn-lt"/>
-              <a:ea typeface="+mn-ea"/>
-              <a:cs typeface="+mn-cs"/>
-            </a:endParaRPr>
-          </a:p>
-          <a:p>
-            <a:pPr rtl="0" fontAlgn="base"/>
-            <a:r>
-              <a:rPr lang="en-US" sz="1200" b="0" i="0" u="none" strike="noStrike" kern="1200" dirty="0">
-                <a:solidFill>
-                  <a:schemeClr val="tx1"/>
-                </a:solidFill>
-                <a:effectLst/>
-                <a:latin typeface="+mn-lt"/>
-                <a:ea typeface="+mn-ea"/>
-                <a:cs typeface="+mn-cs"/>
-              </a:rPr>
-              <a:t>Imagine you’re at a restaurant:</a:t>
-            </a:r>
-          </a:p>
-          <a:p>
-            <a:pPr fontAlgn="base"/>
-            <a:r>
-              <a:rPr lang="en-US" sz="1200" b="0" i="0" u="none" strike="noStrike" kern="1200" dirty="0">
-                <a:solidFill>
-                  <a:schemeClr val="tx1"/>
-                </a:solidFill>
-                <a:effectLst/>
-                <a:latin typeface="+mn-lt"/>
-                <a:ea typeface="+mn-ea"/>
-                <a:cs typeface="+mn-cs"/>
-              </a:rPr>
-              <a:t>You (the client) place an order with the waiter.</a:t>
-            </a:r>
-          </a:p>
-          <a:p>
-            <a:pPr fontAlgn="base"/>
-            <a:r>
-              <a:rPr lang="en-US" sz="1200" b="0" i="0" u="none" strike="noStrike" kern="1200" dirty="0">
-                <a:solidFill>
-                  <a:schemeClr val="tx1"/>
-                </a:solidFill>
-                <a:effectLst/>
-                <a:latin typeface="+mn-lt"/>
-                <a:ea typeface="+mn-ea"/>
-                <a:cs typeface="+mn-cs"/>
-              </a:rPr>
-              <a:t>The waiter (the API) conveys your request to the chef (the server).</a:t>
-            </a:r>
-          </a:p>
-          <a:p>
-            <a:pPr fontAlgn="base"/>
-            <a:r>
-              <a:rPr lang="en-US" sz="1200" b="0" i="0" u="none" strike="noStrike" kern="1200" dirty="0">
-                <a:solidFill>
-                  <a:schemeClr val="tx1"/>
-                </a:solidFill>
-                <a:effectLst/>
-                <a:latin typeface="+mn-lt"/>
-                <a:ea typeface="+mn-ea"/>
-                <a:cs typeface="+mn-cs"/>
-              </a:rPr>
-              <a:t>The chef prepares the food (processes the request) and gives it to the waiter.</a:t>
-            </a:r>
-          </a:p>
-          <a:p>
-            <a:pPr fontAlgn="base"/>
-            <a:r>
-              <a:rPr lang="en-US" sz="1200" b="0" i="0" u="none" strike="noStrike" kern="1200" dirty="0">
-                <a:solidFill>
-                  <a:schemeClr val="tx1"/>
-                </a:solidFill>
-                <a:effectLst/>
-                <a:latin typeface="+mn-lt"/>
-                <a:ea typeface="+mn-ea"/>
-                <a:cs typeface="+mn-cs"/>
-              </a:rPr>
-              <a:t>The waiter delivers it back to your table (response).</a:t>
-            </a:r>
-          </a:p>
-          <a:p>
-            <a:endParaRPr lang="en-US" dirty="0"/>
-          </a:p>
-        </p:txBody>
-      </p:sp>
-      <p:sp>
-        <p:nvSpPr>
-          <p:cNvPr id="4" name="Slide Number Placeholder 3">
-            <a:extLst>
-              <a:ext uri="{FF2B5EF4-FFF2-40B4-BE49-F238E27FC236}">
-                <a16:creationId xmlns:a16="http://schemas.microsoft.com/office/drawing/2014/main" id="{D17C6DFD-53E9-3741-10AE-DFFB7B896666}"/>
-              </a:ext>
-            </a:extLst>
-          </p:cNvPr>
-          <p:cNvSpPr>
-            <a:spLocks noGrp="1"/>
-          </p:cNvSpPr>
-          <p:nvPr>
-            <p:ph type="sldNum" sz="quarter" idx="5"/>
-          </p:nvPr>
-        </p:nvSpPr>
-        <p:spPr/>
-        <p:txBody>
-          <a:bodyPr/>
-          <a:lstStyle/>
-          <a:p>
-            <a:fld id="{FF78EFD2-C9A0-A146-8CE9-0A2B7CC7B867}" type="slidenum">
-              <a:rPr lang="en-US" smtClean="0"/>
-              <a:t>30</a:t>
-            </a:fld>
-            <a:endParaRPr lang="en-US"/>
-          </a:p>
-        </p:txBody>
-      </p:sp>
-    </p:spTree>
-    <p:extLst>
-      <p:ext uri="{BB962C8B-B14F-4D97-AF65-F5344CB8AC3E}">
-        <p14:creationId xmlns:p14="http://schemas.microsoft.com/office/powerpoint/2010/main" val="3341870626"/>
-      </p:ext>
-    </p:extLst>
-  </p:cSld>
-  <p:clrMapOvr>
-    <a:masterClrMapping/>
-  </p:clrMapOvr>
-</p:notes>
-</file>
-
-<file path=ppt/notesSlides/notesSlide31.xml><?xml version="1.0" encoding="utf-8"?>
-<p:notes xmlns:a="http://schemas.openxmlformats.org/drawingml/2006/main" xmlns:r="http://schemas.openxmlformats.org/officeDocument/2006/relationships" xmlns:p="http://schemas.openxmlformats.org/presentationml/2006/main">
-  <p:cSld>
-    <p:spTree>
-      <p:nvGrpSpPr>
-        <p:cNvPr id="1" name="">
-          <a:extLst>
-            <a:ext uri="{FF2B5EF4-FFF2-40B4-BE49-F238E27FC236}">
               <a16:creationId xmlns:a16="http://schemas.microsoft.com/office/drawing/2014/main" id="{14E9B45F-1925-C993-4D16-2EDD49557B8A}"/>
             </a:ext>
           </a:extLst>
@@ -3427,7 +3318,7 @@
           <a:p>
             <a:fld id="{FF78EFD2-C9A0-A146-8CE9-0A2B7CC7B867}" type="slidenum">
               <a:rPr lang="en-US" smtClean="0"/>
-              <a:t>31</a:t>
+              <a:t>30</a:t>
             </a:fld>
             <a:endParaRPr lang="en-US"/>
           </a:p>
@@ -3446,7 +3337,7 @@
 </p:notes>
 </file>
 
-<file path=ppt/notesSlides/notesSlide32.xml><?xml version="1.0" encoding="utf-8"?>
+<file path=ppt/notesSlides/notesSlide31.xml><?xml version="1.0" encoding="utf-8"?>
 <p:notes xmlns:a="http://schemas.openxmlformats.org/drawingml/2006/main" xmlns:r="http://schemas.openxmlformats.org/officeDocument/2006/relationships" xmlns:p="http://schemas.openxmlformats.org/presentationml/2006/main">
   <p:cSld>
     <p:spTree>
@@ -3535,7 +3426,7 @@
           <a:p>
             <a:fld id="{FF78EFD2-C9A0-A146-8CE9-0A2B7CC7B867}" type="slidenum">
               <a:rPr lang="en-US" smtClean="0"/>
-              <a:t>32</a:t>
+              <a:t>31</a:t>
             </a:fld>
             <a:endParaRPr lang="en-US"/>
           </a:p>
@@ -3554,7 +3445,7 @@
 </p:notes>
 </file>
 
-<file path=ppt/notesSlides/notesSlide33.xml><?xml version="1.0" encoding="utf-8"?>
+<file path=ppt/notesSlides/notesSlide32.xml><?xml version="1.0" encoding="utf-8"?>
 <p:notes xmlns:a="http://schemas.openxmlformats.org/drawingml/2006/main" xmlns:r="http://schemas.openxmlformats.org/officeDocument/2006/relationships" xmlns:p="http://schemas.openxmlformats.org/presentationml/2006/main">
   <p:cSld>
     <p:spTree>
@@ -3688,7 +3579,7 @@
           <a:p>
             <a:fld id="{FF78EFD2-C9A0-A146-8CE9-0A2B7CC7B867}" type="slidenum">
               <a:rPr lang="en-US" smtClean="0"/>
-              <a:t>33</a:t>
+              <a:t>32</a:t>
             </a:fld>
             <a:endParaRPr lang="en-US"/>
           </a:p>
@@ -8799,6 +8690,16 @@
                   <a:schemeClr val="accent1"/>
                 </a:solidFill>
               </a:rPr>
+              <a:t>AI-assisted collection workflows</a:t>
+            </a:r>
+          </a:p>
+          <a:p>
+            <a:r>
+              <a:rPr lang="en-US" sz="2400" dirty="0">
+                <a:solidFill>
+                  <a:schemeClr val="accent1"/>
+                </a:solidFill>
+              </a:rPr>
               <a:t>Transparency databases</a:t>
             </a:r>
           </a:p>
@@ -8810,16 +8711,6 @@
                 </a:solidFill>
               </a:rPr>
               <a:t>DSA-based researcher access</a:t>
-            </a:r>
-          </a:p>
-          <a:p>
-            <a:r>
-              <a:rPr lang="en-US" sz="2400" dirty="0">
-                <a:solidFill>
-                  <a:schemeClr val="accent1"/>
-                </a:solidFill>
-              </a:rPr>
-              <a:t>AI-assisted collection workflows</a:t>
             </a:r>
           </a:p>
         </p:txBody>
@@ -11552,7 +11443,7 @@
         <p:cNvPr id="1" name="">
           <a:extLst>
             <a:ext uri="{FF2B5EF4-FFF2-40B4-BE49-F238E27FC236}">
-              <a16:creationId xmlns:a16="http://schemas.microsoft.com/office/drawing/2014/main" id="{504604B8-099B-9474-7A3E-A447DD9F451F}"/>
+              <a16:creationId xmlns:a16="http://schemas.microsoft.com/office/drawing/2014/main" id="{25A4D19A-D1AC-734D-087B-BF8CDF1B503B}"/>
             </a:ext>
           </a:extLst>
         </p:cNvPr>
@@ -11572,7 +11463,7 @@
           <p:cNvPr id="2" name="Title 1">
             <a:extLst>
               <a:ext uri="{FF2B5EF4-FFF2-40B4-BE49-F238E27FC236}">
-                <a16:creationId xmlns:a16="http://schemas.microsoft.com/office/drawing/2014/main" id="{FF05D30B-F0A2-E287-C8D1-1D2D62C8C0A0}"/>
+                <a16:creationId xmlns:a16="http://schemas.microsoft.com/office/drawing/2014/main" id="{36467E2C-DC9D-427E-D36F-8CEFFA7DC1FF}"/>
               </a:ext>
             </a:extLst>
           </p:cNvPr>
@@ -11604,7 +11495,7 @@
           <p:cNvPr id="3" name="Content Placeholder 2">
             <a:extLst>
               <a:ext uri="{FF2B5EF4-FFF2-40B4-BE49-F238E27FC236}">
-                <a16:creationId xmlns:a16="http://schemas.microsoft.com/office/drawing/2014/main" id="{D0A51527-78D5-3FBD-6D9B-17FC19EBF83A}"/>
+                <a16:creationId xmlns:a16="http://schemas.microsoft.com/office/drawing/2014/main" id="{DC2A80F6-A8C3-8F78-6B07-8F01F4356013}"/>
               </a:ext>
             </a:extLst>
           </p:cNvPr>
@@ -11634,47 +11525,7 @@
                   <a:schemeClr val="accent1"/>
                 </a:solidFill>
               </a:rPr>
-              <a:t>Important because:</a:t>
-            </a:r>
-          </a:p>
-          <a:p>
-            <a:r>
-              <a:rPr lang="en-US" sz="2400" dirty="0">
-                <a:solidFill>
-                  <a:schemeClr val="accent1"/>
-                </a:solidFill>
-              </a:rPr>
-              <a:t>access is formalized</a:t>
-            </a:r>
-          </a:p>
-          <a:p>
-            <a:r>
-              <a:rPr lang="en-US" sz="2400" dirty="0">
-                <a:solidFill>
-                  <a:schemeClr val="accent1"/>
-                </a:solidFill>
-              </a:rPr>
-              <a:t>requests must be justified</a:t>
-            </a:r>
-          </a:p>
-          <a:p>
-            <a:r>
-              <a:rPr lang="en-US" sz="2400" dirty="0">
-                <a:solidFill>
-                  <a:schemeClr val="accent1"/>
-                </a:solidFill>
-              </a:rPr>
-              <a:t>proportionality and data protection matter</a:t>
-            </a:r>
-          </a:p>
-          <a:p>
-            <a:r>
-              <a:rPr lang="en-US" sz="2400" dirty="0">
-                <a:solidFill>
-                  <a:schemeClr val="accent1"/>
-                </a:solidFill>
-              </a:rPr>
-              <a:t>timelines and governance shape research design</a:t>
+              <a:t>The Digital Services Act (DSA) creates access mechanisms for studying systemic risks.</a:t>
             </a:r>
           </a:p>
           <a:p>
@@ -11687,12 +11538,78 @@
               </a:solidFill>
             </a:endParaRPr>
           </a:p>
+          <a:p>
+            <a:pPr marL="0" indent="0">
+              <a:buNone/>
+            </a:pPr>
+            <a:r>
+              <a:rPr lang="en-US" dirty="0">
+                <a:solidFill>
+                  <a:schemeClr val="accent1"/>
+                </a:solidFill>
+              </a:rPr>
+              <a:t>Relevant distinction:</a:t>
+            </a:r>
+          </a:p>
+          <a:p>
+            <a:r>
+              <a:rPr lang="en-US" sz="2400" dirty="0">
+                <a:solidFill>
+                  <a:schemeClr val="accent1"/>
+                </a:solidFill>
+              </a:rPr>
+              <a:t>public-data access</a:t>
+            </a:r>
+          </a:p>
+          <a:p>
+            <a:r>
+              <a:rPr lang="en-US" sz="2400" dirty="0">
+                <a:solidFill>
+                  <a:schemeClr val="accent1"/>
+                </a:solidFill>
+              </a:rPr>
+              <a:t>vetted researcher access to non-public data</a:t>
+            </a:r>
+          </a:p>
+          <a:p>
+            <a:pPr marL="0" indent="0">
+              <a:buNone/>
+            </a:pPr>
+            <a:endParaRPr lang="en-US" dirty="0">
+              <a:solidFill>
+                <a:schemeClr val="accent1"/>
+              </a:solidFill>
+            </a:endParaRPr>
+          </a:p>
+          <a:p>
+            <a:pPr marL="0" indent="0">
+              <a:buNone/>
+            </a:pPr>
+            <a:r>
+              <a:rPr lang="en-US" dirty="0">
+                <a:solidFill>
+                  <a:schemeClr val="accent1"/>
+                </a:solidFill>
+              </a:rPr>
+              <a:t>More by Hajo Boomgaarden on Thursday!</a:t>
+            </a:r>
+          </a:p>
+          <a:p>
+            <a:pPr marL="0" indent="0">
+              <a:buNone/>
+            </a:pPr>
+            <a:endParaRPr lang="en-US" dirty="0">
+              <a:solidFill>
+                <a:schemeClr val="accent1"/>
+              </a:solidFill>
+            </a:endParaRPr>
+          </a:p>
         </p:txBody>
       </p:sp>
     </p:spTree>
     <p:extLst>
       <p:ext uri="{BB962C8B-B14F-4D97-AF65-F5344CB8AC3E}">
-        <p14:creationId xmlns:p14="http://schemas.microsoft.com/office/powerpoint/2010/main" val="2873449122"/>
+        <p14:creationId xmlns:p14="http://schemas.microsoft.com/office/powerpoint/2010/main" val="3853719236"/>
       </p:ext>
     </p:extLst>
   </p:cSld>
@@ -11703,184 +11620,6 @@
 </file>
 
 <file path=ppt/slides/slide26.xml><?xml version="1.0" encoding="utf-8"?>
-<p:sld xmlns:a="http://schemas.openxmlformats.org/drawingml/2006/main" xmlns:r="http://schemas.openxmlformats.org/officeDocument/2006/relationships" xmlns:p="http://schemas.openxmlformats.org/presentationml/2006/main">
-  <p:cSld>
-    <p:spTree>
-      <p:nvGrpSpPr>
-        <p:cNvPr id="1" name="">
-          <a:extLst>
-            <a:ext uri="{FF2B5EF4-FFF2-40B4-BE49-F238E27FC236}">
-              <a16:creationId xmlns:a16="http://schemas.microsoft.com/office/drawing/2014/main" id="{60F6E430-0432-FDE4-87F3-7B62A771DA13}"/>
-            </a:ext>
-          </a:extLst>
-        </p:cNvPr>
-        <p:cNvGrpSpPr/>
-        <p:nvPr/>
-      </p:nvGrpSpPr>
-      <p:grpSpPr>
-        <a:xfrm>
-          <a:off x="0" y="0"/>
-          <a:ext cx="0" cy="0"/>
-          <a:chOff x="0" y="0"/>
-          <a:chExt cx="0" cy="0"/>
-        </a:xfrm>
-      </p:grpSpPr>
-      <p:sp>
-        <p:nvSpPr>
-          <p:cNvPr id="2" name="Title 1">
-            <a:extLst>
-              <a:ext uri="{FF2B5EF4-FFF2-40B4-BE49-F238E27FC236}">
-                <a16:creationId xmlns:a16="http://schemas.microsoft.com/office/drawing/2014/main" id="{FC4AD9EF-656B-7E58-071C-549FE5E41462}"/>
-              </a:ext>
-            </a:extLst>
-          </p:cNvPr>
-          <p:cNvSpPr>
-            <a:spLocks noGrp="1"/>
-          </p:cNvSpPr>
-          <p:nvPr>
-            <p:ph type="title"/>
-          </p:nvPr>
-        </p:nvSpPr>
-        <p:spPr/>
-        <p:txBody>
-          <a:bodyPr/>
-          <a:lstStyle/>
-          <a:p>
-            <a:r>
-              <a:rPr lang="en-US" dirty="0">
-                <a:solidFill>
-                  <a:schemeClr val="accent1"/>
-                </a:solidFill>
-              </a:rPr>
-              <a:t>DSA-Based Researcher Access</a:t>
-            </a:r>
-          </a:p>
-        </p:txBody>
-      </p:sp>
-      <p:sp>
-        <p:nvSpPr>
-          <p:cNvPr id="3" name="Content Placeholder 2">
-            <a:extLst>
-              <a:ext uri="{FF2B5EF4-FFF2-40B4-BE49-F238E27FC236}">
-                <a16:creationId xmlns:a16="http://schemas.microsoft.com/office/drawing/2014/main" id="{F62CA5D3-F3FA-A7F4-2821-3E3B8BFC2E36}"/>
-              </a:ext>
-            </a:extLst>
-          </p:cNvPr>
-          <p:cNvSpPr>
-            <a:spLocks noGrp="1"/>
-          </p:cNvSpPr>
-          <p:nvPr>
-            <p:ph idx="1"/>
-          </p:nvPr>
-        </p:nvSpPr>
-        <p:spPr>
-          <a:xfrm>
-            <a:off x="838200" y="1720525"/>
-            <a:ext cx="10515600" cy="4351338"/>
-          </a:xfrm>
-        </p:spPr>
-        <p:txBody>
-          <a:bodyPr/>
-          <a:lstStyle/>
-          <a:p>
-            <a:pPr marL="0" indent="0">
-              <a:buNone/>
-            </a:pPr>
-            <a:r>
-              <a:rPr lang="en-US" dirty="0">
-                <a:solidFill>
-                  <a:schemeClr val="accent1"/>
-                </a:solidFill>
-              </a:rPr>
-              <a:t>Important because:</a:t>
-            </a:r>
-          </a:p>
-          <a:p>
-            <a:r>
-              <a:rPr lang="en-US" sz="2400" dirty="0">
-                <a:solidFill>
-                  <a:schemeClr val="accent1"/>
-                </a:solidFill>
-              </a:rPr>
-              <a:t>access is formalized</a:t>
-            </a:r>
-          </a:p>
-          <a:p>
-            <a:r>
-              <a:rPr lang="en-US" sz="2400" dirty="0">
-                <a:solidFill>
-                  <a:schemeClr val="accent1"/>
-                </a:solidFill>
-              </a:rPr>
-              <a:t>requests must be justified</a:t>
-            </a:r>
-          </a:p>
-          <a:p>
-            <a:r>
-              <a:rPr lang="en-US" sz="2400" dirty="0">
-                <a:solidFill>
-                  <a:schemeClr val="accent1"/>
-                </a:solidFill>
-              </a:rPr>
-              <a:t>proportionality and data protection matter</a:t>
-            </a:r>
-          </a:p>
-          <a:p>
-            <a:r>
-              <a:rPr lang="en-US" sz="2400" dirty="0">
-                <a:solidFill>
-                  <a:schemeClr val="accent1"/>
-                </a:solidFill>
-              </a:rPr>
-              <a:t>timelines and governance shape research design</a:t>
-            </a:r>
-          </a:p>
-          <a:p>
-            <a:endParaRPr lang="en-US" sz="2400" dirty="0">
-              <a:solidFill>
-                <a:schemeClr val="accent1"/>
-              </a:solidFill>
-            </a:endParaRPr>
-          </a:p>
-          <a:p>
-            <a:pPr marL="0" indent="0">
-              <a:buNone/>
-            </a:pPr>
-            <a:r>
-              <a:rPr lang="en-US" sz="2400" dirty="0">
-                <a:solidFill>
-                  <a:schemeClr val="accent1"/>
-                </a:solidFill>
-              </a:rPr>
-              <a:t>More by Hajo Boomgaarden on Thursday!</a:t>
-            </a:r>
-          </a:p>
-          <a:p>
-            <a:pPr marL="0" indent="0">
-              <a:buNone/>
-            </a:pPr>
-            <a:endParaRPr lang="en-US" dirty="0">
-              <a:solidFill>
-                <a:schemeClr val="accent1"/>
-              </a:solidFill>
-            </a:endParaRPr>
-          </a:p>
-        </p:txBody>
-      </p:sp>
-    </p:spTree>
-    <p:extLst>
-      <p:ext uri="{BB962C8B-B14F-4D97-AF65-F5344CB8AC3E}">
-        <p14:creationId xmlns:p14="http://schemas.microsoft.com/office/powerpoint/2010/main" val="3325197118"/>
-      </p:ext>
-    </p:extLst>
-  </p:cSld>
-  <p:clrMapOvr>
-    <a:masterClrMapping/>
-  </p:clrMapOvr>
-</p:sld>
-</file>
-
-<file path=ppt/slides/slide27.xml><?xml version="1.0" encoding="utf-8"?>
 <p:sld xmlns:a="http://schemas.openxmlformats.org/drawingml/2006/main" xmlns:r="http://schemas.openxmlformats.org/officeDocument/2006/relationships" xmlns:p="http://schemas.openxmlformats.org/presentationml/2006/main">
   <p:cSld>
     <p:spTree>
@@ -12015,7 +11754,7 @@
 </p:sld>
 </file>
 
-<file path=ppt/slides/slide28.xml><?xml version="1.0" encoding="utf-8"?>
+<file path=ppt/slides/slide27.xml><?xml version="1.0" encoding="utf-8"?>
 <p:sld xmlns:a="http://schemas.openxmlformats.org/drawingml/2006/main" xmlns:r="http://schemas.openxmlformats.org/officeDocument/2006/relationships" xmlns:p="http://schemas.openxmlformats.org/presentationml/2006/main">
   <p:cSld>
     <p:spTree>
@@ -12142,7 +11881,7 @@
 </p:sld>
 </file>
 
-<file path=ppt/slides/slide29.xml><?xml version="1.0" encoding="utf-8"?>
+<file path=ppt/slides/slide28.xml><?xml version="1.0" encoding="utf-8"?>
 <p:sld xmlns:a="http://schemas.openxmlformats.org/drawingml/2006/main" xmlns:r="http://schemas.openxmlformats.org/officeDocument/2006/relationships" xmlns:p="http://schemas.openxmlformats.org/presentationml/2006/main">
   <p:cSld>
     <p:spTree>
@@ -12280,285 +12019,7 @@
 </p:sld>
 </file>
 
-<file path=ppt/slides/slide3.xml><?xml version="1.0" encoding="utf-8"?>
-<p:sld xmlns:a="http://schemas.openxmlformats.org/drawingml/2006/main" xmlns:r="http://schemas.openxmlformats.org/officeDocument/2006/relationships" xmlns:p="http://schemas.openxmlformats.org/presentationml/2006/main">
-  <p:cSld>
-    <p:spTree>
-      <p:nvGrpSpPr>
-        <p:cNvPr id="1" name="">
-          <a:extLst>
-            <a:ext uri="{FF2B5EF4-FFF2-40B4-BE49-F238E27FC236}">
-              <a16:creationId xmlns:a16="http://schemas.microsoft.com/office/drawing/2014/main" id="{8938B18D-2295-1BCD-EFEB-056633601900}"/>
-            </a:ext>
-          </a:extLst>
-        </p:cNvPr>
-        <p:cNvGrpSpPr/>
-        <p:nvPr/>
-      </p:nvGrpSpPr>
-      <p:grpSpPr>
-        <a:xfrm>
-          <a:off x="0" y="0"/>
-          <a:ext cx="0" cy="0"/>
-          <a:chOff x="0" y="0"/>
-          <a:chExt cx="0" cy="0"/>
-        </a:xfrm>
-      </p:grpSpPr>
-      <p:sp>
-        <p:nvSpPr>
-          <p:cNvPr id="2" name="Title 1">
-            <a:extLst>
-              <a:ext uri="{FF2B5EF4-FFF2-40B4-BE49-F238E27FC236}">
-                <a16:creationId xmlns:a16="http://schemas.microsoft.com/office/drawing/2014/main" id="{43BDE2AF-BD61-1F43-B7FF-3DEE4FB03D4E}"/>
-              </a:ext>
-            </a:extLst>
-          </p:cNvPr>
-          <p:cNvSpPr>
-            <a:spLocks noGrp="1"/>
-          </p:cNvSpPr>
-          <p:nvPr>
-            <p:ph type="title"/>
-          </p:nvPr>
-        </p:nvSpPr>
-        <p:spPr/>
-        <p:txBody>
-          <a:bodyPr/>
-          <a:lstStyle/>
-          <a:p>
-            <a:r>
-              <a:rPr lang="en-US" dirty="0">
-                <a:solidFill>
-                  <a:schemeClr val="accent1"/>
-                </a:solidFill>
-              </a:rPr>
-              <a:t>Collecting Platform Data: Course Overview</a:t>
-            </a:r>
-          </a:p>
-        </p:txBody>
-      </p:sp>
-      <p:sp>
-        <p:nvSpPr>
-          <p:cNvPr id="3" name="Content Placeholder 2">
-            <a:extLst>
-              <a:ext uri="{FF2B5EF4-FFF2-40B4-BE49-F238E27FC236}">
-                <a16:creationId xmlns:a16="http://schemas.microsoft.com/office/drawing/2014/main" id="{3B9E53FB-AB37-ADE7-64F1-0F539F6F0EC9}"/>
-              </a:ext>
-            </a:extLst>
-          </p:cNvPr>
-          <p:cNvSpPr>
-            <a:spLocks noGrp="1"/>
-          </p:cNvSpPr>
-          <p:nvPr>
-            <p:ph idx="1"/>
-          </p:nvPr>
-        </p:nvSpPr>
-        <p:spPr>
-          <a:xfrm>
-            <a:off x="1102474" y="1839349"/>
-            <a:ext cx="9951349" cy="2390229"/>
-          </a:xfrm>
-        </p:spPr>
-        <p:txBody>
-          <a:bodyPr>
-            <a:noAutofit/>
-          </a:bodyPr>
-          <a:lstStyle/>
-          <a:p>
-            <a:pPr marL="0" indent="0">
-              <a:buNone/>
-            </a:pPr>
-            <a:r>
-              <a:rPr lang="en-US" sz="3200" dirty="0">
-                <a:solidFill>
-                  <a:schemeClr val="accent1"/>
-                </a:solidFill>
-              </a:rPr>
-              <a:t>Goal</a:t>
-            </a:r>
-          </a:p>
-          <a:p>
-            <a:pPr marL="0" indent="0">
-              <a:buNone/>
-            </a:pPr>
-            <a:r>
-              <a:rPr lang="en-US" sz="2500" dirty="0">
-                <a:solidFill>
-                  <a:schemeClr val="accent1"/>
-                </a:solidFill>
-              </a:rPr>
-              <a:t>Learn how to </a:t>
-            </a:r>
-            <a:r>
-              <a:rPr lang="en-US" sz="2500" b="1" dirty="0">
-                <a:solidFill>
-                  <a:schemeClr val="accent1"/>
-                </a:solidFill>
-              </a:rPr>
-              <a:t>collect</a:t>
-            </a:r>
-            <a:r>
-              <a:rPr lang="en-US" sz="2500" dirty="0">
-                <a:solidFill>
-                  <a:schemeClr val="accent1"/>
-                </a:solidFill>
-              </a:rPr>
-              <a:t>, </a:t>
-            </a:r>
-            <a:r>
-              <a:rPr lang="en-US" sz="2500" b="1" dirty="0">
-                <a:solidFill>
-                  <a:schemeClr val="accent1"/>
-                </a:solidFill>
-              </a:rPr>
-              <a:t>document</a:t>
-            </a:r>
-            <a:r>
-              <a:rPr lang="en-US" sz="2500" dirty="0">
-                <a:solidFill>
-                  <a:schemeClr val="accent1"/>
-                </a:solidFill>
-              </a:rPr>
-              <a:t>, and </a:t>
-            </a:r>
-            <a:r>
-              <a:rPr lang="en-US" sz="2500" b="1" dirty="0">
-                <a:solidFill>
-                  <a:schemeClr val="accent1"/>
-                </a:solidFill>
-              </a:rPr>
-              <a:t>critically</a:t>
-            </a:r>
-            <a:r>
-              <a:rPr lang="en-US" sz="2500" dirty="0">
-                <a:solidFill>
-                  <a:schemeClr val="accent1"/>
-                </a:solidFill>
-              </a:rPr>
-              <a:t> </a:t>
-            </a:r>
-            <a:r>
-              <a:rPr lang="en-US" sz="2500" b="1" dirty="0">
-                <a:solidFill>
-                  <a:schemeClr val="accent1"/>
-                </a:solidFill>
-              </a:rPr>
-              <a:t>assess</a:t>
-            </a:r>
-            <a:r>
-              <a:rPr lang="en-US" sz="2500" dirty="0">
-                <a:solidFill>
-                  <a:schemeClr val="accent1"/>
-                </a:solidFill>
-              </a:rPr>
-              <a:t> data from online platforms.</a:t>
-            </a:r>
-          </a:p>
-          <a:p>
-            <a:pPr marL="0" indent="0">
-              <a:buNone/>
-            </a:pPr>
-            <a:endParaRPr lang="en-US" sz="3200" dirty="0">
-              <a:solidFill>
-                <a:schemeClr val="accent1"/>
-              </a:solidFill>
-            </a:endParaRPr>
-          </a:p>
-          <a:p>
-            <a:pPr marL="0" indent="0">
-              <a:buNone/>
-            </a:pPr>
-            <a:r>
-              <a:rPr lang="en-US" sz="2500" dirty="0">
-                <a:solidFill>
-                  <a:schemeClr val="accent1"/>
-                </a:solidFill>
-              </a:rPr>
-              <a:t>By the end of the week, participants can </a:t>
-            </a:r>
-            <a:r>
-              <a:rPr lang="en-US" sz="2500" b="1" dirty="0">
-                <a:solidFill>
-                  <a:schemeClr val="accent1"/>
-                </a:solidFill>
-              </a:rPr>
-              <a:t>design</a:t>
-            </a:r>
-            <a:r>
-              <a:rPr lang="en-US" sz="2500" dirty="0">
-                <a:solidFill>
-                  <a:schemeClr val="accent1"/>
-                </a:solidFill>
-              </a:rPr>
-              <a:t> and </a:t>
-            </a:r>
-            <a:r>
-              <a:rPr lang="en-US" sz="2500" b="1" dirty="0">
-                <a:solidFill>
-                  <a:schemeClr val="accent1"/>
-                </a:solidFill>
-              </a:rPr>
-              <a:t>critique</a:t>
-            </a:r>
-            <a:r>
-              <a:rPr lang="en-US" sz="2500" dirty="0">
-                <a:solidFill>
-                  <a:schemeClr val="accent1"/>
-                </a:solidFill>
-              </a:rPr>
-              <a:t> a </a:t>
-            </a:r>
-            <a:r>
-              <a:rPr lang="en-US" sz="2500" b="1" dirty="0">
-                <a:solidFill>
-                  <a:schemeClr val="accent1"/>
-                </a:solidFill>
-              </a:rPr>
-              <a:t>reproducible platform data collection </a:t>
-            </a:r>
-            <a:r>
-              <a:rPr lang="en-US" sz="2500" dirty="0">
-                <a:solidFill>
-                  <a:schemeClr val="accent1"/>
-                </a:solidFill>
-              </a:rPr>
-              <a:t>workflow.</a:t>
-            </a:r>
-          </a:p>
-          <a:p>
-            <a:pPr marL="0" indent="0">
-              <a:buNone/>
-            </a:pPr>
-            <a:endParaRPr lang="en-US" sz="2500" dirty="0">
-              <a:solidFill>
-                <a:schemeClr val="accent1"/>
-              </a:solidFill>
-            </a:endParaRPr>
-          </a:p>
-          <a:p>
-            <a:pPr marL="0" indent="0">
-              <a:buNone/>
-            </a:pPr>
-            <a:endParaRPr lang="en-US" sz="3200" dirty="0">
-              <a:solidFill>
-                <a:schemeClr val="accent1"/>
-              </a:solidFill>
-            </a:endParaRPr>
-          </a:p>
-        </p:txBody>
-      </p:sp>
-    </p:spTree>
-    <p:extLst>
-      <p:ext uri="{BB962C8B-B14F-4D97-AF65-F5344CB8AC3E}">
-        <p14:creationId xmlns:p14="http://schemas.microsoft.com/office/powerpoint/2010/main" val="1493801983"/>
-      </p:ext>
-    </p:extLst>
-  </p:cSld>
-  <p:clrMapOvr>
-    <a:masterClrMapping/>
-  </p:clrMapOvr>
-</p:sld>
-</file>
-
-<file path=ppt/slides/slide30.xml><?xml version="1.0" encoding="utf-8"?>
+<file path=ppt/slides/slide29.xml><?xml version="1.0" encoding="utf-8"?>
 <p:sld xmlns:a="http://schemas.openxmlformats.org/drawingml/2006/main" xmlns:r="http://schemas.openxmlformats.org/officeDocument/2006/relationships" xmlns:p="http://schemas.openxmlformats.org/presentationml/2006/main">
   <p:cSld>
     <p:spTree>
@@ -12696,7 +12157,285 @@
 </p:sld>
 </file>
 
-<file path=ppt/slides/slide31.xml><?xml version="1.0" encoding="utf-8"?>
+<file path=ppt/slides/slide3.xml><?xml version="1.0" encoding="utf-8"?>
+<p:sld xmlns:a="http://schemas.openxmlformats.org/drawingml/2006/main" xmlns:r="http://schemas.openxmlformats.org/officeDocument/2006/relationships" xmlns:p="http://schemas.openxmlformats.org/presentationml/2006/main">
+  <p:cSld>
+    <p:spTree>
+      <p:nvGrpSpPr>
+        <p:cNvPr id="1" name="">
+          <a:extLst>
+            <a:ext uri="{FF2B5EF4-FFF2-40B4-BE49-F238E27FC236}">
+              <a16:creationId xmlns:a16="http://schemas.microsoft.com/office/drawing/2014/main" id="{8938B18D-2295-1BCD-EFEB-056633601900}"/>
+            </a:ext>
+          </a:extLst>
+        </p:cNvPr>
+        <p:cNvGrpSpPr/>
+        <p:nvPr/>
+      </p:nvGrpSpPr>
+      <p:grpSpPr>
+        <a:xfrm>
+          <a:off x="0" y="0"/>
+          <a:ext cx="0" cy="0"/>
+          <a:chOff x="0" y="0"/>
+          <a:chExt cx="0" cy="0"/>
+        </a:xfrm>
+      </p:grpSpPr>
+      <p:sp>
+        <p:nvSpPr>
+          <p:cNvPr id="2" name="Title 1">
+            <a:extLst>
+              <a:ext uri="{FF2B5EF4-FFF2-40B4-BE49-F238E27FC236}">
+                <a16:creationId xmlns:a16="http://schemas.microsoft.com/office/drawing/2014/main" id="{43BDE2AF-BD61-1F43-B7FF-3DEE4FB03D4E}"/>
+              </a:ext>
+            </a:extLst>
+          </p:cNvPr>
+          <p:cNvSpPr>
+            <a:spLocks noGrp="1"/>
+          </p:cNvSpPr>
+          <p:nvPr>
+            <p:ph type="title"/>
+          </p:nvPr>
+        </p:nvSpPr>
+        <p:spPr/>
+        <p:txBody>
+          <a:bodyPr/>
+          <a:lstStyle/>
+          <a:p>
+            <a:r>
+              <a:rPr lang="en-US" dirty="0">
+                <a:solidFill>
+                  <a:schemeClr val="accent1"/>
+                </a:solidFill>
+              </a:rPr>
+              <a:t>Collecting Platform Data: Course Overview</a:t>
+            </a:r>
+          </a:p>
+        </p:txBody>
+      </p:sp>
+      <p:sp>
+        <p:nvSpPr>
+          <p:cNvPr id="3" name="Content Placeholder 2">
+            <a:extLst>
+              <a:ext uri="{FF2B5EF4-FFF2-40B4-BE49-F238E27FC236}">
+                <a16:creationId xmlns:a16="http://schemas.microsoft.com/office/drawing/2014/main" id="{3B9E53FB-AB37-ADE7-64F1-0F539F6F0EC9}"/>
+              </a:ext>
+            </a:extLst>
+          </p:cNvPr>
+          <p:cNvSpPr>
+            <a:spLocks noGrp="1"/>
+          </p:cNvSpPr>
+          <p:nvPr>
+            <p:ph idx="1"/>
+          </p:nvPr>
+        </p:nvSpPr>
+        <p:spPr>
+          <a:xfrm>
+            <a:off x="1102474" y="1839349"/>
+            <a:ext cx="9951349" cy="2390229"/>
+          </a:xfrm>
+        </p:spPr>
+        <p:txBody>
+          <a:bodyPr>
+            <a:noAutofit/>
+          </a:bodyPr>
+          <a:lstStyle/>
+          <a:p>
+            <a:pPr marL="0" indent="0">
+              <a:buNone/>
+            </a:pPr>
+            <a:r>
+              <a:rPr lang="en-US" sz="3200" dirty="0">
+                <a:solidFill>
+                  <a:schemeClr val="accent1"/>
+                </a:solidFill>
+              </a:rPr>
+              <a:t>Goal</a:t>
+            </a:r>
+          </a:p>
+          <a:p>
+            <a:pPr marL="0" indent="0">
+              <a:buNone/>
+            </a:pPr>
+            <a:r>
+              <a:rPr lang="en-US" sz="2500" dirty="0">
+                <a:solidFill>
+                  <a:schemeClr val="accent1"/>
+                </a:solidFill>
+              </a:rPr>
+              <a:t>Learn how to </a:t>
+            </a:r>
+            <a:r>
+              <a:rPr lang="en-US" sz="2500" b="1" dirty="0">
+                <a:solidFill>
+                  <a:schemeClr val="accent1"/>
+                </a:solidFill>
+              </a:rPr>
+              <a:t>collect</a:t>
+            </a:r>
+            <a:r>
+              <a:rPr lang="en-US" sz="2500" dirty="0">
+                <a:solidFill>
+                  <a:schemeClr val="accent1"/>
+                </a:solidFill>
+              </a:rPr>
+              <a:t>, </a:t>
+            </a:r>
+            <a:r>
+              <a:rPr lang="en-US" sz="2500" b="1" dirty="0">
+                <a:solidFill>
+                  <a:schemeClr val="accent1"/>
+                </a:solidFill>
+              </a:rPr>
+              <a:t>document</a:t>
+            </a:r>
+            <a:r>
+              <a:rPr lang="en-US" sz="2500" dirty="0">
+                <a:solidFill>
+                  <a:schemeClr val="accent1"/>
+                </a:solidFill>
+              </a:rPr>
+              <a:t>, and </a:t>
+            </a:r>
+            <a:r>
+              <a:rPr lang="en-US" sz="2500" b="1" dirty="0">
+                <a:solidFill>
+                  <a:schemeClr val="accent1"/>
+                </a:solidFill>
+              </a:rPr>
+              <a:t>critically</a:t>
+            </a:r>
+            <a:r>
+              <a:rPr lang="en-US" sz="2500" dirty="0">
+                <a:solidFill>
+                  <a:schemeClr val="accent1"/>
+                </a:solidFill>
+              </a:rPr>
+              <a:t> </a:t>
+            </a:r>
+            <a:r>
+              <a:rPr lang="en-US" sz="2500" b="1" dirty="0">
+                <a:solidFill>
+                  <a:schemeClr val="accent1"/>
+                </a:solidFill>
+              </a:rPr>
+              <a:t>assess</a:t>
+            </a:r>
+            <a:r>
+              <a:rPr lang="en-US" sz="2500" dirty="0">
+                <a:solidFill>
+                  <a:schemeClr val="accent1"/>
+                </a:solidFill>
+              </a:rPr>
+              <a:t> data from online platforms.</a:t>
+            </a:r>
+          </a:p>
+          <a:p>
+            <a:pPr marL="0" indent="0">
+              <a:buNone/>
+            </a:pPr>
+            <a:endParaRPr lang="en-US" sz="3200" dirty="0">
+              <a:solidFill>
+                <a:schemeClr val="accent1"/>
+              </a:solidFill>
+            </a:endParaRPr>
+          </a:p>
+          <a:p>
+            <a:pPr marL="0" indent="0">
+              <a:buNone/>
+            </a:pPr>
+            <a:r>
+              <a:rPr lang="en-US" sz="2500" dirty="0">
+                <a:solidFill>
+                  <a:schemeClr val="accent1"/>
+                </a:solidFill>
+              </a:rPr>
+              <a:t>By the end of the week, participants can </a:t>
+            </a:r>
+            <a:r>
+              <a:rPr lang="en-US" sz="2500" b="1" dirty="0">
+                <a:solidFill>
+                  <a:schemeClr val="accent1"/>
+                </a:solidFill>
+              </a:rPr>
+              <a:t>design</a:t>
+            </a:r>
+            <a:r>
+              <a:rPr lang="en-US" sz="2500" dirty="0">
+                <a:solidFill>
+                  <a:schemeClr val="accent1"/>
+                </a:solidFill>
+              </a:rPr>
+              <a:t> and </a:t>
+            </a:r>
+            <a:r>
+              <a:rPr lang="en-US" sz="2500" b="1" dirty="0">
+                <a:solidFill>
+                  <a:schemeClr val="accent1"/>
+                </a:solidFill>
+              </a:rPr>
+              <a:t>critique</a:t>
+            </a:r>
+            <a:r>
+              <a:rPr lang="en-US" sz="2500" dirty="0">
+                <a:solidFill>
+                  <a:schemeClr val="accent1"/>
+                </a:solidFill>
+              </a:rPr>
+              <a:t> a </a:t>
+            </a:r>
+            <a:r>
+              <a:rPr lang="en-US" sz="2500" b="1" dirty="0">
+                <a:solidFill>
+                  <a:schemeClr val="accent1"/>
+                </a:solidFill>
+              </a:rPr>
+              <a:t>reproducible platform data collection </a:t>
+            </a:r>
+            <a:r>
+              <a:rPr lang="en-US" sz="2500" dirty="0">
+                <a:solidFill>
+                  <a:schemeClr val="accent1"/>
+                </a:solidFill>
+              </a:rPr>
+              <a:t>workflow.</a:t>
+            </a:r>
+          </a:p>
+          <a:p>
+            <a:pPr marL="0" indent="0">
+              <a:buNone/>
+            </a:pPr>
+            <a:endParaRPr lang="en-US" sz="2500" dirty="0">
+              <a:solidFill>
+                <a:schemeClr val="accent1"/>
+              </a:solidFill>
+            </a:endParaRPr>
+          </a:p>
+          <a:p>
+            <a:pPr marL="0" indent="0">
+              <a:buNone/>
+            </a:pPr>
+            <a:endParaRPr lang="en-US" sz="3200" dirty="0">
+              <a:solidFill>
+                <a:schemeClr val="accent1"/>
+              </a:solidFill>
+            </a:endParaRPr>
+          </a:p>
+        </p:txBody>
+      </p:sp>
+    </p:spTree>
+    <p:extLst>
+      <p:ext uri="{BB962C8B-B14F-4D97-AF65-F5344CB8AC3E}">
+        <p14:creationId xmlns:p14="http://schemas.microsoft.com/office/powerpoint/2010/main" val="1493801983"/>
+      </p:ext>
+    </p:extLst>
+  </p:cSld>
+  <p:clrMapOvr>
+    <a:masterClrMapping/>
+  </p:clrMapOvr>
+</p:sld>
+</file>
+
+<file path=ppt/slides/slide30.xml><?xml version="1.0" encoding="utf-8"?>
 <p:sld xmlns:a="http://schemas.openxmlformats.org/drawingml/2006/main" xmlns:r="http://schemas.openxmlformats.org/officeDocument/2006/relationships" xmlns:p="http://schemas.openxmlformats.org/presentationml/2006/main">
   <p:cSld>
     <p:spTree>
@@ -12906,7 +12645,7 @@
 </p:sld>
 </file>
 
-<file path=ppt/slides/slide32.xml><?xml version="1.0" encoding="utf-8"?>
+<file path=ppt/slides/slide31.xml><?xml version="1.0" encoding="utf-8"?>
 <p:sld xmlns:a="http://schemas.openxmlformats.org/drawingml/2006/main" xmlns:r="http://schemas.openxmlformats.org/officeDocument/2006/relationships" xmlns:p="http://schemas.openxmlformats.org/presentationml/2006/main">
   <p:cSld>
     <p:spTree>
@@ -13114,7 +12853,7 @@
 </p:sld>
 </file>
 
-<file path=ppt/slides/slide33.xml><?xml version="1.0" encoding="utf-8"?>
+<file path=ppt/slides/slide32.xml><?xml version="1.0" encoding="utf-8"?>
 <p:sld xmlns:a="http://schemas.openxmlformats.org/drawingml/2006/main" xmlns:r="http://schemas.openxmlformats.org/officeDocument/2006/relationships" xmlns:p="http://schemas.openxmlformats.org/presentationml/2006/main">
   <p:cSld>
     <p:spTree>

--- a/slides/day1_intro.pptx
+++ b/slides/day1_intro.pptx
@@ -7590,11 +7590,8 @@
                 <a:solidFill>
                   <a:srgbClr val="005174"/>
                 </a:solidFill>
-                <a:highlight>
-                  <a:srgbClr val="FFFF00"/>
-                </a:highlight>
-              </a:rPr>
-              <a:t>WHERE?</a:t>
+              </a:rPr>
+              <a:t>A201</a:t>
             </a:r>
           </a:p>
           <a:p>

--- a/slides/day1_intro.pptx
+++ b/slides/day1_intro.pptx
@@ -5,7 +5,7 @@
     <p:sldMasterId id="2147483648" r:id="rId1"/>
   </p:sldMasterIdLst>
   <p:notesMasterIdLst>
-    <p:notesMasterId r:id="rId34"/>
+    <p:notesMasterId r:id="rId30"/>
   </p:notesMasterIdLst>
   <p:sldIdLst>
     <p:sldId id="256" r:id="rId2"/>
@@ -28,18 +28,14 @@
     <p:sldId id="298" r:id="rId19"/>
     <p:sldId id="295" r:id="rId20"/>
     <p:sldId id="324" r:id="rId21"/>
-    <p:sldId id="323" r:id="rId22"/>
-    <p:sldId id="299" r:id="rId23"/>
-    <p:sldId id="300" r:id="rId24"/>
-    <p:sldId id="301" r:id="rId25"/>
-    <p:sldId id="327" r:id="rId26"/>
-    <p:sldId id="303" r:id="rId27"/>
-    <p:sldId id="318" r:id="rId28"/>
-    <p:sldId id="278" r:id="rId29"/>
-    <p:sldId id="279" r:id="rId30"/>
-    <p:sldId id="262" r:id="rId31"/>
-    <p:sldId id="281" r:id="rId32"/>
-    <p:sldId id="326" r:id="rId33"/>
+    <p:sldId id="299" r:id="rId22"/>
+    <p:sldId id="300" r:id="rId23"/>
+    <p:sldId id="301" r:id="rId24"/>
+    <p:sldId id="303" r:id="rId25"/>
+    <p:sldId id="318" r:id="rId26"/>
+    <p:sldId id="278" r:id="rId27"/>
+    <p:sldId id="262" r:id="rId28"/>
+    <p:sldId id="281" r:id="rId29"/>
   </p:sldIdLst>
   <p:sldSz cx="12192000" cy="6858000"/>
   <p:notesSz cx="6858000" cy="9144000"/>
@@ -1929,145 +1925,6 @@
         <p:cNvPr id="1" name="">
           <a:extLst>
             <a:ext uri="{FF2B5EF4-FFF2-40B4-BE49-F238E27FC236}">
-              <a16:creationId xmlns:a16="http://schemas.microsoft.com/office/drawing/2014/main" id="{F940C512-90DF-13F9-F943-EA3F3FA6C635}"/>
-            </a:ext>
-          </a:extLst>
-        </p:cNvPr>
-        <p:cNvGrpSpPr/>
-        <p:nvPr/>
-      </p:nvGrpSpPr>
-      <p:grpSpPr>
-        <a:xfrm>
-          <a:off x="0" y="0"/>
-          <a:ext cx="0" cy="0"/>
-          <a:chOff x="0" y="0"/>
-          <a:chExt cx="0" cy="0"/>
-        </a:xfrm>
-      </p:grpSpPr>
-      <p:sp>
-        <p:nvSpPr>
-          <p:cNvPr id="2" name="Slide Image Placeholder 1">
-            <a:extLst>
-              <a:ext uri="{FF2B5EF4-FFF2-40B4-BE49-F238E27FC236}">
-                <a16:creationId xmlns:a16="http://schemas.microsoft.com/office/drawing/2014/main" id="{7789E67D-2EB4-2A19-3AD0-6DF8112EB2EA}"/>
-              </a:ext>
-            </a:extLst>
-          </p:cNvPr>
-          <p:cNvSpPr>
-            <a:spLocks noGrp="1" noRot="1" noChangeAspect="1"/>
-          </p:cNvSpPr>
-          <p:nvPr>
-            <p:ph type="sldImg"/>
-          </p:nvPr>
-        </p:nvSpPr>
-        <p:spPr/>
-      </p:sp>
-      <p:sp>
-        <p:nvSpPr>
-          <p:cNvPr id="3" name="Notes Placeholder 2">
-            <a:extLst>
-              <a:ext uri="{FF2B5EF4-FFF2-40B4-BE49-F238E27FC236}">
-                <a16:creationId xmlns:a16="http://schemas.microsoft.com/office/drawing/2014/main" id="{7501559B-F25B-CC6F-D771-95A82D2766A5}"/>
-              </a:ext>
-            </a:extLst>
-          </p:cNvPr>
-          <p:cNvSpPr>
-            <a:spLocks noGrp="1"/>
-          </p:cNvSpPr>
-          <p:nvPr>
-            <p:ph type="body" idx="1"/>
-          </p:nvPr>
-        </p:nvSpPr>
-        <p:spPr/>
-        <p:txBody>
-          <a:bodyPr/>
-          <a:lstStyle/>
-          <a:p>
-            <a:pPr marL="0" marR="0" lvl="0" indent="0" algn="l" defTabSz="914400" rtl="0" eaLnBrk="1" fontAlgn="auto" latinLnBrk="0" hangingPunct="1">
-              <a:lnSpc>
-                <a:spcPct val="100000"/>
-              </a:lnSpc>
-              <a:spcBef>
-                <a:spcPts val="0"/>
-              </a:spcBef>
-              <a:spcAft>
-                <a:spcPts val="0"/>
-              </a:spcAft>
-              <a:buClrTx/>
-              <a:buSzTx/>
-              <a:buFontTx/>
-              <a:buNone/>
-              <a:tabLst/>
-              <a:defRPr/>
-            </a:pPr>
-            <a:r>
-              <a:rPr lang="en-US" dirty="0">
-                <a:solidFill>
-                  <a:schemeClr val="accent1"/>
-                </a:solidFill>
-              </a:rPr>
-              <a:t>DOM = </a:t>
-            </a:r>
-            <a:r>
-              <a:rPr lang="en-US" dirty="0"/>
-              <a:t>browser’s internal tree representation of a webpage.</a:t>
-            </a:r>
-          </a:p>
-          <a:p>
-            <a:endParaRPr lang="en-US" dirty="0"/>
-          </a:p>
-        </p:txBody>
-      </p:sp>
-      <p:sp>
-        <p:nvSpPr>
-          <p:cNvPr id="4" name="Slide Number Placeholder 3">
-            <a:extLst>
-              <a:ext uri="{FF2B5EF4-FFF2-40B4-BE49-F238E27FC236}">
-                <a16:creationId xmlns:a16="http://schemas.microsoft.com/office/drawing/2014/main" id="{AE852092-4195-ACA7-6B6B-14C3FE874DF6}"/>
-              </a:ext>
-            </a:extLst>
-          </p:cNvPr>
-          <p:cNvSpPr>
-            <a:spLocks noGrp="1"/>
-          </p:cNvSpPr>
-          <p:nvPr>
-            <p:ph type="sldNum" sz="quarter" idx="5"/>
-          </p:nvPr>
-        </p:nvSpPr>
-        <p:spPr/>
-        <p:txBody>
-          <a:bodyPr/>
-          <a:lstStyle/>
-          <a:p>
-            <a:fld id="{FF78EFD2-C9A0-A146-8CE9-0A2B7CC7B867}" type="slidenum">
-              <a:rPr lang="en-US" smtClean="0"/>
-              <a:t>21</a:t>
-            </a:fld>
-            <a:endParaRPr lang="en-US"/>
-          </a:p>
-        </p:txBody>
-      </p:sp>
-    </p:spTree>
-    <p:extLst>
-      <p:ext uri="{BB962C8B-B14F-4D97-AF65-F5344CB8AC3E}">
-        <p14:creationId xmlns:p14="http://schemas.microsoft.com/office/powerpoint/2010/main" val="1239298422"/>
-      </p:ext>
-    </p:extLst>
-  </p:cSld>
-  <p:clrMapOvr>
-    <a:masterClrMapping/>
-  </p:clrMapOvr>
-</p:notes>
-</file>
-
-<file path=ppt/notesSlides/notesSlide22.xml><?xml version="1.0" encoding="utf-8"?>
-<p:notes xmlns:a="http://schemas.openxmlformats.org/drawingml/2006/main" xmlns:r="http://schemas.openxmlformats.org/officeDocument/2006/relationships" xmlns:p="http://schemas.openxmlformats.org/presentationml/2006/main">
-  <p:cSld>
-    <p:spTree>
-      <p:nvGrpSpPr>
-        <p:cNvPr id="1" name="">
-          <a:extLst>
-            <a:ext uri="{FF2B5EF4-FFF2-40B4-BE49-F238E27FC236}">
               <a16:creationId xmlns:a16="http://schemas.microsoft.com/office/drawing/2014/main" id="{83AA515B-4A2F-0A16-3F98-99D71AB7122D}"/>
             </a:ext>
           </a:extLst>
@@ -2149,7 +2006,7 @@
           <a:p>
             <a:fld id="{FF78EFD2-C9A0-A146-8CE9-0A2B7CC7B867}" type="slidenum">
               <a:rPr lang="en-US" smtClean="0"/>
-              <a:t>22</a:t>
+              <a:t>21</a:t>
             </a:fld>
             <a:endParaRPr lang="en-US"/>
           </a:p>
@@ -2168,7 +2025,7 @@
 </p:notes>
 </file>
 
-<file path=ppt/notesSlides/notesSlide23.xml><?xml version="1.0" encoding="utf-8"?>
+<file path=ppt/notesSlides/notesSlide22.xml><?xml version="1.0" encoding="utf-8"?>
 <p:notes xmlns:a="http://schemas.openxmlformats.org/drawingml/2006/main" xmlns:r="http://schemas.openxmlformats.org/officeDocument/2006/relationships" xmlns:p="http://schemas.openxmlformats.org/presentationml/2006/main">
   <p:cSld>
     <p:spTree>
@@ -2257,7 +2114,7 @@
           <a:p>
             <a:fld id="{FF78EFD2-C9A0-A146-8CE9-0A2B7CC7B867}" type="slidenum">
               <a:rPr lang="en-US" smtClean="0"/>
-              <a:t>23</a:t>
+              <a:t>22</a:t>
             </a:fld>
             <a:endParaRPr lang="en-US"/>
           </a:p>
@@ -2276,7 +2133,7 @@
 </p:notes>
 </file>
 
-<file path=ppt/notesSlides/notesSlide24.xml><?xml version="1.0" encoding="utf-8"?>
+<file path=ppt/notesSlides/notesSlide23.xml><?xml version="1.0" encoding="utf-8"?>
 <p:notes xmlns:a="http://schemas.openxmlformats.org/drawingml/2006/main" xmlns:r="http://schemas.openxmlformats.org/officeDocument/2006/relationships" xmlns:p="http://schemas.openxmlformats.org/presentationml/2006/main">
   <p:cSld>
     <p:spTree>
@@ -2365,7 +2222,7 @@
           <a:p>
             <a:fld id="{FF78EFD2-C9A0-A146-8CE9-0A2B7CC7B867}" type="slidenum">
               <a:rPr lang="en-US" smtClean="0"/>
-              <a:t>24</a:t>
+              <a:t>23</a:t>
             </a:fld>
             <a:endParaRPr lang="en-US"/>
           </a:p>
@@ -2384,115 +2241,7 @@
 </p:notes>
 </file>
 
-<file path=ppt/notesSlides/notesSlide25.xml><?xml version="1.0" encoding="utf-8"?>
-<p:notes xmlns:a="http://schemas.openxmlformats.org/drawingml/2006/main" xmlns:r="http://schemas.openxmlformats.org/officeDocument/2006/relationships" xmlns:p="http://schemas.openxmlformats.org/presentationml/2006/main">
-  <p:cSld>
-    <p:spTree>
-      <p:nvGrpSpPr>
-        <p:cNvPr id="1" name="">
-          <a:extLst>
-            <a:ext uri="{FF2B5EF4-FFF2-40B4-BE49-F238E27FC236}">
-              <a16:creationId xmlns:a16="http://schemas.microsoft.com/office/drawing/2014/main" id="{8D9CA44E-4185-3E50-856F-6F6D0123BA90}"/>
-            </a:ext>
-          </a:extLst>
-        </p:cNvPr>
-        <p:cNvGrpSpPr/>
-        <p:nvPr/>
-      </p:nvGrpSpPr>
-      <p:grpSpPr>
-        <a:xfrm>
-          <a:off x="0" y="0"/>
-          <a:ext cx="0" cy="0"/>
-          <a:chOff x="0" y="0"/>
-          <a:chExt cx="0" cy="0"/>
-        </a:xfrm>
-      </p:grpSpPr>
-      <p:sp>
-        <p:nvSpPr>
-          <p:cNvPr id="2" name="Slide Image Placeholder 1">
-            <a:extLst>
-              <a:ext uri="{FF2B5EF4-FFF2-40B4-BE49-F238E27FC236}">
-                <a16:creationId xmlns:a16="http://schemas.microsoft.com/office/drawing/2014/main" id="{EE732686-ECA5-351F-17DD-48ECF6A7C804}"/>
-              </a:ext>
-            </a:extLst>
-          </p:cNvPr>
-          <p:cNvSpPr>
-            <a:spLocks noGrp="1" noRot="1" noChangeAspect="1"/>
-          </p:cNvSpPr>
-          <p:nvPr>
-            <p:ph type="sldImg"/>
-          </p:nvPr>
-        </p:nvSpPr>
-        <p:spPr/>
-      </p:sp>
-      <p:sp>
-        <p:nvSpPr>
-          <p:cNvPr id="3" name="Notes Placeholder 2">
-            <a:extLst>
-              <a:ext uri="{FF2B5EF4-FFF2-40B4-BE49-F238E27FC236}">
-                <a16:creationId xmlns:a16="http://schemas.microsoft.com/office/drawing/2014/main" id="{27642A89-2895-9EB1-B77E-F996DD3017F2}"/>
-              </a:ext>
-            </a:extLst>
-          </p:cNvPr>
-          <p:cNvSpPr>
-            <a:spLocks noGrp="1"/>
-          </p:cNvSpPr>
-          <p:nvPr>
-            <p:ph type="body" idx="1"/>
-          </p:nvPr>
-        </p:nvSpPr>
-        <p:spPr/>
-        <p:txBody>
-          <a:bodyPr/>
-          <a:lstStyle/>
-          <a:p>
-            <a:endParaRPr lang="en-US" dirty="0"/>
-          </a:p>
-        </p:txBody>
-      </p:sp>
-      <p:sp>
-        <p:nvSpPr>
-          <p:cNvPr id="4" name="Slide Number Placeholder 3">
-            <a:extLst>
-              <a:ext uri="{FF2B5EF4-FFF2-40B4-BE49-F238E27FC236}">
-                <a16:creationId xmlns:a16="http://schemas.microsoft.com/office/drawing/2014/main" id="{38DB97B3-6B14-01C8-2D6C-40715B059FB2}"/>
-              </a:ext>
-            </a:extLst>
-          </p:cNvPr>
-          <p:cNvSpPr>
-            <a:spLocks noGrp="1"/>
-          </p:cNvSpPr>
-          <p:nvPr>
-            <p:ph type="sldNum" sz="quarter" idx="5"/>
-          </p:nvPr>
-        </p:nvSpPr>
-        <p:spPr/>
-        <p:txBody>
-          <a:bodyPr/>
-          <a:lstStyle/>
-          <a:p>
-            <a:fld id="{FF78EFD2-C9A0-A146-8CE9-0A2B7CC7B867}" type="slidenum">
-              <a:rPr lang="en-US" smtClean="0"/>
-              <a:t>25</a:t>
-            </a:fld>
-            <a:endParaRPr lang="en-US"/>
-          </a:p>
-        </p:txBody>
-      </p:sp>
-    </p:spTree>
-    <p:extLst>
-      <p:ext uri="{BB962C8B-B14F-4D97-AF65-F5344CB8AC3E}">
-        <p14:creationId xmlns:p14="http://schemas.microsoft.com/office/powerpoint/2010/main" val="3638055156"/>
-      </p:ext>
-    </p:extLst>
-  </p:cSld>
-  <p:clrMapOvr>
-    <a:masterClrMapping/>
-  </p:clrMapOvr>
-</p:notes>
-</file>
-
-<file path=ppt/notesSlides/notesSlide26.xml><?xml version="1.0" encoding="utf-8"?>
+<file path=ppt/notesSlides/notesSlide24.xml><?xml version="1.0" encoding="utf-8"?>
 <p:notes xmlns:a="http://schemas.openxmlformats.org/drawingml/2006/main" xmlns:r="http://schemas.openxmlformats.org/officeDocument/2006/relationships" xmlns:p="http://schemas.openxmlformats.org/presentationml/2006/main">
   <p:cSld>
     <p:spTree>
@@ -2581,7 +2330,7 @@
           <a:p>
             <a:fld id="{FF78EFD2-C9A0-A146-8CE9-0A2B7CC7B867}" type="slidenum">
               <a:rPr lang="en-US" smtClean="0"/>
-              <a:t>26</a:t>
+              <a:t>24</a:t>
             </a:fld>
             <a:endParaRPr lang="en-US"/>
           </a:p>
@@ -2600,7 +2349,7 @@
 </p:notes>
 </file>
 
-<file path=ppt/notesSlides/notesSlide27.xml><?xml version="1.0" encoding="utf-8"?>
+<file path=ppt/notesSlides/notesSlide25.xml><?xml version="1.0" encoding="utf-8"?>
 <p:notes xmlns:a="http://schemas.openxmlformats.org/drawingml/2006/main" xmlns:r="http://schemas.openxmlformats.org/officeDocument/2006/relationships" xmlns:p="http://schemas.openxmlformats.org/presentationml/2006/main">
   <p:cSld>
     <p:spTree>
@@ -2689,7 +2438,7 @@
           <a:p>
             <a:fld id="{FF78EFD2-C9A0-A146-8CE9-0A2B7CC7B867}" type="slidenum">
               <a:rPr lang="en-US" smtClean="0"/>
-              <a:t>27</a:t>
+              <a:t>25</a:t>
             </a:fld>
             <a:endParaRPr lang="en-US"/>
           </a:p>
@@ -2708,7 +2457,7 @@
 </p:notes>
 </file>
 
-<file path=ppt/notesSlides/notesSlide28.xml><?xml version="1.0" encoding="utf-8"?>
+<file path=ppt/notesSlides/notesSlide26.xml><?xml version="1.0" encoding="utf-8"?>
 <p:notes xmlns:a="http://schemas.openxmlformats.org/drawingml/2006/main" xmlns:r="http://schemas.openxmlformats.org/officeDocument/2006/relationships" xmlns:p="http://schemas.openxmlformats.org/presentationml/2006/main">
   <p:cSld>
     <p:spTree>
@@ -2820,7 +2569,7 @@
           <a:p>
             <a:fld id="{FF78EFD2-C9A0-A146-8CE9-0A2B7CC7B867}" type="slidenum">
               <a:rPr lang="en-US" smtClean="0"/>
-              <a:t>28</a:t>
+              <a:t>26</a:t>
             </a:fld>
             <a:endParaRPr lang="en-US"/>
           </a:p>
@@ -2839,7 +2588,7 @@
 </p:notes>
 </file>
 
-<file path=ppt/notesSlides/notesSlide29.xml><?xml version="1.0" encoding="utf-8"?>
+<file path=ppt/notesSlides/notesSlide27.xml><?xml version="1.0" encoding="utf-8"?>
 <p:notes xmlns:a="http://schemas.openxmlformats.org/drawingml/2006/main" xmlns:r="http://schemas.openxmlformats.org/officeDocument/2006/relationships" xmlns:p="http://schemas.openxmlformats.org/presentationml/2006/main">
   <p:cSld>
     <p:spTree>
@@ -2847,7 +2596,7 @@
         <p:cNvPr id="1" name="">
           <a:extLst>
             <a:ext uri="{FF2B5EF4-FFF2-40B4-BE49-F238E27FC236}">
-              <a16:creationId xmlns:a16="http://schemas.microsoft.com/office/drawing/2014/main" id="{0622ED16-FBE9-20D7-BB46-76C1843FD729}"/>
+              <a16:creationId xmlns:a16="http://schemas.microsoft.com/office/drawing/2014/main" id="{14E9B45F-1925-C993-4D16-2EDD49557B8A}"/>
             </a:ext>
           </a:extLst>
         </p:cNvPr>
@@ -2867,7 +2616,7 @@
           <p:cNvPr id="2" name="Slide Image Placeholder 1">
             <a:extLst>
               <a:ext uri="{FF2B5EF4-FFF2-40B4-BE49-F238E27FC236}">
-                <a16:creationId xmlns:a16="http://schemas.microsoft.com/office/drawing/2014/main" id="{281ECAF1-1509-7F11-DDFE-83E267EE6CC6}"/>
+                <a16:creationId xmlns:a16="http://schemas.microsoft.com/office/drawing/2014/main" id="{C49CA2D9-9456-F7EC-8DC1-C8F665EFD72C}"/>
               </a:ext>
             </a:extLst>
           </p:cNvPr>
@@ -2885,7 +2634,7 @@
           <p:cNvPr id="3" name="Notes Placeholder 2">
             <a:extLst>
               <a:ext uri="{FF2B5EF4-FFF2-40B4-BE49-F238E27FC236}">
-                <a16:creationId xmlns:a16="http://schemas.microsoft.com/office/drawing/2014/main" id="{3E41390C-F971-DAE8-8544-B46F6020D865}"/>
+                <a16:creationId xmlns:a16="http://schemas.microsoft.com/office/drawing/2014/main" id="{0C9EACDC-32C1-C9B0-6E22-4ECA6772DB85}"/>
               </a:ext>
             </a:extLst>
           </p:cNvPr>
@@ -2901,180 +2650,6 @@
           <a:bodyPr/>
           <a:lstStyle/>
           <a:p>
-            <a:pPr rtl="0" fontAlgn="base"/>
-            <a:r>
-              <a:rPr lang="en-US" sz="1200" b="0" i="0" u="none" strike="noStrike" kern="1200" dirty="0">
-                <a:solidFill>
-                  <a:schemeClr val="tx1"/>
-                </a:solidFill>
-                <a:effectLst/>
-                <a:latin typeface="+mn-lt"/>
-                <a:ea typeface="+mn-ea"/>
-                <a:cs typeface="+mn-cs"/>
-              </a:rPr>
-              <a:t>Images taken from: https://</a:t>
-            </a:r>
-            <a:r>
-              <a:rPr lang="en-US" sz="1200" b="0" i="0" u="none" strike="noStrike" kern="1200" dirty="0" err="1">
-                <a:solidFill>
-                  <a:schemeClr val="tx1"/>
-                </a:solidFill>
-                <a:effectLst/>
-                <a:latin typeface="+mn-lt"/>
-                <a:ea typeface="+mn-ea"/>
-                <a:cs typeface="+mn-cs"/>
-              </a:rPr>
-              <a:t>www.geeksforgeeks.org</a:t>
-            </a:r>
-            <a:r>
-              <a:rPr lang="en-US" sz="1200" b="0" i="0" u="none" strike="noStrike" kern="1200" dirty="0">
-                <a:solidFill>
-                  <a:schemeClr val="tx1"/>
-                </a:solidFill>
-                <a:effectLst/>
-                <a:latin typeface="+mn-lt"/>
-                <a:ea typeface="+mn-ea"/>
-                <a:cs typeface="+mn-cs"/>
-              </a:rPr>
-              <a:t>/software-testing/what-is-an-</a:t>
-            </a:r>
-            <a:r>
-              <a:rPr lang="en-US" sz="1200" b="0" i="0" u="none" strike="noStrike" kern="1200" dirty="0" err="1">
-                <a:solidFill>
-                  <a:schemeClr val="tx1"/>
-                </a:solidFill>
-                <a:effectLst/>
-                <a:latin typeface="+mn-lt"/>
-                <a:ea typeface="+mn-ea"/>
-                <a:cs typeface="+mn-cs"/>
-              </a:rPr>
-              <a:t>api</a:t>
-            </a:r>
-            <a:r>
-              <a:rPr lang="en-US" sz="1200" b="0" i="0" u="none" strike="noStrike" kern="1200" dirty="0">
-                <a:solidFill>
-                  <a:schemeClr val="tx1"/>
-                </a:solidFill>
-                <a:effectLst/>
-                <a:latin typeface="+mn-lt"/>
-                <a:ea typeface="+mn-ea"/>
-                <a:cs typeface="+mn-cs"/>
-              </a:rPr>
-              <a:t>/</a:t>
-            </a:r>
-          </a:p>
-          <a:p>
-            <a:pPr rtl="0" fontAlgn="base"/>
-            <a:endParaRPr lang="en-US" sz="1200" b="0" i="0" u="none" strike="noStrike" kern="1200" dirty="0">
-              <a:solidFill>
-                <a:schemeClr val="tx1"/>
-              </a:solidFill>
-              <a:effectLst/>
-              <a:latin typeface="+mn-lt"/>
-              <a:ea typeface="+mn-ea"/>
-              <a:cs typeface="+mn-cs"/>
-            </a:endParaRPr>
-          </a:p>
-          <a:p>
-            <a:pPr rtl="0" fontAlgn="base"/>
-            <a:endParaRPr lang="en-US" sz="1200" b="0" i="0" u="none" strike="noStrike" kern="1200" dirty="0">
-              <a:solidFill>
-                <a:schemeClr val="tx1"/>
-              </a:solidFill>
-              <a:effectLst/>
-              <a:latin typeface="+mn-lt"/>
-              <a:ea typeface="+mn-ea"/>
-              <a:cs typeface="+mn-cs"/>
-            </a:endParaRPr>
-          </a:p>
-          <a:p>
-            <a:pPr rtl="0" fontAlgn="base"/>
-            <a:endParaRPr lang="en-US" sz="1200" b="0" i="0" u="none" strike="noStrike" kern="1200" dirty="0">
-              <a:solidFill>
-                <a:schemeClr val="tx1"/>
-              </a:solidFill>
-              <a:effectLst/>
-              <a:latin typeface="+mn-lt"/>
-              <a:ea typeface="+mn-ea"/>
-              <a:cs typeface="+mn-cs"/>
-            </a:endParaRPr>
-          </a:p>
-          <a:p>
-            <a:pPr rtl="0" fontAlgn="base"/>
-            <a:r>
-              <a:rPr lang="en-US" sz="1200" b="0" i="0" u="none" strike="noStrike" kern="1200" dirty="0">
-                <a:solidFill>
-                  <a:schemeClr val="tx1"/>
-                </a:solidFill>
-                <a:effectLst/>
-                <a:latin typeface="+mn-lt"/>
-                <a:ea typeface="+mn-ea"/>
-                <a:cs typeface="+mn-cs"/>
-              </a:rPr>
-              <a:t>Imagine you’re at a restaurant:</a:t>
-            </a:r>
-          </a:p>
-          <a:p>
-            <a:pPr fontAlgn="base"/>
-            <a:r>
-              <a:rPr lang="en-US" sz="1200" b="0" i="0" u="none" strike="noStrike" kern="1200" dirty="0">
-                <a:solidFill>
-                  <a:schemeClr val="tx1"/>
-                </a:solidFill>
-                <a:effectLst/>
-                <a:latin typeface="+mn-lt"/>
-                <a:ea typeface="+mn-ea"/>
-                <a:cs typeface="+mn-cs"/>
-              </a:rPr>
-              <a:t>You (the client) place an order with the waiter.</a:t>
-            </a:r>
-          </a:p>
-          <a:p>
-            <a:pPr fontAlgn="base"/>
-            <a:r>
-              <a:rPr lang="en-US" sz="1200" b="0" i="0" u="none" strike="noStrike" kern="1200" dirty="0">
-                <a:solidFill>
-                  <a:schemeClr val="tx1"/>
-                </a:solidFill>
-                <a:effectLst/>
-                <a:latin typeface="+mn-lt"/>
-                <a:ea typeface="+mn-ea"/>
-                <a:cs typeface="+mn-cs"/>
-              </a:rPr>
-              <a:t>The waiter (the API) conveys your request to the chef (the server).</a:t>
-            </a:r>
-          </a:p>
-          <a:p>
-            <a:pPr fontAlgn="base"/>
-            <a:r>
-              <a:rPr lang="en-US" sz="1200" b="0" i="0" u="none" strike="noStrike" kern="1200" dirty="0">
-                <a:solidFill>
-                  <a:schemeClr val="tx1"/>
-                </a:solidFill>
-                <a:effectLst/>
-                <a:latin typeface="+mn-lt"/>
-                <a:ea typeface="+mn-ea"/>
-                <a:cs typeface="+mn-cs"/>
-              </a:rPr>
-              <a:t>The chef prepares the food (processes the request) and gives it to the waiter.</a:t>
-            </a:r>
-          </a:p>
-          <a:p>
-            <a:pPr fontAlgn="base"/>
-            <a:r>
-              <a:rPr lang="en-US" sz="1200" b="0" i="0" u="none" strike="noStrike" kern="1200" dirty="0">
-                <a:solidFill>
-                  <a:schemeClr val="tx1"/>
-                </a:solidFill>
-                <a:effectLst/>
-                <a:latin typeface="+mn-lt"/>
-                <a:ea typeface="+mn-ea"/>
-                <a:cs typeface="+mn-cs"/>
-              </a:rPr>
-              <a:t>The waiter delivers it back to your table (response).</a:t>
-            </a:r>
-          </a:p>
-          <a:p>
             <a:endParaRPr lang="en-US" dirty="0"/>
           </a:p>
         </p:txBody>
@@ -3084,7 +2659,7 @@
           <p:cNvPr id="4" name="Slide Number Placeholder 3">
             <a:extLst>
               <a:ext uri="{FF2B5EF4-FFF2-40B4-BE49-F238E27FC236}">
-                <a16:creationId xmlns:a16="http://schemas.microsoft.com/office/drawing/2014/main" id="{D17C6DFD-53E9-3741-10AE-DFFB7B896666}"/>
+                <a16:creationId xmlns:a16="http://schemas.microsoft.com/office/drawing/2014/main" id="{B076A8F6-FBFE-C7A4-1FE6-3C975A358E90}"/>
               </a:ext>
             </a:extLst>
           </p:cNvPr>
@@ -3102,7 +2677,7 @@
           <a:p>
             <a:fld id="{FF78EFD2-C9A0-A146-8CE9-0A2B7CC7B867}" type="slidenum">
               <a:rPr lang="en-US" smtClean="0"/>
-              <a:t>29</a:t>
+              <a:t>27</a:t>
             </a:fld>
             <a:endParaRPr lang="en-US"/>
           </a:p>
@@ -3111,7 +2686,115 @@
     </p:spTree>
     <p:extLst>
       <p:ext uri="{BB962C8B-B14F-4D97-AF65-F5344CB8AC3E}">
-        <p14:creationId xmlns:p14="http://schemas.microsoft.com/office/powerpoint/2010/main" val="3341870626"/>
+        <p14:creationId xmlns:p14="http://schemas.microsoft.com/office/powerpoint/2010/main" val="1888415515"/>
+      </p:ext>
+    </p:extLst>
+  </p:cSld>
+  <p:clrMapOvr>
+    <a:masterClrMapping/>
+  </p:clrMapOvr>
+</p:notes>
+</file>
+
+<file path=ppt/notesSlides/notesSlide28.xml><?xml version="1.0" encoding="utf-8"?>
+<p:notes xmlns:a="http://schemas.openxmlformats.org/drawingml/2006/main" xmlns:r="http://schemas.openxmlformats.org/officeDocument/2006/relationships" xmlns:p="http://schemas.openxmlformats.org/presentationml/2006/main">
+  <p:cSld>
+    <p:spTree>
+      <p:nvGrpSpPr>
+        <p:cNvPr id="1" name="">
+          <a:extLst>
+            <a:ext uri="{FF2B5EF4-FFF2-40B4-BE49-F238E27FC236}">
+              <a16:creationId xmlns:a16="http://schemas.microsoft.com/office/drawing/2014/main" id="{8276AB12-E4BE-2895-5942-8EB3594FC13C}"/>
+            </a:ext>
+          </a:extLst>
+        </p:cNvPr>
+        <p:cNvGrpSpPr/>
+        <p:nvPr/>
+      </p:nvGrpSpPr>
+      <p:grpSpPr>
+        <a:xfrm>
+          <a:off x="0" y="0"/>
+          <a:ext cx="0" cy="0"/>
+          <a:chOff x="0" y="0"/>
+          <a:chExt cx="0" cy="0"/>
+        </a:xfrm>
+      </p:grpSpPr>
+      <p:sp>
+        <p:nvSpPr>
+          <p:cNvPr id="2" name="Slide Image Placeholder 1">
+            <a:extLst>
+              <a:ext uri="{FF2B5EF4-FFF2-40B4-BE49-F238E27FC236}">
+                <a16:creationId xmlns:a16="http://schemas.microsoft.com/office/drawing/2014/main" id="{6E17AFE7-48E9-FF99-5E65-E91DF6095D03}"/>
+              </a:ext>
+            </a:extLst>
+          </p:cNvPr>
+          <p:cNvSpPr>
+            <a:spLocks noGrp="1" noRot="1" noChangeAspect="1"/>
+          </p:cNvSpPr>
+          <p:nvPr>
+            <p:ph type="sldImg"/>
+          </p:nvPr>
+        </p:nvSpPr>
+        <p:spPr/>
+      </p:sp>
+      <p:sp>
+        <p:nvSpPr>
+          <p:cNvPr id="3" name="Notes Placeholder 2">
+            <a:extLst>
+              <a:ext uri="{FF2B5EF4-FFF2-40B4-BE49-F238E27FC236}">
+                <a16:creationId xmlns:a16="http://schemas.microsoft.com/office/drawing/2014/main" id="{BBFE2B31-C66D-6B10-48B6-0240355441A5}"/>
+              </a:ext>
+            </a:extLst>
+          </p:cNvPr>
+          <p:cNvSpPr>
+            <a:spLocks noGrp="1"/>
+          </p:cNvSpPr>
+          <p:nvPr>
+            <p:ph type="body" idx="1"/>
+          </p:nvPr>
+        </p:nvSpPr>
+        <p:spPr/>
+        <p:txBody>
+          <a:bodyPr/>
+          <a:lstStyle/>
+          <a:p>
+            <a:endParaRPr lang="en-US" dirty="0"/>
+          </a:p>
+        </p:txBody>
+      </p:sp>
+      <p:sp>
+        <p:nvSpPr>
+          <p:cNvPr id="4" name="Slide Number Placeholder 3">
+            <a:extLst>
+              <a:ext uri="{FF2B5EF4-FFF2-40B4-BE49-F238E27FC236}">
+                <a16:creationId xmlns:a16="http://schemas.microsoft.com/office/drawing/2014/main" id="{3D606F75-A8C9-FA91-51FD-42BB66D7058F}"/>
+              </a:ext>
+            </a:extLst>
+          </p:cNvPr>
+          <p:cNvSpPr>
+            <a:spLocks noGrp="1"/>
+          </p:cNvSpPr>
+          <p:nvPr>
+            <p:ph type="sldNum" sz="quarter" idx="5"/>
+          </p:nvPr>
+        </p:nvSpPr>
+        <p:spPr/>
+        <p:txBody>
+          <a:bodyPr/>
+          <a:lstStyle/>
+          <a:p>
+            <a:fld id="{FF78EFD2-C9A0-A146-8CE9-0A2B7CC7B867}" type="slidenum">
+              <a:rPr lang="en-US" smtClean="0"/>
+              <a:t>28</a:t>
+            </a:fld>
+            <a:endParaRPr lang="en-US"/>
+          </a:p>
+        </p:txBody>
+      </p:sp>
+    </p:spTree>
+    <p:extLst>
+      <p:ext uri="{BB962C8B-B14F-4D97-AF65-F5344CB8AC3E}">
+        <p14:creationId xmlns:p14="http://schemas.microsoft.com/office/powerpoint/2010/main" val="1675293660"/>
       </p:ext>
     </p:extLst>
   </p:cSld>
@@ -3220,375 +2903,6 @@
     <p:extLst>
       <p:ext uri="{BB962C8B-B14F-4D97-AF65-F5344CB8AC3E}">
         <p14:creationId xmlns:p14="http://schemas.microsoft.com/office/powerpoint/2010/main" val="854750004"/>
-      </p:ext>
-    </p:extLst>
-  </p:cSld>
-  <p:clrMapOvr>
-    <a:masterClrMapping/>
-  </p:clrMapOvr>
-</p:notes>
-</file>
-
-<file path=ppt/notesSlides/notesSlide30.xml><?xml version="1.0" encoding="utf-8"?>
-<p:notes xmlns:a="http://schemas.openxmlformats.org/drawingml/2006/main" xmlns:r="http://schemas.openxmlformats.org/officeDocument/2006/relationships" xmlns:p="http://schemas.openxmlformats.org/presentationml/2006/main">
-  <p:cSld>
-    <p:spTree>
-      <p:nvGrpSpPr>
-        <p:cNvPr id="1" name="">
-          <a:extLst>
-            <a:ext uri="{FF2B5EF4-FFF2-40B4-BE49-F238E27FC236}">
-              <a16:creationId xmlns:a16="http://schemas.microsoft.com/office/drawing/2014/main" id="{14E9B45F-1925-C993-4D16-2EDD49557B8A}"/>
-            </a:ext>
-          </a:extLst>
-        </p:cNvPr>
-        <p:cNvGrpSpPr/>
-        <p:nvPr/>
-      </p:nvGrpSpPr>
-      <p:grpSpPr>
-        <a:xfrm>
-          <a:off x="0" y="0"/>
-          <a:ext cx="0" cy="0"/>
-          <a:chOff x="0" y="0"/>
-          <a:chExt cx="0" cy="0"/>
-        </a:xfrm>
-      </p:grpSpPr>
-      <p:sp>
-        <p:nvSpPr>
-          <p:cNvPr id="2" name="Slide Image Placeholder 1">
-            <a:extLst>
-              <a:ext uri="{FF2B5EF4-FFF2-40B4-BE49-F238E27FC236}">
-                <a16:creationId xmlns:a16="http://schemas.microsoft.com/office/drawing/2014/main" id="{C49CA2D9-9456-F7EC-8DC1-C8F665EFD72C}"/>
-              </a:ext>
-            </a:extLst>
-          </p:cNvPr>
-          <p:cNvSpPr>
-            <a:spLocks noGrp="1" noRot="1" noChangeAspect="1"/>
-          </p:cNvSpPr>
-          <p:nvPr>
-            <p:ph type="sldImg"/>
-          </p:nvPr>
-        </p:nvSpPr>
-        <p:spPr/>
-      </p:sp>
-      <p:sp>
-        <p:nvSpPr>
-          <p:cNvPr id="3" name="Notes Placeholder 2">
-            <a:extLst>
-              <a:ext uri="{FF2B5EF4-FFF2-40B4-BE49-F238E27FC236}">
-                <a16:creationId xmlns:a16="http://schemas.microsoft.com/office/drawing/2014/main" id="{0C9EACDC-32C1-C9B0-6E22-4ECA6772DB85}"/>
-              </a:ext>
-            </a:extLst>
-          </p:cNvPr>
-          <p:cNvSpPr>
-            <a:spLocks noGrp="1"/>
-          </p:cNvSpPr>
-          <p:nvPr>
-            <p:ph type="body" idx="1"/>
-          </p:nvPr>
-        </p:nvSpPr>
-        <p:spPr/>
-        <p:txBody>
-          <a:bodyPr/>
-          <a:lstStyle/>
-          <a:p>
-            <a:endParaRPr lang="en-US" dirty="0"/>
-          </a:p>
-        </p:txBody>
-      </p:sp>
-      <p:sp>
-        <p:nvSpPr>
-          <p:cNvPr id="4" name="Slide Number Placeholder 3">
-            <a:extLst>
-              <a:ext uri="{FF2B5EF4-FFF2-40B4-BE49-F238E27FC236}">
-                <a16:creationId xmlns:a16="http://schemas.microsoft.com/office/drawing/2014/main" id="{B076A8F6-FBFE-C7A4-1FE6-3C975A358E90}"/>
-              </a:ext>
-            </a:extLst>
-          </p:cNvPr>
-          <p:cNvSpPr>
-            <a:spLocks noGrp="1"/>
-          </p:cNvSpPr>
-          <p:nvPr>
-            <p:ph type="sldNum" sz="quarter" idx="5"/>
-          </p:nvPr>
-        </p:nvSpPr>
-        <p:spPr/>
-        <p:txBody>
-          <a:bodyPr/>
-          <a:lstStyle/>
-          <a:p>
-            <a:fld id="{FF78EFD2-C9A0-A146-8CE9-0A2B7CC7B867}" type="slidenum">
-              <a:rPr lang="en-US" smtClean="0"/>
-              <a:t>30</a:t>
-            </a:fld>
-            <a:endParaRPr lang="en-US"/>
-          </a:p>
-        </p:txBody>
-      </p:sp>
-    </p:spTree>
-    <p:extLst>
-      <p:ext uri="{BB962C8B-B14F-4D97-AF65-F5344CB8AC3E}">
-        <p14:creationId xmlns:p14="http://schemas.microsoft.com/office/powerpoint/2010/main" val="1888415515"/>
-      </p:ext>
-    </p:extLst>
-  </p:cSld>
-  <p:clrMapOvr>
-    <a:masterClrMapping/>
-  </p:clrMapOvr>
-</p:notes>
-</file>
-
-<file path=ppt/notesSlides/notesSlide31.xml><?xml version="1.0" encoding="utf-8"?>
-<p:notes xmlns:a="http://schemas.openxmlformats.org/drawingml/2006/main" xmlns:r="http://schemas.openxmlformats.org/officeDocument/2006/relationships" xmlns:p="http://schemas.openxmlformats.org/presentationml/2006/main">
-  <p:cSld>
-    <p:spTree>
-      <p:nvGrpSpPr>
-        <p:cNvPr id="1" name="">
-          <a:extLst>
-            <a:ext uri="{FF2B5EF4-FFF2-40B4-BE49-F238E27FC236}">
-              <a16:creationId xmlns:a16="http://schemas.microsoft.com/office/drawing/2014/main" id="{8276AB12-E4BE-2895-5942-8EB3594FC13C}"/>
-            </a:ext>
-          </a:extLst>
-        </p:cNvPr>
-        <p:cNvGrpSpPr/>
-        <p:nvPr/>
-      </p:nvGrpSpPr>
-      <p:grpSpPr>
-        <a:xfrm>
-          <a:off x="0" y="0"/>
-          <a:ext cx="0" cy="0"/>
-          <a:chOff x="0" y="0"/>
-          <a:chExt cx="0" cy="0"/>
-        </a:xfrm>
-      </p:grpSpPr>
-      <p:sp>
-        <p:nvSpPr>
-          <p:cNvPr id="2" name="Slide Image Placeholder 1">
-            <a:extLst>
-              <a:ext uri="{FF2B5EF4-FFF2-40B4-BE49-F238E27FC236}">
-                <a16:creationId xmlns:a16="http://schemas.microsoft.com/office/drawing/2014/main" id="{6E17AFE7-48E9-FF99-5E65-E91DF6095D03}"/>
-              </a:ext>
-            </a:extLst>
-          </p:cNvPr>
-          <p:cNvSpPr>
-            <a:spLocks noGrp="1" noRot="1" noChangeAspect="1"/>
-          </p:cNvSpPr>
-          <p:nvPr>
-            <p:ph type="sldImg"/>
-          </p:nvPr>
-        </p:nvSpPr>
-        <p:spPr/>
-      </p:sp>
-      <p:sp>
-        <p:nvSpPr>
-          <p:cNvPr id="3" name="Notes Placeholder 2">
-            <a:extLst>
-              <a:ext uri="{FF2B5EF4-FFF2-40B4-BE49-F238E27FC236}">
-                <a16:creationId xmlns:a16="http://schemas.microsoft.com/office/drawing/2014/main" id="{BBFE2B31-C66D-6B10-48B6-0240355441A5}"/>
-              </a:ext>
-            </a:extLst>
-          </p:cNvPr>
-          <p:cNvSpPr>
-            <a:spLocks noGrp="1"/>
-          </p:cNvSpPr>
-          <p:nvPr>
-            <p:ph type="body" idx="1"/>
-          </p:nvPr>
-        </p:nvSpPr>
-        <p:spPr/>
-        <p:txBody>
-          <a:bodyPr/>
-          <a:lstStyle/>
-          <a:p>
-            <a:endParaRPr lang="en-US" dirty="0"/>
-          </a:p>
-        </p:txBody>
-      </p:sp>
-      <p:sp>
-        <p:nvSpPr>
-          <p:cNvPr id="4" name="Slide Number Placeholder 3">
-            <a:extLst>
-              <a:ext uri="{FF2B5EF4-FFF2-40B4-BE49-F238E27FC236}">
-                <a16:creationId xmlns:a16="http://schemas.microsoft.com/office/drawing/2014/main" id="{3D606F75-A8C9-FA91-51FD-42BB66D7058F}"/>
-              </a:ext>
-            </a:extLst>
-          </p:cNvPr>
-          <p:cNvSpPr>
-            <a:spLocks noGrp="1"/>
-          </p:cNvSpPr>
-          <p:nvPr>
-            <p:ph type="sldNum" sz="quarter" idx="5"/>
-          </p:nvPr>
-        </p:nvSpPr>
-        <p:spPr/>
-        <p:txBody>
-          <a:bodyPr/>
-          <a:lstStyle/>
-          <a:p>
-            <a:fld id="{FF78EFD2-C9A0-A146-8CE9-0A2B7CC7B867}" type="slidenum">
-              <a:rPr lang="en-US" smtClean="0"/>
-              <a:t>31</a:t>
-            </a:fld>
-            <a:endParaRPr lang="en-US"/>
-          </a:p>
-        </p:txBody>
-      </p:sp>
-    </p:spTree>
-    <p:extLst>
-      <p:ext uri="{BB962C8B-B14F-4D97-AF65-F5344CB8AC3E}">
-        <p14:creationId xmlns:p14="http://schemas.microsoft.com/office/powerpoint/2010/main" val="1675293660"/>
-      </p:ext>
-    </p:extLst>
-  </p:cSld>
-  <p:clrMapOvr>
-    <a:masterClrMapping/>
-  </p:clrMapOvr>
-</p:notes>
-</file>
-
-<file path=ppt/notesSlides/notesSlide32.xml><?xml version="1.0" encoding="utf-8"?>
-<p:notes xmlns:a="http://schemas.openxmlformats.org/drawingml/2006/main" xmlns:r="http://schemas.openxmlformats.org/officeDocument/2006/relationships" xmlns:p="http://schemas.openxmlformats.org/presentationml/2006/main">
-  <p:cSld>
-    <p:spTree>
-      <p:nvGrpSpPr>
-        <p:cNvPr id="1" name=""/>
-        <p:cNvGrpSpPr/>
-        <p:nvPr/>
-      </p:nvGrpSpPr>
-      <p:grpSpPr>
-        <a:xfrm>
-          <a:off x="0" y="0"/>
-          <a:ext cx="0" cy="0"/>
-          <a:chOff x="0" y="0"/>
-          <a:chExt cx="0" cy="0"/>
-        </a:xfrm>
-      </p:grpSpPr>
-      <p:sp>
-        <p:nvSpPr>
-          <p:cNvPr id="2" name="Slide Image Placeholder 1"/>
-          <p:cNvSpPr>
-            <a:spLocks noGrp="1" noRot="1" noChangeAspect="1"/>
-          </p:cNvSpPr>
-          <p:nvPr>
-            <p:ph type="sldImg"/>
-          </p:nvPr>
-        </p:nvSpPr>
-        <p:spPr/>
-      </p:sp>
-      <p:sp>
-        <p:nvSpPr>
-          <p:cNvPr id="3" name="Notes Placeholder 2"/>
-          <p:cNvSpPr>
-            <a:spLocks noGrp="1"/>
-          </p:cNvSpPr>
-          <p:nvPr>
-            <p:ph type="body" idx="1"/>
-          </p:nvPr>
-        </p:nvSpPr>
-        <p:spPr/>
-        <p:txBody>
-          <a:bodyPr/>
-          <a:lstStyle/>
-          <a:p>
-            <a:pPr marL="0" marR="0" lvl="0" indent="0" algn="l" defTabSz="914400" rtl="0" eaLnBrk="1" fontAlgn="auto" latinLnBrk="0" hangingPunct="1">
-              <a:lnSpc>
-                <a:spcPct val="100000"/>
-              </a:lnSpc>
-              <a:spcBef>
-                <a:spcPts val="0"/>
-              </a:spcBef>
-              <a:spcAft>
-                <a:spcPts val="0"/>
-              </a:spcAft>
-              <a:buClrTx/>
-              <a:buSzTx/>
-              <a:buFontTx/>
-              <a:buNone/>
-              <a:tabLst/>
-              <a:defRPr/>
-            </a:pPr>
-            <a:r>
-              <a:rPr lang="en-US" sz="1200" dirty="0">
-                <a:solidFill>
-                  <a:schemeClr val="accent1"/>
-                </a:solidFill>
-              </a:rPr>
-              <a:t>e.g., </a:t>
-            </a:r>
-            <a:r>
-              <a:rPr lang="en-US" sz="1200" dirty="0" err="1">
-                <a:solidFill>
-                  <a:schemeClr val="accent1"/>
-                </a:solidFill>
-              </a:rPr>
-              <a:t>MediaWiki</a:t>
-            </a:r>
-            <a:r>
-              <a:rPr lang="en-US" sz="1200" dirty="0">
-                <a:solidFill>
-                  <a:schemeClr val="accent1"/>
-                </a:solidFill>
-              </a:rPr>
-              <a:t> API: https://</a:t>
-            </a:r>
-            <a:r>
-              <a:rPr lang="en-US" sz="1200" dirty="0" err="1">
-                <a:solidFill>
-                  <a:schemeClr val="accent1"/>
-                </a:solidFill>
-              </a:rPr>
-              <a:t>en.wikipedia.org</a:t>
-            </a:r>
-            <a:r>
-              <a:rPr lang="en-US" sz="1200" dirty="0">
-                <a:solidFill>
-                  <a:schemeClr val="accent1"/>
-                </a:solidFill>
-              </a:rPr>
-              <a:t>/w/</a:t>
-            </a:r>
-            <a:r>
-              <a:rPr lang="en-US" sz="1200" dirty="0" err="1">
-                <a:solidFill>
-                  <a:schemeClr val="accent1"/>
-                </a:solidFill>
-              </a:rPr>
-              <a:t>api.php</a:t>
-            </a:r>
-            <a:endParaRPr lang="en-US" sz="1200" dirty="0">
-              <a:solidFill>
-                <a:schemeClr val="accent1"/>
-              </a:solidFill>
-            </a:endParaRPr>
-          </a:p>
-        </p:txBody>
-      </p:sp>
-      <p:sp>
-        <p:nvSpPr>
-          <p:cNvPr id="4" name="Slide Number Placeholder 3"/>
-          <p:cNvSpPr>
-            <a:spLocks noGrp="1"/>
-          </p:cNvSpPr>
-          <p:nvPr>
-            <p:ph type="sldNum" sz="quarter" idx="5"/>
-          </p:nvPr>
-        </p:nvSpPr>
-        <p:spPr/>
-        <p:txBody>
-          <a:bodyPr/>
-          <a:lstStyle/>
-          <a:p>
-            <a:fld id="{FF78EFD2-C9A0-A146-8CE9-0A2B7CC7B867}" type="slidenum">
-              <a:rPr lang="en-US" smtClean="0"/>
-              <a:t>32</a:t>
-            </a:fld>
-            <a:endParaRPr lang="en-US"/>
-          </a:p>
-        </p:txBody>
-      </p:sp>
-    </p:spTree>
-    <p:extLst>
-      <p:ext uri="{BB962C8B-B14F-4D97-AF65-F5344CB8AC3E}">
-        <p14:creationId xmlns:p14="http://schemas.microsoft.com/office/powerpoint/2010/main" val="3404265225"/>
       </p:ext>
     </p:extLst>
   </p:cSld>
@@ -10286,412 +9600,6 @@
         <p:cNvPr id="1" name="">
           <a:extLst>
             <a:ext uri="{FF2B5EF4-FFF2-40B4-BE49-F238E27FC236}">
-              <a16:creationId xmlns:a16="http://schemas.microsoft.com/office/drawing/2014/main" id="{3F787A8E-2204-AE00-F268-C2A7D74740CC}"/>
-            </a:ext>
-          </a:extLst>
-        </p:cNvPr>
-        <p:cNvGrpSpPr/>
-        <p:nvPr/>
-      </p:nvGrpSpPr>
-      <p:grpSpPr>
-        <a:xfrm>
-          <a:off x="0" y="0"/>
-          <a:ext cx="0" cy="0"/>
-          <a:chOff x="0" y="0"/>
-          <a:chExt cx="0" cy="0"/>
-        </a:xfrm>
-      </p:grpSpPr>
-      <p:sp>
-        <p:nvSpPr>
-          <p:cNvPr id="2" name="Title 1">
-            <a:extLst>
-              <a:ext uri="{FF2B5EF4-FFF2-40B4-BE49-F238E27FC236}">
-                <a16:creationId xmlns:a16="http://schemas.microsoft.com/office/drawing/2014/main" id="{72B26E73-AF84-D637-2F3E-00A03B6A1659}"/>
-              </a:ext>
-            </a:extLst>
-          </p:cNvPr>
-          <p:cNvSpPr>
-            <a:spLocks noGrp="1"/>
-          </p:cNvSpPr>
-          <p:nvPr>
-            <p:ph type="title"/>
-          </p:nvPr>
-        </p:nvSpPr>
-        <p:spPr/>
-        <p:txBody>
-          <a:bodyPr/>
-          <a:lstStyle/>
-          <a:p>
-            <a:r>
-              <a:rPr lang="en-US" dirty="0">
-                <a:solidFill>
-                  <a:schemeClr val="accent1"/>
-                </a:solidFill>
-              </a:rPr>
-              <a:t>Browser Automation</a:t>
-            </a:r>
-          </a:p>
-        </p:txBody>
-      </p:sp>
-      <p:sp>
-        <p:nvSpPr>
-          <p:cNvPr id="3" name="Content Placeholder 2">
-            <a:extLst>
-              <a:ext uri="{FF2B5EF4-FFF2-40B4-BE49-F238E27FC236}">
-                <a16:creationId xmlns:a16="http://schemas.microsoft.com/office/drawing/2014/main" id="{DC647414-CC22-620D-B647-80F20AED8484}"/>
-              </a:ext>
-            </a:extLst>
-          </p:cNvPr>
-          <p:cNvSpPr>
-            <a:spLocks noGrp="1"/>
-          </p:cNvSpPr>
-          <p:nvPr>
-            <p:ph idx="1"/>
-          </p:nvPr>
-        </p:nvSpPr>
-        <p:spPr>
-          <a:xfrm>
-            <a:off x="838200" y="1720525"/>
-            <a:ext cx="5257800" cy="4351338"/>
-          </a:xfrm>
-        </p:spPr>
-        <p:txBody>
-          <a:bodyPr/>
-          <a:lstStyle/>
-          <a:p>
-            <a:pPr marL="0" indent="0">
-              <a:buNone/>
-            </a:pPr>
-            <a:r>
-              <a:rPr lang="en-US" dirty="0">
-                <a:solidFill>
-                  <a:schemeClr val="accent1"/>
-                </a:solidFill>
-              </a:rPr>
-              <a:t>Useful when:</a:t>
-            </a:r>
-          </a:p>
-          <a:p>
-            <a:r>
-              <a:rPr lang="en-US" sz="2400" dirty="0">
-                <a:solidFill>
-                  <a:schemeClr val="accent1"/>
-                </a:solidFill>
-              </a:rPr>
-              <a:t>designed for transparency</a:t>
-            </a:r>
-          </a:p>
-          <a:p>
-            <a:r>
-              <a:rPr lang="en-US" sz="2400" dirty="0">
-                <a:solidFill>
-                  <a:schemeClr val="accent1"/>
-                </a:solidFill>
-              </a:rPr>
-              <a:t>often searchable</a:t>
-            </a:r>
-          </a:p>
-          <a:p>
-            <a:r>
-              <a:rPr lang="en-US" sz="2400" dirty="0">
-                <a:solidFill>
-                  <a:schemeClr val="accent1"/>
-                </a:solidFill>
-              </a:rPr>
-              <a:t>useful for moderation or advertising research</a:t>
-            </a:r>
-          </a:p>
-          <a:p>
-            <a:pPr marL="0" indent="0">
-              <a:buNone/>
-            </a:pPr>
-            <a:endParaRPr lang="en-US" dirty="0">
-              <a:solidFill>
-                <a:schemeClr val="accent1"/>
-              </a:solidFill>
-            </a:endParaRPr>
-          </a:p>
-        </p:txBody>
-      </p:sp>
-      <p:sp>
-        <p:nvSpPr>
-          <p:cNvPr id="4" name="Content Placeholder 2">
-            <a:extLst>
-              <a:ext uri="{FF2B5EF4-FFF2-40B4-BE49-F238E27FC236}">
-                <a16:creationId xmlns:a16="http://schemas.microsoft.com/office/drawing/2014/main" id="{7EDF7131-4FA3-1492-916A-4DC38587AAA1}"/>
-              </a:ext>
-            </a:extLst>
-          </p:cNvPr>
-          <p:cNvSpPr txBox="1">
-            <a:spLocks/>
-          </p:cNvSpPr>
-          <p:nvPr/>
-        </p:nvSpPr>
-        <p:spPr>
-          <a:xfrm>
-            <a:off x="6095999" y="1690688"/>
-            <a:ext cx="5802775" cy="4351338"/>
-          </a:xfrm>
-          <a:prstGeom prst="rect">
-            <a:avLst/>
-          </a:prstGeom>
-        </p:spPr>
-        <p:txBody>
-          <a:bodyPr vert="horz" lIns="91440" tIns="45720" rIns="91440" bIns="45720" rtlCol="0">
-            <a:normAutofit/>
-          </a:bodyPr>
-          <a:lstStyle>
-            <a:lvl1pPr marL="228600" indent="-228600" algn="l" defTabSz="914400" rtl="0" eaLnBrk="1" latinLnBrk="0" hangingPunct="1">
-              <a:lnSpc>
-                <a:spcPct val="90000"/>
-              </a:lnSpc>
-              <a:spcBef>
-                <a:spcPts val="1000"/>
-              </a:spcBef>
-              <a:buFont typeface="Arial" panose="020B0604020202020204" pitchFamily="34" charset="0"/>
-              <a:buChar char="•"/>
-              <a:defRPr sz="2800" kern="1200">
-                <a:solidFill>
-                  <a:schemeClr val="tx1"/>
-                </a:solidFill>
-                <a:latin typeface="+mn-lt"/>
-                <a:ea typeface="+mn-ea"/>
-                <a:cs typeface="+mn-cs"/>
-              </a:defRPr>
-            </a:lvl1pPr>
-            <a:lvl2pPr marL="685800" indent="-228600" algn="l" defTabSz="914400" rtl="0" eaLnBrk="1" latinLnBrk="0" hangingPunct="1">
-              <a:lnSpc>
-                <a:spcPct val="90000"/>
-              </a:lnSpc>
-              <a:spcBef>
-                <a:spcPts val="500"/>
-              </a:spcBef>
-              <a:buFont typeface="Arial" panose="020B0604020202020204" pitchFamily="34" charset="0"/>
-              <a:buChar char="•"/>
-              <a:defRPr sz="2400" kern="1200">
-                <a:solidFill>
-                  <a:schemeClr val="tx1"/>
-                </a:solidFill>
-                <a:latin typeface="+mn-lt"/>
-                <a:ea typeface="+mn-ea"/>
-                <a:cs typeface="+mn-cs"/>
-              </a:defRPr>
-            </a:lvl2pPr>
-            <a:lvl3pPr marL="1143000" indent="-228600" algn="l" defTabSz="914400" rtl="0" eaLnBrk="1" latinLnBrk="0" hangingPunct="1">
-              <a:lnSpc>
-                <a:spcPct val="90000"/>
-              </a:lnSpc>
-              <a:spcBef>
-                <a:spcPts val="500"/>
-              </a:spcBef>
-              <a:buFont typeface="Arial" panose="020B0604020202020204" pitchFamily="34" charset="0"/>
-              <a:buChar char="•"/>
-              <a:defRPr sz="2000" kern="1200">
-                <a:solidFill>
-                  <a:schemeClr val="tx1"/>
-                </a:solidFill>
-                <a:latin typeface="+mn-lt"/>
-                <a:ea typeface="+mn-ea"/>
-                <a:cs typeface="+mn-cs"/>
-              </a:defRPr>
-            </a:lvl3pPr>
-            <a:lvl4pPr marL="1600200" indent="-228600" algn="l" defTabSz="914400" rtl="0" eaLnBrk="1" latinLnBrk="0" hangingPunct="1">
-              <a:lnSpc>
-                <a:spcPct val="90000"/>
-              </a:lnSpc>
-              <a:spcBef>
-                <a:spcPts val="500"/>
-              </a:spcBef>
-              <a:buFont typeface="Arial" panose="020B0604020202020204" pitchFamily="34" charset="0"/>
-              <a:buChar char="•"/>
-              <a:defRPr sz="1800" kern="1200">
-                <a:solidFill>
-                  <a:schemeClr val="tx1"/>
-                </a:solidFill>
-                <a:latin typeface="+mn-lt"/>
-                <a:ea typeface="+mn-ea"/>
-                <a:cs typeface="+mn-cs"/>
-              </a:defRPr>
-            </a:lvl4pPr>
-            <a:lvl5pPr marL="2057400" indent="-228600" algn="l" defTabSz="914400" rtl="0" eaLnBrk="1" latinLnBrk="0" hangingPunct="1">
-              <a:lnSpc>
-                <a:spcPct val="90000"/>
-              </a:lnSpc>
-              <a:spcBef>
-                <a:spcPts val="500"/>
-              </a:spcBef>
-              <a:buFont typeface="Arial" panose="020B0604020202020204" pitchFamily="34" charset="0"/>
-              <a:buChar char="•"/>
-              <a:defRPr sz="1800" kern="1200">
-                <a:solidFill>
-                  <a:schemeClr val="tx1"/>
-                </a:solidFill>
-                <a:latin typeface="+mn-lt"/>
-                <a:ea typeface="+mn-ea"/>
-                <a:cs typeface="+mn-cs"/>
-              </a:defRPr>
-            </a:lvl5pPr>
-            <a:lvl6pPr marL="2514600" indent="-228600" algn="l" defTabSz="914400" rtl="0" eaLnBrk="1" latinLnBrk="0" hangingPunct="1">
-              <a:lnSpc>
-                <a:spcPct val="90000"/>
-              </a:lnSpc>
-              <a:spcBef>
-                <a:spcPts val="500"/>
-              </a:spcBef>
-              <a:buFont typeface="Arial" panose="020B0604020202020204" pitchFamily="34" charset="0"/>
-              <a:buChar char="•"/>
-              <a:defRPr sz="1800" kern="1200">
-                <a:solidFill>
-                  <a:schemeClr val="tx1"/>
-                </a:solidFill>
-                <a:latin typeface="+mn-lt"/>
-                <a:ea typeface="+mn-ea"/>
-                <a:cs typeface="+mn-cs"/>
-              </a:defRPr>
-            </a:lvl6pPr>
-            <a:lvl7pPr marL="2971800" indent="-228600" algn="l" defTabSz="914400" rtl="0" eaLnBrk="1" latinLnBrk="0" hangingPunct="1">
-              <a:lnSpc>
-                <a:spcPct val="90000"/>
-              </a:lnSpc>
-              <a:spcBef>
-                <a:spcPts val="500"/>
-              </a:spcBef>
-              <a:buFont typeface="Arial" panose="020B0604020202020204" pitchFamily="34" charset="0"/>
-              <a:buChar char="•"/>
-              <a:defRPr sz="1800" kern="1200">
-                <a:solidFill>
-                  <a:schemeClr val="tx1"/>
-                </a:solidFill>
-                <a:latin typeface="+mn-lt"/>
-                <a:ea typeface="+mn-ea"/>
-                <a:cs typeface="+mn-cs"/>
-              </a:defRPr>
-            </a:lvl7pPr>
-            <a:lvl8pPr marL="3429000" indent="-228600" algn="l" defTabSz="914400" rtl="0" eaLnBrk="1" latinLnBrk="0" hangingPunct="1">
-              <a:lnSpc>
-                <a:spcPct val="90000"/>
-              </a:lnSpc>
-              <a:spcBef>
-                <a:spcPts val="500"/>
-              </a:spcBef>
-              <a:buFont typeface="Arial" panose="020B0604020202020204" pitchFamily="34" charset="0"/>
-              <a:buChar char="•"/>
-              <a:defRPr sz="1800" kern="1200">
-                <a:solidFill>
-                  <a:schemeClr val="tx1"/>
-                </a:solidFill>
-                <a:latin typeface="+mn-lt"/>
-                <a:ea typeface="+mn-ea"/>
-                <a:cs typeface="+mn-cs"/>
-              </a:defRPr>
-            </a:lvl8pPr>
-            <a:lvl9pPr marL="3886200" indent="-228600" algn="l" defTabSz="914400" rtl="0" eaLnBrk="1" latinLnBrk="0" hangingPunct="1">
-              <a:lnSpc>
-                <a:spcPct val="90000"/>
-              </a:lnSpc>
-              <a:spcBef>
-                <a:spcPts val="500"/>
-              </a:spcBef>
-              <a:buFont typeface="Arial" panose="020B0604020202020204" pitchFamily="34" charset="0"/>
-              <a:buChar char="•"/>
-              <a:defRPr sz="1800" kern="1200">
-                <a:solidFill>
-                  <a:schemeClr val="tx1"/>
-                </a:solidFill>
-                <a:latin typeface="+mn-lt"/>
-                <a:ea typeface="+mn-ea"/>
-                <a:cs typeface="+mn-cs"/>
-              </a:defRPr>
-            </a:lvl9pPr>
-          </a:lstStyle>
-          <a:p>
-            <a:pPr marL="0" indent="0">
-              <a:buFont typeface="Arial" panose="020B0604020202020204" pitchFamily="34" charset="0"/>
-              <a:buNone/>
-            </a:pPr>
-            <a:r>
-              <a:rPr lang="en-US" dirty="0">
-                <a:solidFill>
-                  <a:schemeClr val="accent1"/>
-                </a:solidFill>
-              </a:rPr>
-              <a:t>Limitations:</a:t>
-            </a:r>
-          </a:p>
-          <a:p>
-            <a:r>
-              <a:rPr lang="en-US" sz="2400" dirty="0">
-                <a:solidFill>
-                  <a:schemeClr val="accent1"/>
-                </a:solidFill>
-              </a:rPr>
-              <a:t>slower and more brittle</a:t>
-            </a:r>
-          </a:p>
-          <a:p>
-            <a:r>
-              <a:rPr lang="en-US" sz="2400" dirty="0">
-                <a:solidFill>
-                  <a:schemeClr val="accent1"/>
-                </a:solidFill>
-              </a:rPr>
-              <a:t>more server load</a:t>
-            </a:r>
-          </a:p>
-          <a:p>
-            <a:r>
-              <a:rPr lang="en-US" sz="2400" dirty="0">
-                <a:solidFill>
-                  <a:schemeClr val="accent1"/>
-                </a:solidFill>
-              </a:rPr>
-              <a:t>waiting/scrolling choices can affect results</a:t>
-            </a:r>
-          </a:p>
-          <a:p>
-            <a:r>
-              <a:rPr lang="en-US" sz="2400" dirty="0">
-                <a:solidFill>
-                  <a:schemeClr val="accent1"/>
-                </a:solidFill>
-              </a:rPr>
-              <a:t>should not be used to bypass controls</a:t>
-            </a:r>
-          </a:p>
-          <a:p>
-            <a:pPr marL="0" indent="0">
-              <a:buFont typeface="Arial" panose="020B0604020202020204" pitchFamily="34" charset="0"/>
-              <a:buNone/>
-            </a:pPr>
-            <a:endParaRPr lang="en-US" dirty="0">
-              <a:solidFill>
-                <a:schemeClr val="accent1"/>
-              </a:solidFill>
-            </a:endParaRPr>
-          </a:p>
-        </p:txBody>
-      </p:sp>
-    </p:spTree>
-    <p:extLst>
-      <p:ext uri="{BB962C8B-B14F-4D97-AF65-F5344CB8AC3E}">
-        <p14:creationId xmlns:p14="http://schemas.microsoft.com/office/powerpoint/2010/main" val="1630702811"/>
-      </p:ext>
-    </p:extLst>
-  </p:cSld>
-  <p:clrMapOvr>
-    <a:masterClrMapping/>
-  </p:clrMapOvr>
-</p:sld>
-</file>
-
-<file path=ppt/slides/slide22.xml><?xml version="1.0" encoding="utf-8"?>
-<p:sld xmlns:a="http://schemas.openxmlformats.org/drawingml/2006/main" xmlns:r="http://schemas.openxmlformats.org/officeDocument/2006/relationships" xmlns:p="http://schemas.openxmlformats.org/presentationml/2006/main">
-  <p:cSld>
-    <p:spTree>
-      <p:nvGrpSpPr>
-        <p:cNvPr id="1" name="">
-          <a:extLst>
-            <a:ext uri="{FF2B5EF4-FFF2-40B4-BE49-F238E27FC236}">
               <a16:creationId xmlns:a16="http://schemas.microsoft.com/office/drawing/2014/main" id="{5BA09BAB-22A5-24C5-CB63-2D9170A38179}"/>
             </a:ext>
           </a:extLst>
@@ -10855,7 +9763,7 @@
 </p:sld>
 </file>
 
-<file path=ppt/slides/slide23.xml><?xml version="1.0" encoding="utf-8"?>
+<file path=ppt/slides/slide22.xml><?xml version="1.0" encoding="utf-8"?>
 <p:sld xmlns:a="http://schemas.openxmlformats.org/drawingml/2006/main" xmlns:r="http://schemas.openxmlformats.org/officeDocument/2006/relationships" xmlns:p="http://schemas.openxmlformats.org/presentationml/2006/main">
   <p:cSld>
     <p:spTree>
@@ -11261,7 +10169,7 @@
 </p:sld>
 </file>
 
-<file path=ppt/slides/slide24.xml><?xml version="1.0" encoding="utf-8"?>
+<file path=ppt/slides/slide23.xml><?xml version="1.0" encoding="utf-8"?>
 <p:sld xmlns:a="http://schemas.openxmlformats.org/drawingml/2006/main" xmlns:r="http://schemas.openxmlformats.org/officeDocument/2006/relationships" xmlns:p="http://schemas.openxmlformats.org/presentationml/2006/main">
   <p:cSld>
     <p:spTree>
@@ -11432,191 +10340,7 @@
 </p:sld>
 </file>
 
-<file path=ppt/slides/slide25.xml><?xml version="1.0" encoding="utf-8"?>
-<p:sld xmlns:a="http://schemas.openxmlformats.org/drawingml/2006/main" xmlns:r="http://schemas.openxmlformats.org/officeDocument/2006/relationships" xmlns:p="http://schemas.openxmlformats.org/presentationml/2006/main">
-  <p:cSld>
-    <p:spTree>
-      <p:nvGrpSpPr>
-        <p:cNvPr id="1" name="">
-          <a:extLst>
-            <a:ext uri="{FF2B5EF4-FFF2-40B4-BE49-F238E27FC236}">
-              <a16:creationId xmlns:a16="http://schemas.microsoft.com/office/drawing/2014/main" id="{25A4D19A-D1AC-734D-087B-BF8CDF1B503B}"/>
-            </a:ext>
-          </a:extLst>
-        </p:cNvPr>
-        <p:cNvGrpSpPr/>
-        <p:nvPr/>
-      </p:nvGrpSpPr>
-      <p:grpSpPr>
-        <a:xfrm>
-          <a:off x="0" y="0"/>
-          <a:ext cx="0" cy="0"/>
-          <a:chOff x="0" y="0"/>
-          <a:chExt cx="0" cy="0"/>
-        </a:xfrm>
-      </p:grpSpPr>
-      <p:sp>
-        <p:nvSpPr>
-          <p:cNvPr id="2" name="Title 1">
-            <a:extLst>
-              <a:ext uri="{FF2B5EF4-FFF2-40B4-BE49-F238E27FC236}">
-                <a16:creationId xmlns:a16="http://schemas.microsoft.com/office/drawing/2014/main" id="{36467E2C-DC9D-427E-D36F-8CEFFA7DC1FF}"/>
-              </a:ext>
-            </a:extLst>
-          </p:cNvPr>
-          <p:cNvSpPr>
-            <a:spLocks noGrp="1"/>
-          </p:cNvSpPr>
-          <p:nvPr>
-            <p:ph type="title"/>
-          </p:nvPr>
-        </p:nvSpPr>
-        <p:spPr/>
-        <p:txBody>
-          <a:bodyPr/>
-          <a:lstStyle/>
-          <a:p>
-            <a:r>
-              <a:rPr lang="en-US" dirty="0">
-                <a:solidFill>
-                  <a:schemeClr val="accent1"/>
-                </a:solidFill>
-              </a:rPr>
-              <a:t>DSA-Based Researcher Access</a:t>
-            </a:r>
-          </a:p>
-        </p:txBody>
-      </p:sp>
-      <p:sp>
-        <p:nvSpPr>
-          <p:cNvPr id="3" name="Content Placeholder 2">
-            <a:extLst>
-              <a:ext uri="{FF2B5EF4-FFF2-40B4-BE49-F238E27FC236}">
-                <a16:creationId xmlns:a16="http://schemas.microsoft.com/office/drawing/2014/main" id="{DC2A80F6-A8C3-8F78-6B07-8F01F4356013}"/>
-              </a:ext>
-            </a:extLst>
-          </p:cNvPr>
-          <p:cNvSpPr>
-            <a:spLocks noGrp="1"/>
-          </p:cNvSpPr>
-          <p:nvPr>
-            <p:ph idx="1"/>
-          </p:nvPr>
-        </p:nvSpPr>
-        <p:spPr>
-          <a:xfrm>
-            <a:off x="838200" y="1720525"/>
-            <a:ext cx="10515600" cy="4351338"/>
-          </a:xfrm>
-        </p:spPr>
-        <p:txBody>
-          <a:bodyPr/>
-          <a:lstStyle/>
-          <a:p>
-            <a:pPr marL="0" indent="0">
-              <a:buNone/>
-            </a:pPr>
-            <a:r>
-              <a:rPr lang="en-US" dirty="0">
-                <a:solidFill>
-                  <a:schemeClr val="accent1"/>
-                </a:solidFill>
-              </a:rPr>
-              <a:t>The Digital Services Act (DSA) creates access mechanisms for studying systemic risks.</a:t>
-            </a:r>
-          </a:p>
-          <a:p>
-            <a:pPr marL="0" indent="0">
-              <a:buNone/>
-            </a:pPr>
-            <a:endParaRPr lang="en-US" dirty="0">
-              <a:solidFill>
-                <a:schemeClr val="accent1"/>
-              </a:solidFill>
-            </a:endParaRPr>
-          </a:p>
-          <a:p>
-            <a:pPr marL="0" indent="0">
-              <a:buNone/>
-            </a:pPr>
-            <a:r>
-              <a:rPr lang="en-US" dirty="0">
-                <a:solidFill>
-                  <a:schemeClr val="accent1"/>
-                </a:solidFill>
-              </a:rPr>
-              <a:t>Relevant distinction:</a:t>
-            </a:r>
-          </a:p>
-          <a:p>
-            <a:r>
-              <a:rPr lang="en-US" sz="2400" dirty="0">
-                <a:solidFill>
-                  <a:schemeClr val="accent1"/>
-                </a:solidFill>
-              </a:rPr>
-              <a:t>public-data access</a:t>
-            </a:r>
-          </a:p>
-          <a:p>
-            <a:r>
-              <a:rPr lang="en-US" sz="2400" dirty="0">
-                <a:solidFill>
-                  <a:schemeClr val="accent1"/>
-                </a:solidFill>
-              </a:rPr>
-              <a:t>vetted researcher access to non-public data</a:t>
-            </a:r>
-          </a:p>
-          <a:p>
-            <a:pPr marL="0" indent="0">
-              <a:buNone/>
-            </a:pPr>
-            <a:endParaRPr lang="en-US" dirty="0">
-              <a:solidFill>
-                <a:schemeClr val="accent1"/>
-              </a:solidFill>
-            </a:endParaRPr>
-          </a:p>
-          <a:p>
-            <a:pPr marL="0" indent="0">
-              <a:buNone/>
-            </a:pPr>
-            <a:r>
-              <a:rPr lang="en-US" dirty="0">
-                <a:solidFill>
-                  <a:schemeClr val="accent1"/>
-                </a:solidFill>
-              </a:rPr>
-              <a:t>More by Hajo Boomgaarden on Thursday!</a:t>
-            </a:r>
-          </a:p>
-          <a:p>
-            <a:pPr marL="0" indent="0">
-              <a:buNone/>
-            </a:pPr>
-            <a:endParaRPr lang="en-US" dirty="0">
-              <a:solidFill>
-                <a:schemeClr val="accent1"/>
-              </a:solidFill>
-            </a:endParaRPr>
-          </a:p>
-        </p:txBody>
-      </p:sp>
-    </p:spTree>
-    <p:extLst>
-      <p:ext uri="{BB962C8B-B14F-4D97-AF65-F5344CB8AC3E}">
-        <p14:creationId xmlns:p14="http://schemas.microsoft.com/office/powerpoint/2010/main" val="3853719236"/>
-      </p:ext>
-    </p:extLst>
-  </p:cSld>
-  <p:clrMapOvr>
-    <a:masterClrMapping/>
-  </p:clrMapOvr>
-</p:sld>
-</file>
-
-<file path=ppt/slides/slide26.xml><?xml version="1.0" encoding="utf-8"?>
+<file path=ppt/slides/slide24.xml><?xml version="1.0" encoding="utf-8"?>
 <p:sld xmlns:a="http://schemas.openxmlformats.org/drawingml/2006/main" xmlns:r="http://schemas.openxmlformats.org/officeDocument/2006/relationships" xmlns:p="http://schemas.openxmlformats.org/presentationml/2006/main">
   <p:cSld>
     <p:spTree>
@@ -11751,7 +10475,7 @@
 </p:sld>
 </file>
 
-<file path=ppt/slides/slide27.xml><?xml version="1.0" encoding="utf-8"?>
+<file path=ppt/slides/slide25.xml><?xml version="1.0" encoding="utf-8"?>
 <p:sld xmlns:a="http://schemas.openxmlformats.org/drawingml/2006/main" xmlns:r="http://schemas.openxmlformats.org/officeDocument/2006/relationships" xmlns:p="http://schemas.openxmlformats.org/presentationml/2006/main">
   <p:cSld>
     <p:spTree>
@@ -11878,7 +10602,7 @@
 </p:sld>
 </file>
 
-<file path=ppt/slides/slide28.xml><?xml version="1.0" encoding="utf-8"?>
+<file path=ppt/slides/slide26.xml><?xml version="1.0" encoding="utf-8"?>
 <p:sld xmlns:a="http://schemas.openxmlformats.org/drawingml/2006/main" xmlns:r="http://schemas.openxmlformats.org/officeDocument/2006/relationships" xmlns:p="http://schemas.openxmlformats.org/presentationml/2006/main">
   <p:cSld>
     <p:spTree>
@@ -12016,7 +10740,7 @@
 </p:sld>
 </file>
 
-<file path=ppt/slides/slide29.xml><?xml version="1.0" encoding="utf-8"?>
+<file path=ppt/slides/slide27.xml><?xml version="1.0" encoding="utf-8"?>
 <p:sld xmlns:a="http://schemas.openxmlformats.org/drawingml/2006/main" xmlns:r="http://schemas.openxmlformats.org/officeDocument/2006/relationships" xmlns:p="http://schemas.openxmlformats.org/presentationml/2006/main">
   <p:cSld>
     <p:spTree>
@@ -12024,7 +10748,7 @@
         <p:cNvPr id="1" name="">
           <a:extLst>
             <a:ext uri="{FF2B5EF4-FFF2-40B4-BE49-F238E27FC236}">
-              <a16:creationId xmlns:a16="http://schemas.microsoft.com/office/drawing/2014/main" id="{F84301E6-1F94-2F12-668A-B5414CDBD5F0}"/>
+              <a16:creationId xmlns:a16="http://schemas.microsoft.com/office/drawing/2014/main" id="{A58260FE-ECFF-0268-05BA-97F7BA8F571F}"/>
             </a:ext>
           </a:extLst>
         </p:cNvPr>
@@ -12044,7 +10768,7 @@
           <p:cNvPr id="2" name="Title 1">
             <a:extLst>
               <a:ext uri="{FF2B5EF4-FFF2-40B4-BE49-F238E27FC236}">
-                <a16:creationId xmlns:a16="http://schemas.microsoft.com/office/drawing/2014/main" id="{D6D55418-86A3-AAAE-46DE-A13686D23F80}"/>
+                <a16:creationId xmlns:a16="http://schemas.microsoft.com/office/drawing/2014/main" id="{F26F5233-FD9F-505B-FDDB-8ED2028034D1}"/>
               </a:ext>
             </a:extLst>
           </p:cNvPr>
@@ -12066,7 +10790,7 @@
                   <a:schemeClr val="accent1"/>
                 </a:solidFill>
               </a:rPr>
-              <a:t>What is an API?</a:t>
+              <a:t>How APIs Work</a:t>
             </a:r>
           </a:p>
         </p:txBody>
@@ -12076,7 +10800,7 @@
           <p:cNvPr id="3" name="Content Placeholder 2">
             <a:extLst>
               <a:ext uri="{FF2B5EF4-FFF2-40B4-BE49-F238E27FC236}">
-                <a16:creationId xmlns:a16="http://schemas.microsoft.com/office/drawing/2014/main" id="{BC4F1094-314C-62A1-A2F9-4D33D618CBC2}"/>
+                <a16:creationId xmlns:a16="http://schemas.microsoft.com/office/drawing/2014/main" id="{1253A800-82C6-501F-EC81-0E4693AF784C}"/>
               </a:ext>
             </a:extLst>
           </p:cNvPr>
@@ -12101,50 +10825,330 @@
               <a:buNone/>
             </a:pPr>
             <a:r>
-              <a:rPr lang="en-US" dirty="0">
-                <a:solidFill>
-                  <a:schemeClr val="accent1"/>
-                </a:solidFill>
-              </a:rPr>
-              <a:t>API = Application Programming Interface, i.e., a way for software systems to communicate.</a:t>
-            </a:r>
-          </a:p>
-        </p:txBody>
-      </p:sp>
-      <p:pic>
-        <p:nvPicPr>
-          <p:cNvPr id="4" name="Picture 3" descr="frame_3259.webp">
-            <a:extLst>
-              <a:ext uri="{FF2B5EF4-FFF2-40B4-BE49-F238E27FC236}">
-                <a16:creationId xmlns:a16="http://schemas.microsoft.com/office/drawing/2014/main" id="{5A47F343-33D8-0A3E-00EB-802CB1D011D2}"/>
-              </a:ext>
-            </a:extLst>
-          </p:cNvPr>
-          <p:cNvPicPr>
-            <a:picLocks noChangeAspect="1"/>
-          </p:cNvPicPr>
-          <p:nvPr/>
-        </p:nvPicPr>
-        <p:blipFill>
-          <a:blip r:embed="rId3"/>
-          <a:stretch>
-            <a:fillRect/>
-          </a:stretch>
-        </p:blipFill>
-        <p:spPr>
-          <a:xfrm>
-            <a:off x="3558059" y="2912766"/>
-            <a:ext cx="5080000" cy="2540000"/>
-          </a:xfrm>
-          <a:prstGeom prst="rect">
-            <a:avLst/>
-          </a:prstGeom>
-        </p:spPr>
-      </p:pic>
+              <a:rPr lang="en-US" sz="2400" dirty="0">
+                <a:solidFill>
+                  <a:schemeClr val="accent1"/>
+                </a:solidFill>
+              </a:rPr>
+              <a:t>APIs operate through a request response cycle between a client and a server</a:t>
+            </a:r>
+          </a:p>
+          <a:p>
+            <a:pPr marL="0" indent="0">
+              <a:buNone/>
+            </a:pPr>
+            <a:endParaRPr lang="en-US" sz="2400" dirty="0">
+              <a:solidFill>
+                <a:schemeClr val="accent1"/>
+              </a:solidFill>
+            </a:endParaRPr>
+          </a:p>
+          <a:p>
+            <a:r>
+              <a:rPr lang="en-US" sz="2400" b="1" dirty="0">
+                <a:solidFill>
+                  <a:schemeClr val="accent1"/>
+                </a:solidFill>
+              </a:rPr>
+              <a:t>Request</a:t>
+            </a:r>
+            <a:r>
+              <a:rPr lang="en-US" sz="2400" dirty="0">
+                <a:solidFill>
+                  <a:schemeClr val="accent1"/>
+                </a:solidFill>
+              </a:rPr>
+              <a:t>: The client sends a request to an API endpoint (URI).</a:t>
+            </a:r>
+          </a:p>
+          <a:p>
+            <a:r>
+              <a:rPr lang="en-US" sz="2400" b="1" dirty="0">
+                <a:solidFill>
+                  <a:schemeClr val="accent1"/>
+                </a:solidFill>
+              </a:rPr>
+              <a:t>Processing</a:t>
+            </a:r>
+            <a:r>
+              <a:rPr lang="en-US" sz="2400" dirty="0">
+                <a:solidFill>
+                  <a:schemeClr val="accent1"/>
+                </a:solidFill>
+              </a:rPr>
+              <a:t>: The API forwards the request to the server.</a:t>
+            </a:r>
+          </a:p>
+          <a:p>
+            <a:r>
+              <a:rPr lang="en-US" sz="2400" b="1" dirty="0">
+                <a:solidFill>
+                  <a:schemeClr val="accent1"/>
+                </a:solidFill>
+              </a:rPr>
+              <a:t>Response</a:t>
+            </a:r>
+            <a:r>
+              <a:rPr lang="en-US" sz="2400" dirty="0">
+                <a:solidFill>
+                  <a:schemeClr val="accent1"/>
+                </a:solidFill>
+              </a:rPr>
+              <a:t>: The server processes and sends back the requested data.</a:t>
+            </a:r>
+          </a:p>
+          <a:p>
+            <a:r>
+              <a:rPr lang="en-US" sz="2400" b="1" dirty="0">
+                <a:solidFill>
+                  <a:schemeClr val="accent1"/>
+                </a:solidFill>
+              </a:rPr>
+              <a:t>Delivery</a:t>
+            </a:r>
+            <a:r>
+              <a:rPr lang="en-US" sz="2400" dirty="0">
+                <a:solidFill>
+                  <a:schemeClr val="accent1"/>
+                </a:solidFill>
+              </a:rPr>
+              <a:t>: The API returns the server’s response to the client.</a:t>
+            </a:r>
+          </a:p>
+          <a:p>
+            <a:pPr marL="0" indent="0">
+              <a:buNone/>
+            </a:pPr>
+            <a:endParaRPr lang="en-US" sz="2400" dirty="0">
+              <a:solidFill>
+                <a:schemeClr val="accent1"/>
+              </a:solidFill>
+            </a:endParaRPr>
+          </a:p>
+          <a:p>
+            <a:pPr marL="0" indent="0">
+              <a:buNone/>
+            </a:pPr>
+            <a:endParaRPr lang="en-US" sz="2400" dirty="0">
+              <a:solidFill>
+                <a:schemeClr val="accent1"/>
+              </a:solidFill>
+            </a:endParaRPr>
+          </a:p>
+        </p:txBody>
+      </p:sp>
     </p:spTree>
     <p:extLst>
       <p:ext uri="{BB962C8B-B14F-4D97-AF65-F5344CB8AC3E}">
-        <p14:creationId xmlns:p14="http://schemas.microsoft.com/office/powerpoint/2010/main" val="1341086130"/>
+        <p14:creationId xmlns:p14="http://schemas.microsoft.com/office/powerpoint/2010/main" val="490620624"/>
+      </p:ext>
+    </p:extLst>
+  </p:cSld>
+  <p:clrMapOvr>
+    <a:masterClrMapping/>
+  </p:clrMapOvr>
+</p:sld>
+</file>
+
+<file path=ppt/slides/slide28.xml><?xml version="1.0" encoding="utf-8"?>
+<p:sld xmlns:a="http://schemas.openxmlformats.org/drawingml/2006/main" xmlns:r="http://schemas.openxmlformats.org/officeDocument/2006/relationships" xmlns:p="http://schemas.openxmlformats.org/presentationml/2006/main">
+  <p:cSld>
+    <p:spTree>
+      <p:nvGrpSpPr>
+        <p:cNvPr id="1" name="">
+          <a:extLst>
+            <a:ext uri="{FF2B5EF4-FFF2-40B4-BE49-F238E27FC236}">
+              <a16:creationId xmlns:a16="http://schemas.microsoft.com/office/drawing/2014/main" id="{041C1123-DECD-4079-C438-2430965C355C}"/>
+            </a:ext>
+          </a:extLst>
+        </p:cNvPr>
+        <p:cNvGrpSpPr/>
+        <p:nvPr/>
+      </p:nvGrpSpPr>
+      <p:grpSpPr>
+        <a:xfrm>
+          <a:off x="0" y="0"/>
+          <a:ext cx="0" cy="0"/>
+          <a:chOff x="0" y="0"/>
+          <a:chExt cx="0" cy="0"/>
+        </a:xfrm>
+      </p:grpSpPr>
+      <p:sp>
+        <p:nvSpPr>
+          <p:cNvPr id="2" name="Title 1">
+            <a:extLst>
+              <a:ext uri="{FF2B5EF4-FFF2-40B4-BE49-F238E27FC236}">
+                <a16:creationId xmlns:a16="http://schemas.microsoft.com/office/drawing/2014/main" id="{A28EBC7E-8309-FCF2-B52B-F2D348C66A07}"/>
+              </a:ext>
+            </a:extLst>
+          </p:cNvPr>
+          <p:cNvSpPr>
+            <a:spLocks noGrp="1"/>
+          </p:cNvSpPr>
+          <p:nvPr>
+            <p:ph type="title"/>
+          </p:nvPr>
+        </p:nvSpPr>
+        <p:spPr/>
+        <p:txBody>
+          <a:bodyPr/>
+          <a:lstStyle/>
+          <a:p>
+            <a:r>
+              <a:rPr lang="en-US" dirty="0">
+                <a:solidFill>
+                  <a:schemeClr val="accent1"/>
+                </a:solidFill>
+              </a:rPr>
+              <a:t>Anatomy of an API request</a:t>
+            </a:r>
+          </a:p>
+        </p:txBody>
+      </p:sp>
+      <p:sp>
+        <p:nvSpPr>
+          <p:cNvPr id="3" name="Content Placeholder 2">
+            <a:extLst>
+              <a:ext uri="{FF2B5EF4-FFF2-40B4-BE49-F238E27FC236}">
+                <a16:creationId xmlns:a16="http://schemas.microsoft.com/office/drawing/2014/main" id="{300F8743-820D-4C7B-CC96-CEFB7B708F76}"/>
+              </a:ext>
+            </a:extLst>
+          </p:cNvPr>
+          <p:cNvSpPr>
+            <a:spLocks noGrp="1"/>
+          </p:cNvSpPr>
+          <p:nvPr>
+            <p:ph idx="1"/>
+          </p:nvPr>
+        </p:nvSpPr>
+        <p:spPr>
+          <a:xfrm>
+            <a:off x="838200" y="1720525"/>
+            <a:ext cx="10515600" cy="4351338"/>
+          </a:xfrm>
+        </p:spPr>
+        <p:txBody>
+          <a:bodyPr/>
+          <a:lstStyle/>
+          <a:p>
+            <a:pPr marL="0" indent="0">
+              <a:buNone/>
+            </a:pPr>
+            <a:r>
+              <a:rPr lang="en-US" dirty="0">
+                <a:solidFill>
+                  <a:schemeClr val="accent1"/>
+                </a:solidFill>
+              </a:rPr>
+              <a:t>An API request usually includes:</a:t>
+            </a:r>
+          </a:p>
+          <a:p>
+            <a:r>
+              <a:rPr lang="en-US" sz="2400" b="1" dirty="0">
+                <a:solidFill>
+                  <a:schemeClr val="accent1"/>
+                </a:solidFill>
+              </a:rPr>
+              <a:t>Endpoint</a:t>
+            </a:r>
+            <a:r>
+              <a:rPr lang="en-US" sz="2400" dirty="0">
+                <a:solidFill>
+                  <a:schemeClr val="accent1"/>
+                </a:solidFill>
+              </a:rPr>
+              <a:t>: where the request goes</a:t>
+            </a:r>
+          </a:p>
+          <a:p>
+            <a:r>
+              <a:rPr lang="en-US" sz="2400" b="1" dirty="0">
+                <a:solidFill>
+                  <a:schemeClr val="accent1"/>
+                </a:solidFill>
+              </a:rPr>
+              <a:t>Method</a:t>
+            </a:r>
+            <a:r>
+              <a:rPr lang="en-US" sz="2400" dirty="0">
+                <a:solidFill>
+                  <a:schemeClr val="accent1"/>
+                </a:solidFill>
+              </a:rPr>
+              <a:t>: what kind of request, e.g. GET or POST</a:t>
+            </a:r>
+          </a:p>
+          <a:p>
+            <a:r>
+              <a:rPr lang="en-US" sz="2400" b="1" dirty="0">
+                <a:solidFill>
+                  <a:schemeClr val="accent1"/>
+                </a:solidFill>
+              </a:rPr>
+              <a:t>Parameters</a:t>
+            </a:r>
+            <a:r>
+              <a:rPr lang="en-US" sz="2400" dirty="0">
+                <a:solidFill>
+                  <a:schemeClr val="accent1"/>
+                </a:solidFill>
+              </a:rPr>
+              <a:t>: what we ask for</a:t>
+            </a:r>
+          </a:p>
+          <a:p>
+            <a:r>
+              <a:rPr lang="en-US" sz="2400" b="1" dirty="0">
+                <a:solidFill>
+                  <a:schemeClr val="accent1"/>
+                </a:solidFill>
+              </a:rPr>
+              <a:t>Headers</a:t>
+            </a:r>
+            <a:r>
+              <a:rPr lang="en-US" sz="2400" dirty="0">
+                <a:solidFill>
+                  <a:schemeClr val="accent1"/>
+                </a:solidFill>
+              </a:rPr>
+              <a:t>: metadata about the request</a:t>
+            </a:r>
+          </a:p>
+          <a:p>
+            <a:r>
+              <a:rPr lang="en-US" sz="2400" b="1" dirty="0">
+                <a:solidFill>
+                  <a:schemeClr val="accent1"/>
+                </a:solidFill>
+              </a:rPr>
+              <a:t>Authentication</a:t>
+            </a:r>
+            <a:r>
+              <a:rPr lang="en-US" sz="2400" dirty="0">
+                <a:solidFill>
+                  <a:schemeClr val="accent1"/>
+                </a:solidFill>
+              </a:rPr>
+              <a:t>: key/token if required</a:t>
+            </a:r>
+          </a:p>
+          <a:p>
+            <a:pPr marL="1371600" lvl="3" indent="0">
+              <a:buNone/>
+            </a:pPr>
+            <a:endParaRPr lang="en-US" sz="2400" dirty="0">
+              <a:solidFill>
+                <a:schemeClr val="accent1"/>
+              </a:solidFill>
+            </a:endParaRPr>
+          </a:p>
+        </p:txBody>
+      </p:sp>
+    </p:spTree>
+    <p:extLst>
+      <p:ext uri="{BB962C8B-B14F-4D97-AF65-F5344CB8AC3E}">
+        <p14:creationId xmlns:p14="http://schemas.microsoft.com/office/powerpoint/2010/main" val="611198330"/>
       </p:ext>
     </p:extLst>
   </p:cSld>
@@ -12423,625 +11427,6 @@
     <p:extLst>
       <p:ext uri="{BB962C8B-B14F-4D97-AF65-F5344CB8AC3E}">
         <p14:creationId xmlns:p14="http://schemas.microsoft.com/office/powerpoint/2010/main" val="1493801983"/>
-      </p:ext>
-    </p:extLst>
-  </p:cSld>
-  <p:clrMapOvr>
-    <a:masterClrMapping/>
-  </p:clrMapOvr>
-</p:sld>
-</file>
-
-<file path=ppt/slides/slide30.xml><?xml version="1.0" encoding="utf-8"?>
-<p:sld xmlns:a="http://schemas.openxmlformats.org/drawingml/2006/main" xmlns:r="http://schemas.openxmlformats.org/officeDocument/2006/relationships" xmlns:p="http://schemas.openxmlformats.org/presentationml/2006/main">
-  <p:cSld>
-    <p:spTree>
-      <p:nvGrpSpPr>
-        <p:cNvPr id="1" name="">
-          <a:extLst>
-            <a:ext uri="{FF2B5EF4-FFF2-40B4-BE49-F238E27FC236}">
-              <a16:creationId xmlns:a16="http://schemas.microsoft.com/office/drawing/2014/main" id="{A58260FE-ECFF-0268-05BA-97F7BA8F571F}"/>
-            </a:ext>
-          </a:extLst>
-        </p:cNvPr>
-        <p:cNvGrpSpPr/>
-        <p:nvPr/>
-      </p:nvGrpSpPr>
-      <p:grpSpPr>
-        <a:xfrm>
-          <a:off x="0" y="0"/>
-          <a:ext cx="0" cy="0"/>
-          <a:chOff x="0" y="0"/>
-          <a:chExt cx="0" cy="0"/>
-        </a:xfrm>
-      </p:grpSpPr>
-      <p:sp>
-        <p:nvSpPr>
-          <p:cNvPr id="2" name="Title 1">
-            <a:extLst>
-              <a:ext uri="{FF2B5EF4-FFF2-40B4-BE49-F238E27FC236}">
-                <a16:creationId xmlns:a16="http://schemas.microsoft.com/office/drawing/2014/main" id="{F26F5233-FD9F-505B-FDDB-8ED2028034D1}"/>
-              </a:ext>
-            </a:extLst>
-          </p:cNvPr>
-          <p:cNvSpPr>
-            <a:spLocks noGrp="1"/>
-          </p:cNvSpPr>
-          <p:nvPr>
-            <p:ph type="title"/>
-          </p:nvPr>
-        </p:nvSpPr>
-        <p:spPr/>
-        <p:txBody>
-          <a:bodyPr/>
-          <a:lstStyle/>
-          <a:p>
-            <a:r>
-              <a:rPr lang="en-US" dirty="0">
-                <a:solidFill>
-                  <a:schemeClr val="accent1"/>
-                </a:solidFill>
-              </a:rPr>
-              <a:t>How APIs Work</a:t>
-            </a:r>
-          </a:p>
-        </p:txBody>
-      </p:sp>
-      <p:sp>
-        <p:nvSpPr>
-          <p:cNvPr id="3" name="Content Placeholder 2">
-            <a:extLst>
-              <a:ext uri="{FF2B5EF4-FFF2-40B4-BE49-F238E27FC236}">
-                <a16:creationId xmlns:a16="http://schemas.microsoft.com/office/drawing/2014/main" id="{1253A800-82C6-501F-EC81-0E4693AF784C}"/>
-              </a:ext>
-            </a:extLst>
-          </p:cNvPr>
-          <p:cNvSpPr>
-            <a:spLocks noGrp="1"/>
-          </p:cNvSpPr>
-          <p:nvPr>
-            <p:ph idx="1"/>
-          </p:nvPr>
-        </p:nvSpPr>
-        <p:spPr>
-          <a:xfrm>
-            <a:off x="838200" y="1720525"/>
-            <a:ext cx="10515600" cy="4351338"/>
-          </a:xfrm>
-        </p:spPr>
-        <p:txBody>
-          <a:bodyPr/>
-          <a:lstStyle/>
-          <a:p>
-            <a:pPr marL="0" indent="0">
-              <a:buNone/>
-            </a:pPr>
-            <a:r>
-              <a:rPr lang="en-US" sz="2400" dirty="0">
-                <a:solidFill>
-                  <a:schemeClr val="accent1"/>
-                </a:solidFill>
-              </a:rPr>
-              <a:t>APIs operate through a request response cycle between a client and a server</a:t>
-            </a:r>
-          </a:p>
-          <a:p>
-            <a:pPr marL="0" indent="0">
-              <a:buNone/>
-            </a:pPr>
-            <a:endParaRPr lang="en-US" sz="2400" dirty="0">
-              <a:solidFill>
-                <a:schemeClr val="accent1"/>
-              </a:solidFill>
-            </a:endParaRPr>
-          </a:p>
-          <a:p>
-            <a:r>
-              <a:rPr lang="en-US" sz="2400" b="1" dirty="0">
-                <a:solidFill>
-                  <a:schemeClr val="accent1"/>
-                </a:solidFill>
-              </a:rPr>
-              <a:t>Request</a:t>
-            </a:r>
-            <a:r>
-              <a:rPr lang="en-US" sz="2400" dirty="0">
-                <a:solidFill>
-                  <a:schemeClr val="accent1"/>
-                </a:solidFill>
-              </a:rPr>
-              <a:t>: The client sends a request to an API endpoint (URI).</a:t>
-            </a:r>
-          </a:p>
-          <a:p>
-            <a:r>
-              <a:rPr lang="en-US" sz="2400" b="1" dirty="0">
-                <a:solidFill>
-                  <a:schemeClr val="accent1"/>
-                </a:solidFill>
-              </a:rPr>
-              <a:t>Processing</a:t>
-            </a:r>
-            <a:r>
-              <a:rPr lang="en-US" sz="2400" dirty="0">
-                <a:solidFill>
-                  <a:schemeClr val="accent1"/>
-                </a:solidFill>
-              </a:rPr>
-              <a:t>: The API forwards the request to the server.</a:t>
-            </a:r>
-          </a:p>
-          <a:p>
-            <a:r>
-              <a:rPr lang="en-US" sz="2400" b="1" dirty="0">
-                <a:solidFill>
-                  <a:schemeClr val="accent1"/>
-                </a:solidFill>
-              </a:rPr>
-              <a:t>Response</a:t>
-            </a:r>
-            <a:r>
-              <a:rPr lang="en-US" sz="2400" dirty="0">
-                <a:solidFill>
-                  <a:schemeClr val="accent1"/>
-                </a:solidFill>
-              </a:rPr>
-              <a:t>: The server processes and sends back the requested data.</a:t>
-            </a:r>
-          </a:p>
-          <a:p>
-            <a:r>
-              <a:rPr lang="en-US" sz="2400" b="1" dirty="0">
-                <a:solidFill>
-                  <a:schemeClr val="accent1"/>
-                </a:solidFill>
-              </a:rPr>
-              <a:t>Delivery</a:t>
-            </a:r>
-            <a:r>
-              <a:rPr lang="en-US" sz="2400" dirty="0">
-                <a:solidFill>
-                  <a:schemeClr val="accent1"/>
-                </a:solidFill>
-              </a:rPr>
-              <a:t>: The API returns the server’s response to the client.</a:t>
-            </a:r>
-          </a:p>
-          <a:p>
-            <a:pPr marL="0" indent="0">
-              <a:buNone/>
-            </a:pPr>
-            <a:endParaRPr lang="en-US" sz="2400" dirty="0">
-              <a:solidFill>
-                <a:schemeClr val="accent1"/>
-              </a:solidFill>
-            </a:endParaRPr>
-          </a:p>
-          <a:p>
-            <a:pPr marL="0" indent="0">
-              <a:buNone/>
-            </a:pPr>
-            <a:endParaRPr lang="en-US" sz="2400" dirty="0">
-              <a:solidFill>
-                <a:schemeClr val="accent1"/>
-              </a:solidFill>
-            </a:endParaRPr>
-          </a:p>
-        </p:txBody>
-      </p:sp>
-    </p:spTree>
-    <p:extLst>
-      <p:ext uri="{BB962C8B-B14F-4D97-AF65-F5344CB8AC3E}">
-        <p14:creationId xmlns:p14="http://schemas.microsoft.com/office/powerpoint/2010/main" val="490620624"/>
-      </p:ext>
-    </p:extLst>
-  </p:cSld>
-  <p:clrMapOvr>
-    <a:masterClrMapping/>
-  </p:clrMapOvr>
-</p:sld>
-</file>
-
-<file path=ppt/slides/slide31.xml><?xml version="1.0" encoding="utf-8"?>
-<p:sld xmlns:a="http://schemas.openxmlformats.org/drawingml/2006/main" xmlns:r="http://schemas.openxmlformats.org/officeDocument/2006/relationships" xmlns:p="http://schemas.openxmlformats.org/presentationml/2006/main">
-  <p:cSld>
-    <p:spTree>
-      <p:nvGrpSpPr>
-        <p:cNvPr id="1" name="">
-          <a:extLst>
-            <a:ext uri="{FF2B5EF4-FFF2-40B4-BE49-F238E27FC236}">
-              <a16:creationId xmlns:a16="http://schemas.microsoft.com/office/drawing/2014/main" id="{041C1123-DECD-4079-C438-2430965C355C}"/>
-            </a:ext>
-          </a:extLst>
-        </p:cNvPr>
-        <p:cNvGrpSpPr/>
-        <p:nvPr/>
-      </p:nvGrpSpPr>
-      <p:grpSpPr>
-        <a:xfrm>
-          <a:off x="0" y="0"/>
-          <a:ext cx="0" cy="0"/>
-          <a:chOff x="0" y="0"/>
-          <a:chExt cx="0" cy="0"/>
-        </a:xfrm>
-      </p:grpSpPr>
-      <p:sp>
-        <p:nvSpPr>
-          <p:cNvPr id="2" name="Title 1">
-            <a:extLst>
-              <a:ext uri="{FF2B5EF4-FFF2-40B4-BE49-F238E27FC236}">
-                <a16:creationId xmlns:a16="http://schemas.microsoft.com/office/drawing/2014/main" id="{A28EBC7E-8309-FCF2-B52B-F2D348C66A07}"/>
-              </a:ext>
-            </a:extLst>
-          </p:cNvPr>
-          <p:cNvSpPr>
-            <a:spLocks noGrp="1"/>
-          </p:cNvSpPr>
-          <p:nvPr>
-            <p:ph type="title"/>
-          </p:nvPr>
-        </p:nvSpPr>
-        <p:spPr/>
-        <p:txBody>
-          <a:bodyPr/>
-          <a:lstStyle/>
-          <a:p>
-            <a:r>
-              <a:rPr lang="en-US" dirty="0">
-                <a:solidFill>
-                  <a:schemeClr val="accent1"/>
-                </a:solidFill>
-              </a:rPr>
-              <a:t>Anatomy of an API request</a:t>
-            </a:r>
-          </a:p>
-        </p:txBody>
-      </p:sp>
-      <p:sp>
-        <p:nvSpPr>
-          <p:cNvPr id="3" name="Content Placeholder 2">
-            <a:extLst>
-              <a:ext uri="{FF2B5EF4-FFF2-40B4-BE49-F238E27FC236}">
-                <a16:creationId xmlns:a16="http://schemas.microsoft.com/office/drawing/2014/main" id="{300F8743-820D-4C7B-CC96-CEFB7B708F76}"/>
-              </a:ext>
-            </a:extLst>
-          </p:cNvPr>
-          <p:cNvSpPr>
-            <a:spLocks noGrp="1"/>
-          </p:cNvSpPr>
-          <p:nvPr>
-            <p:ph idx="1"/>
-          </p:nvPr>
-        </p:nvSpPr>
-        <p:spPr>
-          <a:xfrm>
-            <a:off x="838200" y="1720525"/>
-            <a:ext cx="10515600" cy="4351338"/>
-          </a:xfrm>
-        </p:spPr>
-        <p:txBody>
-          <a:bodyPr/>
-          <a:lstStyle/>
-          <a:p>
-            <a:pPr marL="0" indent="0">
-              <a:buNone/>
-            </a:pPr>
-            <a:r>
-              <a:rPr lang="en-US" dirty="0">
-                <a:solidFill>
-                  <a:schemeClr val="accent1"/>
-                </a:solidFill>
-              </a:rPr>
-              <a:t>An API request usually includes:</a:t>
-            </a:r>
-          </a:p>
-          <a:p>
-            <a:r>
-              <a:rPr lang="en-US" sz="2400" b="1" dirty="0">
-                <a:solidFill>
-                  <a:schemeClr val="accent1"/>
-                </a:solidFill>
-              </a:rPr>
-              <a:t>Endpoint</a:t>
-            </a:r>
-            <a:r>
-              <a:rPr lang="en-US" sz="2400" dirty="0">
-                <a:solidFill>
-                  <a:schemeClr val="accent1"/>
-                </a:solidFill>
-              </a:rPr>
-              <a:t>: where the request goes</a:t>
-            </a:r>
-          </a:p>
-          <a:p>
-            <a:r>
-              <a:rPr lang="en-US" sz="2400" b="1" dirty="0">
-                <a:solidFill>
-                  <a:schemeClr val="accent1"/>
-                </a:solidFill>
-              </a:rPr>
-              <a:t>Method</a:t>
-            </a:r>
-            <a:r>
-              <a:rPr lang="en-US" sz="2400" dirty="0">
-                <a:solidFill>
-                  <a:schemeClr val="accent1"/>
-                </a:solidFill>
-              </a:rPr>
-              <a:t>: what kind of request, e.g. GET or POST</a:t>
-            </a:r>
-          </a:p>
-          <a:p>
-            <a:r>
-              <a:rPr lang="en-US" sz="2400" b="1" dirty="0">
-                <a:solidFill>
-                  <a:schemeClr val="accent1"/>
-                </a:solidFill>
-              </a:rPr>
-              <a:t>Parameters</a:t>
-            </a:r>
-            <a:r>
-              <a:rPr lang="en-US" sz="2400" dirty="0">
-                <a:solidFill>
-                  <a:schemeClr val="accent1"/>
-                </a:solidFill>
-              </a:rPr>
-              <a:t>: what we ask for</a:t>
-            </a:r>
-          </a:p>
-          <a:p>
-            <a:r>
-              <a:rPr lang="en-US" sz="2400" b="1" dirty="0">
-                <a:solidFill>
-                  <a:schemeClr val="accent1"/>
-                </a:solidFill>
-              </a:rPr>
-              <a:t>Headers</a:t>
-            </a:r>
-            <a:r>
-              <a:rPr lang="en-US" sz="2400" dirty="0">
-                <a:solidFill>
-                  <a:schemeClr val="accent1"/>
-                </a:solidFill>
-              </a:rPr>
-              <a:t>: metadata about the request</a:t>
-            </a:r>
-          </a:p>
-          <a:p>
-            <a:r>
-              <a:rPr lang="en-US" sz="2400" b="1" dirty="0">
-                <a:solidFill>
-                  <a:schemeClr val="accent1"/>
-                </a:solidFill>
-              </a:rPr>
-              <a:t>Authentication</a:t>
-            </a:r>
-            <a:r>
-              <a:rPr lang="en-US" sz="2400" dirty="0">
-                <a:solidFill>
-                  <a:schemeClr val="accent1"/>
-                </a:solidFill>
-              </a:rPr>
-              <a:t>: key/token if required</a:t>
-            </a:r>
-          </a:p>
-          <a:p>
-            <a:pPr marL="1371600" lvl="3" indent="0">
-              <a:buNone/>
-            </a:pPr>
-            <a:endParaRPr lang="en-US" sz="2400" dirty="0">
-              <a:solidFill>
-                <a:schemeClr val="accent1"/>
-              </a:solidFill>
-            </a:endParaRPr>
-          </a:p>
-        </p:txBody>
-      </p:sp>
-    </p:spTree>
-    <p:extLst>
-      <p:ext uri="{BB962C8B-B14F-4D97-AF65-F5344CB8AC3E}">
-        <p14:creationId xmlns:p14="http://schemas.microsoft.com/office/powerpoint/2010/main" val="611198330"/>
-      </p:ext>
-    </p:extLst>
-  </p:cSld>
-  <p:clrMapOvr>
-    <a:masterClrMapping/>
-  </p:clrMapOvr>
-</p:sld>
-</file>
-
-<file path=ppt/slides/slide32.xml><?xml version="1.0" encoding="utf-8"?>
-<p:sld xmlns:a="http://schemas.openxmlformats.org/drawingml/2006/main" xmlns:r="http://schemas.openxmlformats.org/officeDocument/2006/relationships" xmlns:p="http://schemas.openxmlformats.org/presentationml/2006/main">
-  <p:cSld>
-    <p:spTree>
-      <p:nvGrpSpPr>
-        <p:cNvPr id="1" name=""/>
-        <p:cNvGrpSpPr/>
-        <p:nvPr/>
-      </p:nvGrpSpPr>
-      <p:grpSpPr>
-        <a:xfrm>
-          <a:off x="0" y="0"/>
-          <a:ext cx="0" cy="0"/>
-          <a:chOff x="0" y="0"/>
-          <a:chExt cx="0" cy="0"/>
-        </a:xfrm>
-      </p:grpSpPr>
-      <p:sp>
-        <p:nvSpPr>
-          <p:cNvPr id="2" name="Title 1">
-            <a:extLst>
-              <a:ext uri="{FF2B5EF4-FFF2-40B4-BE49-F238E27FC236}">
-                <a16:creationId xmlns:a16="http://schemas.microsoft.com/office/drawing/2014/main" id="{C01E33A6-E9E2-5A75-86DD-2970D71281C1}"/>
-              </a:ext>
-            </a:extLst>
-          </p:cNvPr>
-          <p:cNvSpPr>
-            <a:spLocks noGrp="1"/>
-          </p:cNvSpPr>
-          <p:nvPr>
-            <p:ph type="title"/>
-          </p:nvPr>
-        </p:nvSpPr>
-        <p:spPr/>
-        <p:txBody>
-          <a:bodyPr/>
-          <a:lstStyle/>
-          <a:p>
-            <a:r>
-              <a:rPr lang="en-US" dirty="0">
-                <a:solidFill>
-                  <a:schemeClr val="accent1"/>
-                </a:solidFill>
-              </a:rPr>
-              <a:t>Agenda for the rest of the day…</a:t>
-            </a:r>
-          </a:p>
-        </p:txBody>
-      </p:sp>
-      <p:sp>
-        <p:nvSpPr>
-          <p:cNvPr id="3" name="Content Placeholder 2">
-            <a:extLst>
-              <a:ext uri="{FF2B5EF4-FFF2-40B4-BE49-F238E27FC236}">
-                <a16:creationId xmlns:a16="http://schemas.microsoft.com/office/drawing/2014/main" id="{91A11D33-6003-721D-CCD9-E1EAA6C583BA}"/>
-              </a:ext>
-            </a:extLst>
-          </p:cNvPr>
-          <p:cNvSpPr>
-            <a:spLocks noGrp="1"/>
-          </p:cNvSpPr>
-          <p:nvPr>
-            <p:ph idx="1"/>
-          </p:nvPr>
-        </p:nvSpPr>
-        <p:spPr>
-          <a:xfrm>
-            <a:off x="838200" y="1720525"/>
-            <a:ext cx="10515600" cy="4351338"/>
-          </a:xfrm>
-        </p:spPr>
-        <p:txBody>
-          <a:bodyPr>
-            <a:normAutofit/>
-          </a:bodyPr>
-          <a:lstStyle/>
-          <a:p>
-            <a:pPr marL="0" indent="0">
-              <a:buNone/>
-            </a:pPr>
-            <a:endParaRPr lang="en-US" dirty="0">
-              <a:solidFill>
-                <a:schemeClr val="accent1"/>
-              </a:solidFill>
-            </a:endParaRPr>
-          </a:p>
-          <a:p>
-            <a:pPr lvl="1"/>
-            <a:r>
-              <a:rPr lang="en-US" sz="2800" dirty="0">
-                <a:solidFill>
-                  <a:schemeClr val="accent1"/>
-                </a:solidFill>
-              </a:rPr>
-              <a:t>send an API request (we use the </a:t>
-            </a:r>
-            <a:r>
-              <a:rPr lang="en-US" sz="2800" b="1" dirty="0" err="1">
-                <a:solidFill>
-                  <a:schemeClr val="accent1"/>
-                </a:solidFill>
-              </a:rPr>
-              <a:t>MediaWiki</a:t>
-            </a:r>
-            <a:r>
-              <a:rPr lang="en-US" sz="2800" b="1" dirty="0">
-                <a:solidFill>
-                  <a:schemeClr val="accent1"/>
-                </a:solidFill>
-              </a:rPr>
-              <a:t> API </a:t>
-            </a:r>
-            <a:r>
-              <a:rPr lang="en-US" sz="2800" dirty="0">
-                <a:solidFill>
-                  <a:schemeClr val="accent1"/>
-                </a:solidFill>
-              </a:rPr>
-              <a:t>as example)</a:t>
-            </a:r>
-          </a:p>
-          <a:p>
-            <a:pPr lvl="1"/>
-            <a:r>
-              <a:rPr lang="en-US" sz="2800" dirty="0">
-                <a:solidFill>
-                  <a:schemeClr val="accent1"/>
-                </a:solidFill>
-              </a:rPr>
-              <a:t>inspect the response</a:t>
-            </a:r>
-          </a:p>
-          <a:p>
-            <a:pPr lvl="1"/>
-            <a:r>
-              <a:rPr lang="en-US" sz="2800" dirty="0">
-                <a:solidFill>
-                  <a:schemeClr val="accent1"/>
-                </a:solidFill>
-              </a:rPr>
-              <a:t>understand JSON</a:t>
-            </a:r>
-          </a:p>
-          <a:p>
-            <a:pPr lvl="1"/>
-            <a:r>
-              <a:rPr lang="en-US" sz="2800" dirty="0">
-                <a:solidFill>
-                  <a:schemeClr val="accent1"/>
-                </a:solidFill>
-              </a:rPr>
-              <a:t>turn search results into a table</a:t>
-            </a:r>
-          </a:p>
-          <a:p>
-            <a:pPr lvl="1"/>
-            <a:r>
-              <a:rPr lang="en-US" sz="2800" dirty="0">
-                <a:solidFill>
-                  <a:schemeClr val="accent1"/>
-                </a:solidFill>
-              </a:rPr>
-              <a:t>follow pagination</a:t>
-            </a:r>
-          </a:p>
-          <a:p>
-            <a:pPr lvl="1"/>
-            <a:r>
-              <a:rPr lang="en-US" sz="2800" dirty="0">
-                <a:solidFill>
-                  <a:schemeClr val="accent1"/>
-                </a:solidFill>
-              </a:rPr>
-              <a:t>retrieve page-level data</a:t>
-            </a:r>
-          </a:p>
-          <a:p>
-            <a:pPr marL="0" indent="0">
-              <a:buNone/>
-            </a:pPr>
-            <a:endParaRPr lang="en-US" dirty="0">
-              <a:solidFill>
-                <a:schemeClr val="accent1"/>
-              </a:solidFill>
-            </a:endParaRPr>
-          </a:p>
-        </p:txBody>
-      </p:sp>
-    </p:spTree>
-    <p:extLst>
-      <p:ext uri="{BB962C8B-B14F-4D97-AF65-F5344CB8AC3E}">
-        <p14:creationId xmlns:p14="http://schemas.microsoft.com/office/powerpoint/2010/main" val="1727965126"/>
       </p:ext>
     </p:extLst>
   </p:cSld>
